--- a/docs/F1_TeamBuilder_발표자료.pptx
+++ b/docs/F1_TeamBuilder_발표자료.pptx
@@ -25,6 +25,7 @@
     <p:sldId id="273" r:id="rId19"/>
     <p:sldId id="274" r:id="rId20"/>
     <p:sldId id="275" r:id="rId21"/>
+    <p:sldId id="282" r:id="rId33"/>
     <p:sldId id="276" r:id="rId22"/>
     <p:sldId id="277" r:id="rId23"/>
     <p:sldId id="278" r:id="rId24"/>
@@ -328,7 +329,7 @@
                   <c:v>416</c:v>
                 </c:pt>
                 <c:pt idx="2">
-                  <c:v>99</c:v>
+                  <c:v>118</c:v>
                 </c:pt>
                 <c:pt idx="3">
                   <c:v>24</c:v>
@@ -707,7 +708,7 @@
               <c:numCache>
                 <c:ptCount val="4"/>
                 <c:pt idx="0">
-                  <c:v>124</c:v>
+                  <c:v>127</c:v>
                 </c:pt>
                 <c:pt idx="1">
                   <c:v>20</c:v>
@@ -4056,7 +4057,7 @@
           <a:p>
             <a:r>
               <a:rPr lang="en-US" dirty="0"/>
-              <a:t>다섯 가지 제안입니다. 영입 후보를 다시 거르는 것, 보수적 기준을 유지하는 것, 피트 손실 점검, 접전 구간 추적, 다음 시즌 재검증입니다.</a:t>
+              <a:t>다섯 가지 제안입니다. RUSSELL·LECLERC 우선 검토, 가장 빠른 후보를 바로 고르지 않는 보수적 기준, 피트레인 손실 점검, 접전 구간의 경기별 결과 추적, 그리고 LECLERC의 장기 스틴트 타이어 유지 확인입니다.</a:t>
             </a:r>
             <a:endParaRPr lang="en-US" dirty="0"/>
           </a:p>
@@ -4362,6 +4363,94 @@
 </p:notes>
 </file>
 
+<file path=ppt/notesSlides/notesSlide27.xml><?xml version="1.0" encoding="utf-8"?>
+<p:notes xmlns:a="http://schemas.openxmlformats.org/drawingml/2006/main" xmlns:r="http://schemas.openxmlformats.org/officeDocument/2006/relationships" xmlns:p="http://schemas.openxmlformats.org/presentationml/2006/main">
+  <p:cSld>
+    <p:spTree>
+      <p:nvGrpSpPr>
+        <p:cNvPr id="1" name=""/>
+        <p:cNvGrpSpPr/>
+        <p:nvPr/>
+      </p:nvGrpSpPr>
+      <p:grpSpPr>
+        <a:xfrm>
+          <a:off x="0" y="0"/>
+          <a:ext cx="0" cy="0"/>
+          <a:chOff x="0" y="0"/>
+          <a:chExt cx="0" cy="0"/>
+        </a:xfrm>
+      </p:grpSpPr>
+      <p:sp>
+        <p:nvSpPr>
+          <p:cNvPr id="2" name="Slide Image Placeholder 1"/>
+          <p:cNvSpPr>
+            <a:spLocks noGrp="1" noRot="1" noChangeAspect="1"/>
+          </p:cNvSpPr>
+          <p:nvPr>
+            <p:ph type="sldImg"/>
+          </p:nvPr>
+        </p:nvSpPr>
+        <p:spPr/>
+      </p:sp>
+      <p:sp>
+        <p:nvSpPr>
+          <p:cNvPr id="3" name="Notes Placeholder 2"/>
+          <p:cNvSpPr>
+            <a:spLocks noGrp="1"/>
+          </p:cNvSpPr>
+          <p:nvPr>
+            <p:ph type="body" idx="1"/>
+          </p:nvPr>
+        </p:nvSpPr>
+        <p:spPr/>
+        <p:txBody>
+          <a:bodyPr/>
+          <a:lstStyle/>
+          <a:p>
+            <a:r>
+              <a:rPr lang="en-US" dirty="0"/>
+              <a:t>영입하면 성적이 얼마나 바뀌는지 확인하려고 2025 시즌을 4,000번 다시 치렀습니다. 지금 라인업은 시즌 1승 확률이 0.1%이고, 대부분 후보도 1~3%에 머뭅니다. 우승은 차량이 거의 정합니다. 현실적인 목표는 팀 6위이고, LECLERC로 바꾸면 6위 이내 확률이 9%에서 65%로 오릅니다. RUSSELL은 2025만 보면 효과가 크지만 2023~2025로 보면 거의 사라져, 앞의 우위가 차량 덕분일 수 있다는 신호입니다. 이 슬라이드는 관측 기록이 아니라 가정 위의 추정이라 결론을 바꾸지 않습니다. 관측 기록으로는 RUSSELL이 1순위이고, 이 결과 때문에 RUSSELL은 확정이 아니라 우선 검토이며 다음 시즌 데이터로 다시 판정할 첫 번째 항목입니다.</a:t>
+            </a:r>
+            <a:endParaRPr lang="en-US" dirty="0"/>
+          </a:p>
+        </p:txBody>
+      </p:sp>
+      <p:sp>
+        <p:nvSpPr>
+          <p:cNvPr id="4" name="Slide Number Placeholder 3"/>
+          <p:cNvSpPr>
+            <a:spLocks noGrp="1"/>
+          </p:cNvSpPr>
+          <p:nvPr>
+            <p:ph type="sldNum" sz="quarter" idx="10"/>
+          </p:nvPr>
+        </p:nvSpPr>
+        <p:spPr/>
+        <p:txBody>
+          <a:bodyPr/>
+          <a:lstStyle/>
+          <a:p>
+            <a:fld id="{F7021451-1387-4CA6-816F-3879F97B5CBC}" type="slidenum">
+              <a:rPr lang="en-US"/>
+              <a:t>21</a:t>
+            </a:fld>
+            <a:endParaRPr lang="en-US"/>
+          </a:p>
+        </p:txBody>
+      </p:sp>
+    </p:spTree>
+    <p:extLst>
+      <p:ext uri="{BB962C8B-B14F-4D97-AF65-F5344CB8AC3E}">
+        <p14:creationId xmlns:p14="http://schemas.microsoft.com/office/powerpoint/2010/main" val="1024086991"/>
+      </p:ext>
+    </p:extLst>
+  </p:cSld>
+  <p:clrMapOvr>
+    <a:masterClrMapping/>
+  </p:clrMapOvr>
+</p:notes>
+</file>
+
 <file path=ppt/notesSlides/notesSlide3.xml><?xml version="1.0" encoding="utf-8"?>
 <p:notes xmlns:a="http://schemas.openxmlformats.org/drawingml/2006/main" xmlns:r="http://schemas.openxmlformats.org/officeDocument/2006/relationships" xmlns:p="http://schemas.openxmlformats.org/presentationml/2006/main">
   <p:cSld>
@@ -4848,7 +4937,7 @@
           <a:p>
             <a:r>
               <a:rPr lang="en-US" dirty="0"/>
-              <a:t>탐지한 28,052건 중 27,485건이 결측이고, 대부분은 1랩 랩타임처럼 원천 특성이라 허용으로 기록했습니다. 근거가 있는 1,335셀만 복구했습니다.</a:t>
+              <a:t>탐지한 28,071건 중 27,485건이 결측이고, 대부분은 속도·1랩 랩타임처럼 원천 특성이라 허용으로 기록했습니다. 근거가 있는 1,357셀만 복구했고, 근거가 없는 4행은 격리했습니다. ERROR 등급 결함이 있던 파일 5개가 정제 후 0개가 됐습니다.</a:t>
             </a:r>
             <a:endParaRPr lang="en-US" dirty="0"/>
           </a:p>
@@ -4936,7 +5025,7 @@
           <a:p>
             <a:r>
               <a:rPr lang="en-US" dirty="0"/>
-              <a:t>같은 규칙을 두 도구로 두 번 돌려 결과가 같았다는 것이 이 숫자를 믿을 수 있는 근거입니다. ERROR 등급 위반은 0건입니다.</a:t>
+              <a:t>같은 규칙을 두 도구로 두 번 돌려 결과가 같았다는 것이 이 숫자를 믿을 수 있는 근거입니다. 같은 검사를 정제 전 원본에 돌리면 FAIL이 12건 나오고, 정제 후에는 0건입니다. 12건 중 9건은 sessions의 대회 키 2개가 오염돼 연결된 9개 파일이 함께 어긋난 것이었습니다.</a:t>
             </a:r>
             <a:endParaRPr lang="en-US" dirty="0"/>
           </a:p>
@@ -5399,7 +5488,7 @@
                   <a:srgbClr val="8C8C8C"/>
                 </a:solidFill>
               </a:rPr>
-              <a:t>F1 Team Builder 분석  ·  2023 ~ 2026-10-14 종료 본경기 87경기 · 정제 v0.2.0 · 본경기 기본 포인트(Sprint·보너스 제외)</a:t>
+              <a:t>F1 Team Builder 분석  ·  2023 ~ 2026-10-14 종료 본경기 87경기 · 정제 v0.3.0 · 본경기 기본 포인트(Sprint·보너스 제외)</a:t>
             </a:r>
             <a:endParaRPr lang="en-US" sz="900" dirty="0"/>
           </a:p>
@@ -6000,7 +6089,7 @@
                   <a:srgbClr val="D0D0D0"/>
                 </a:solidFill>
               </a:rPr>
-              <a:t>오염 데이터 6종과 분석 중 추가 수집한 5종, 87경기를 정제·검증해 직접 분석했습니다. 이 보고서의 모든 숫자는 같은 기준(2023 ~ 2026-10-14 종료 본경기, 정제 v0.2.0)에서 나왔습니다.</a:t>
+              <a:t>오염 데이터 6종과 분석 중 추가 수집한 5종, 87경기를 정제·검증해 직접 분석했습니다. 이 보고서의 모든 숫자는 같은 기준(2023 ~ 2026-10-14 종료 본경기, 정제 v0.3.0)에서 나왔습니다.</a:t>
             </a:r>
             <a:endParaRPr lang="en-US" sz="1500" dirty="0"/>
           </a:p>
@@ -19074,7 +19163,7 @@
                   <a:srgbClr val="6B6B6B"/>
                 </a:solidFill>
               </a:rPr>
-              <a:t>근거 17 · 18</a:t>
+              <a:t>근거 17 · 18 · 21</a:t>
             </a:r>
             <a:endParaRPr lang="en-US" sz="1000" dirty="0"/>
           </a:p>
@@ -20189,7 +20278,7 @@
                   <a:srgbClr val="E5E5E5"/>
                 </a:solidFill>
               </a:rPr>
-              <a:t>차량 효과를 분리하지 않았다 — 다른 차량에서 얻은 상대 페이스는 선수 효과와 차량 효과가 섞여 있다.</a:t>
+              <a:t>후보 지표는 차량 효과를 분리하지 않았다 — 교체 시뮬레이션(21)에서만 분리했고, 그 결과는 추정 기간에 따라 달라진다.</a:t>
             </a:r>
             <a:endParaRPr lang="en-US" sz="1400" dirty="0"/>
           </a:p>
@@ -20279,7 +20368,7 @@
                   <a:srgbClr val="E5E5E5"/>
                 </a:solidFill>
               </a:rPr>
-              <a:t>Gold 수치의 계산 코드가 저장소에 없다 — 현재 Gold는 분석 결과 파일을 적재·검증한 것이며, 재계산은 다음 단계다.</a:t>
+              <a:t>Gold 수치의 계산 코드가 저장소에 없다 — 후보 지표는 정제 v0.2.0으로 계산한 결과 파일이다(v0.3.0과 차이는 22셀·2행).</a:t>
             </a:r>
             <a:endParaRPr lang="en-US" sz="1400" dirty="0"/>
           </a:p>
@@ -21148,9 +21237,3707 @@
                   <a:srgbClr val="8C8C8C"/>
                 </a:solidFill>
               </a:rPr>
-              <a:t>모든 숫자는 2023 ~ 2026-10-14 종료 본경기 87경기 · 정제 v0.2.0 · 본경기 기본 포인트(Sprint·보너스 제외) · Team 1</a:t>
+              <a:t>모든 숫자는 2023 ~ 2026-10-14 종료 본경기 87경기 · 정제 v0.3.0 · 본경기 기본 포인트(Sprint·보너스 제외) · Team 1</a:t>
             </a:r>
             <a:endParaRPr lang="en-US" sz="1100" dirty="0"/>
+          </a:p>
+        </p:txBody>
+      </p:sp>
+    </p:spTree>
+  </p:cSld>
+  <p:clrMapOvr>
+    <a:masterClrMapping/>
+  </p:clrMapOvr>
+</p:sld>
+</file>
+
+<file path=ppt/slides/slide27.xml><?xml version="1.0" encoding="utf-8"?>
+<p:sld xmlns:a="http://schemas.openxmlformats.org/drawingml/2006/main" xmlns:r="http://schemas.openxmlformats.org/officeDocument/2006/relationships" xmlns:p="http://schemas.openxmlformats.org/presentationml/2006/main">
+  <p:cSld name="Slide 17">
+    <p:spTree>
+      <p:nvGrpSpPr>
+        <p:cNvPr id="1" name=""/>
+        <p:cNvGrpSpPr/>
+        <p:nvPr/>
+      </p:nvGrpSpPr>
+      <p:grpSpPr>
+        <a:xfrm>
+          <a:off x="0" y="0"/>
+          <a:ext cx="0" cy="0"/>
+          <a:chOff x="0" y="0"/>
+          <a:chExt cx="0" cy="0"/>
+        </a:xfrm>
+      </p:grpSpPr>
+      <p:sp>
+        <p:nvSpPr>
+          <p:cNvPr id="2" name="Text 0"/>
+          <p:cNvSpPr/>
+          <p:nvPr>
+            <p:ph idx="100" type="title" hasCustomPrompt="1"/>
+          </p:nvPr>
+        </p:nvSpPr>
+        <p:spPr>
+          <a:xfrm>
+            <a:off x="548640" y="365760"/>
+            <a:ext cx="11109960" cy="640080"/>
+          </a:xfrm>
+          <a:prstGeom prst="rect">
+            <a:avLst/>
+          </a:prstGeom>
+          <a:noFill/>
+          <a:ln/>
+        </p:spPr>
+        <p:txBody>
+          <a:bodyPr wrap="square" lIns="0" tIns="0" rIns="0" bIns="0" rtlCol="0" anchor="ctr"/>
+          <a:lstStyle/>
+          <a:p>
+            <a:pPr algn="l" indent="0" marL="0">
+              <a:buNone/>
+            </a:pPr>
+            <a:r>
+              <a:rPr lang="en-US" sz="2800" b="1" dirty="0">
+                <a:solidFill>
+                  <a:srgbClr val="1A1A1A"/>
+                </a:solidFill>
+              </a:rPr>
+              <a:t>교체해도 우승은 어렵다 — 현실적 목표는 팀 6위</a:t>
+            </a:r>
+            <a:endParaRPr lang="en-US" sz="2800" dirty="0"/>
+          </a:p>
+        </p:txBody>
+      </p:sp>
+      <p:sp>
+        <p:nvSpPr>
+          <p:cNvPr id="3" name="Text 0"/>
+          <p:cNvSpPr/>
+          <p:nvPr>
+            <p:ph idx="101" type="body" hasCustomPrompt="1"/>
+          </p:nvPr>
+        </p:nvSpPr>
+        <p:spPr>
+          <a:xfrm>
+            <a:off x="548640" y="1005840"/>
+            <a:ext cx="11109960" cy="365760"/>
+          </a:xfrm>
+          <a:prstGeom prst="rect">
+            <a:avLst/>
+          </a:prstGeom>
+          <a:noFill/>
+          <a:ln/>
+        </p:spPr>
+        <p:txBody>
+          <a:bodyPr wrap="square" lIns="0" tIns="0" rIns="0" bIns="0" rtlCol="0" anchor="t"/>
+          <a:lstStyle/>
+          <a:p>
+            <a:pPr indent="0" marL="0">
+              <a:buNone/>
+            </a:pPr>
+            <a:r>
+              <a:rPr lang="en-US" sz="1400" dirty="0">
+                <a:solidFill>
+                  <a:srgbClr val="6B6B6B"/>
+                </a:solidFill>
+              </a:rPr>
+              <a:t>시뮬레이션 · 가정 기반 추정 (Gold 관측 근거와 구분) · 2025 본경기 24경기 4,000번 재현 · 차량·선수 효과는 2023~2025로 분리</a:t>
+            </a:r>
+            <a:endParaRPr lang="en-US" sz="1400" dirty="0"/>
+          </a:p>
+        </p:txBody>
+      </p:sp>
+      <p:graphicFrame>
+        <p:nvGraphicFramePr>
+          <p:cNvPr id="18" name="cand-table"/>
+          <p:cNvGraphicFramePr>
+            <a:graphicFrameLocks noGrp="1"/>
+          </p:cNvGraphicFramePr>
+          <p:nvPr>
+            <p:extLst>
+              <p:ext uri="{D42A27DB-BD31-4B8C-83A1-F6EECF244321}">
+                <p14:modId xmlns:p14="http://schemas.microsoft.com/office/powerpoint/2010/main" val="1579011935"/>
+              </p:ext>
+            </p:extLst>
+          </p:nvPr>
+        </p:nvGraphicFramePr>
+        <p:xfrm>
+          <a:off x="548640" y="1508760"/>
+          <a:ext cx="11109960" cy="914400"/>
+        </p:xfrm>
+        <a:graphic>
+          <a:graphicData uri="http://schemas.openxmlformats.org/drawingml/2006/table">
+            <a:tbl>
+              <a:tblPr/>
+              <a:tblGrid>
+                <a:gridCol w="1691640"/>
+                <a:gridCol w="1463040"/>
+                <a:gridCol w="1371600"/>
+                <a:gridCol w="1371600"/>
+                <a:gridCol w="1280160"/>
+                <a:gridCol w="1325880"/>
+                <a:gridCol w="1051560"/>
+                <a:gridCol w="1554480"/>
+              </a:tblGrid>
+              <a:tr h="512064">
+                <a:tc>
+                  <a:txBody>
+                    <a:bodyPr/>
+                    <a:lstStyle/>
+                    <a:p>
+                      <a:pPr algn="l" indent="0" marL="0">
+                        <a:buNone/>
+                      </a:pPr>
+                      <a:r>
+                        <a:rPr lang="en-US" sz="1100" b="1" dirty="0">
+                          <a:solidFill>
+                            <a:srgbClr val="FFFFFF"/>
+                          </a:solidFill>
+                        </a:rPr>
+                        <a:t>시나리오</a:t>
+                      </a:r>
+                      <a:endParaRPr lang="en-US" sz="1100" dirty="0"/>
+                    </a:p>
+                  </a:txBody>
+                  <a:tcPr marL="91440" marR="91440" marT="45720" marB="45720" anchor="ctr">
+                    <a:lnL w="9525" cap="flat" cmpd="sng" algn="ctr">
+                      <a:solidFill>
+                        <a:srgbClr val="E5E5E5"/>
+                      </a:solidFill>
+                      <a:prstDash val="solid"/>
+                      <a:round/>
+                      <a:headEnd type="none" w="med" len="med"/>
+                      <a:tailEnd type="none" w="med" len="med"/>
+                    </a:lnL>
+                    <a:lnR w="9525" cap="flat" cmpd="sng" algn="ctr">
+                      <a:solidFill>
+                        <a:srgbClr val="E5E5E5"/>
+                      </a:solidFill>
+                      <a:prstDash val="solid"/>
+                      <a:round/>
+                      <a:headEnd type="none" w="med" len="med"/>
+                      <a:tailEnd type="none" w="med" len="med"/>
+                    </a:lnR>
+                    <a:lnT w="9525" cap="flat" cmpd="sng" algn="ctr">
+                      <a:solidFill>
+                        <a:srgbClr val="E5E5E5"/>
+                      </a:solidFill>
+                      <a:prstDash val="solid"/>
+                      <a:round/>
+                      <a:headEnd type="none" w="med" len="med"/>
+                      <a:tailEnd type="none" w="med" len="med"/>
+                    </a:lnT>
+                    <a:lnB w="9525" cap="flat" cmpd="sng" algn="ctr">
+                      <a:solidFill>
+                        <a:srgbClr val="E5E5E5"/>
+                      </a:solidFill>
+                      <a:prstDash val="solid"/>
+                      <a:round/>
+                      <a:headEnd type="none" w="med" len="med"/>
+                      <a:tailEnd type="none" w="med" len="med"/>
+                    </a:lnB>
+                    <a:solidFill>
+                      <a:srgbClr val="1A1A1A"/>
+                    </a:solidFill>
+                  </a:tcPr>
+                </a:tc>
+                <a:tc>
+                  <a:txBody>
+                    <a:bodyPr/>
+                    <a:lstStyle/>
+                    <a:p>
+                      <a:pPr algn="l" indent="0" marL="0">
+                        <a:buNone/>
+                      </a:pPr>
+                      <a:r>
+                        <a:rPr lang="en-US" sz="1100" b="1" dirty="0">
+                          <a:solidFill>
+                            <a:srgbClr val="FFFFFF"/>
+                          </a:solidFill>
+                        </a:rPr>
+                        <a:t>원래 팀</a:t>
+                      </a:r>
+                      <a:endParaRPr lang="en-US" sz="1100" dirty="0"/>
+                    </a:p>
+                  </a:txBody>
+                  <a:tcPr marL="91440" marR="91440" marT="45720" marB="45720" anchor="ctr">
+                    <a:lnL w="9525" cap="flat" cmpd="sng" algn="ctr">
+                      <a:solidFill>
+                        <a:srgbClr val="E5E5E5"/>
+                      </a:solidFill>
+                      <a:prstDash val="solid"/>
+                      <a:round/>
+                      <a:headEnd type="none" w="med" len="med"/>
+                      <a:tailEnd type="none" w="med" len="med"/>
+                    </a:lnL>
+                    <a:lnR w="9525" cap="flat" cmpd="sng" algn="ctr">
+                      <a:solidFill>
+                        <a:srgbClr val="E5E5E5"/>
+                      </a:solidFill>
+                      <a:prstDash val="solid"/>
+                      <a:round/>
+                      <a:headEnd type="none" w="med" len="med"/>
+                      <a:tailEnd type="none" w="med" len="med"/>
+                    </a:lnR>
+                    <a:lnT w="9525" cap="flat" cmpd="sng" algn="ctr">
+                      <a:solidFill>
+                        <a:srgbClr val="E5E5E5"/>
+                      </a:solidFill>
+                      <a:prstDash val="solid"/>
+                      <a:round/>
+                      <a:headEnd type="none" w="med" len="med"/>
+                      <a:tailEnd type="none" w="med" len="med"/>
+                    </a:lnT>
+                    <a:lnB w="9525" cap="flat" cmpd="sng" algn="ctr">
+                      <a:solidFill>
+                        <a:srgbClr val="E5E5E5"/>
+                      </a:solidFill>
+                      <a:prstDash val="solid"/>
+                      <a:round/>
+                      <a:headEnd type="none" w="med" len="med"/>
+                      <a:tailEnd type="none" w="med" len="med"/>
+                    </a:lnB>
+                    <a:solidFill>
+                      <a:srgbClr val="1A1A1A"/>
+                    </a:solidFill>
+                  </a:tcPr>
+                </a:tc>
+                <a:tc>
+                  <a:txBody>
+                    <a:bodyPr/>
+                    <a:lstStyle/>
+                    <a:p>
+                      <a:pPr algn="l" indent="0" marL="0">
+                        <a:buNone/>
+                      </a:pPr>
+                      <a:r>
+                        <a:rPr lang="en-US" sz="1100" b="1" dirty="0">
+                          <a:solidFill>
+                            <a:srgbClr val="FFFFFF"/>
+                          </a:solidFill>
+                        </a:rPr>
+                        <a:t>시즌 1승 이상</a:t>
+                      </a:r>
+                      <a:endParaRPr lang="en-US" sz="1100" dirty="0"/>
+                    </a:p>
+                  </a:txBody>
+                  <a:tcPr marL="91440" marR="91440" marT="45720" marB="45720" anchor="ctr">
+                    <a:lnL w="9525" cap="flat" cmpd="sng" algn="ctr">
+                      <a:solidFill>
+                        <a:srgbClr val="E5E5E5"/>
+                      </a:solidFill>
+                      <a:prstDash val="solid"/>
+                      <a:round/>
+                      <a:headEnd type="none" w="med" len="med"/>
+                      <a:tailEnd type="none" w="med" len="med"/>
+                    </a:lnL>
+                    <a:lnR w="9525" cap="flat" cmpd="sng" algn="ctr">
+                      <a:solidFill>
+                        <a:srgbClr val="E5E5E5"/>
+                      </a:solidFill>
+                      <a:prstDash val="solid"/>
+                      <a:round/>
+                      <a:headEnd type="none" w="med" len="med"/>
+                      <a:tailEnd type="none" w="med" len="med"/>
+                    </a:lnR>
+                    <a:lnT w="9525" cap="flat" cmpd="sng" algn="ctr">
+                      <a:solidFill>
+                        <a:srgbClr val="E5E5E5"/>
+                      </a:solidFill>
+                      <a:prstDash val="solid"/>
+                      <a:round/>
+                      <a:headEnd type="none" w="med" len="med"/>
+                      <a:tailEnd type="none" w="med" len="med"/>
+                    </a:lnT>
+                    <a:lnB w="9525" cap="flat" cmpd="sng" algn="ctr">
+                      <a:solidFill>
+                        <a:srgbClr val="E5E5E5"/>
+                      </a:solidFill>
+                      <a:prstDash val="solid"/>
+                      <a:round/>
+                      <a:headEnd type="none" w="med" len="med"/>
+                      <a:tailEnd type="none" w="med" len="med"/>
+                    </a:lnB>
+                    <a:solidFill>
+                      <a:srgbClr val="1A1A1A"/>
+                    </a:solidFill>
+                  </a:tcPr>
+                </a:tc>
+                <a:tc>
+                  <a:txBody>
+                    <a:bodyPr/>
+                    <a:lstStyle/>
+                    <a:p>
+                      <a:pPr algn="l" indent="0" marL="0">
+                        <a:buNone/>
+                      </a:pPr>
+                      <a:r>
+                        <a:rPr lang="en-US" sz="1100" b="1" dirty="0">
+                          <a:solidFill>
+                            <a:srgbClr val="FFFFFF"/>
+                          </a:solidFill>
+                        </a:rPr>
+                        <a:t>포디움 1회 이상</a:t>
+                      </a:r>
+                      <a:endParaRPr lang="en-US" sz="1100" dirty="0"/>
+                    </a:p>
+                  </a:txBody>
+                  <a:tcPr marL="91440" marR="91440" marT="45720" marB="45720" anchor="ctr">
+                    <a:lnL w="9525" cap="flat" cmpd="sng" algn="ctr">
+                      <a:solidFill>
+                        <a:srgbClr val="E5E5E5"/>
+                      </a:solidFill>
+                      <a:prstDash val="solid"/>
+                      <a:round/>
+                      <a:headEnd type="none" w="med" len="med"/>
+                      <a:tailEnd type="none" w="med" len="med"/>
+                    </a:lnL>
+                    <a:lnR w="9525" cap="flat" cmpd="sng" algn="ctr">
+                      <a:solidFill>
+                        <a:srgbClr val="E5E5E5"/>
+                      </a:solidFill>
+                      <a:prstDash val="solid"/>
+                      <a:round/>
+                      <a:headEnd type="none" w="med" len="med"/>
+                      <a:tailEnd type="none" w="med" len="med"/>
+                    </a:lnR>
+                    <a:lnT w="9525" cap="flat" cmpd="sng" algn="ctr">
+                      <a:solidFill>
+                        <a:srgbClr val="E5E5E5"/>
+                      </a:solidFill>
+                      <a:prstDash val="solid"/>
+                      <a:round/>
+                      <a:headEnd type="none" w="med" len="med"/>
+                      <a:tailEnd type="none" w="med" len="med"/>
+                    </a:lnT>
+                    <a:lnB w="9525" cap="flat" cmpd="sng" algn="ctr">
+                      <a:solidFill>
+                        <a:srgbClr val="E5E5E5"/>
+                      </a:solidFill>
+                      <a:prstDash val="solid"/>
+                      <a:round/>
+                      <a:headEnd type="none" w="med" len="med"/>
+                      <a:tailEnd type="none" w="med" len="med"/>
+                    </a:lnB>
+                    <a:solidFill>
+                      <a:srgbClr val="1A1A1A"/>
+                    </a:solidFill>
+                  </a:tcPr>
+                </a:tc>
+                <a:tc>
+                  <a:txBody>
+                    <a:bodyPr/>
+                    <a:lstStyle/>
+                    <a:p>
+                      <a:pPr algn="l" indent="0" marL="0">
+                        <a:buNone/>
+                      </a:pPr>
+                      <a:r>
+                        <a:rPr lang="en-US" sz="1100" b="1" dirty="0">
+                          <a:solidFill>
+                            <a:srgbClr val="FFFFFF"/>
+                          </a:solidFill>
+                        </a:rPr>
+                        <a:t>팀 기대 포인트</a:t>
+                      </a:r>
+                      <a:endParaRPr lang="en-US" sz="1100" dirty="0"/>
+                    </a:p>
+                  </a:txBody>
+                  <a:tcPr marL="91440" marR="91440" marT="45720" marB="45720" anchor="ctr">
+                    <a:lnL w="9525" cap="flat" cmpd="sng" algn="ctr">
+                      <a:solidFill>
+                        <a:srgbClr val="E5E5E5"/>
+                      </a:solidFill>
+                      <a:prstDash val="solid"/>
+                      <a:round/>
+                      <a:headEnd type="none" w="med" len="med"/>
+                      <a:tailEnd type="none" w="med" len="med"/>
+                    </a:lnL>
+                    <a:lnR w="9525" cap="flat" cmpd="sng" algn="ctr">
+                      <a:solidFill>
+                        <a:srgbClr val="E5E5E5"/>
+                      </a:solidFill>
+                      <a:prstDash val="solid"/>
+                      <a:round/>
+                      <a:headEnd type="none" w="med" len="med"/>
+                      <a:tailEnd type="none" w="med" len="med"/>
+                    </a:lnR>
+                    <a:lnT w="9525" cap="flat" cmpd="sng" algn="ctr">
+                      <a:solidFill>
+                        <a:srgbClr val="E5E5E5"/>
+                      </a:solidFill>
+                      <a:prstDash val="solid"/>
+                      <a:round/>
+                      <a:headEnd type="none" w="med" len="med"/>
+                      <a:tailEnd type="none" w="med" len="med"/>
+                    </a:lnT>
+                    <a:lnB w="9525" cap="flat" cmpd="sng" algn="ctr">
+                      <a:solidFill>
+                        <a:srgbClr val="E5E5E5"/>
+                      </a:solidFill>
+                      <a:prstDash val="solid"/>
+                      <a:round/>
+                      <a:headEnd type="none" w="med" len="med"/>
+                      <a:tailEnd type="none" w="med" len="med"/>
+                    </a:lnB>
+                    <a:solidFill>
+                      <a:srgbClr val="1A1A1A"/>
+                    </a:solidFill>
+                  </a:tcPr>
+                </a:tc>
+                <a:tc>
+                  <a:txBody>
+                    <a:bodyPr/>
+                    <a:lstStyle/>
+                    <a:p>
+                      <a:pPr algn="l" indent="0" marL="0">
+                        <a:buNone/>
+                      </a:pPr>
+                      <a:r>
+                        <a:rPr lang="en-US" sz="1100" b="1" dirty="0">
+                          <a:solidFill>
+                            <a:srgbClr val="FFFFFF"/>
+                          </a:solidFill>
+                        </a:rPr>
+                        <a:t>팀 기대 순위</a:t>
+                      </a:r>
+                      <a:endParaRPr lang="en-US" sz="1100" dirty="0"/>
+                    </a:p>
+                  </a:txBody>
+                  <a:tcPr marL="91440" marR="91440" marT="45720" marB="45720" anchor="ctr">
+                    <a:lnL w="9525" cap="flat" cmpd="sng" algn="ctr">
+                      <a:solidFill>
+                        <a:srgbClr val="E5E5E5"/>
+                      </a:solidFill>
+                      <a:prstDash val="solid"/>
+                      <a:round/>
+                      <a:headEnd type="none" w="med" len="med"/>
+                      <a:tailEnd type="none" w="med" len="med"/>
+                    </a:lnL>
+                    <a:lnR w="9525" cap="flat" cmpd="sng" algn="ctr">
+                      <a:solidFill>
+                        <a:srgbClr val="E5E5E5"/>
+                      </a:solidFill>
+                      <a:prstDash val="solid"/>
+                      <a:round/>
+                      <a:headEnd type="none" w="med" len="med"/>
+                      <a:tailEnd type="none" w="med" len="med"/>
+                    </a:lnR>
+                    <a:lnT w="9525" cap="flat" cmpd="sng" algn="ctr">
+                      <a:solidFill>
+                        <a:srgbClr val="E5E5E5"/>
+                      </a:solidFill>
+                      <a:prstDash val="solid"/>
+                      <a:round/>
+                      <a:headEnd type="none" w="med" len="med"/>
+                      <a:tailEnd type="none" w="med" len="med"/>
+                    </a:lnT>
+                    <a:lnB w="9525" cap="flat" cmpd="sng" algn="ctr">
+                      <a:solidFill>
+                        <a:srgbClr val="E5E5E5"/>
+                      </a:solidFill>
+                      <a:prstDash val="solid"/>
+                      <a:round/>
+                      <a:headEnd type="none" w="med" len="med"/>
+                      <a:tailEnd type="none" w="med" len="med"/>
+                    </a:lnB>
+                    <a:solidFill>
+                      <a:srgbClr val="1A1A1A"/>
+                    </a:solidFill>
+                  </a:tcPr>
+                </a:tc>
+                <a:tc>
+                  <a:txBody>
+                    <a:bodyPr/>
+                    <a:lstStyle/>
+                    <a:p>
+                      <a:pPr algn="l" indent="0" marL="0">
+                        <a:buNone/>
+                      </a:pPr>
+                      <a:r>
+                        <a:rPr lang="en-US" sz="1100" b="1" dirty="0">
+                          <a:solidFill>
+                            <a:srgbClr val="FFFFFF"/>
+                          </a:solidFill>
+                        </a:rPr>
+                        <a:t>팀 6위 이내</a:t>
+                      </a:r>
+                      <a:endParaRPr lang="en-US" sz="1100" dirty="0"/>
+                    </a:p>
+                  </a:txBody>
+                  <a:tcPr marL="91440" marR="91440" marT="45720" marB="45720" anchor="ctr">
+                    <a:lnL w="9525" cap="flat" cmpd="sng" algn="ctr">
+                      <a:solidFill>
+                        <a:srgbClr val="E5E5E5"/>
+                      </a:solidFill>
+                      <a:prstDash val="solid"/>
+                      <a:round/>
+                      <a:headEnd type="none" w="med" len="med"/>
+                      <a:tailEnd type="none" w="med" len="med"/>
+                    </a:lnL>
+                    <a:lnR w="9525" cap="flat" cmpd="sng" algn="ctr">
+                      <a:solidFill>
+                        <a:srgbClr val="E5E5E5"/>
+                      </a:solidFill>
+                      <a:prstDash val="solid"/>
+                      <a:round/>
+                      <a:headEnd type="none" w="med" len="med"/>
+                      <a:tailEnd type="none" w="med" len="med"/>
+                    </a:lnR>
+                    <a:lnT w="9525" cap="flat" cmpd="sng" algn="ctr">
+                      <a:solidFill>
+                        <a:srgbClr val="E5E5E5"/>
+                      </a:solidFill>
+                      <a:prstDash val="solid"/>
+                      <a:round/>
+                      <a:headEnd type="none" w="med" len="med"/>
+                      <a:tailEnd type="none" w="med" len="med"/>
+                    </a:lnT>
+                    <a:lnB w="9525" cap="flat" cmpd="sng" algn="ctr">
+                      <a:solidFill>
+                        <a:srgbClr val="E5E5E5"/>
+                      </a:solidFill>
+                      <a:prstDash val="solid"/>
+                      <a:round/>
+                      <a:headEnd type="none" w="med" len="med"/>
+                      <a:tailEnd type="none" w="med" len="med"/>
+                    </a:lnB>
+                    <a:solidFill>
+                      <a:srgbClr val="1A1A1A"/>
+                    </a:solidFill>
+                  </a:tcPr>
+                </a:tc>
+                <a:tc>
+                  <a:txBody>
+                    <a:bodyPr/>
+                    <a:lstStyle/>
+                    <a:p>
+                      <a:pPr algn="l" indent="0" marL="0">
+                        <a:buNone/>
+                      </a:pPr>
+                      <a:r>
+                        <a:rPr lang="en-US" sz="1100" b="1" dirty="0">
+                          <a:solidFill>
+                            <a:srgbClr val="FFFFFF"/>
+                          </a:solidFill>
+                        </a:rPr>
+                        <a:t>2025만 추정 · 6위 이내</a:t>
+                      </a:r>
+                      <a:endParaRPr lang="en-US" sz="1100" dirty="0"/>
+                    </a:p>
+                  </a:txBody>
+                  <a:tcPr marL="91440" marR="91440" marT="45720" marB="45720" anchor="ctr">
+                    <a:lnL w="9525" cap="flat" cmpd="sng" algn="ctr">
+                      <a:solidFill>
+                        <a:srgbClr val="E5E5E5"/>
+                      </a:solidFill>
+                      <a:prstDash val="solid"/>
+                      <a:round/>
+                      <a:headEnd type="none" w="med" len="med"/>
+                      <a:tailEnd type="none" w="med" len="med"/>
+                    </a:lnL>
+                    <a:lnR w="9525" cap="flat" cmpd="sng" algn="ctr">
+                      <a:solidFill>
+                        <a:srgbClr val="E5E5E5"/>
+                      </a:solidFill>
+                      <a:prstDash val="solid"/>
+                      <a:round/>
+                      <a:headEnd type="none" w="med" len="med"/>
+                      <a:tailEnd type="none" w="med" len="med"/>
+                    </a:lnR>
+                    <a:lnT w="9525" cap="flat" cmpd="sng" algn="ctr">
+                      <a:solidFill>
+                        <a:srgbClr val="E5E5E5"/>
+                      </a:solidFill>
+                      <a:prstDash val="solid"/>
+                      <a:round/>
+                      <a:headEnd type="none" w="med" len="med"/>
+                      <a:tailEnd type="none" w="med" len="med"/>
+                    </a:lnT>
+                    <a:lnB w="9525" cap="flat" cmpd="sng" algn="ctr">
+                      <a:solidFill>
+                        <a:srgbClr val="E5E5E5"/>
+                      </a:solidFill>
+                      <a:prstDash val="solid"/>
+                      <a:round/>
+                      <a:headEnd type="none" w="med" len="med"/>
+                      <a:tailEnd type="none" w="med" len="med"/>
+                    </a:lnB>
+                    <a:solidFill>
+                      <a:srgbClr val="1A1A1A"/>
+                    </a:solidFill>
+                  </a:tcPr>
+                </a:tc>
+              </a:tr>
+              <a:tr h="512064">
+                <a:tc>
+                  <a:txBody>
+                    <a:bodyPr/>
+                    <a:lstStyle/>
+                    <a:p>
+                      <a:pPr algn="l" indent="0" marL="0">
+                        <a:buNone/>
+                      </a:pPr>
+                      <a:r>
+                        <a:rPr lang="en-US" sz="1100" b="1" dirty="0">
+                          <a:solidFill>
+                            <a:srgbClr val="1A1A1A"/>
+                          </a:solidFill>
+                        </a:rPr>
+                        <a:t>실제 라인업 (STROLL)</a:t>
+                      </a:r>
+                      <a:endParaRPr lang="en-US" sz="1100" dirty="0"/>
+                    </a:p>
+                  </a:txBody>
+                  <a:tcPr marL="91440" marR="91440" marT="45720" marB="45720" anchor="ctr">
+                    <a:lnL w="9525" cap="flat" cmpd="sng" algn="ctr">
+                      <a:solidFill>
+                        <a:srgbClr val="E5E5E5"/>
+                      </a:solidFill>
+                      <a:prstDash val="solid"/>
+                      <a:round/>
+                      <a:headEnd type="none" w="med" len="med"/>
+                      <a:tailEnd type="none" w="med" len="med"/>
+                    </a:lnL>
+                    <a:lnR w="9525" cap="flat" cmpd="sng" algn="ctr">
+                      <a:solidFill>
+                        <a:srgbClr val="E5E5E5"/>
+                      </a:solidFill>
+                      <a:prstDash val="solid"/>
+                      <a:round/>
+                      <a:headEnd type="none" w="med" len="med"/>
+                      <a:tailEnd type="none" w="med" len="med"/>
+                    </a:lnR>
+                    <a:lnT w="9525" cap="flat" cmpd="sng" algn="ctr">
+                      <a:solidFill>
+                        <a:srgbClr val="E5E5E5"/>
+                      </a:solidFill>
+                      <a:prstDash val="solid"/>
+                      <a:round/>
+                      <a:headEnd type="none" w="med" len="med"/>
+                      <a:tailEnd type="none" w="med" len="med"/>
+                    </a:lnT>
+                    <a:lnB w="9525" cap="flat" cmpd="sng" algn="ctr">
+                      <a:solidFill>
+                        <a:srgbClr val="E5E5E5"/>
+                      </a:solidFill>
+                      <a:prstDash val="solid"/>
+                      <a:round/>
+                      <a:headEnd type="none" w="med" len="med"/>
+                      <a:tailEnd type="none" w="med" len="med"/>
+                    </a:lnB>
+                    <a:solidFill>
+                      <a:srgbClr val="FDECEC"/>
+                    </a:solidFill>
+                  </a:tcPr>
+                </a:tc>
+                <a:tc>
+                  <a:txBody>
+                    <a:bodyPr/>
+                    <a:lstStyle/>
+                    <a:p>
+                      <a:pPr algn="l" indent="0" marL="0">
+                        <a:buNone/>
+                      </a:pPr>
+                      <a:r>
+                        <a:rPr lang="en-US" sz="1100" dirty="0">
+                          <a:solidFill>
+                            <a:srgbClr val="1A1A1A"/>
+                          </a:solidFill>
+                        </a:rPr>
+                        <a:t>Aston Martin</a:t>
+                      </a:r>
+                      <a:endParaRPr lang="en-US" sz="1100" dirty="0"/>
+                    </a:p>
+                  </a:txBody>
+                  <a:tcPr marL="91440" marR="91440" marT="45720" marB="45720" anchor="ctr">
+                    <a:lnL w="9525" cap="flat" cmpd="sng" algn="ctr">
+                      <a:solidFill>
+                        <a:srgbClr val="E5E5E5"/>
+                      </a:solidFill>
+                      <a:prstDash val="solid"/>
+                      <a:round/>
+                      <a:headEnd type="none" w="med" len="med"/>
+                      <a:tailEnd type="none" w="med" len="med"/>
+                    </a:lnL>
+                    <a:lnR w="9525" cap="flat" cmpd="sng" algn="ctr">
+                      <a:solidFill>
+                        <a:srgbClr val="E5E5E5"/>
+                      </a:solidFill>
+                      <a:prstDash val="solid"/>
+                      <a:round/>
+                      <a:headEnd type="none" w="med" len="med"/>
+                      <a:tailEnd type="none" w="med" len="med"/>
+                    </a:lnR>
+                    <a:lnT w="9525" cap="flat" cmpd="sng" algn="ctr">
+                      <a:solidFill>
+                        <a:srgbClr val="E5E5E5"/>
+                      </a:solidFill>
+                      <a:prstDash val="solid"/>
+                      <a:round/>
+                      <a:headEnd type="none" w="med" len="med"/>
+                      <a:tailEnd type="none" w="med" len="med"/>
+                    </a:lnT>
+                    <a:lnB w="9525" cap="flat" cmpd="sng" algn="ctr">
+                      <a:solidFill>
+                        <a:srgbClr val="E5E5E5"/>
+                      </a:solidFill>
+                      <a:prstDash val="solid"/>
+                      <a:round/>
+                      <a:headEnd type="none" w="med" len="med"/>
+                      <a:tailEnd type="none" w="med" len="med"/>
+                    </a:lnB>
+                    <a:solidFill>
+                      <a:srgbClr val="FDECEC"/>
+                    </a:solidFill>
+                  </a:tcPr>
+                </a:tc>
+                <a:tc>
+                  <a:txBody>
+                    <a:bodyPr/>
+                    <a:lstStyle/>
+                    <a:p>
+                      <a:pPr algn="l" indent="0" marL="0">
+                        <a:buNone/>
+                      </a:pPr>
+                      <a:r>
+                        <a:rPr lang="en-US" sz="1100" dirty="0">
+                          <a:solidFill>
+                            <a:srgbClr val="1A1A1A"/>
+                          </a:solidFill>
+                        </a:rPr>
+                        <a:t>0.1%</a:t>
+                      </a:r>
+                      <a:endParaRPr lang="en-US" sz="1100" dirty="0"/>
+                    </a:p>
+                  </a:txBody>
+                  <a:tcPr marL="91440" marR="91440" marT="45720" marB="45720" anchor="ctr">
+                    <a:lnL w="9525" cap="flat" cmpd="sng" algn="ctr">
+                      <a:solidFill>
+                        <a:srgbClr val="E5E5E5"/>
+                      </a:solidFill>
+                      <a:prstDash val="solid"/>
+                      <a:round/>
+                      <a:headEnd type="none" w="med" len="med"/>
+                      <a:tailEnd type="none" w="med" len="med"/>
+                    </a:lnL>
+                    <a:lnR w="9525" cap="flat" cmpd="sng" algn="ctr">
+                      <a:solidFill>
+                        <a:srgbClr val="E5E5E5"/>
+                      </a:solidFill>
+                      <a:prstDash val="solid"/>
+                      <a:round/>
+                      <a:headEnd type="none" w="med" len="med"/>
+                      <a:tailEnd type="none" w="med" len="med"/>
+                    </a:lnR>
+                    <a:lnT w="9525" cap="flat" cmpd="sng" algn="ctr">
+                      <a:solidFill>
+                        <a:srgbClr val="E5E5E5"/>
+                      </a:solidFill>
+                      <a:prstDash val="solid"/>
+                      <a:round/>
+                      <a:headEnd type="none" w="med" len="med"/>
+                      <a:tailEnd type="none" w="med" len="med"/>
+                    </a:lnT>
+                    <a:lnB w="9525" cap="flat" cmpd="sng" algn="ctr">
+                      <a:solidFill>
+                        <a:srgbClr val="E5E5E5"/>
+                      </a:solidFill>
+                      <a:prstDash val="solid"/>
+                      <a:round/>
+                      <a:headEnd type="none" w="med" len="med"/>
+                      <a:tailEnd type="none" w="med" len="med"/>
+                    </a:lnB>
+                    <a:solidFill>
+                      <a:srgbClr val="FDECEC"/>
+                    </a:solidFill>
+                  </a:tcPr>
+                </a:tc>
+                <a:tc>
+                  <a:txBody>
+                    <a:bodyPr/>
+                    <a:lstStyle/>
+                    <a:p>
+                      <a:pPr algn="l" indent="0" marL="0">
+                        <a:buNone/>
+                      </a:pPr>
+                      <a:r>
+                        <a:rPr lang="en-US" sz="1100" dirty="0">
+                          <a:solidFill>
+                            <a:srgbClr val="1A1A1A"/>
+                          </a:solidFill>
+                        </a:rPr>
+                        <a:t>8.6%</a:t>
+                      </a:r>
+                      <a:endParaRPr lang="en-US" sz="1100" dirty="0"/>
+                    </a:p>
+                  </a:txBody>
+                  <a:tcPr marL="91440" marR="91440" marT="45720" marB="45720" anchor="ctr">
+                    <a:lnL w="9525" cap="flat" cmpd="sng" algn="ctr">
+                      <a:solidFill>
+                        <a:srgbClr val="E5E5E5"/>
+                      </a:solidFill>
+                      <a:prstDash val="solid"/>
+                      <a:round/>
+                      <a:headEnd type="none" w="med" len="med"/>
+                      <a:tailEnd type="none" w="med" len="med"/>
+                    </a:lnL>
+                    <a:lnR w="9525" cap="flat" cmpd="sng" algn="ctr">
+                      <a:solidFill>
+                        <a:srgbClr val="E5E5E5"/>
+                      </a:solidFill>
+                      <a:prstDash val="solid"/>
+                      <a:round/>
+                      <a:headEnd type="none" w="med" len="med"/>
+                      <a:tailEnd type="none" w="med" len="med"/>
+                    </a:lnR>
+                    <a:lnT w="9525" cap="flat" cmpd="sng" algn="ctr">
+                      <a:solidFill>
+                        <a:srgbClr val="E5E5E5"/>
+                      </a:solidFill>
+                      <a:prstDash val="solid"/>
+                      <a:round/>
+                      <a:headEnd type="none" w="med" len="med"/>
+                      <a:tailEnd type="none" w="med" len="med"/>
+                    </a:lnT>
+                    <a:lnB w="9525" cap="flat" cmpd="sng" algn="ctr">
+                      <a:solidFill>
+                        <a:srgbClr val="E5E5E5"/>
+                      </a:solidFill>
+                      <a:prstDash val="solid"/>
+                      <a:round/>
+                      <a:headEnd type="none" w="med" len="med"/>
+                      <a:tailEnd type="none" w="med" len="med"/>
+                    </a:lnB>
+                    <a:solidFill>
+                      <a:srgbClr val="FDECEC"/>
+                    </a:solidFill>
+                  </a:tcPr>
+                </a:tc>
+                <a:tc>
+                  <a:txBody>
+                    <a:bodyPr/>
+                    <a:lstStyle/>
+                    <a:p>
+                      <a:pPr algn="l" indent="0" marL="0">
+                        <a:buNone/>
+                      </a:pPr>
+                      <a:r>
+                        <a:rPr lang="en-US" sz="1100" dirty="0">
+                          <a:solidFill>
+                            <a:srgbClr val="1A1A1A"/>
+                          </a:solidFill>
+                        </a:rPr>
+                        <a:t>64.6</a:t>
+                      </a:r>
+                      <a:endParaRPr lang="en-US" sz="1100" dirty="0"/>
+                    </a:p>
+                  </a:txBody>
+                  <a:tcPr marL="91440" marR="91440" marT="45720" marB="45720" anchor="ctr">
+                    <a:lnL w="9525" cap="flat" cmpd="sng" algn="ctr">
+                      <a:solidFill>
+                        <a:srgbClr val="E5E5E5"/>
+                      </a:solidFill>
+                      <a:prstDash val="solid"/>
+                      <a:round/>
+                      <a:headEnd type="none" w="med" len="med"/>
+                      <a:tailEnd type="none" w="med" len="med"/>
+                    </a:lnL>
+                    <a:lnR w="9525" cap="flat" cmpd="sng" algn="ctr">
+                      <a:solidFill>
+                        <a:srgbClr val="E5E5E5"/>
+                      </a:solidFill>
+                      <a:prstDash val="solid"/>
+                      <a:round/>
+                      <a:headEnd type="none" w="med" len="med"/>
+                      <a:tailEnd type="none" w="med" len="med"/>
+                    </a:lnR>
+                    <a:lnT w="9525" cap="flat" cmpd="sng" algn="ctr">
+                      <a:solidFill>
+                        <a:srgbClr val="E5E5E5"/>
+                      </a:solidFill>
+                      <a:prstDash val="solid"/>
+                      <a:round/>
+                      <a:headEnd type="none" w="med" len="med"/>
+                      <a:tailEnd type="none" w="med" len="med"/>
+                    </a:lnT>
+                    <a:lnB w="9525" cap="flat" cmpd="sng" algn="ctr">
+                      <a:solidFill>
+                        <a:srgbClr val="E5E5E5"/>
+                      </a:solidFill>
+                      <a:prstDash val="solid"/>
+                      <a:round/>
+                      <a:headEnd type="none" w="med" len="med"/>
+                      <a:tailEnd type="none" w="med" len="med"/>
+                    </a:lnB>
+                    <a:solidFill>
+                      <a:srgbClr val="FDECEC"/>
+                    </a:solidFill>
+                  </a:tcPr>
+                </a:tc>
+                <a:tc>
+                  <a:txBody>
+                    <a:bodyPr/>
+                    <a:lstStyle/>
+                    <a:p>
+                      <a:pPr algn="l" indent="0" marL="0">
+                        <a:buNone/>
+                      </a:pPr>
+                      <a:r>
+                        <a:rPr lang="en-US" sz="1100" dirty="0">
+                          <a:solidFill>
+                            <a:srgbClr val="1A1A1A"/>
+                          </a:solidFill>
+                        </a:rPr>
+                        <a:t>8.1</a:t>
+                      </a:r>
+                      <a:endParaRPr lang="en-US" sz="1100" dirty="0"/>
+                    </a:p>
+                  </a:txBody>
+                  <a:tcPr marL="91440" marR="91440" marT="45720" marB="45720" anchor="ctr">
+                    <a:lnL w="9525" cap="flat" cmpd="sng" algn="ctr">
+                      <a:solidFill>
+                        <a:srgbClr val="E5E5E5"/>
+                      </a:solidFill>
+                      <a:prstDash val="solid"/>
+                      <a:round/>
+                      <a:headEnd type="none" w="med" len="med"/>
+                      <a:tailEnd type="none" w="med" len="med"/>
+                    </a:lnL>
+                    <a:lnR w="9525" cap="flat" cmpd="sng" algn="ctr">
+                      <a:solidFill>
+                        <a:srgbClr val="E5E5E5"/>
+                      </a:solidFill>
+                      <a:prstDash val="solid"/>
+                      <a:round/>
+                      <a:headEnd type="none" w="med" len="med"/>
+                      <a:tailEnd type="none" w="med" len="med"/>
+                    </a:lnR>
+                    <a:lnT w="9525" cap="flat" cmpd="sng" algn="ctr">
+                      <a:solidFill>
+                        <a:srgbClr val="E5E5E5"/>
+                      </a:solidFill>
+                      <a:prstDash val="solid"/>
+                      <a:round/>
+                      <a:headEnd type="none" w="med" len="med"/>
+                      <a:tailEnd type="none" w="med" len="med"/>
+                    </a:lnT>
+                    <a:lnB w="9525" cap="flat" cmpd="sng" algn="ctr">
+                      <a:solidFill>
+                        <a:srgbClr val="E5E5E5"/>
+                      </a:solidFill>
+                      <a:prstDash val="solid"/>
+                      <a:round/>
+                      <a:headEnd type="none" w="med" len="med"/>
+                      <a:tailEnd type="none" w="med" len="med"/>
+                    </a:lnB>
+                    <a:solidFill>
+                      <a:srgbClr val="FDECEC"/>
+                    </a:solidFill>
+                  </a:tcPr>
+                </a:tc>
+                <a:tc>
+                  <a:txBody>
+                    <a:bodyPr/>
+                    <a:lstStyle/>
+                    <a:p>
+                      <a:pPr algn="l" indent="0" marL="0">
+                        <a:buNone/>
+                      </a:pPr>
+                      <a:r>
+                        <a:rPr lang="en-US" sz="1100" dirty="0">
+                          <a:solidFill>
+                            <a:srgbClr val="1A1A1A"/>
+                          </a:solidFill>
+                        </a:rPr>
+                        <a:t>9.3%</a:t>
+                      </a:r>
+                      <a:endParaRPr lang="en-US" sz="1100" dirty="0"/>
+                    </a:p>
+                  </a:txBody>
+                  <a:tcPr marL="91440" marR="91440" marT="45720" marB="45720" anchor="ctr">
+                    <a:lnL w="9525" cap="flat" cmpd="sng" algn="ctr">
+                      <a:solidFill>
+                        <a:srgbClr val="E5E5E5"/>
+                      </a:solidFill>
+                      <a:prstDash val="solid"/>
+                      <a:round/>
+                      <a:headEnd type="none" w="med" len="med"/>
+                      <a:tailEnd type="none" w="med" len="med"/>
+                    </a:lnL>
+                    <a:lnR w="9525" cap="flat" cmpd="sng" algn="ctr">
+                      <a:solidFill>
+                        <a:srgbClr val="E5E5E5"/>
+                      </a:solidFill>
+                      <a:prstDash val="solid"/>
+                      <a:round/>
+                      <a:headEnd type="none" w="med" len="med"/>
+                      <a:tailEnd type="none" w="med" len="med"/>
+                    </a:lnR>
+                    <a:lnT w="9525" cap="flat" cmpd="sng" algn="ctr">
+                      <a:solidFill>
+                        <a:srgbClr val="E5E5E5"/>
+                      </a:solidFill>
+                      <a:prstDash val="solid"/>
+                      <a:round/>
+                      <a:headEnd type="none" w="med" len="med"/>
+                      <a:tailEnd type="none" w="med" len="med"/>
+                    </a:lnT>
+                    <a:lnB w="9525" cap="flat" cmpd="sng" algn="ctr">
+                      <a:solidFill>
+                        <a:srgbClr val="E5E5E5"/>
+                      </a:solidFill>
+                      <a:prstDash val="solid"/>
+                      <a:round/>
+                      <a:headEnd type="none" w="med" len="med"/>
+                      <a:tailEnd type="none" w="med" len="med"/>
+                    </a:lnB>
+                    <a:solidFill>
+                      <a:srgbClr val="FDECEC"/>
+                    </a:solidFill>
+                  </a:tcPr>
+                </a:tc>
+                <a:tc>
+                  <a:txBody>
+                    <a:bodyPr/>
+                    <a:lstStyle/>
+                    <a:p>
+                      <a:pPr algn="l" indent="0" marL="0">
+                        <a:buNone/>
+                      </a:pPr>
+                      <a:r>
+                        <a:rPr lang="en-US" sz="1100" dirty="0">
+                          <a:solidFill>
+                            <a:srgbClr val="1A1A1A"/>
+                          </a:solidFill>
+                        </a:rPr>
+                        <a:t>7.7%</a:t>
+                      </a:r>
+                      <a:endParaRPr lang="en-US" sz="1100" dirty="0"/>
+                    </a:p>
+                  </a:txBody>
+                  <a:tcPr marL="91440" marR="91440" marT="45720" marB="45720" anchor="ctr">
+                    <a:lnL w="9525" cap="flat" cmpd="sng" algn="ctr">
+                      <a:solidFill>
+                        <a:srgbClr val="E5E5E5"/>
+                      </a:solidFill>
+                      <a:prstDash val="solid"/>
+                      <a:round/>
+                      <a:headEnd type="none" w="med" len="med"/>
+                      <a:tailEnd type="none" w="med" len="med"/>
+                    </a:lnL>
+                    <a:lnR w="9525" cap="flat" cmpd="sng" algn="ctr">
+                      <a:solidFill>
+                        <a:srgbClr val="E5E5E5"/>
+                      </a:solidFill>
+                      <a:prstDash val="solid"/>
+                      <a:round/>
+                      <a:headEnd type="none" w="med" len="med"/>
+                      <a:tailEnd type="none" w="med" len="med"/>
+                    </a:lnR>
+                    <a:lnT w="9525" cap="flat" cmpd="sng" algn="ctr">
+                      <a:solidFill>
+                        <a:srgbClr val="E5E5E5"/>
+                      </a:solidFill>
+                      <a:prstDash val="solid"/>
+                      <a:round/>
+                      <a:headEnd type="none" w="med" len="med"/>
+                      <a:tailEnd type="none" w="med" len="med"/>
+                    </a:lnT>
+                    <a:lnB w="9525" cap="flat" cmpd="sng" algn="ctr">
+                      <a:solidFill>
+                        <a:srgbClr val="E5E5E5"/>
+                      </a:solidFill>
+                      <a:prstDash val="solid"/>
+                      <a:round/>
+                      <a:headEnd type="none" w="med" len="med"/>
+                      <a:tailEnd type="none" w="med" len="med"/>
+                    </a:lnB>
+                    <a:solidFill>
+                      <a:srgbClr val="FDECEC"/>
+                    </a:solidFill>
+                  </a:tcPr>
+                </a:tc>
+              </a:tr>
+              <a:tr h="512064">
+                <a:tc>
+                  <a:txBody>
+                    <a:bodyPr/>
+                    <a:lstStyle/>
+                    <a:p>
+                      <a:pPr algn="l" indent="0" marL="0">
+                        <a:buNone/>
+                      </a:pPr>
+                      <a:r>
+                        <a:rPr lang="en-US" sz="1100" b="1" dirty="0">
+                          <a:solidFill>
+                            <a:srgbClr val="1A1A1A"/>
+                          </a:solidFill>
+                        </a:rPr>
+                        <a:t>↔ Max VERSTAPPEN</a:t>
+                      </a:r>
+                      <a:endParaRPr lang="en-US" sz="1100" dirty="0"/>
+                    </a:p>
+                  </a:txBody>
+                  <a:tcPr marL="91440" marR="91440" marT="45720" marB="45720" anchor="ctr">
+                    <a:lnL w="9525" cap="flat" cmpd="sng" algn="ctr">
+                      <a:solidFill>
+                        <a:srgbClr val="E5E5E5"/>
+                      </a:solidFill>
+                      <a:prstDash val="solid"/>
+                      <a:round/>
+                      <a:headEnd type="none" w="med" len="med"/>
+                      <a:tailEnd type="none" w="med" len="med"/>
+                    </a:lnL>
+                    <a:lnR w="9525" cap="flat" cmpd="sng" algn="ctr">
+                      <a:solidFill>
+                        <a:srgbClr val="E5E5E5"/>
+                      </a:solidFill>
+                      <a:prstDash val="solid"/>
+                      <a:round/>
+                      <a:headEnd type="none" w="med" len="med"/>
+                      <a:tailEnd type="none" w="med" len="med"/>
+                    </a:lnR>
+                    <a:lnT w="9525" cap="flat" cmpd="sng" algn="ctr">
+                      <a:solidFill>
+                        <a:srgbClr val="E5E5E5"/>
+                      </a:solidFill>
+                      <a:prstDash val="solid"/>
+                      <a:round/>
+                      <a:headEnd type="none" w="med" len="med"/>
+                      <a:tailEnd type="none" w="med" len="med"/>
+                    </a:lnT>
+                    <a:lnB w="9525" cap="flat" cmpd="sng" algn="ctr">
+                      <a:solidFill>
+                        <a:srgbClr val="E5E5E5"/>
+                      </a:solidFill>
+                      <a:prstDash val="solid"/>
+                      <a:round/>
+                      <a:headEnd type="none" w="med" len="med"/>
+                      <a:tailEnd type="none" w="med" len="med"/>
+                    </a:lnB>
+                    <a:solidFill>
+                      <a:srgbClr val="F4F4F4"/>
+                    </a:solidFill>
+                  </a:tcPr>
+                </a:tc>
+                <a:tc>
+                  <a:txBody>
+                    <a:bodyPr/>
+                    <a:lstStyle/>
+                    <a:p>
+                      <a:pPr algn="l" indent="0" marL="0">
+                        <a:buNone/>
+                      </a:pPr>
+                      <a:r>
+                        <a:rPr lang="en-US" sz="1100" b="1" dirty="0">
+                          <a:solidFill>
+                            <a:srgbClr val="1A1A1A"/>
+                          </a:solidFill>
+                        </a:rPr>
+                        <a:t>Red Bull Racing</a:t>
+                      </a:r>
+                      <a:endParaRPr lang="en-US" sz="1100" dirty="0"/>
+                    </a:p>
+                  </a:txBody>
+                  <a:tcPr marL="91440" marR="91440" marT="45720" marB="45720" anchor="ctr">
+                    <a:lnL w="9525" cap="flat" cmpd="sng" algn="ctr">
+                      <a:solidFill>
+                        <a:srgbClr val="E5E5E5"/>
+                      </a:solidFill>
+                      <a:prstDash val="solid"/>
+                      <a:round/>
+                      <a:headEnd type="none" w="med" len="med"/>
+                      <a:tailEnd type="none" w="med" len="med"/>
+                    </a:lnL>
+                    <a:lnR w="9525" cap="flat" cmpd="sng" algn="ctr">
+                      <a:solidFill>
+                        <a:srgbClr val="E5E5E5"/>
+                      </a:solidFill>
+                      <a:prstDash val="solid"/>
+                      <a:round/>
+                      <a:headEnd type="none" w="med" len="med"/>
+                      <a:tailEnd type="none" w="med" len="med"/>
+                    </a:lnR>
+                    <a:lnT w="9525" cap="flat" cmpd="sng" algn="ctr">
+                      <a:solidFill>
+                        <a:srgbClr val="E5E5E5"/>
+                      </a:solidFill>
+                      <a:prstDash val="solid"/>
+                      <a:round/>
+                      <a:headEnd type="none" w="med" len="med"/>
+                      <a:tailEnd type="none" w="med" len="med"/>
+                    </a:lnT>
+                    <a:lnB w="9525" cap="flat" cmpd="sng" algn="ctr">
+                      <a:solidFill>
+                        <a:srgbClr val="E5E5E5"/>
+                      </a:solidFill>
+                      <a:prstDash val="solid"/>
+                      <a:round/>
+                      <a:headEnd type="none" w="med" len="med"/>
+                      <a:tailEnd type="none" w="med" len="med"/>
+                    </a:lnB>
+                    <a:solidFill>
+                      <a:srgbClr val="F4F4F4"/>
+                    </a:solidFill>
+                  </a:tcPr>
+                </a:tc>
+                <a:tc>
+                  <a:txBody>
+                    <a:bodyPr/>
+                    <a:lstStyle/>
+                    <a:p>
+                      <a:pPr algn="l" indent="0" marL="0">
+                        <a:buNone/>
+                      </a:pPr>
+                      <a:r>
+                        <a:rPr lang="en-US" sz="1100" b="1" dirty="0">
+                          <a:solidFill>
+                            <a:srgbClr val="1A1A1A"/>
+                          </a:solidFill>
+                        </a:rPr>
+                        <a:t>63.8%</a:t>
+                      </a:r>
+                      <a:endParaRPr lang="en-US" sz="1100" dirty="0"/>
+                    </a:p>
+                  </a:txBody>
+                  <a:tcPr marL="91440" marR="91440" marT="45720" marB="45720" anchor="ctr">
+                    <a:lnL w="9525" cap="flat" cmpd="sng" algn="ctr">
+                      <a:solidFill>
+                        <a:srgbClr val="E5E5E5"/>
+                      </a:solidFill>
+                      <a:prstDash val="solid"/>
+                      <a:round/>
+                      <a:headEnd type="none" w="med" len="med"/>
+                      <a:tailEnd type="none" w="med" len="med"/>
+                    </a:lnL>
+                    <a:lnR w="9525" cap="flat" cmpd="sng" algn="ctr">
+                      <a:solidFill>
+                        <a:srgbClr val="E5E5E5"/>
+                      </a:solidFill>
+                      <a:prstDash val="solid"/>
+                      <a:round/>
+                      <a:headEnd type="none" w="med" len="med"/>
+                      <a:tailEnd type="none" w="med" len="med"/>
+                    </a:lnR>
+                    <a:lnT w="9525" cap="flat" cmpd="sng" algn="ctr">
+                      <a:solidFill>
+                        <a:srgbClr val="E5E5E5"/>
+                      </a:solidFill>
+                      <a:prstDash val="solid"/>
+                      <a:round/>
+                      <a:headEnd type="none" w="med" len="med"/>
+                      <a:tailEnd type="none" w="med" len="med"/>
+                    </a:lnT>
+                    <a:lnB w="9525" cap="flat" cmpd="sng" algn="ctr">
+                      <a:solidFill>
+                        <a:srgbClr val="E5E5E5"/>
+                      </a:solidFill>
+                      <a:prstDash val="solid"/>
+                      <a:round/>
+                      <a:headEnd type="none" w="med" len="med"/>
+                      <a:tailEnd type="none" w="med" len="med"/>
+                    </a:lnB>
+                    <a:solidFill>
+                      <a:srgbClr val="F4F4F4"/>
+                    </a:solidFill>
+                  </a:tcPr>
+                </a:tc>
+                <a:tc>
+                  <a:txBody>
+                    <a:bodyPr/>
+                    <a:lstStyle/>
+                    <a:p>
+                      <a:pPr algn="l" indent="0" marL="0">
+                        <a:buNone/>
+                      </a:pPr>
+                      <a:r>
+                        <a:rPr lang="en-US" sz="1100" b="1" dirty="0">
+                          <a:solidFill>
+                            <a:srgbClr val="1A1A1A"/>
+                          </a:solidFill>
+                        </a:rPr>
+                        <a:t>99.9%</a:t>
+                      </a:r>
+                      <a:endParaRPr lang="en-US" sz="1100" dirty="0"/>
+                    </a:p>
+                  </a:txBody>
+                  <a:tcPr marL="91440" marR="91440" marT="45720" marB="45720" anchor="ctr">
+                    <a:lnL w="9525" cap="flat" cmpd="sng" algn="ctr">
+                      <a:solidFill>
+                        <a:srgbClr val="E5E5E5"/>
+                      </a:solidFill>
+                      <a:prstDash val="solid"/>
+                      <a:round/>
+                      <a:headEnd type="none" w="med" len="med"/>
+                      <a:tailEnd type="none" w="med" len="med"/>
+                    </a:lnL>
+                    <a:lnR w="9525" cap="flat" cmpd="sng" algn="ctr">
+                      <a:solidFill>
+                        <a:srgbClr val="E5E5E5"/>
+                      </a:solidFill>
+                      <a:prstDash val="solid"/>
+                      <a:round/>
+                      <a:headEnd type="none" w="med" len="med"/>
+                      <a:tailEnd type="none" w="med" len="med"/>
+                    </a:lnR>
+                    <a:lnT w="9525" cap="flat" cmpd="sng" algn="ctr">
+                      <a:solidFill>
+                        <a:srgbClr val="E5E5E5"/>
+                      </a:solidFill>
+                      <a:prstDash val="solid"/>
+                      <a:round/>
+                      <a:headEnd type="none" w="med" len="med"/>
+                      <a:tailEnd type="none" w="med" len="med"/>
+                    </a:lnT>
+                    <a:lnB w="9525" cap="flat" cmpd="sng" algn="ctr">
+                      <a:solidFill>
+                        <a:srgbClr val="E5E5E5"/>
+                      </a:solidFill>
+                      <a:prstDash val="solid"/>
+                      <a:round/>
+                      <a:headEnd type="none" w="med" len="med"/>
+                      <a:tailEnd type="none" w="med" len="med"/>
+                    </a:lnB>
+                    <a:solidFill>
+                      <a:srgbClr val="F4F4F4"/>
+                    </a:solidFill>
+                  </a:tcPr>
+                </a:tc>
+                <a:tc>
+                  <a:txBody>
+                    <a:bodyPr/>
+                    <a:lstStyle/>
+                    <a:p>
+                      <a:pPr algn="l" indent="0" marL="0">
+                        <a:buNone/>
+                      </a:pPr>
+                      <a:r>
+                        <a:rPr lang="en-US" sz="1100" b="1" dirty="0">
+                          <a:solidFill>
+                            <a:srgbClr val="1A1A1A"/>
+                          </a:solidFill>
+                        </a:rPr>
+                        <a:t>235.0</a:t>
+                      </a:r>
+                      <a:endParaRPr lang="en-US" sz="1100" dirty="0"/>
+                    </a:p>
+                  </a:txBody>
+                  <a:tcPr marL="91440" marR="91440" marT="45720" marB="45720" anchor="ctr">
+                    <a:lnL w="9525" cap="flat" cmpd="sng" algn="ctr">
+                      <a:solidFill>
+                        <a:srgbClr val="E5E5E5"/>
+                      </a:solidFill>
+                      <a:prstDash val="solid"/>
+                      <a:round/>
+                      <a:headEnd type="none" w="med" len="med"/>
+                      <a:tailEnd type="none" w="med" len="med"/>
+                    </a:lnL>
+                    <a:lnR w="9525" cap="flat" cmpd="sng" algn="ctr">
+                      <a:solidFill>
+                        <a:srgbClr val="E5E5E5"/>
+                      </a:solidFill>
+                      <a:prstDash val="solid"/>
+                      <a:round/>
+                      <a:headEnd type="none" w="med" len="med"/>
+                      <a:tailEnd type="none" w="med" len="med"/>
+                    </a:lnR>
+                    <a:lnT w="9525" cap="flat" cmpd="sng" algn="ctr">
+                      <a:solidFill>
+                        <a:srgbClr val="E5E5E5"/>
+                      </a:solidFill>
+                      <a:prstDash val="solid"/>
+                      <a:round/>
+                      <a:headEnd type="none" w="med" len="med"/>
+                      <a:tailEnd type="none" w="med" len="med"/>
+                    </a:lnT>
+                    <a:lnB w="9525" cap="flat" cmpd="sng" algn="ctr">
+                      <a:solidFill>
+                        <a:srgbClr val="E5E5E5"/>
+                      </a:solidFill>
+                      <a:prstDash val="solid"/>
+                      <a:round/>
+                      <a:headEnd type="none" w="med" len="med"/>
+                      <a:tailEnd type="none" w="med" len="med"/>
+                    </a:lnB>
+                    <a:solidFill>
+                      <a:srgbClr val="F4F4F4"/>
+                    </a:solidFill>
+                  </a:tcPr>
+                </a:tc>
+                <a:tc>
+                  <a:txBody>
+                    <a:bodyPr/>
+                    <a:lstStyle/>
+                    <a:p>
+                      <a:pPr algn="l" indent="0" marL="0">
+                        <a:buNone/>
+                      </a:pPr>
+                      <a:r>
+                        <a:rPr lang="en-US" sz="1100" b="1" dirty="0">
+                          <a:solidFill>
+                            <a:srgbClr val="1A1A1A"/>
+                          </a:solidFill>
+                        </a:rPr>
+                        <a:t>4.0</a:t>
+                      </a:r>
+                      <a:endParaRPr lang="en-US" sz="1100" dirty="0"/>
+                    </a:p>
+                  </a:txBody>
+                  <a:tcPr marL="91440" marR="91440" marT="45720" marB="45720" anchor="ctr">
+                    <a:lnL w="9525" cap="flat" cmpd="sng" algn="ctr">
+                      <a:solidFill>
+                        <a:srgbClr val="E5E5E5"/>
+                      </a:solidFill>
+                      <a:prstDash val="solid"/>
+                      <a:round/>
+                      <a:headEnd type="none" w="med" len="med"/>
+                      <a:tailEnd type="none" w="med" len="med"/>
+                    </a:lnL>
+                    <a:lnR w="9525" cap="flat" cmpd="sng" algn="ctr">
+                      <a:solidFill>
+                        <a:srgbClr val="E5E5E5"/>
+                      </a:solidFill>
+                      <a:prstDash val="solid"/>
+                      <a:round/>
+                      <a:headEnd type="none" w="med" len="med"/>
+                      <a:tailEnd type="none" w="med" len="med"/>
+                    </a:lnR>
+                    <a:lnT w="9525" cap="flat" cmpd="sng" algn="ctr">
+                      <a:solidFill>
+                        <a:srgbClr val="E5E5E5"/>
+                      </a:solidFill>
+                      <a:prstDash val="solid"/>
+                      <a:round/>
+                      <a:headEnd type="none" w="med" len="med"/>
+                      <a:tailEnd type="none" w="med" len="med"/>
+                    </a:lnT>
+                    <a:lnB w="9525" cap="flat" cmpd="sng" algn="ctr">
+                      <a:solidFill>
+                        <a:srgbClr val="E5E5E5"/>
+                      </a:solidFill>
+                      <a:prstDash val="solid"/>
+                      <a:round/>
+                      <a:headEnd type="none" w="med" len="med"/>
+                      <a:tailEnd type="none" w="med" len="med"/>
+                    </a:lnB>
+                    <a:solidFill>
+                      <a:srgbClr val="F4F4F4"/>
+                    </a:solidFill>
+                  </a:tcPr>
+                </a:tc>
+                <a:tc>
+                  <a:txBody>
+                    <a:bodyPr/>
+                    <a:lstStyle/>
+                    <a:p>
+                      <a:pPr algn="l" indent="0" marL="0">
+                        <a:buNone/>
+                      </a:pPr>
+                      <a:r>
+                        <a:rPr lang="en-US" sz="1100" b="1" dirty="0">
+                          <a:solidFill>
+                            <a:srgbClr val="1A1A1A"/>
+                          </a:solidFill>
+                        </a:rPr>
+                        <a:t>100%</a:t>
+                      </a:r>
+                      <a:endParaRPr lang="en-US" sz="1100" dirty="0"/>
+                    </a:p>
+                  </a:txBody>
+                  <a:tcPr marL="91440" marR="91440" marT="45720" marB="45720" anchor="ctr">
+                    <a:lnL w="9525" cap="flat" cmpd="sng" algn="ctr">
+                      <a:solidFill>
+                        <a:srgbClr val="E5E5E5"/>
+                      </a:solidFill>
+                      <a:prstDash val="solid"/>
+                      <a:round/>
+                      <a:headEnd type="none" w="med" len="med"/>
+                      <a:tailEnd type="none" w="med" len="med"/>
+                    </a:lnL>
+                    <a:lnR w="9525" cap="flat" cmpd="sng" algn="ctr">
+                      <a:solidFill>
+                        <a:srgbClr val="E5E5E5"/>
+                      </a:solidFill>
+                      <a:prstDash val="solid"/>
+                      <a:round/>
+                      <a:headEnd type="none" w="med" len="med"/>
+                      <a:tailEnd type="none" w="med" len="med"/>
+                    </a:lnR>
+                    <a:lnT w="9525" cap="flat" cmpd="sng" algn="ctr">
+                      <a:solidFill>
+                        <a:srgbClr val="E5E5E5"/>
+                      </a:solidFill>
+                      <a:prstDash val="solid"/>
+                      <a:round/>
+                      <a:headEnd type="none" w="med" len="med"/>
+                      <a:tailEnd type="none" w="med" len="med"/>
+                    </a:lnT>
+                    <a:lnB w="9525" cap="flat" cmpd="sng" algn="ctr">
+                      <a:solidFill>
+                        <a:srgbClr val="E5E5E5"/>
+                      </a:solidFill>
+                      <a:prstDash val="solid"/>
+                      <a:round/>
+                      <a:headEnd type="none" w="med" len="med"/>
+                      <a:tailEnd type="none" w="med" len="med"/>
+                    </a:lnB>
+                    <a:solidFill>
+                      <a:srgbClr val="F4F4F4"/>
+                    </a:solidFill>
+                  </a:tcPr>
+                </a:tc>
+                <a:tc>
+                  <a:txBody>
+                    <a:bodyPr/>
+                    <a:lstStyle/>
+                    <a:p>
+                      <a:pPr algn="l" indent="0" marL="0">
+                        <a:buNone/>
+                      </a:pPr>
+                      <a:r>
+                        <a:rPr lang="en-US" sz="1100" b="1" dirty="0">
+                          <a:solidFill>
+                            <a:srgbClr val="E10600"/>
+                          </a:solidFill>
+                        </a:rPr>
+                        <a:t>100%</a:t>
+                      </a:r>
+                      <a:endParaRPr lang="en-US" sz="1100" dirty="0"/>
+                    </a:p>
+                  </a:txBody>
+                  <a:tcPr marL="91440" marR="91440" marT="45720" marB="45720" anchor="ctr">
+                    <a:lnL w="9525" cap="flat" cmpd="sng" algn="ctr">
+                      <a:solidFill>
+                        <a:srgbClr val="E5E5E5"/>
+                      </a:solidFill>
+                      <a:prstDash val="solid"/>
+                      <a:round/>
+                      <a:headEnd type="none" w="med" len="med"/>
+                      <a:tailEnd type="none" w="med" len="med"/>
+                    </a:lnL>
+                    <a:lnR w="9525" cap="flat" cmpd="sng" algn="ctr">
+                      <a:solidFill>
+                        <a:srgbClr val="E5E5E5"/>
+                      </a:solidFill>
+                      <a:prstDash val="solid"/>
+                      <a:round/>
+                      <a:headEnd type="none" w="med" len="med"/>
+                      <a:tailEnd type="none" w="med" len="med"/>
+                    </a:lnR>
+                    <a:lnT w="9525" cap="flat" cmpd="sng" algn="ctr">
+                      <a:solidFill>
+                        <a:srgbClr val="E5E5E5"/>
+                      </a:solidFill>
+                      <a:prstDash val="solid"/>
+                      <a:round/>
+                      <a:headEnd type="none" w="med" len="med"/>
+                      <a:tailEnd type="none" w="med" len="med"/>
+                    </a:lnT>
+                    <a:lnB w="9525" cap="flat" cmpd="sng" algn="ctr">
+                      <a:solidFill>
+                        <a:srgbClr val="E5E5E5"/>
+                      </a:solidFill>
+                      <a:prstDash val="solid"/>
+                      <a:round/>
+                      <a:headEnd type="none" w="med" len="med"/>
+                      <a:tailEnd type="none" w="med" len="med"/>
+                    </a:lnB>
+                    <a:solidFill>
+                      <a:srgbClr val="F4F4F4"/>
+                    </a:solidFill>
+                  </a:tcPr>
+                </a:tc>
+              </a:tr>
+              <a:tr h="512064">
+                <a:tc>
+                  <a:txBody>
+                    <a:bodyPr/>
+                    <a:lstStyle/>
+                    <a:p>
+                      <a:pPr algn="l" indent="0" marL="0">
+                        <a:buNone/>
+                      </a:pPr>
+                      <a:r>
+                        <a:rPr lang="en-US" sz="1100" b="1" dirty="0">
+                          <a:solidFill>
+                            <a:srgbClr val="1A1A1A"/>
+                          </a:solidFill>
+                        </a:rPr>
+                        <a:t>↔ Charles LECLERC</a:t>
+                      </a:r>
+                      <a:endParaRPr lang="en-US" sz="1100" dirty="0"/>
+                    </a:p>
+                  </a:txBody>
+                  <a:tcPr marL="91440" marR="91440" marT="45720" marB="45720" anchor="ctr">
+                    <a:lnL w="9525" cap="flat" cmpd="sng" algn="ctr">
+                      <a:solidFill>
+                        <a:srgbClr val="E5E5E5"/>
+                      </a:solidFill>
+                      <a:prstDash val="solid"/>
+                      <a:round/>
+                      <a:headEnd type="none" w="med" len="med"/>
+                      <a:tailEnd type="none" w="med" len="med"/>
+                    </a:lnL>
+                    <a:lnR w="9525" cap="flat" cmpd="sng" algn="ctr">
+                      <a:solidFill>
+                        <a:srgbClr val="E5E5E5"/>
+                      </a:solidFill>
+                      <a:prstDash val="solid"/>
+                      <a:round/>
+                      <a:headEnd type="none" w="med" len="med"/>
+                      <a:tailEnd type="none" w="med" len="med"/>
+                    </a:lnR>
+                    <a:lnT w="9525" cap="flat" cmpd="sng" algn="ctr">
+                      <a:solidFill>
+                        <a:srgbClr val="E5E5E5"/>
+                      </a:solidFill>
+                      <a:prstDash val="solid"/>
+                      <a:round/>
+                      <a:headEnd type="none" w="med" len="med"/>
+                      <a:tailEnd type="none" w="med" len="med"/>
+                    </a:lnT>
+                    <a:lnB w="9525" cap="flat" cmpd="sng" algn="ctr">
+                      <a:solidFill>
+                        <a:srgbClr val="E5E5E5"/>
+                      </a:solidFill>
+                      <a:prstDash val="solid"/>
+                      <a:round/>
+                      <a:headEnd type="none" w="med" len="med"/>
+                      <a:tailEnd type="none" w="med" len="med"/>
+                    </a:lnB>
+                    <a:solidFill>
+                      <a:srgbClr val="FFFFFF"/>
+                    </a:solidFill>
+                  </a:tcPr>
+                </a:tc>
+                <a:tc>
+                  <a:txBody>
+                    <a:bodyPr/>
+                    <a:lstStyle/>
+                    <a:p>
+                      <a:pPr algn="l" indent="0" marL="0">
+                        <a:buNone/>
+                      </a:pPr>
+                      <a:r>
+                        <a:rPr lang="en-US" sz="1100" b="1" dirty="0">
+                          <a:solidFill>
+                            <a:srgbClr val="1A1A1A"/>
+                          </a:solidFill>
+                        </a:rPr>
+                        <a:t>Ferrari</a:t>
+                      </a:r>
+                      <a:endParaRPr lang="en-US" sz="1100" dirty="0"/>
+                    </a:p>
+                  </a:txBody>
+                  <a:tcPr marL="91440" marR="91440" marT="45720" marB="45720" anchor="ctr">
+                    <a:lnL w="9525" cap="flat" cmpd="sng" algn="ctr">
+                      <a:solidFill>
+                        <a:srgbClr val="E5E5E5"/>
+                      </a:solidFill>
+                      <a:prstDash val="solid"/>
+                      <a:round/>
+                      <a:headEnd type="none" w="med" len="med"/>
+                      <a:tailEnd type="none" w="med" len="med"/>
+                    </a:lnL>
+                    <a:lnR w="9525" cap="flat" cmpd="sng" algn="ctr">
+                      <a:solidFill>
+                        <a:srgbClr val="E5E5E5"/>
+                      </a:solidFill>
+                      <a:prstDash val="solid"/>
+                      <a:round/>
+                      <a:headEnd type="none" w="med" len="med"/>
+                      <a:tailEnd type="none" w="med" len="med"/>
+                    </a:lnR>
+                    <a:lnT w="9525" cap="flat" cmpd="sng" algn="ctr">
+                      <a:solidFill>
+                        <a:srgbClr val="E5E5E5"/>
+                      </a:solidFill>
+                      <a:prstDash val="solid"/>
+                      <a:round/>
+                      <a:headEnd type="none" w="med" len="med"/>
+                      <a:tailEnd type="none" w="med" len="med"/>
+                    </a:lnT>
+                    <a:lnB w="9525" cap="flat" cmpd="sng" algn="ctr">
+                      <a:solidFill>
+                        <a:srgbClr val="E5E5E5"/>
+                      </a:solidFill>
+                      <a:prstDash val="solid"/>
+                      <a:round/>
+                      <a:headEnd type="none" w="med" len="med"/>
+                      <a:tailEnd type="none" w="med" len="med"/>
+                    </a:lnB>
+                    <a:solidFill>
+                      <a:srgbClr val="FFFFFF"/>
+                    </a:solidFill>
+                  </a:tcPr>
+                </a:tc>
+                <a:tc>
+                  <a:txBody>
+                    <a:bodyPr/>
+                    <a:lstStyle/>
+                    <a:p>
+                      <a:pPr algn="l" indent="0" marL="0">
+                        <a:buNone/>
+                      </a:pPr>
+                      <a:r>
+                        <a:rPr lang="en-US" sz="1100" b="1" dirty="0">
+                          <a:solidFill>
+                            <a:srgbClr val="1A1A1A"/>
+                          </a:solidFill>
+                        </a:rPr>
+                        <a:t>3.1%</a:t>
+                      </a:r>
+                      <a:endParaRPr lang="en-US" sz="1100" dirty="0"/>
+                    </a:p>
+                  </a:txBody>
+                  <a:tcPr marL="91440" marR="91440" marT="45720" marB="45720" anchor="ctr">
+                    <a:lnL w="9525" cap="flat" cmpd="sng" algn="ctr">
+                      <a:solidFill>
+                        <a:srgbClr val="E5E5E5"/>
+                      </a:solidFill>
+                      <a:prstDash val="solid"/>
+                      <a:round/>
+                      <a:headEnd type="none" w="med" len="med"/>
+                      <a:tailEnd type="none" w="med" len="med"/>
+                    </a:lnL>
+                    <a:lnR w="9525" cap="flat" cmpd="sng" algn="ctr">
+                      <a:solidFill>
+                        <a:srgbClr val="E5E5E5"/>
+                      </a:solidFill>
+                      <a:prstDash val="solid"/>
+                      <a:round/>
+                      <a:headEnd type="none" w="med" len="med"/>
+                      <a:tailEnd type="none" w="med" len="med"/>
+                    </a:lnR>
+                    <a:lnT w="9525" cap="flat" cmpd="sng" algn="ctr">
+                      <a:solidFill>
+                        <a:srgbClr val="E5E5E5"/>
+                      </a:solidFill>
+                      <a:prstDash val="solid"/>
+                      <a:round/>
+                      <a:headEnd type="none" w="med" len="med"/>
+                      <a:tailEnd type="none" w="med" len="med"/>
+                    </a:lnT>
+                    <a:lnB w="9525" cap="flat" cmpd="sng" algn="ctr">
+                      <a:solidFill>
+                        <a:srgbClr val="E5E5E5"/>
+                      </a:solidFill>
+                      <a:prstDash val="solid"/>
+                      <a:round/>
+                      <a:headEnd type="none" w="med" len="med"/>
+                      <a:tailEnd type="none" w="med" len="med"/>
+                    </a:lnB>
+                    <a:solidFill>
+                      <a:srgbClr val="FFFFFF"/>
+                    </a:solidFill>
+                  </a:tcPr>
+                </a:tc>
+                <a:tc>
+                  <a:txBody>
+                    <a:bodyPr/>
+                    <a:lstStyle/>
+                    <a:p>
+                      <a:pPr algn="l" indent="0" marL="0">
+                        <a:buNone/>
+                      </a:pPr>
+                      <a:r>
+                        <a:rPr lang="en-US" sz="1100" b="1" dirty="0">
+                          <a:solidFill>
+                            <a:srgbClr val="1A1A1A"/>
+                          </a:solidFill>
+                        </a:rPr>
+                        <a:t>49.4%</a:t>
+                      </a:r>
+                      <a:endParaRPr lang="en-US" sz="1100" dirty="0"/>
+                    </a:p>
+                  </a:txBody>
+                  <a:tcPr marL="91440" marR="91440" marT="45720" marB="45720" anchor="ctr">
+                    <a:lnL w="9525" cap="flat" cmpd="sng" algn="ctr">
+                      <a:solidFill>
+                        <a:srgbClr val="E5E5E5"/>
+                      </a:solidFill>
+                      <a:prstDash val="solid"/>
+                      <a:round/>
+                      <a:headEnd type="none" w="med" len="med"/>
+                      <a:tailEnd type="none" w="med" len="med"/>
+                    </a:lnL>
+                    <a:lnR w="9525" cap="flat" cmpd="sng" algn="ctr">
+                      <a:solidFill>
+                        <a:srgbClr val="E5E5E5"/>
+                      </a:solidFill>
+                      <a:prstDash val="solid"/>
+                      <a:round/>
+                      <a:headEnd type="none" w="med" len="med"/>
+                      <a:tailEnd type="none" w="med" len="med"/>
+                    </a:lnR>
+                    <a:lnT w="9525" cap="flat" cmpd="sng" algn="ctr">
+                      <a:solidFill>
+                        <a:srgbClr val="E5E5E5"/>
+                      </a:solidFill>
+                      <a:prstDash val="solid"/>
+                      <a:round/>
+                      <a:headEnd type="none" w="med" len="med"/>
+                      <a:tailEnd type="none" w="med" len="med"/>
+                    </a:lnT>
+                    <a:lnB w="9525" cap="flat" cmpd="sng" algn="ctr">
+                      <a:solidFill>
+                        <a:srgbClr val="E5E5E5"/>
+                      </a:solidFill>
+                      <a:prstDash val="solid"/>
+                      <a:round/>
+                      <a:headEnd type="none" w="med" len="med"/>
+                      <a:tailEnd type="none" w="med" len="med"/>
+                    </a:lnB>
+                    <a:solidFill>
+                      <a:srgbClr val="FFFFFF"/>
+                    </a:solidFill>
+                  </a:tcPr>
+                </a:tc>
+                <a:tc>
+                  <a:txBody>
+                    <a:bodyPr/>
+                    <a:lstStyle/>
+                    <a:p>
+                      <a:pPr algn="l" indent="0" marL="0">
+                        <a:buNone/>
+                      </a:pPr>
+                      <a:r>
+                        <a:rPr lang="en-US" sz="1100" b="1" dirty="0">
+                          <a:solidFill>
+                            <a:srgbClr val="1A1A1A"/>
+                          </a:solidFill>
+                        </a:rPr>
+                        <a:t>107.6</a:t>
+                      </a:r>
+                      <a:endParaRPr lang="en-US" sz="1100" dirty="0"/>
+                    </a:p>
+                  </a:txBody>
+                  <a:tcPr marL="91440" marR="91440" marT="45720" marB="45720" anchor="ctr">
+                    <a:lnL w="9525" cap="flat" cmpd="sng" algn="ctr">
+                      <a:solidFill>
+                        <a:srgbClr val="E5E5E5"/>
+                      </a:solidFill>
+                      <a:prstDash val="solid"/>
+                      <a:round/>
+                      <a:headEnd type="none" w="med" len="med"/>
+                      <a:tailEnd type="none" w="med" len="med"/>
+                    </a:lnL>
+                    <a:lnR w="9525" cap="flat" cmpd="sng" algn="ctr">
+                      <a:solidFill>
+                        <a:srgbClr val="E5E5E5"/>
+                      </a:solidFill>
+                      <a:prstDash val="solid"/>
+                      <a:round/>
+                      <a:headEnd type="none" w="med" len="med"/>
+                      <a:tailEnd type="none" w="med" len="med"/>
+                    </a:lnR>
+                    <a:lnT w="9525" cap="flat" cmpd="sng" algn="ctr">
+                      <a:solidFill>
+                        <a:srgbClr val="E5E5E5"/>
+                      </a:solidFill>
+                      <a:prstDash val="solid"/>
+                      <a:round/>
+                      <a:headEnd type="none" w="med" len="med"/>
+                      <a:tailEnd type="none" w="med" len="med"/>
+                    </a:lnT>
+                    <a:lnB w="9525" cap="flat" cmpd="sng" algn="ctr">
+                      <a:solidFill>
+                        <a:srgbClr val="E5E5E5"/>
+                      </a:solidFill>
+                      <a:prstDash val="solid"/>
+                      <a:round/>
+                      <a:headEnd type="none" w="med" len="med"/>
+                      <a:tailEnd type="none" w="med" len="med"/>
+                    </a:lnB>
+                    <a:solidFill>
+                      <a:srgbClr val="FFFFFF"/>
+                    </a:solidFill>
+                  </a:tcPr>
+                </a:tc>
+                <a:tc>
+                  <a:txBody>
+                    <a:bodyPr/>
+                    <a:lstStyle/>
+                    <a:p>
+                      <a:pPr algn="l" indent="0" marL="0">
+                        <a:buNone/>
+                      </a:pPr>
+                      <a:r>
+                        <a:rPr lang="en-US" sz="1100" b="1" dirty="0">
+                          <a:solidFill>
+                            <a:srgbClr val="1A1A1A"/>
+                          </a:solidFill>
+                        </a:rPr>
+                        <a:t>6.3</a:t>
+                      </a:r>
+                      <a:endParaRPr lang="en-US" sz="1100" dirty="0"/>
+                    </a:p>
+                  </a:txBody>
+                  <a:tcPr marL="91440" marR="91440" marT="45720" marB="45720" anchor="ctr">
+                    <a:lnL w="9525" cap="flat" cmpd="sng" algn="ctr">
+                      <a:solidFill>
+                        <a:srgbClr val="E5E5E5"/>
+                      </a:solidFill>
+                      <a:prstDash val="solid"/>
+                      <a:round/>
+                      <a:headEnd type="none" w="med" len="med"/>
+                      <a:tailEnd type="none" w="med" len="med"/>
+                    </a:lnL>
+                    <a:lnR w="9525" cap="flat" cmpd="sng" algn="ctr">
+                      <a:solidFill>
+                        <a:srgbClr val="E5E5E5"/>
+                      </a:solidFill>
+                      <a:prstDash val="solid"/>
+                      <a:round/>
+                      <a:headEnd type="none" w="med" len="med"/>
+                      <a:tailEnd type="none" w="med" len="med"/>
+                    </a:lnR>
+                    <a:lnT w="9525" cap="flat" cmpd="sng" algn="ctr">
+                      <a:solidFill>
+                        <a:srgbClr val="E5E5E5"/>
+                      </a:solidFill>
+                      <a:prstDash val="solid"/>
+                      <a:round/>
+                      <a:headEnd type="none" w="med" len="med"/>
+                      <a:tailEnd type="none" w="med" len="med"/>
+                    </a:lnT>
+                    <a:lnB w="9525" cap="flat" cmpd="sng" algn="ctr">
+                      <a:solidFill>
+                        <a:srgbClr val="E5E5E5"/>
+                      </a:solidFill>
+                      <a:prstDash val="solid"/>
+                      <a:round/>
+                      <a:headEnd type="none" w="med" len="med"/>
+                      <a:tailEnd type="none" w="med" len="med"/>
+                    </a:lnB>
+                    <a:solidFill>
+                      <a:srgbClr val="FFFFFF"/>
+                    </a:solidFill>
+                  </a:tcPr>
+                </a:tc>
+                <a:tc>
+                  <a:txBody>
+                    <a:bodyPr/>
+                    <a:lstStyle/>
+                    <a:p>
+                      <a:pPr algn="l" indent="0" marL="0">
+                        <a:buNone/>
+                      </a:pPr>
+                      <a:r>
+                        <a:rPr lang="en-US" sz="1100" b="1" dirty="0">
+                          <a:solidFill>
+                            <a:srgbClr val="1A1A1A"/>
+                          </a:solidFill>
+                        </a:rPr>
+                        <a:t>65.0%</a:t>
+                      </a:r>
+                      <a:endParaRPr lang="en-US" sz="1100" dirty="0"/>
+                    </a:p>
+                  </a:txBody>
+                  <a:tcPr marL="91440" marR="91440" marT="45720" marB="45720" anchor="ctr">
+                    <a:lnL w="9525" cap="flat" cmpd="sng" algn="ctr">
+                      <a:solidFill>
+                        <a:srgbClr val="E5E5E5"/>
+                      </a:solidFill>
+                      <a:prstDash val="solid"/>
+                      <a:round/>
+                      <a:headEnd type="none" w="med" len="med"/>
+                      <a:tailEnd type="none" w="med" len="med"/>
+                    </a:lnL>
+                    <a:lnR w="9525" cap="flat" cmpd="sng" algn="ctr">
+                      <a:solidFill>
+                        <a:srgbClr val="E5E5E5"/>
+                      </a:solidFill>
+                      <a:prstDash val="solid"/>
+                      <a:round/>
+                      <a:headEnd type="none" w="med" len="med"/>
+                      <a:tailEnd type="none" w="med" len="med"/>
+                    </a:lnR>
+                    <a:lnT w="9525" cap="flat" cmpd="sng" algn="ctr">
+                      <a:solidFill>
+                        <a:srgbClr val="E5E5E5"/>
+                      </a:solidFill>
+                      <a:prstDash val="solid"/>
+                      <a:round/>
+                      <a:headEnd type="none" w="med" len="med"/>
+                      <a:tailEnd type="none" w="med" len="med"/>
+                    </a:lnT>
+                    <a:lnB w="9525" cap="flat" cmpd="sng" algn="ctr">
+                      <a:solidFill>
+                        <a:srgbClr val="E5E5E5"/>
+                      </a:solidFill>
+                      <a:prstDash val="solid"/>
+                      <a:round/>
+                      <a:headEnd type="none" w="med" len="med"/>
+                      <a:tailEnd type="none" w="med" len="med"/>
+                    </a:lnB>
+                    <a:solidFill>
+                      <a:srgbClr val="FFFFFF"/>
+                    </a:solidFill>
+                  </a:tcPr>
+                </a:tc>
+                <a:tc>
+                  <a:txBody>
+                    <a:bodyPr/>
+                    <a:lstStyle/>
+                    <a:p>
+                      <a:pPr algn="l" indent="0" marL="0">
+                        <a:buNone/>
+                      </a:pPr>
+                      <a:r>
+                        <a:rPr lang="en-US" sz="1100" b="1" dirty="0">
+                          <a:solidFill>
+                            <a:srgbClr val="E10600"/>
+                          </a:solidFill>
+                        </a:rPr>
+                        <a:t>47.8%</a:t>
+                      </a:r>
+                      <a:endParaRPr lang="en-US" sz="1100" dirty="0"/>
+                    </a:p>
+                  </a:txBody>
+                  <a:tcPr marL="91440" marR="91440" marT="45720" marB="45720" anchor="ctr">
+                    <a:lnL w="9525" cap="flat" cmpd="sng" algn="ctr">
+                      <a:solidFill>
+                        <a:srgbClr val="E5E5E5"/>
+                      </a:solidFill>
+                      <a:prstDash val="solid"/>
+                      <a:round/>
+                      <a:headEnd type="none" w="med" len="med"/>
+                      <a:tailEnd type="none" w="med" len="med"/>
+                    </a:lnL>
+                    <a:lnR w="9525" cap="flat" cmpd="sng" algn="ctr">
+                      <a:solidFill>
+                        <a:srgbClr val="E5E5E5"/>
+                      </a:solidFill>
+                      <a:prstDash val="solid"/>
+                      <a:round/>
+                      <a:headEnd type="none" w="med" len="med"/>
+                      <a:tailEnd type="none" w="med" len="med"/>
+                    </a:lnR>
+                    <a:lnT w="9525" cap="flat" cmpd="sng" algn="ctr">
+                      <a:solidFill>
+                        <a:srgbClr val="E5E5E5"/>
+                      </a:solidFill>
+                      <a:prstDash val="solid"/>
+                      <a:round/>
+                      <a:headEnd type="none" w="med" len="med"/>
+                      <a:tailEnd type="none" w="med" len="med"/>
+                    </a:lnT>
+                    <a:lnB w="9525" cap="flat" cmpd="sng" algn="ctr">
+                      <a:solidFill>
+                        <a:srgbClr val="E5E5E5"/>
+                      </a:solidFill>
+                      <a:prstDash val="solid"/>
+                      <a:round/>
+                      <a:headEnd type="none" w="med" len="med"/>
+                      <a:tailEnd type="none" w="med" len="med"/>
+                    </a:lnB>
+                    <a:solidFill>
+                      <a:srgbClr val="FFFFFF"/>
+                    </a:solidFill>
+                  </a:tcPr>
+                </a:tc>
+              </a:tr>
+              <a:tr h="512064">
+                <a:tc>
+                  <a:txBody>
+                    <a:bodyPr/>
+                    <a:lstStyle/>
+                    <a:p>
+                      <a:pPr algn="l" indent="0" marL="0">
+                        <a:buNone/>
+                      </a:pPr>
+                      <a:r>
+                        <a:rPr lang="en-US" sz="1100" b="1" dirty="0">
+                          <a:solidFill>
+                            <a:srgbClr val="1A1A1A"/>
+                          </a:solidFill>
+                        </a:rPr>
+                        <a:t>↔ Carlos SAINZ</a:t>
+                      </a:r>
+                      <a:endParaRPr lang="en-US" sz="1100" dirty="0"/>
+                    </a:p>
+                  </a:txBody>
+                  <a:tcPr marL="91440" marR="91440" marT="45720" marB="45720" anchor="ctr">
+                    <a:lnL w="9525" cap="flat" cmpd="sng" algn="ctr">
+                      <a:solidFill>
+                        <a:srgbClr val="E5E5E5"/>
+                      </a:solidFill>
+                      <a:prstDash val="solid"/>
+                      <a:round/>
+                      <a:headEnd type="none" w="med" len="med"/>
+                      <a:tailEnd type="none" w="med" len="med"/>
+                    </a:lnL>
+                    <a:lnR w="9525" cap="flat" cmpd="sng" algn="ctr">
+                      <a:solidFill>
+                        <a:srgbClr val="E5E5E5"/>
+                      </a:solidFill>
+                      <a:prstDash val="solid"/>
+                      <a:round/>
+                      <a:headEnd type="none" w="med" len="med"/>
+                      <a:tailEnd type="none" w="med" len="med"/>
+                    </a:lnR>
+                    <a:lnT w="9525" cap="flat" cmpd="sng" algn="ctr">
+                      <a:solidFill>
+                        <a:srgbClr val="E5E5E5"/>
+                      </a:solidFill>
+                      <a:prstDash val="solid"/>
+                      <a:round/>
+                      <a:headEnd type="none" w="med" len="med"/>
+                      <a:tailEnd type="none" w="med" len="med"/>
+                    </a:lnT>
+                    <a:lnB w="9525" cap="flat" cmpd="sng" algn="ctr">
+                      <a:solidFill>
+                        <a:srgbClr val="E5E5E5"/>
+                      </a:solidFill>
+                      <a:prstDash val="solid"/>
+                      <a:round/>
+                      <a:headEnd type="none" w="med" len="med"/>
+                      <a:tailEnd type="none" w="med" len="med"/>
+                    </a:lnB>
+                    <a:solidFill>
+                      <a:srgbClr val="F4F4F4"/>
+                    </a:solidFill>
+                  </a:tcPr>
+                </a:tc>
+                <a:tc>
+                  <a:txBody>
+                    <a:bodyPr/>
+                    <a:lstStyle/>
+                    <a:p>
+                      <a:pPr algn="l" indent="0" marL="0">
+                        <a:buNone/>
+                      </a:pPr>
+                      <a:r>
+                        <a:rPr lang="en-US" sz="1100" dirty="0">
+                          <a:solidFill>
+                            <a:srgbClr val="1A1A1A"/>
+                          </a:solidFill>
+                        </a:rPr>
+                        <a:t>Williams</a:t>
+                      </a:r>
+                      <a:endParaRPr lang="en-US" sz="1100" dirty="0"/>
+                    </a:p>
+                  </a:txBody>
+                  <a:tcPr marL="91440" marR="91440" marT="45720" marB="45720" anchor="ctr">
+                    <a:lnL w="9525" cap="flat" cmpd="sng" algn="ctr">
+                      <a:solidFill>
+                        <a:srgbClr val="E5E5E5"/>
+                      </a:solidFill>
+                      <a:prstDash val="solid"/>
+                      <a:round/>
+                      <a:headEnd type="none" w="med" len="med"/>
+                      <a:tailEnd type="none" w="med" len="med"/>
+                    </a:lnL>
+                    <a:lnR w="9525" cap="flat" cmpd="sng" algn="ctr">
+                      <a:solidFill>
+                        <a:srgbClr val="E5E5E5"/>
+                      </a:solidFill>
+                      <a:prstDash val="solid"/>
+                      <a:round/>
+                      <a:headEnd type="none" w="med" len="med"/>
+                      <a:tailEnd type="none" w="med" len="med"/>
+                    </a:lnR>
+                    <a:lnT w="9525" cap="flat" cmpd="sng" algn="ctr">
+                      <a:solidFill>
+                        <a:srgbClr val="E5E5E5"/>
+                      </a:solidFill>
+                      <a:prstDash val="solid"/>
+                      <a:round/>
+                      <a:headEnd type="none" w="med" len="med"/>
+                      <a:tailEnd type="none" w="med" len="med"/>
+                    </a:lnT>
+                    <a:lnB w="9525" cap="flat" cmpd="sng" algn="ctr">
+                      <a:solidFill>
+                        <a:srgbClr val="E5E5E5"/>
+                      </a:solidFill>
+                      <a:prstDash val="solid"/>
+                      <a:round/>
+                      <a:headEnd type="none" w="med" len="med"/>
+                      <a:tailEnd type="none" w="med" len="med"/>
+                    </a:lnB>
+                    <a:solidFill>
+                      <a:srgbClr val="F4F4F4"/>
+                    </a:solidFill>
+                  </a:tcPr>
+                </a:tc>
+                <a:tc>
+                  <a:txBody>
+                    <a:bodyPr/>
+                    <a:lstStyle/>
+                    <a:p>
+                      <a:pPr algn="l" indent="0" marL="0">
+                        <a:buNone/>
+                      </a:pPr>
+                      <a:r>
+                        <a:rPr lang="en-US" sz="1100" dirty="0">
+                          <a:solidFill>
+                            <a:srgbClr val="1A1A1A"/>
+                          </a:solidFill>
+                        </a:rPr>
+                        <a:t>1.4%</a:t>
+                      </a:r>
+                      <a:endParaRPr lang="en-US" sz="1100" dirty="0"/>
+                    </a:p>
+                  </a:txBody>
+                  <a:tcPr marL="91440" marR="91440" marT="45720" marB="45720" anchor="ctr">
+                    <a:lnL w="9525" cap="flat" cmpd="sng" algn="ctr">
+                      <a:solidFill>
+                        <a:srgbClr val="E5E5E5"/>
+                      </a:solidFill>
+                      <a:prstDash val="solid"/>
+                      <a:round/>
+                      <a:headEnd type="none" w="med" len="med"/>
+                      <a:tailEnd type="none" w="med" len="med"/>
+                    </a:lnL>
+                    <a:lnR w="9525" cap="flat" cmpd="sng" algn="ctr">
+                      <a:solidFill>
+                        <a:srgbClr val="E5E5E5"/>
+                      </a:solidFill>
+                      <a:prstDash val="solid"/>
+                      <a:round/>
+                      <a:headEnd type="none" w="med" len="med"/>
+                      <a:tailEnd type="none" w="med" len="med"/>
+                    </a:lnR>
+                    <a:lnT w="9525" cap="flat" cmpd="sng" algn="ctr">
+                      <a:solidFill>
+                        <a:srgbClr val="E5E5E5"/>
+                      </a:solidFill>
+                      <a:prstDash val="solid"/>
+                      <a:round/>
+                      <a:headEnd type="none" w="med" len="med"/>
+                      <a:tailEnd type="none" w="med" len="med"/>
+                    </a:lnT>
+                    <a:lnB w="9525" cap="flat" cmpd="sng" algn="ctr">
+                      <a:solidFill>
+                        <a:srgbClr val="E5E5E5"/>
+                      </a:solidFill>
+                      <a:prstDash val="solid"/>
+                      <a:round/>
+                      <a:headEnd type="none" w="med" len="med"/>
+                      <a:tailEnd type="none" w="med" len="med"/>
+                    </a:lnB>
+                    <a:solidFill>
+                      <a:srgbClr val="F4F4F4"/>
+                    </a:solidFill>
+                  </a:tcPr>
+                </a:tc>
+                <a:tc>
+                  <a:txBody>
+                    <a:bodyPr/>
+                    <a:lstStyle/>
+                    <a:p>
+                      <a:pPr algn="l" indent="0" marL="0">
+                        <a:buNone/>
+                      </a:pPr>
+                      <a:r>
+                        <a:rPr lang="en-US" sz="1100" dirty="0">
+                          <a:solidFill>
+                            <a:srgbClr val="1A1A1A"/>
+                          </a:solidFill>
+                        </a:rPr>
+                        <a:t>32.5%</a:t>
+                      </a:r>
+                      <a:endParaRPr lang="en-US" sz="1100" dirty="0"/>
+                    </a:p>
+                  </a:txBody>
+                  <a:tcPr marL="91440" marR="91440" marT="45720" marB="45720" anchor="ctr">
+                    <a:lnL w="9525" cap="flat" cmpd="sng" algn="ctr">
+                      <a:solidFill>
+                        <a:srgbClr val="E5E5E5"/>
+                      </a:solidFill>
+                      <a:prstDash val="solid"/>
+                      <a:round/>
+                      <a:headEnd type="none" w="med" len="med"/>
+                      <a:tailEnd type="none" w="med" len="med"/>
+                    </a:lnL>
+                    <a:lnR w="9525" cap="flat" cmpd="sng" algn="ctr">
+                      <a:solidFill>
+                        <a:srgbClr val="E5E5E5"/>
+                      </a:solidFill>
+                      <a:prstDash val="solid"/>
+                      <a:round/>
+                      <a:headEnd type="none" w="med" len="med"/>
+                      <a:tailEnd type="none" w="med" len="med"/>
+                    </a:lnR>
+                    <a:lnT w="9525" cap="flat" cmpd="sng" algn="ctr">
+                      <a:solidFill>
+                        <a:srgbClr val="E5E5E5"/>
+                      </a:solidFill>
+                      <a:prstDash val="solid"/>
+                      <a:round/>
+                      <a:headEnd type="none" w="med" len="med"/>
+                      <a:tailEnd type="none" w="med" len="med"/>
+                    </a:lnT>
+                    <a:lnB w="9525" cap="flat" cmpd="sng" algn="ctr">
+                      <a:solidFill>
+                        <a:srgbClr val="E5E5E5"/>
+                      </a:solidFill>
+                      <a:prstDash val="solid"/>
+                      <a:round/>
+                      <a:headEnd type="none" w="med" len="med"/>
+                      <a:tailEnd type="none" w="med" len="med"/>
+                    </a:lnB>
+                    <a:solidFill>
+                      <a:srgbClr val="F4F4F4"/>
+                    </a:solidFill>
+                  </a:tcPr>
+                </a:tc>
+                <a:tc>
+                  <a:txBody>
+                    <a:bodyPr/>
+                    <a:lstStyle/>
+                    <a:p>
+                      <a:pPr algn="l" indent="0" marL="0">
+                        <a:buNone/>
+                      </a:pPr>
+                      <a:r>
+                        <a:rPr lang="en-US" sz="1100" dirty="0">
+                          <a:solidFill>
+                            <a:srgbClr val="1A1A1A"/>
+                          </a:solidFill>
+                        </a:rPr>
+                        <a:t>90.8</a:t>
+                      </a:r>
+                      <a:endParaRPr lang="en-US" sz="1100" dirty="0"/>
+                    </a:p>
+                  </a:txBody>
+                  <a:tcPr marL="91440" marR="91440" marT="45720" marB="45720" anchor="ctr">
+                    <a:lnL w="9525" cap="flat" cmpd="sng" algn="ctr">
+                      <a:solidFill>
+                        <a:srgbClr val="E5E5E5"/>
+                      </a:solidFill>
+                      <a:prstDash val="solid"/>
+                      <a:round/>
+                      <a:headEnd type="none" w="med" len="med"/>
+                      <a:tailEnd type="none" w="med" len="med"/>
+                    </a:lnL>
+                    <a:lnR w="9525" cap="flat" cmpd="sng" algn="ctr">
+                      <a:solidFill>
+                        <a:srgbClr val="E5E5E5"/>
+                      </a:solidFill>
+                      <a:prstDash val="solid"/>
+                      <a:round/>
+                      <a:headEnd type="none" w="med" len="med"/>
+                      <a:tailEnd type="none" w="med" len="med"/>
+                    </a:lnR>
+                    <a:lnT w="9525" cap="flat" cmpd="sng" algn="ctr">
+                      <a:solidFill>
+                        <a:srgbClr val="E5E5E5"/>
+                      </a:solidFill>
+                      <a:prstDash val="solid"/>
+                      <a:round/>
+                      <a:headEnd type="none" w="med" len="med"/>
+                      <a:tailEnd type="none" w="med" len="med"/>
+                    </a:lnT>
+                    <a:lnB w="9525" cap="flat" cmpd="sng" algn="ctr">
+                      <a:solidFill>
+                        <a:srgbClr val="E5E5E5"/>
+                      </a:solidFill>
+                      <a:prstDash val="solid"/>
+                      <a:round/>
+                      <a:headEnd type="none" w="med" len="med"/>
+                      <a:tailEnd type="none" w="med" len="med"/>
+                    </a:lnB>
+                    <a:solidFill>
+                      <a:srgbClr val="F4F4F4"/>
+                    </a:solidFill>
+                  </a:tcPr>
+                </a:tc>
+                <a:tc>
+                  <a:txBody>
+                    <a:bodyPr/>
+                    <a:lstStyle/>
+                    <a:p>
+                      <a:pPr algn="l" indent="0" marL="0">
+                        <a:buNone/>
+                      </a:pPr>
+                      <a:r>
+                        <a:rPr lang="en-US" sz="1100" dirty="0">
+                          <a:solidFill>
+                            <a:srgbClr val="1A1A1A"/>
+                          </a:solidFill>
+                        </a:rPr>
+                        <a:t>6.5</a:t>
+                      </a:r>
+                      <a:endParaRPr lang="en-US" sz="1100" dirty="0"/>
+                    </a:p>
+                  </a:txBody>
+                  <a:tcPr marL="91440" marR="91440" marT="45720" marB="45720" anchor="ctr">
+                    <a:lnL w="9525" cap="flat" cmpd="sng" algn="ctr">
+                      <a:solidFill>
+                        <a:srgbClr val="E5E5E5"/>
+                      </a:solidFill>
+                      <a:prstDash val="solid"/>
+                      <a:round/>
+                      <a:headEnd type="none" w="med" len="med"/>
+                      <a:tailEnd type="none" w="med" len="med"/>
+                    </a:lnL>
+                    <a:lnR w="9525" cap="flat" cmpd="sng" algn="ctr">
+                      <a:solidFill>
+                        <a:srgbClr val="E5E5E5"/>
+                      </a:solidFill>
+                      <a:prstDash val="solid"/>
+                      <a:round/>
+                      <a:headEnd type="none" w="med" len="med"/>
+                      <a:tailEnd type="none" w="med" len="med"/>
+                    </a:lnR>
+                    <a:lnT w="9525" cap="flat" cmpd="sng" algn="ctr">
+                      <a:solidFill>
+                        <a:srgbClr val="E5E5E5"/>
+                      </a:solidFill>
+                      <a:prstDash val="solid"/>
+                      <a:round/>
+                      <a:headEnd type="none" w="med" len="med"/>
+                      <a:tailEnd type="none" w="med" len="med"/>
+                    </a:lnT>
+                    <a:lnB w="9525" cap="flat" cmpd="sng" algn="ctr">
+                      <a:solidFill>
+                        <a:srgbClr val="E5E5E5"/>
+                      </a:solidFill>
+                      <a:prstDash val="solid"/>
+                      <a:round/>
+                      <a:headEnd type="none" w="med" len="med"/>
+                      <a:tailEnd type="none" w="med" len="med"/>
+                    </a:lnB>
+                    <a:solidFill>
+                      <a:srgbClr val="F4F4F4"/>
+                    </a:solidFill>
+                  </a:tcPr>
+                </a:tc>
+                <a:tc>
+                  <a:txBody>
+                    <a:bodyPr/>
+                    <a:lstStyle/>
+                    <a:p>
+                      <a:pPr algn="l" indent="0" marL="0">
+                        <a:buNone/>
+                      </a:pPr>
+                      <a:r>
+                        <a:rPr lang="en-US" sz="1100" dirty="0">
+                          <a:solidFill>
+                            <a:srgbClr val="1A1A1A"/>
+                          </a:solidFill>
+                        </a:rPr>
+                        <a:t>53.9%</a:t>
+                      </a:r>
+                      <a:endParaRPr lang="en-US" sz="1100" dirty="0"/>
+                    </a:p>
+                  </a:txBody>
+                  <a:tcPr marL="91440" marR="91440" marT="45720" marB="45720" anchor="ctr">
+                    <a:lnL w="9525" cap="flat" cmpd="sng" algn="ctr">
+                      <a:solidFill>
+                        <a:srgbClr val="E5E5E5"/>
+                      </a:solidFill>
+                      <a:prstDash val="solid"/>
+                      <a:round/>
+                      <a:headEnd type="none" w="med" len="med"/>
+                      <a:tailEnd type="none" w="med" len="med"/>
+                    </a:lnL>
+                    <a:lnR w="9525" cap="flat" cmpd="sng" algn="ctr">
+                      <a:solidFill>
+                        <a:srgbClr val="E5E5E5"/>
+                      </a:solidFill>
+                      <a:prstDash val="solid"/>
+                      <a:round/>
+                      <a:headEnd type="none" w="med" len="med"/>
+                      <a:tailEnd type="none" w="med" len="med"/>
+                    </a:lnR>
+                    <a:lnT w="9525" cap="flat" cmpd="sng" algn="ctr">
+                      <a:solidFill>
+                        <a:srgbClr val="E5E5E5"/>
+                      </a:solidFill>
+                      <a:prstDash val="solid"/>
+                      <a:round/>
+                      <a:headEnd type="none" w="med" len="med"/>
+                      <a:tailEnd type="none" w="med" len="med"/>
+                    </a:lnT>
+                    <a:lnB w="9525" cap="flat" cmpd="sng" algn="ctr">
+                      <a:solidFill>
+                        <a:srgbClr val="E5E5E5"/>
+                      </a:solidFill>
+                      <a:prstDash val="solid"/>
+                      <a:round/>
+                      <a:headEnd type="none" w="med" len="med"/>
+                      <a:tailEnd type="none" w="med" len="med"/>
+                    </a:lnB>
+                    <a:solidFill>
+                      <a:srgbClr val="F4F4F4"/>
+                    </a:solidFill>
+                  </a:tcPr>
+                </a:tc>
+                <a:tc>
+                  <a:txBody>
+                    <a:bodyPr/>
+                    <a:lstStyle/>
+                    <a:p>
+                      <a:pPr algn="l" indent="0" marL="0">
+                        <a:buNone/>
+                      </a:pPr>
+                      <a:r>
+                        <a:rPr lang="en-US" sz="1100" dirty="0">
+                          <a:solidFill>
+                            <a:srgbClr val="6B6B6B"/>
+                          </a:solidFill>
+                        </a:rPr>
+                        <a:t>17.6%</a:t>
+                      </a:r>
+                      <a:endParaRPr lang="en-US" sz="1100" dirty="0"/>
+                    </a:p>
+                  </a:txBody>
+                  <a:tcPr marL="91440" marR="91440" marT="45720" marB="45720" anchor="ctr">
+                    <a:lnL w="9525" cap="flat" cmpd="sng" algn="ctr">
+                      <a:solidFill>
+                        <a:srgbClr val="E5E5E5"/>
+                      </a:solidFill>
+                      <a:prstDash val="solid"/>
+                      <a:round/>
+                      <a:headEnd type="none" w="med" len="med"/>
+                      <a:tailEnd type="none" w="med" len="med"/>
+                    </a:lnL>
+                    <a:lnR w="9525" cap="flat" cmpd="sng" algn="ctr">
+                      <a:solidFill>
+                        <a:srgbClr val="E5E5E5"/>
+                      </a:solidFill>
+                      <a:prstDash val="solid"/>
+                      <a:round/>
+                      <a:headEnd type="none" w="med" len="med"/>
+                      <a:tailEnd type="none" w="med" len="med"/>
+                    </a:lnR>
+                    <a:lnT w="9525" cap="flat" cmpd="sng" algn="ctr">
+                      <a:solidFill>
+                        <a:srgbClr val="E5E5E5"/>
+                      </a:solidFill>
+                      <a:prstDash val="solid"/>
+                      <a:round/>
+                      <a:headEnd type="none" w="med" len="med"/>
+                      <a:tailEnd type="none" w="med" len="med"/>
+                    </a:lnT>
+                    <a:lnB w="9525" cap="flat" cmpd="sng" algn="ctr">
+                      <a:solidFill>
+                        <a:srgbClr val="E5E5E5"/>
+                      </a:solidFill>
+                      <a:prstDash val="solid"/>
+                      <a:round/>
+                      <a:headEnd type="none" w="med" len="med"/>
+                      <a:tailEnd type="none" w="med" len="med"/>
+                    </a:lnB>
+                    <a:solidFill>
+                      <a:srgbClr val="F4F4F4"/>
+                    </a:solidFill>
+                  </a:tcPr>
+                </a:tc>
+              </a:tr>
+              <a:tr h="512064">
+                <a:tc>
+                  <a:txBody>
+                    <a:bodyPr/>
+                    <a:lstStyle/>
+                    <a:p>
+                      <a:pPr algn="l" indent="0" marL="0">
+                        <a:buNone/>
+                      </a:pPr>
+                      <a:r>
+                        <a:rPr lang="en-US" sz="1100" b="1" dirty="0">
+                          <a:solidFill>
+                            <a:srgbClr val="1A1A1A"/>
+                          </a:solidFill>
+                        </a:rPr>
+                        <a:t>↔ Lando NORRIS</a:t>
+                      </a:r>
+                      <a:endParaRPr lang="en-US" sz="1100" dirty="0"/>
+                    </a:p>
+                  </a:txBody>
+                  <a:tcPr marL="91440" marR="91440" marT="45720" marB="45720" anchor="ctr">
+                    <a:lnL w="9525" cap="flat" cmpd="sng" algn="ctr">
+                      <a:solidFill>
+                        <a:srgbClr val="E5E5E5"/>
+                      </a:solidFill>
+                      <a:prstDash val="solid"/>
+                      <a:round/>
+                      <a:headEnd type="none" w="med" len="med"/>
+                      <a:tailEnd type="none" w="med" len="med"/>
+                    </a:lnL>
+                    <a:lnR w="9525" cap="flat" cmpd="sng" algn="ctr">
+                      <a:solidFill>
+                        <a:srgbClr val="E5E5E5"/>
+                      </a:solidFill>
+                      <a:prstDash val="solid"/>
+                      <a:round/>
+                      <a:headEnd type="none" w="med" len="med"/>
+                      <a:tailEnd type="none" w="med" len="med"/>
+                    </a:lnR>
+                    <a:lnT w="9525" cap="flat" cmpd="sng" algn="ctr">
+                      <a:solidFill>
+                        <a:srgbClr val="E5E5E5"/>
+                      </a:solidFill>
+                      <a:prstDash val="solid"/>
+                      <a:round/>
+                      <a:headEnd type="none" w="med" len="med"/>
+                      <a:tailEnd type="none" w="med" len="med"/>
+                    </a:lnT>
+                    <a:lnB w="9525" cap="flat" cmpd="sng" algn="ctr">
+                      <a:solidFill>
+                        <a:srgbClr val="E5E5E5"/>
+                      </a:solidFill>
+                      <a:prstDash val="solid"/>
+                      <a:round/>
+                      <a:headEnd type="none" w="med" len="med"/>
+                      <a:tailEnd type="none" w="med" len="med"/>
+                    </a:lnB>
+                    <a:solidFill>
+                      <a:srgbClr val="FFFFFF"/>
+                    </a:solidFill>
+                  </a:tcPr>
+                </a:tc>
+                <a:tc>
+                  <a:txBody>
+                    <a:bodyPr/>
+                    <a:lstStyle/>
+                    <a:p>
+                      <a:pPr algn="l" indent="0" marL="0">
+                        <a:buNone/>
+                      </a:pPr>
+                      <a:r>
+                        <a:rPr lang="en-US" sz="1100" dirty="0">
+                          <a:solidFill>
+                            <a:srgbClr val="1A1A1A"/>
+                          </a:solidFill>
+                        </a:rPr>
+                        <a:t>McLaren</a:t>
+                      </a:r>
+                      <a:endParaRPr lang="en-US" sz="1100" dirty="0"/>
+                    </a:p>
+                  </a:txBody>
+                  <a:tcPr marL="91440" marR="91440" marT="45720" marB="45720" anchor="ctr">
+                    <a:lnL w="9525" cap="flat" cmpd="sng" algn="ctr">
+                      <a:solidFill>
+                        <a:srgbClr val="E5E5E5"/>
+                      </a:solidFill>
+                      <a:prstDash val="solid"/>
+                      <a:round/>
+                      <a:headEnd type="none" w="med" len="med"/>
+                      <a:tailEnd type="none" w="med" len="med"/>
+                    </a:lnL>
+                    <a:lnR w="9525" cap="flat" cmpd="sng" algn="ctr">
+                      <a:solidFill>
+                        <a:srgbClr val="E5E5E5"/>
+                      </a:solidFill>
+                      <a:prstDash val="solid"/>
+                      <a:round/>
+                      <a:headEnd type="none" w="med" len="med"/>
+                      <a:tailEnd type="none" w="med" len="med"/>
+                    </a:lnR>
+                    <a:lnT w="9525" cap="flat" cmpd="sng" algn="ctr">
+                      <a:solidFill>
+                        <a:srgbClr val="E5E5E5"/>
+                      </a:solidFill>
+                      <a:prstDash val="solid"/>
+                      <a:round/>
+                      <a:headEnd type="none" w="med" len="med"/>
+                      <a:tailEnd type="none" w="med" len="med"/>
+                    </a:lnT>
+                    <a:lnB w="9525" cap="flat" cmpd="sng" algn="ctr">
+                      <a:solidFill>
+                        <a:srgbClr val="E5E5E5"/>
+                      </a:solidFill>
+                      <a:prstDash val="solid"/>
+                      <a:round/>
+                      <a:headEnd type="none" w="med" len="med"/>
+                      <a:tailEnd type="none" w="med" len="med"/>
+                    </a:lnB>
+                    <a:solidFill>
+                      <a:srgbClr val="FFFFFF"/>
+                    </a:solidFill>
+                  </a:tcPr>
+                </a:tc>
+                <a:tc>
+                  <a:txBody>
+                    <a:bodyPr/>
+                    <a:lstStyle/>
+                    <a:p>
+                      <a:pPr algn="l" indent="0" marL="0">
+                        <a:buNone/>
+                      </a:pPr>
+                      <a:r>
+                        <a:rPr lang="en-US" sz="1100" dirty="0">
+                          <a:solidFill>
+                            <a:srgbClr val="1A1A1A"/>
+                          </a:solidFill>
+                        </a:rPr>
+                        <a:t>1.6%</a:t>
+                      </a:r>
+                      <a:endParaRPr lang="en-US" sz="1100" dirty="0"/>
+                    </a:p>
+                  </a:txBody>
+                  <a:tcPr marL="91440" marR="91440" marT="45720" marB="45720" anchor="ctr">
+                    <a:lnL w="9525" cap="flat" cmpd="sng" algn="ctr">
+                      <a:solidFill>
+                        <a:srgbClr val="E5E5E5"/>
+                      </a:solidFill>
+                      <a:prstDash val="solid"/>
+                      <a:round/>
+                      <a:headEnd type="none" w="med" len="med"/>
+                      <a:tailEnd type="none" w="med" len="med"/>
+                    </a:lnL>
+                    <a:lnR w="9525" cap="flat" cmpd="sng" algn="ctr">
+                      <a:solidFill>
+                        <a:srgbClr val="E5E5E5"/>
+                      </a:solidFill>
+                      <a:prstDash val="solid"/>
+                      <a:round/>
+                      <a:headEnd type="none" w="med" len="med"/>
+                      <a:tailEnd type="none" w="med" len="med"/>
+                    </a:lnR>
+                    <a:lnT w="9525" cap="flat" cmpd="sng" algn="ctr">
+                      <a:solidFill>
+                        <a:srgbClr val="E5E5E5"/>
+                      </a:solidFill>
+                      <a:prstDash val="solid"/>
+                      <a:round/>
+                      <a:headEnd type="none" w="med" len="med"/>
+                      <a:tailEnd type="none" w="med" len="med"/>
+                    </a:lnT>
+                    <a:lnB w="9525" cap="flat" cmpd="sng" algn="ctr">
+                      <a:solidFill>
+                        <a:srgbClr val="E5E5E5"/>
+                      </a:solidFill>
+                      <a:prstDash val="solid"/>
+                      <a:round/>
+                      <a:headEnd type="none" w="med" len="med"/>
+                      <a:tailEnd type="none" w="med" len="med"/>
+                    </a:lnB>
+                    <a:solidFill>
+                      <a:srgbClr val="FFFFFF"/>
+                    </a:solidFill>
+                  </a:tcPr>
+                </a:tc>
+                <a:tc>
+                  <a:txBody>
+                    <a:bodyPr/>
+                    <a:lstStyle/>
+                    <a:p>
+                      <a:pPr algn="l" indent="0" marL="0">
+                        <a:buNone/>
+                      </a:pPr>
+                      <a:r>
+                        <a:rPr lang="en-US" sz="1100" dirty="0">
+                          <a:solidFill>
+                            <a:srgbClr val="1A1A1A"/>
+                          </a:solidFill>
+                        </a:rPr>
+                        <a:t>31.6%</a:t>
+                      </a:r>
+                      <a:endParaRPr lang="en-US" sz="1100" dirty="0"/>
+                    </a:p>
+                  </a:txBody>
+                  <a:tcPr marL="91440" marR="91440" marT="45720" marB="45720" anchor="ctr">
+                    <a:lnL w="9525" cap="flat" cmpd="sng" algn="ctr">
+                      <a:solidFill>
+                        <a:srgbClr val="E5E5E5"/>
+                      </a:solidFill>
+                      <a:prstDash val="solid"/>
+                      <a:round/>
+                      <a:headEnd type="none" w="med" len="med"/>
+                      <a:tailEnd type="none" w="med" len="med"/>
+                    </a:lnL>
+                    <a:lnR w="9525" cap="flat" cmpd="sng" algn="ctr">
+                      <a:solidFill>
+                        <a:srgbClr val="E5E5E5"/>
+                      </a:solidFill>
+                      <a:prstDash val="solid"/>
+                      <a:round/>
+                      <a:headEnd type="none" w="med" len="med"/>
+                      <a:tailEnd type="none" w="med" len="med"/>
+                    </a:lnR>
+                    <a:lnT w="9525" cap="flat" cmpd="sng" algn="ctr">
+                      <a:solidFill>
+                        <a:srgbClr val="E5E5E5"/>
+                      </a:solidFill>
+                      <a:prstDash val="solid"/>
+                      <a:round/>
+                      <a:headEnd type="none" w="med" len="med"/>
+                      <a:tailEnd type="none" w="med" len="med"/>
+                    </a:lnT>
+                    <a:lnB w="9525" cap="flat" cmpd="sng" algn="ctr">
+                      <a:solidFill>
+                        <a:srgbClr val="E5E5E5"/>
+                      </a:solidFill>
+                      <a:prstDash val="solid"/>
+                      <a:round/>
+                      <a:headEnd type="none" w="med" len="med"/>
+                      <a:tailEnd type="none" w="med" len="med"/>
+                    </a:lnB>
+                    <a:solidFill>
+                      <a:srgbClr val="FFFFFF"/>
+                    </a:solidFill>
+                  </a:tcPr>
+                </a:tc>
+                <a:tc>
+                  <a:txBody>
+                    <a:bodyPr/>
+                    <a:lstStyle/>
+                    <a:p>
+                      <a:pPr algn="l" indent="0" marL="0">
+                        <a:buNone/>
+                      </a:pPr>
+                      <a:r>
+                        <a:rPr lang="en-US" sz="1100" dirty="0">
+                          <a:solidFill>
+                            <a:srgbClr val="1A1A1A"/>
+                          </a:solidFill>
+                        </a:rPr>
+                        <a:t>88.2</a:t>
+                      </a:r>
+                      <a:endParaRPr lang="en-US" sz="1100" dirty="0"/>
+                    </a:p>
+                  </a:txBody>
+                  <a:tcPr marL="91440" marR="91440" marT="45720" marB="45720" anchor="ctr">
+                    <a:lnL w="9525" cap="flat" cmpd="sng" algn="ctr">
+                      <a:solidFill>
+                        <a:srgbClr val="E5E5E5"/>
+                      </a:solidFill>
+                      <a:prstDash val="solid"/>
+                      <a:round/>
+                      <a:headEnd type="none" w="med" len="med"/>
+                      <a:tailEnd type="none" w="med" len="med"/>
+                    </a:lnL>
+                    <a:lnR w="9525" cap="flat" cmpd="sng" algn="ctr">
+                      <a:solidFill>
+                        <a:srgbClr val="E5E5E5"/>
+                      </a:solidFill>
+                      <a:prstDash val="solid"/>
+                      <a:round/>
+                      <a:headEnd type="none" w="med" len="med"/>
+                      <a:tailEnd type="none" w="med" len="med"/>
+                    </a:lnR>
+                    <a:lnT w="9525" cap="flat" cmpd="sng" algn="ctr">
+                      <a:solidFill>
+                        <a:srgbClr val="E5E5E5"/>
+                      </a:solidFill>
+                      <a:prstDash val="solid"/>
+                      <a:round/>
+                      <a:headEnd type="none" w="med" len="med"/>
+                      <a:tailEnd type="none" w="med" len="med"/>
+                    </a:lnT>
+                    <a:lnB w="9525" cap="flat" cmpd="sng" algn="ctr">
+                      <a:solidFill>
+                        <a:srgbClr val="E5E5E5"/>
+                      </a:solidFill>
+                      <a:prstDash val="solid"/>
+                      <a:round/>
+                      <a:headEnd type="none" w="med" len="med"/>
+                      <a:tailEnd type="none" w="med" len="med"/>
+                    </a:lnB>
+                    <a:solidFill>
+                      <a:srgbClr val="FFFFFF"/>
+                    </a:solidFill>
+                  </a:tcPr>
+                </a:tc>
+                <a:tc>
+                  <a:txBody>
+                    <a:bodyPr/>
+                    <a:lstStyle/>
+                    <a:p>
+                      <a:pPr algn="l" indent="0" marL="0">
+                        <a:buNone/>
+                      </a:pPr>
+                      <a:r>
+                        <a:rPr lang="en-US" sz="1100" dirty="0">
+                          <a:solidFill>
+                            <a:srgbClr val="1A1A1A"/>
+                          </a:solidFill>
+                        </a:rPr>
+                        <a:t>6.9</a:t>
+                      </a:r>
+                      <a:endParaRPr lang="en-US" sz="1100" dirty="0"/>
+                    </a:p>
+                  </a:txBody>
+                  <a:tcPr marL="91440" marR="91440" marT="45720" marB="45720" anchor="ctr">
+                    <a:lnL w="9525" cap="flat" cmpd="sng" algn="ctr">
+                      <a:solidFill>
+                        <a:srgbClr val="E5E5E5"/>
+                      </a:solidFill>
+                      <a:prstDash val="solid"/>
+                      <a:round/>
+                      <a:headEnd type="none" w="med" len="med"/>
+                      <a:tailEnd type="none" w="med" len="med"/>
+                    </a:lnL>
+                    <a:lnR w="9525" cap="flat" cmpd="sng" algn="ctr">
+                      <a:solidFill>
+                        <a:srgbClr val="E5E5E5"/>
+                      </a:solidFill>
+                      <a:prstDash val="solid"/>
+                      <a:round/>
+                      <a:headEnd type="none" w="med" len="med"/>
+                      <a:tailEnd type="none" w="med" len="med"/>
+                    </a:lnR>
+                    <a:lnT w="9525" cap="flat" cmpd="sng" algn="ctr">
+                      <a:solidFill>
+                        <a:srgbClr val="E5E5E5"/>
+                      </a:solidFill>
+                      <a:prstDash val="solid"/>
+                      <a:round/>
+                      <a:headEnd type="none" w="med" len="med"/>
+                      <a:tailEnd type="none" w="med" len="med"/>
+                    </a:lnT>
+                    <a:lnB w="9525" cap="flat" cmpd="sng" algn="ctr">
+                      <a:solidFill>
+                        <a:srgbClr val="E5E5E5"/>
+                      </a:solidFill>
+                      <a:prstDash val="solid"/>
+                      <a:round/>
+                      <a:headEnd type="none" w="med" len="med"/>
+                      <a:tailEnd type="none" w="med" len="med"/>
+                    </a:lnB>
+                    <a:solidFill>
+                      <a:srgbClr val="FFFFFF"/>
+                    </a:solidFill>
+                  </a:tcPr>
+                </a:tc>
+                <a:tc>
+                  <a:txBody>
+                    <a:bodyPr/>
+                    <a:lstStyle/>
+                    <a:p>
+                      <a:pPr algn="l" indent="0" marL="0">
+                        <a:buNone/>
+                      </a:pPr>
+                      <a:r>
+                        <a:rPr lang="en-US" sz="1100" dirty="0">
+                          <a:solidFill>
+                            <a:srgbClr val="1A1A1A"/>
+                          </a:solidFill>
+                        </a:rPr>
+                        <a:t>39.6%</a:t>
+                      </a:r>
+                      <a:endParaRPr lang="en-US" sz="1100" dirty="0"/>
+                    </a:p>
+                  </a:txBody>
+                  <a:tcPr marL="91440" marR="91440" marT="45720" marB="45720" anchor="ctr">
+                    <a:lnL w="9525" cap="flat" cmpd="sng" algn="ctr">
+                      <a:solidFill>
+                        <a:srgbClr val="E5E5E5"/>
+                      </a:solidFill>
+                      <a:prstDash val="solid"/>
+                      <a:round/>
+                      <a:headEnd type="none" w="med" len="med"/>
+                      <a:tailEnd type="none" w="med" len="med"/>
+                    </a:lnL>
+                    <a:lnR w="9525" cap="flat" cmpd="sng" algn="ctr">
+                      <a:solidFill>
+                        <a:srgbClr val="E5E5E5"/>
+                      </a:solidFill>
+                      <a:prstDash val="solid"/>
+                      <a:round/>
+                      <a:headEnd type="none" w="med" len="med"/>
+                      <a:tailEnd type="none" w="med" len="med"/>
+                    </a:lnR>
+                    <a:lnT w="9525" cap="flat" cmpd="sng" algn="ctr">
+                      <a:solidFill>
+                        <a:srgbClr val="E5E5E5"/>
+                      </a:solidFill>
+                      <a:prstDash val="solid"/>
+                      <a:round/>
+                      <a:headEnd type="none" w="med" len="med"/>
+                      <a:tailEnd type="none" w="med" len="med"/>
+                    </a:lnT>
+                    <a:lnB w="9525" cap="flat" cmpd="sng" algn="ctr">
+                      <a:solidFill>
+                        <a:srgbClr val="E5E5E5"/>
+                      </a:solidFill>
+                      <a:prstDash val="solid"/>
+                      <a:round/>
+                      <a:headEnd type="none" w="med" len="med"/>
+                      <a:tailEnd type="none" w="med" len="med"/>
+                    </a:lnB>
+                    <a:solidFill>
+                      <a:srgbClr val="FFFFFF"/>
+                    </a:solidFill>
+                  </a:tcPr>
+                </a:tc>
+                <a:tc>
+                  <a:txBody>
+                    <a:bodyPr/>
+                    <a:lstStyle/>
+                    <a:p>
+                      <a:pPr algn="l" indent="0" marL="0">
+                        <a:buNone/>
+                      </a:pPr>
+                      <a:r>
+                        <a:rPr lang="en-US" sz="1100" dirty="0">
+                          <a:solidFill>
+                            <a:srgbClr val="6B6B6B"/>
+                          </a:solidFill>
+                        </a:rPr>
+                        <a:t>17.4%</a:t>
+                      </a:r>
+                      <a:endParaRPr lang="en-US" sz="1100" dirty="0"/>
+                    </a:p>
+                  </a:txBody>
+                  <a:tcPr marL="91440" marR="91440" marT="45720" marB="45720" anchor="ctr">
+                    <a:lnL w="9525" cap="flat" cmpd="sng" algn="ctr">
+                      <a:solidFill>
+                        <a:srgbClr val="E5E5E5"/>
+                      </a:solidFill>
+                      <a:prstDash val="solid"/>
+                      <a:round/>
+                      <a:headEnd type="none" w="med" len="med"/>
+                      <a:tailEnd type="none" w="med" len="med"/>
+                    </a:lnL>
+                    <a:lnR w="9525" cap="flat" cmpd="sng" algn="ctr">
+                      <a:solidFill>
+                        <a:srgbClr val="E5E5E5"/>
+                      </a:solidFill>
+                      <a:prstDash val="solid"/>
+                      <a:round/>
+                      <a:headEnd type="none" w="med" len="med"/>
+                      <a:tailEnd type="none" w="med" len="med"/>
+                    </a:lnR>
+                    <a:lnT w="9525" cap="flat" cmpd="sng" algn="ctr">
+                      <a:solidFill>
+                        <a:srgbClr val="E5E5E5"/>
+                      </a:solidFill>
+                      <a:prstDash val="solid"/>
+                      <a:round/>
+                      <a:headEnd type="none" w="med" len="med"/>
+                      <a:tailEnd type="none" w="med" len="med"/>
+                    </a:lnT>
+                    <a:lnB w="9525" cap="flat" cmpd="sng" algn="ctr">
+                      <a:solidFill>
+                        <a:srgbClr val="E5E5E5"/>
+                      </a:solidFill>
+                      <a:prstDash val="solid"/>
+                      <a:round/>
+                      <a:headEnd type="none" w="med" len="med"/>
+                      <a:tailEnd type="none" w="med" len="med"/>
+                    </a:lnB>
+                    <a:solidFill>
+                      <a:srgbClr val="FFFFFF"/>
+                    </a:solidFill>
+                  </a:tcPr>
+                </a:tc>
+              </a:tr>
+              <a:tr h="512064">
+                <a:tc>
+                  <a:txBody>
+                    <a:bodyPr/>
+                    <a:lstStyle/>
+                    <a:p>
+                      <a:pPr algn="l" indent="0" marL="0">
+                        <a:buNone/>
+                      </a:pPr>
+                      <a:r>
+                        <a:rPr lang="en-US" sz="1100" b="1" dirty="0">
+                          <a:solidFill>
+                            <a:srgbClr val="1A1A1A"/>
+                          </a:solidFill>
+                        </a:rPr>
+                        <a:t>↔ George RUSSELL</a:t>
+                      </a:r>
+                      <a:endParaRPr lang="en-US" sz="1100" dirty="0"/>
+                    </a:p>
+                  </a:txBody>
+                  <a:tcPr marL="91440" marR="91440" marT="45720" marB="45720" anchor="ctr">
+                    <a:lnL w="9525" cap="flat" cmpd="sng" algn="ctr">
+                      <a:solidFill>
+                        <a:srgbClr val="E5E5E5"/>
+                      </a:solidFill>
+                      <a:prstDash val="solid"/>
+                      <a:round/>
+                      <a:headEnd type="none" w="med" len="med"/>
+                      <a:tailEnd type="none" w="med" len="med"/>
+                    </a:lnL>
+                    <a:lnR w="9525" cap="flat" cmpd="sng" algn="ctr">
+                      <a:solidFill>
+                        <a:srgbClr val="E5E5E5"/>
+                      </a:solidFill>
+                      <a:prstDash val="solid"/>
+                      <a:round/>
+                      <a:headEnd type="none" w="med" len="med"/>
+                      <a:tailEnd type="none" w="med" len="med"/>
+                    </a:lnR>
+                    <a:lnT w="9525" cap="flat" cmpd="sng" algn="ctr">
+                      <a:solidFill>
+                        <a:srgbClr val="E5E5E5"/>
+                      </a:solidFill>
+                      <a:prstDash val="solid"/>
+                      <a:round/>
+                      <a:headEnd type="none" w="med" len="med"/>
+                      <a:tailEnd type="none" w="med" len="med"/>
+                    </a:lnT>
+                    <a:lnB w="9525" cap="flat" cmpd="sng" algn="ctr">
+                      <a:solidFill>
+                        <a:srgbClr val="E5E5E5"/>
+                      </a:solidFill>
+                      <a:prstDash val="solid"/>
+                      <a:round/>
+                      <a:headEnd type="none" w="med" len="med"/>
+                      <a:tailEnd type="none" w="med" len="med"/>
+                    </a:lnB>
+                    <a:solidFill>
+                      <a:srgbClr val="F4F4F4"/>
+                    </a:solidFill>
+                  </a:tcPr>
+                </a:tc>
+                <a:tc>
+                  <a:txBody>
+                    <a:bodyPr/>
+                    <a:lstStyle/>
+                    <a:p>
+                      <a:pPr algn="l" indent="0" marL="0">
+                        <a:buNone/>
+                      </a:pPr>
+                      <a:r>
+                        <a:rPr lang="en-US" sz="1100" dirty="0">
+                          <a:solidFill>
+                            <a:srgbClr val="1A1A1A"/>
+                          </a:solidFill>
+                        </a:rPr>
+                        <a:t>Mercedes</a:t>
+                      </a:r>
+                      <a:endParaRPr lang="en-US" sz="1100" dirty="0"/>
+                    </a:p>
+                  </a:txBody>
+                  <a:tcPr marL="91440" marR="91440" marT="45720" marB="45720" anchor="ctr">
+                    <a:lnL w="9525" cap="flat" cmpd="sng" algn="ctr">
+                      <a:solidFill>
+                        <a:srgbClr val="E5E5E5"/>
+                      </a:solidFill>
+                      <a:prstDash val="solid"/>
+                      <a:round/>
+                      <a:headEnd type="none" w="med" len="med"/>
+                      <a:tailEnd type="none" w="med" len="med"/>
+                    </a:lnL>
+                    <a:lnR w="9525" cap="flat" cmpd="sng" algn="ctr">
+                      <a:solidFill>
+                        <a:srgbClr val="E5E5E5"/>
+                      </a:solidFill>
+                      <a:prstDash val="solid"/>
+                      <a:round/>
+                      <a:headEnd type="none" w="med" len="med"/>
+                      <a:tailEnd type="none" w="med" len="med"/>
+                    </a:lnR>
+                    <a:lnT w="9525" cap="flat" cmpd="sng" algn="ctr">
+                      <a:solidFill>
+                        <a:srgbClr val="E5E5E5"/>
+                      </a:solidFill>
+                      <a:prstDash val="solid"/>
+                      <a:round/>
+                      <a:headEnd type="none" w="med" len="med"/>
+                      <a:tailEnd type="none" w="med" len="med"/>
+                    </a:lnT>
+                    <a:lnB w="9525" cap="flat" cmpd="sng" algn="ctr">
+                      <a:solidFill>
+                        <a:srgbClr val="E5E5E5"/>
+                      </a:solidFill>
+                      <a:prstDash val="solid"/>
+                      <a:round/>
+                      <a:headEnd type="none" w="med" len="med"/>
+                      <a:tailEnd type="none" w="med" len="med"/>
+                    </a:lnB>
+                    <a:solidFill>
+                      <a:srgbClr val="F4F4F4"/>
+                    </a:solidFill>
+                  </a:tcPr>
+                </a:tc>
+                <a:tc>
+                  <a:txBody>
+                    <a:bodyPr/>
+                    <a:lstStyle/>
+                    <a:p>
+                      <a:pPr algn="l" indent="0" marL="0">
+                        <a:buNone/>
+                      </a:pPr>
+                      <a:r>
+                        <a:rPr lang="en-US" sz="1100" dirty="0">
+                          <a:solidFill>
+                            <a:srgbClr val="1A1A1A"/>
+                          </a:solidFill>
+                        </a:rPr>
+                        <a:t>0.3%</a:t>
+                      </a:r>
+                      <a:endParaRPr lang="en-US" sz="1100" dirty="0"/>
+                    </a:p>
+                  </a:txBody>
+                  <a:tcPr marL="91440" marR="91440" marT="45720" marB="45720" anchor="ctr">
+                    <a:lnL w="9525" cap="flat" cmpd="sng" algn="ctr">
+                      <a:solidFill>
+                        <a:srgbClr val="E5E5E5"/>
+                      </a:solidFill>
+                      <a:prstDash val="solid"/>
+                      <a:round/>
+                      <a:headEnd type="none" w="med" len="med"/>
+                      <a:tailEnd type="none" w="med" len="med"/>
+                    </a:lnL>
+                    <a:lnR w="9525" cap="flat" cmpd="sng" algn="ctr">
+                      <a:solidFill>
+                        <a:srgbClr val="E5E5E5"/>
+                      </a:solidFill>
+                      <a:prstDash val="solid"/>
+                      <a:round/>
+                      <a:headEnd type="none" w="med" len="med"/>
+                      <a:tailEnd type="none" w="med" len="med"/>
+                    </a:lnR>
+                    <a:lnT w="9525" cap="flat" cmpd="sng" algn="ctr">
+                      <a:solidFill>
+                        <a:srgbClr val="E5E5E5"/>
+                      </a:solidFill>
+                      <a:prstDash val="solid"/>
+                      <a:round/>
+                      <a:headEnd type="none" w="med" len="med"/>
+                      <a:tailEnd type="none" w="med" len="med"/>
+                    </a:lnT>
+                    <a:lnB w="9525" cap="flat" cmpd="sng" algn="ctr">
+                      <a:solidFill>
+                        <a:srgbClr val="E5E5E5"/>
+                      </a:solidFill>
+                      <a:prstDash val="solid"/>
+                      <a:round/>
+                      <a:headEnd type="none" w="med" len="med"/>
+                      <a:tailEnd type="none" w="med" len="med"/>
+                    </a:lnB>
+                    <a:solidFill>
+                      <a:srgbClr val="F4F4F4"/>
+                    </a:solidFill>
+                  </a:tcPr>
+                </a:tc>
+                <a:tc>
+                  <a:txBody>
+                    <a:bodyPr/>
+                    <a:lstStyle/>
+                    <a:p>
+                      <a:pPr algn="l" indent="0" marL="0">
+                        <a:buNone/>
+                      </a:pPr>
+                      <a:r>
+                        <a:rPr lang="en-US" sz="1100" dirty="0">
+                          <a:solidFill>
+                            <a:srgbClr val="1A1A1A"/>
+                          </a:solidFill>
+                        </a:rPr>
+                        <a:t>11.6%</a:t>
+                      </a:r>
+                      <a:endParaRPr lang="en-US" sz="1100" dirty="0"/>
+                    </a:p>
+                  </a:txBody>
+                  <a:tcPr marL="91440" marR="91440" marT="45720" marB="45720" anchor="ctr">
+                    <a:lnL w="9525" cap="flat" cmpd="sng" algn="ctr">
+                      <a:solidFill>
+                        <a:srgbClr val="E5E5E5"/>
+                      </a:solidFill>
+                      <a:prstDash val="solid"/>
+                      <a:round/>
+                      <a:headEnd type="none" w="med" len="med"/>
+                      <a:tailEnd type="none" w="med" len="med"/>
+                    </a:lnL>
+                    <a:lnR w="9525" cap="flat" cmpd="sng" algn="ctr">
+                      <a:solidFill>
+                        <a:srgbClr val="E5E5E5"/>
+                      </a:solidFill>
+                      <a:prstDash val="solid"/>
+                      <a:round/>
+                      <a:headEnd type="none" w="med" len="med"/>
+                      <a:tailEnd type="none" w="med" len="med"/>
+                    </a:lnR>
+                    <a:lnT w="9525" cap="flat" cmpd="sng" algn="ctr">
+                      <a:solidFill>
+                        <a:srgbClr val="E5E5E5"/>
+                      </a:solidFill>
+                      <a:prstDash val="solid"/>
+                      <a:round/>
+                      <a:headEnd type="none" w="med" len="med"/>
+                      <a:tailEnd type="none" w="med" len="med"/>
+                    </a:lnT>
+                    <a:lnB w="9525" cap="flat" cmpd="sng" algn="ctr">
+                      <a:solidFill>
+                        <a:srgbClr val="E5E5E5"/>
+                      </a:solidFill>
+                      <a:prstDash val="solid"/>
+                      <a:round/>
+                      <a:headEnd type="none" w="med" len="med"/>
+                      <a:tailEnd type="none" w="med" len="med"/>
+                    </a:lnB>
+                    <a:solidFill>
+                      <a:srgbClr val="F4F4F4"/>
+                    </a:solidFill>
+                  </a:tcPr>
+                </a:tc>
+                <a:tc>
+                  <a:txBody>
+                    <a:bodyPr/>
+                    <a:lstStyle/>
+                    <a:p>
+                      <a:pPr algn="l" indent="0" marL="0">
+                        <a:buNone/>
+                      </a:pPr>
+                      <a:r>
+                        <a:rPr lang="en-US" sz="1100" dirty="0">
+                          <a:solidFill>
+                            <a:srgbClr val="1A1A1A"/>
+                          </a:solidFill>
+                        </a:rPr>
+                        <a:t>69.0</a:t>
+                      </a:r>
+                      <a:endParaRPr lang="en-US" sz="1100" dirty="0"/>
+                    </a:p>
+                  </a:txBody>
+                  <a:tcPr marL="91440" marR="91440" marT="45720" marB="45720" anchor="ctr">
+                    <a:lnL w="9525" cap="flat" cmpd="sng" algn="ctr">
+                      <a:solidFill>
+                        <a:srgbClr val="E5E5E5"/>
+                      </a:solidFill>
+                      <a:prstDash val="solid"/>
+                      <a:round/>
+                      <a:headEnd type="none" w="med" len="med"/>
+                      <a:tailEnd type="none" w="med" len="med"/>
+                    </a:lnL>
+                    <a:lnR w="9525" cap="flat" cmpd="sng" algn="ctr">
+                      <a:solidFill>
+                        <a:srgbClr val="E5E5E5"/>
+                      </a:solidFill>
+                      <a:prstDash val="solid"/>
+                      <a:round/>
+                      <a:headEnd type="none" w="med" len="med"/>
+                      <a:tailEnd type="none" w="med" len="med"/>
+                    </a:lnR>
+                    <a:lnT w="9525" cap="flat" cmpd="sng" algn="ctr">
+                      <a:solidFill>
+                        <a:srgbClr val="E5E5E5"/>
+                      </a:solidFill>
+                      <a:prstDash val="solid"/>
+                      <a:round/>
+                      <a:headEnd type="none" w="med" len="med"/>
+                      <a:tailEnd type="none" w="med" len="med"/>
+                    </a:lnT>
+                    <a:lnB w="9525" cap="flat" cmpd="sng" algn="ctr">
+                      <a:solidFill>
+                        <a:srgbClr val="E5E5E5"/>
+                      </a:solidFill>
+                      <a:prstDash val="solid"/>
+                      <a:round/>
+                      <a:headEnd type="none" w="med" len="med"/>
+                      <a:tailEnd type="none" w="med" len="med"/>
+                    </a:lnB>
+                    <a:solidFill>
+                      <a:srgbClr val="F4F4F4"/>
+                    </a:solidFill>
+                  </a:tcPr>
+                </a:tc>
+                <a:tc>
+                  <a:txBody>
+                    <a:bodyPr/>
+                    <a:lstStyle/>
+                    <a:p>
+                      <a:pPr algn="l" indent="0" marL="0">
+                        <a:buNone/>
+                      </a:pPr>
+                      <a:r>
+                        <a:rPr lang="en-US" sz="1100" dirty="0">
+                          <a:solidFill>
+                            <a:srgbClr val="1A1A1A"/>
+                          </a:solidFill>
+                        </a:rPr>
+                        <a:t>7.9</a:t>
+                      </a:r>
+                      <a:endParaRPr lang="en-US" sz="1100" dirty="0"/>
+                    </a:p>
+                  </a:txBody>
+                  <a:tcPr marL="91440" marR="91440" marT="45720" marB="45720" anchor="ctr">
+                    <a:lnL w="9525" cap="flat" cmpd="sng" algn="ctr">
+                      <a:solidFill>
+                        <a:srgbClr val="E5E5E5"/>
+                      </a:solidFill>
+                      <a:prstDash val="solid"/>
+                      <a:round/>
+                      <a:headEnd type="none" w="med" len="med"/>
+                      <a:tailEnd type="none" w="med" len="med"/>
+                    </a:lnL>
+                    <a:lnR w="9525" cap="flat" cmpd="sng" algn="ctr">
+                      <a:solidFill>
+                        <a:srgbClr val="E5E5E5"/>
+                      </a:solidFill>
+                      <a:prstDash val="solid"/>
+                      <a:round/>
+                      <a:headEnd type="none" w="med" len="med"/>
+                      <a:tailEnd type="none" w="med" len="med"/>
+                    </a:lnR>
+                    <a:lnT w="9525" cap="flat" cmpd="sng" algn="ctr">
+                      <a:solidFill>
+                        <a:srgbClr val="E5E5E5"/>
+                      </a:solidFill>
+                      <a:prstDash val="solid"/>
+                      <a:round/>
+                      <a:headEnd type="none" w="med" len="med"/>
+                      <a:tailEnd type="none" w="med" len="med"/>
+                    </a:lnT>
+                    <a:lnB w="9525" cap="flat" cmpd="sng" algn="ctr">
+                      <a:solidFill>
+                        <a:srgbClr val="E5E5E5"/>
+                      </a:solidFill>
+                      <a:prstDash val="solid"/>
+                      <a:round/>
+                      <a:headEnd type="none" w="med" len="med"/>
+                      <a:tailEnd type="none" w="med" len="med"/>
+                    </a:lnB>
+                    <a:solidFill>
+                      <a:srgbClr val="F4F4F4"/>
+                    </a:solidFill>
+                  </a:tcPr>
+                </a:tc>
+                <a:tc>
+                  <a:txBody>
+                    <a:bodyPr/>
+                    <a:lstStyle/>
+                    <a:p>
+                      <a:pPr algn="l" indent="0" marL="0">
+                        <a:buNone/>
+                      </a:pPr>
+                      <a:r>
+                        <a:rPr lang="en-US" sz="1100" dirty="0">
+                          <a:solidFill>
+                            <a:srgbClr val="1A1A1A"/>
+                          </a:solidFill>
+                        </a:rPr>
+                        <a:t>11.5%</a:t>
+                      </a:r>
+                      <a:endParaRPr lang="en-US" sz="1100" dirty="0"/>
+                    </a:p>
+                  </a:txBody>
+                  <a:tcPr marL="91440" marR="91440" marT="45720" marB="45720" anchor="ctr">
+                    <a:lnL w="9525" cap="flat" cmpd="sng" algn="ctr">
+                      <a:solidFill>
+                        <a:srgbClr val="E5E5E5"/>
+                      </a:solidFill>
+                      <a:prstDash val="solid"/>
+                      <a:round/>
+                      <a:headEnd type="none" w="med" len="med"/>
+                      <a:tailEnd type="none" w="med" len="med"/>
+                    </a:lnL>
+                    <a:lnR w="9525" cap="flat" cmpd="sng" algn="ctr">
+                      <a:solidFill>
+                        <a:srgbClr val="E5E5E5"/>
+                      </a:solidFill>
+                      <a:prstDash val="solid"/>
+                      <a:round/>
+                      <a:headEnd type="none" w="med" len="med"/>
+                      <a:tailEnd type="none" w="med" len="med"/>
+                    </a:lnR>
+                    <a:lnT w="9525" cap="flat" cmpd="sng" algn="ctr">
+                      <a:solidFill>
+                        <a:srgbClr val="E5E5E5"/>
+                      </a:solidFill>
+                      <a:prstDash val="solid"/>
+                      <a:round/>
+                      <a:headEnd type="none" w="med" len="med"/>
+                      <a:tailEnd type="none" w="med" len="med"/>
+                    </a:lnT>
+                    <a:lnB w="9525" cap="flat" cmpd="sng" algn="ctr">
+                      <a:solidFill>
+                        <a:srgbClr val="E5E5E5"/>
+                      </a:solidFill>
+                      <a:prstDash val="solid"/>
+                      <a:round/>
+                      <a:headEnd type="none" w="med" len="med"/>
+                      <a:tailEnd type="none" w="med" len="med"/>
+                    </a:lnB>
+                    <a:solidFill>
+                      <a:srgbClr val="F4F4F4"/>
+                    </a:solidFill>
+                  </a:tcPr>
+                </a:tc>
+                <a:tc>
+                  <a:txBody>
+                    <a:bodyPr/>
+                    <a:lstStyle/>
+                    <a:p>
+                      <a:pPr algn="l" indent="0" marL="0">
+                        <a:buNone/>
+                      </a:pPr>
+                      <a:r>
+                        <a:rPr lang="en-US" sz="1100" dirty="0">
+                          <a:solidFill>
+                            <a:srgbClr val="6B6B6B"/>
+                          </a:solidFill>
+                        </a:rPr>
+                        <a:t>36.0%</a:t>
+                      </a:r>
+                      <a:endParaRPr lang="en-US" sz="1100" dirty="0"/>
+                    </a:p>
+                  </a:txBody>
+                  <a:tcPr marL="91440" marR="91440" marT="45720" marB="45720" anchor="ctr">
+                    <a:lnL w="9525" cap="flat" cmpd="sng" algn="ctr">
+                      <a:solidFill>
+                        <a:srgbClr val="E5E5E5"/>
+                      </a:solidFill>
+                      <a:prstDash val="solid"/>
+                      <a:round/>
+                      <a:headEnd type="none" w="med" len="med"/>
+                      <a:tailEnd type="none" w="med" len="med"/>
+                    </a:lnL>
+                    <a:lnR w="9525" cap="flat" cmpd="sng" algn="ctr">
+                      <a:solidFill>
+                        <a:srgbClr val="E5E5E5"/>
+                      </a:solidFill>
+                      <a:prstDash val="solid"/>
+                      <a:round/>
+                      <a:headEnd type="none" w="med" len="med"/>
+                      <a:tailEnd type="none" w="med" len="med"/>
+                    </a:lnR>
+                    <a:lnT w="9525" cap="flat" cmpd="sng" algn="ctr">
+                      <a:solidFill>
+                        <a:srgbClr val="E5E5E5"/>
+                      </a:solidFill>
+                      <a:prstDash val="solid"/>
+                      <a:round/>
+                      <a:headEnd type="none" w="med" len="med"/>
+                      <a:tailEnd type="none" w="med" len="med"/>
+                    </a:lnT>
+                    <a:lnB w="9525" cap="flat" cmpd="sng" algn="ctr">
+                      <a:solidFill>
+                        <a:srgbClr val="E5E5E5"/>
+                      </a:solidFill>
+                      <a:prstDash val="solid"/>
+                      <a:round/>
+                      <a:headEnd type="none" w="med" len="med"/>
+                      <a:tailEnd type="none" w="med" len="med"/>
+                    </a:lnB>
+                    <a:solidFill>
+                      <a:srgbClr val="F4F4F4"/>
+                    </a:solidFill>
+                  </a:tcPr>
+                </a:tc>
+              </a:tr>
+            </a:tbl>
+          </a:graphicData>
+        </a:graphic>
+      </p:graphicFrame>
+      <p:sp>
+        <p:nvSpPr>
+          <p:cNvPr id="5" name="cand-note"/>
+          <p:cNvSpPr txBox="1"/>
+          <p:nvPr/>
+        </p:nvSpPr>
+        <p:spPr>
+          <a:xfrm>
+            <a:off x="548640" y="5257800"/>
+            <a:ext cx="11109960" cy="365760"/>
+          </a:xfrm>
+          <a:prstGeom prst="rect">
+            <a:avLst/>
+          </a:prstGeom>
+          <a:noFill/>
+          <a:ln/>
+        </p:spPr>
+        <p:txBody>
+          <a:bodyPr wrap="square" lIns="0" tIns="0" rIns="0" bIns="0" rtlCol="0" anchor="t"/>
+          <a:lstStyle/>
+          <a:p>
+            <a:pPr indent="0" marL="0">
+              <a:buNone/>
+            </a:pPr>
+            <a:r>
+              <a:rPr lang="en-US" sz="1100" dirty="0">
+                <a:solidFill>
+                  <a:srgbClr val="6B6B6B"/>
+                </a:solidFill>
+              </a:rPr>
+              <a:t>모델 적중: 실제 라인업 재현 시 팀별 포인트 상관 0.99(평균 오차 20.6점), 경기 우승자 적중 37.5% → 시즌 합계로 읽는다 · STROLL과 후보는 같은 팀에서 뛴 적이 없어 비교에 "연결 그룹 평균이 같다"는 가정이 들어 있다 · VERSTAPPEN은 과대평가 가능</a:t>
+            </a:r>
+            <a:endParaRPr lang="en-US" sz="1100" dirty="0"/>
+          </a:p>
+        </p:txBody>
+      </p:sp>
+      <p:sp>
+        <p:nvSpPr>
+          <p:cNvPr id="6" name="takeaway"/>
+          <p:cNvSpPr txBox="1"/>
+          <p:nvPr/>
+        </p:nvSpPr>
+        <p:spPr>
+          <a:xfrm>
+            <a:off x="548640" y="5870448"/>
+            <a:ext cx="11109960" cy="411480"/>
+          </a:xfrm>
+          <a:prstGeom prst="rect">
+            <a:avLst/>
+          </a:prstGeom>
+          <a:noFill/>
+          <a:ln/>
+        </p:spPr>
+        <p:txBody>
+          <a:bodyPr wrap="square" lIns="0" tIns="0" rIns="0" bIns="0" rtlCol="0" anchor="t"/>
+          <a:lstStyle/>
+          <a:p>
+            <a:pPr indent="0" marL="0">
+              <a:buNone/>
+            </a:pPr>
+            <a:r>
+              <a:rPr lang="en-US" sz="1400" b="1" dirty="0">
+                <a:solidFill>
+                  <a:srgbClr val="E10600"/>
+                </a:solidFill>
+              </a:rPr>
+              <a:t>→  </a:t>
+            </a:r>
+            <a:pPr indent="0" marL="0">
+              <a:buNone/>
+            </a:pPr>
+            <a:r>
+              <a:rPr lang="en-US" sz="1400" dirty="0">
+                <a:solidFill>
+                  <a:srgbClr val="1A1A1A"/>
+                </a:solidFill>
+              </a:rPr>
+              <a:t>LECLERC는 어느 추정 기간에서도 팀 6위 확률을 크게 올린다 — RUSSELL의 이득은 기간에 따라 흔들려 차량 영향일 수 있다</a:t>
+            </a:r>
+            <a:endParaRPr lang="en-US" sz="1400" dirty="0"/>
+          </a:p>
+        </p:txBody>
+      </p:sp>
+      <p:sp>
+        <p:nvSpPr>
+          <p:cNvPr id="25" name="Slide Number Placeholder 0"/>
+          <p:cNvSpPr>
+            <a:spLocks noGrp="1"/>
+          </p:cNvSpPr>
+          <p:nvPr>
+            <p:ph type="sldNum" sz="quarter" idx="4294967295"/>
+          </p:nvPr>
+        </p:nvSpPr>
+        <p:spPr>
+          <a:xfrm>
+            <a:off x="11109960" y="6446520"/>
+            <a:ext cx="548640" cy="256032"/>
+          </a:xfrm>
+          <a:prstGeom prst="rect">
+            <a:avLst/>
+          </a:prstGeom>
+          <a:extLst>
+            <a:ext uri="{C572A759-6A51-4108-AA02-DFA0A04FC94B}">
+              <ma14:wrappingTextBoxFlag xmlns:ma14="http://schemas.microsoft.com/office/mac/drawingml/2011/main" val="0"/>
+            </a:ext>
+          </a:extLst>
+        </p:spPr>
+        <p:txBody>
+          <a:bodyPr/>
+          <a:lstStyle>
+            <a:lvl1pPr>
+              <a:defRPr sz="900">
+                <a:solidFill>
+                  <a:srgbClr val="8C8C8C"/>
+                </a:solidFill>
+                <a:latin typeface="Malgun Gothic"/>
+                <a:ea typeface="Malgun Gothic"/>
+                <a:cs typeface="Malgun Gothic"/>
+              </a:defRPr>
+            </a:lvl1pPr>
+          </a:lstStyle>
+          <a:p>
+            <a:pPr algn="r"/>
+            <a:fld id="{F7021451-1387-4CA6-816F-3879F97B5CBC}" type="slidenum">
+              <a:rPr b="0" lang="en-US"/>
+              <a:t>17</a:t>
+            </a:fld>
+            <a:endParaRPr lang="en-US"/>
           </a:p>
         </p:txBody>
       </p:sp>
@@ -21249,7 +25036,7 @@
                   <a:srgbClr val="6B6B6B"/>
                 </a:solidFill>
               </a:rPr>
-              <a:t>기준: 2023 ~ 2026-10-14 종료 본경기 87경기 · 정제 v0.2.0 · 본경기 기본 포인트(Sprint·보너스 제외)</a:t>
+              <a:t>기준: 2023 ~ 2026-10-14 종료 본경기 87경기 · 정제 v0.3.0 · 본경기 기본 포인트(Sprint·보너스 제외)</a:t>
             </a:r>
             <a:endParaRPr lang="en-US" sz="1400" dirty="0"/>
           </a:p>
@@ -21411,7 +25198,7 @@
                   <a:srgbClr val="1A1A1A"/>
                 </a:solidFill>
               </a:rPr>
-              <a:t>1,335셀</a:t>
+              <a:t>1,357셀</a:t>
             </a:r>
             <a:endParaRPr lang="en-US" sz="2800" dirty="0"/>
           </a:p>
@@ -21447,7 +25234,7 @@
                   <a:srgbClr val="6B6B6B"/>
                 </a:solidFill>
               </a:rPr>
-              <a:t>복구 (탐지 28,052건 중 근거 있는 것만)</a:t>
+              <a:t>복구 (탐지 28,071건 중 근거 있는 것만)</a:t>
             </a:r>
             <a:endParaRPr lang="en-US" sz="1100" dirty="0"/>
           </a:p>
@@ -21510,7 +25297,7 @@
                   <a:srgbClr val="1A1A1A"/>
                 </a:solidFill>
               </a:rPr>
-              <a:t>FAIL 0</a:t>
+              <a:t>FAIL 12→0</a:t>
             </a:r>
             <a:endParaRPr lang="en-US" sz="2800" dirty="0"/>
           </a:p>
@@ -21546,7 +25333,7 @@
                   <a:srgbClr val="6B6B6B"/>
                 </a:solidFill>
               </a:rPr>
-              <a:t>정제 후 검증 151개 · pandas = MySQL</a:t>
+              <a:t>정제 전 → 후 · 검증 154개 · pandas = MySQL</a:t>
             </a:r>
             <a:endParaRPr lang="en-US" sz="1100" dirty="0"/>
           </a:p>
@@ -21778,7 +25565,7 @@
                   <a:srgbClr val="6B6B6B"/>
                 </a:solidFill>
               </a:rPr>
-              <a:t>28,052건을 탐지해 근거가 있는 1,335셀만 고쳤고, 같은 151개 규칙을 pandas·MySQL에서 두 번 돌려 결과가 같았다. 통계값으로 결측을 채우지 않았다.</a:t>
+              <a:t>28,071건을 탐지해 근거가 있는 1,357셀만 고쳤고, 같은 154개 규칙을 pandas·MySQL에서 두 번 돌려 결과가 같았다. 정제 전 12건이던 FAIL이 0건이 됐고, 통계값으로 결측을 채우지 않았다.</a:t>
             </a:r>
             <a:endParaRPr lang="en-US" sz="1200" dirty="0"/>
           </a:p>
@@ -28321,7 +32108,7 @@
                   <a:srgbClr val="1A1A1A"/>
                 </a:solidFill>
               </a:rPr>
-              <a:t>탐지 28,052건 중 근거가 있는 1,335셀만 고쳤다</a:t>
+              <a:t>탐지 28,071건 중 근거가 있는 1,357셀만 고쳤다</a:t>
             </a:r>
             <a:endParaRPr lang="en-US" sz="2800" dirty="0"/>
           </a:p>
@@ -28422,7 +32209,7 @@
                   <a:srgbClr val="1A1A1A"/>
                 </a:solidFill>
               </a:rPr>
-              <a:t>28,052</a:t>
+              <a:t>28,071</a:t>
             </a:r>
             <a:endParaRPr lang="en-US" sz="2800" dirty="0"/>
           </a:p>
@@ -28521,7 +32308,7 @@
                   <a:srgbClr val="E10600"/>
                 </a:solidFill>
               </a:rPr>
-              <a:t>1,335</a:t>
+              <a:t>1,357</a:t>
             </a:r>
             <a:endParaRPr lang="en-US" sz="2800" dirty="0"/>
           </a:p>
@@ -28620,7 +32407,7 @@
                   <a:srgbClr val="1A1A1A"/>
                 </a:solidFill>
               </a:rPr>
-              <a:t>24,824</a:t>
+              <a:t>24,866</a:t>
             </a:r>
             <a:endParaRPr lang="en-US" sz="2800" dirty="0"/>
           </a:p>
@@ -28719,7 +32506,7 @@
                   <a:srgbClr val="1A1A1A"/>
                 </a:solidFill>
               </a:rPr>
-              <a:t>1,893</a:t>
+              <a:t>1,848</a:t>
             </a:r>
             <a:endParaRPr lang="en-US" sz="2800" dirty="0"/>
           </a:p>
@@ -28818,7 +32605,7 @@
                   <a:srgbClr val="1A1A1A"/>
                 </a:solidFill>
               </a:rPr>
-              <a:t>2</a:t>
+              <a:t>4</a:t>
             </a:r>
             <a:endParaRPr lang="en-US" sz="2800" dirty="0"/>
           </a:p>
@@ -29185,7 +32972,7 @@
                   <a:srgbClr val="1A1A1A"/>
                 </a:solidFill>
               </a:rPr>
-              <a:t>같은 151개 규칙을 두 번 돌려 결과가 같았다</a:t>
+              <a:t>같은 154개 규칙을 두 번 돌려 결과가 같았다</a:t>
             </a:r>
             <a:endParaRPr lang="en-US" sz="2800" dirty="0"/>
           </a:p>
@@ -29311,7 +33098,7 @@
                   <a:srgbClr val="6B6B6B"/>
                 </a:solidFill>
               </a:rPr>
-              <a:t>151개 검사 · WARN 7</a:t>
+              <a:t>정제 전 FAIL 12</a:t>
             </a:r>
             <a:endParaRPr lang="en-US" sz="1200" dirty="0"/>
           </a:p>
@@ -29471,7 +33258,7 @@
                   <a:srgbClr val="6B6B6B"/>
                 </a:solidFill>
               </a:rPr>
-              <a:t>같은 검사 ID·대상의 위반 건수가 151개 모두 일치</a:t>
+              <a:t>같은 검사 ID·대상의 위반 건수가 154개 모두 일치</a:t>
             </a:r>
             <a:endParaRPr lang="en-US" sz="1200" dirty="0"/>
           </a:p>
@@ -29631,7 +33418,7 @@
                   <a:srgbClr val="6B6B6B"/>
                 </a:solidFill>
               </a:rPr>
-              <a:t>원본 120,873 = 유지 119,579 + 복구 1,292 + 격리 2 + 제거 0</a:t>
+              <a:t>원본 120,873 = 유지 119,575 + 복구 1,294 + 격리 4 + 제거 0</a:t>
             </a:r>
             <a:endParaRPr lang="en-US" sz="1200" dirty="0"/>
           </a:p>

--- a/docs/F1_TeamBuilder_발표자료.pptx
+++ b/docs/F1_TeamBuilder_발표자료.pptx
@@ -2738,10 +2738,8 @@
           <a:lstStyle/>
           <a:p>
             <a:r>
-              <a:rPr lang="en-US" dirty="0"/>
-              <a:t>F1 팀이 드라이버를 영입할 때 가장 빠른 선수가 아니라 우리 팀의 약점을 메울 선수를 데이터로 찾는 것이 질문입니다. 모든 숫자는 같은 기준에서 나왔고, 결론은 RUSSELL과 LECLERC 두 명입니다.</a:t>
-            </a:r>
-            <a:endParaRPr lang="en-US" dirty="0"/>
+              <a:t>F1 팀이 드라이버를 영입할 때 가장 빠른 선수가 아니라 우리 팀의 약점을 메울 선수를 데이터로 찾는 것이 질문입니다. 모든 숫자는 같은 기준에서 나왔고, 결론은 LECLERC를 1순위, RUSSELL을 2순위로 검토하는 것입니다.</a:t>
+            </a:r>
           </a:p>
         </p:txBody>
       </p:sp>
@@ -3090,10 +3088,8 @@
           <a:lstStyle/>
           <a:p>
             <a:r>
-              <a:rPr lang="en-US" dirty="0"/>
-              <a:t>가설 여섯 개를 판정했습니다. 라인업 가설은 중앙값이 느리게 나왔지만 95% 구간이 0을 포함해 보류했습니다. 타이어는 방향은 같지만 크기가 가장 작아 약점으로 보지 않습니다.</a:t>
-            </a:r>
-            <a:endParaRPr lang="en-US" dirty="0"/>
+              <a:t>가설 여섯 개를 판정했습니다. 라인업 가설은 STROLL이 동료 ALONSO보다 중앙값이 느리게 나왔지만 95% 구간이 0을 포함해 보류했습니다. 그래서 "STROLL 탓"이라고 단정하지 않고, ③에서 후보가 차가 아닌 선수 몫의 페이스를 가져오는지를 따로 확인합니다. 타이어는 방향은 같지만 크기가 가장 작아 약점으로 보지 않습니다. 마지막 가설은 ③에서 11가지 조건으로 확인합니다.</a:t>
+            </a:r>
           </a:p>
         </p:txBody>
       </p:sp>
@@ -3354,7 +3350,7 @@
           <a:lstStyle/>
           <a:p>
             <a:r>
-              <a:t>세 번째 섹션은 후보 검토입니다. 같은 경기 비교와 같은 차 동료 비교로 같은 환경을 두 단계로 나누고, 우리 약점에서 출발한 기준으로 후보를 고릅니다.</a:t>
+              <a:t>세 번째 섹션은 후보 검토입니다. ②에서 STROLL 개인이 원인인지는 보류했기 때문에, 후보가 차가 아니라 선수 몫의 페이스를 가져오는지를 확인합니다. 같은 경기 비교와 같은 차 동료 비교로 같은 환경을 두 단계로 나누고, 우리 약점에서 출발한 기준으로 고릅니다.</a:t>
             </a:r>
           </a:p>
         </p:txBody>
@@ -3440,10 +3436,8 @@
           <a:lstStyle/>
           <a:p>
             <a:r>
-              <a:rPr lang="en-US" dirty="0"/>
-              <a:t>후보를 하나의 점수로 줄 세우지 않습니다. 같은 표에서 보면 지표마다 앞서는 선수가 다릅니다. 네 조건을 모두 통과한 후보는 RUSSELL과 LECLERC입니다.</a:t>
-            </a:r>
-            <a:endParaRPr lang="en-US" dirty="0"/>
+              <a:t>후보를 하나의 점수로 줄 세우지 않습니다. 같은 표에서 보면 지표마다 앞서는 선수가 다릅니다. 네 조건을 모두 통과한 후보는 LECLERC와 RUSSELL입니다. 포인트는 차량이 대부분을 정해 참고로만 둡니다.</a:t>
+            </a:r>
           </a:p>
         </p:txBody>
       </p:sp>
@@ -3528,10 +3522,8 @@
           <a:lstStyle/>
           <a:p>
             <a:r>
-              <a:rPr lang="en-US" dirty="0"/>
-              <a:t>후보 19명 중 7명이 기준 선수보다 빨랐고, 그중 자기 팀 동료 대비 우위까지 모든 조건에서 반복된 선수는 RUSSELL과 LECLERC 두 명입니다. RUSSELL은 일관성이 상위 10%라 1순위로, LECLERC는 페이스 우위가 가장 크지만 타이어 유지가 하위라 2순위로 둡니다. 계약 가능성과 이적 후 성과는 판단하지 않습니다.</a:t>
-            </a:r>
-            <a:endParaRPr lang="en-US" dirty="0"/>
+              <a:t>후보 19명 중 7명이 같은 경기 비교에서 11가지 조건, 95% 구간, 시즌 전·후반 모두 기준 선수보다 빨랐고, 그중 같은 차 동료 비교까지 11/11 조건에서 빠른 선수는 LECLERC와 RUSSELL 두 명입니다. 같은 동료 HAMILTON 기준으로 재면 LECLERC는 9경기 모두 빨랐고 RUSSELL은 비슷했습니다. 그래서 LECLERC를 1순위, RUSSELL을 2순위로 둡니다. 2026 시즌으로 확인해 보면 RUSSELL은 ANTONELLI에게 뒤집혔고 LECLERC는 HAMILTON과 비슷해져, 둘 다 확정이 아니라 우선 검토입니다. 계약 가능성과 이적 후 성과는 판단하지 않습니다.</a:t>
+            </a:r>
           </a:p>
         </p:txBody>
       </p:sp>
@@ -3704,7 +3696,7 @@
           <a:lstStyle/>
           <a:p>
             <a:r>
-              <a:t>결론부터 말씀드립니다. 2025 Aston Martin의 STROLL 자리에는 RUSSELL을 1순위로 검토합니다. RUSSELL과 LECLERC는 같은 경기 비교와 같은 차 동료 비교 모두에서 빠릅니다. 둘 중 RUSSELL은 우리 팀 강점인 타이어 유지를 지키고, LECLERC는 페이스 근거가 더 크지만 타이어 유지를 확인한 뒤 2순위로 둡니다. 영입과 별개로 피트레인 손실은 지금 바로 점검할 수 있습니다.</a:t>
+              <a:t>결론부터 말씀드립니다. 2025 Aston Martin의 STROLL 자리에는 LECLERC를 1순위, RUSSELL을 2순위로 검토합니다. 두 선수 모두 같은 경기 비교와 같은 차 동료 비교에서 11가지 조건 모두 빠릅니다. 둘을 가르는 것은 같은 자로 잰 비교입니다. 두 선수 모두 같은 차에서 HAMILTON과 달린 적이 있어, 같은 동료를 기준으로 재면 LECLERC는 9경기 모두 빨랐고 RUSSELL은 비슷했습니다. 교체 시뮬레이션도 같은 방향입니다. LECLERC의 타이어 유지는 영입 전에 장기 스틴트로 확인합니다. 영입과 별개로 피트레인 손실은 지금 바로 점검할 수 있습니다.</a:t>
             </a:r>
           </a:p>
         </p:txBody>
@@ -4054,10 +4046,8 @@
           <a:lstStyle/>
           <a:p>
             <a:r>
-              <a:rPr lang="en-US" dirty="0"/>
-              <a:t>다섯 가지 제안입니다. RUSSELL·LECLERC 우선 검토, 가장 빠른 후보를 바로 고르지 않는 보수적 기준, 피트레인 손실 점검, 접전 구간의 경기별 결과 추적, 그리고 LECLERC의 장기 스틴트 타이어 유지 확인입니다.</a:t>
-            </a:r>
-            <a:endParaRPr lang="en-US" dirty="0"/>
+              <a:t>다섯 가지 제안입니다. LECLERC를 1순위로 한 우선 검토, 가장 빠른 후보를 바로 고르지 않는 보수적 기준, 피트레인 손실 점검, 접전 구간의 경기별 결과 추적, 그리고 1순위 LECLERC의 장기 스틴트 타이어 유지 확인입니다.</a:t>
+            </a:r>
           </a:p>
         </p:txBody>
       </p:sp>
@@ -4142,10 +4132,8 @@
           <a:lstStyle/>
           <a:p>
             <a:r>
-              <a:rPr lang="en-US" dirty="0"/>
-              <a:t>관측 기록, 적합성 해석, 경제적 기회의 정성 설명을 분리해서 말합니다. 이 분석은 판단을 돕는 근거이지 결과를 예측하는 모델이 아닙니다.</a:t>
-            </a:r>
-            <a:endParaRPr lang="en-US" dirty="0"/>
+              <a:t>한계를 분명히 말씀드립니다. 첫째, 같은 경기 비교에는 차량 몫이 섞여 있어 후보를 거르는 데만 썼습니다. 둘째, 두 후보를 같은 HAMILTON 기준으로 쟀지만 2025는 HAMILTON의 Ferrari 첫해였고, 2026에는 LECLERC의 우위도 0 근처로 줄었습니다. 셋째, STROLL은 ALONSO하고만 같은 차를 타서 STROLL 쪽 차량 몫은 분리할 수 없습니다. 넷째, 정제 데이터로 다시 계산한 값은 Gold와 방향은 같지만 크기가 다르고, 타이어 유지 지표는 시즌마다 흔들립니다. 그래서 결론은 확정이 아니라 우선 검토 순서입니다.</a:t>
+            </a:r>
           </a:p>
         </p:txBody>
       </p:sp>
@@ -4318,10 +4306,8 @@
           <a:lstStyle/>
           <a:p>
             <a:r>
-              <a:rPr lang="en-US" dirty="0"/>
-              <a:t>정리하면, STROLL 자리의 우선 검토 후보는 RUSSELL과 LECLERC이고, 영입과 별개로 피트레인 손실을 먼저 점검해야 합니다. 감사합니다.</a:t>
-            </a:r>
-            <a:endParaRPr lang="en-US" dirty="0"/>
+              <a:t>정리하면, STROLL 자리의 우선 검토 후보는 LECLERC(1순위)와 RUSSELL이고, 영입과 별개로 피트레인 손실을 먼저 점검해야 합니다. 감사합니다.</a:t>
+            </a:r>
           </a:p>
         </p:txBody>
       </p:sp>
@@ -4406,10 +4392,8 @@
           <a:lstStyle/>
           <a:p>
             <a:r>
-              <a:rPr lang="en-US" dirty="0"/>
-              <a:t>영입하면 성적이 얼마나 바뀌는지 확인하려고 2025 시즌을 4,000번 다시 치렀습니다. 지금 라인업은 시즌 1승 확률이 0.1%이고, 대부분 후보도 1~3%에 머뭅니다. 우승은 차량이 거의 정합니다. 현실적인 목표는 팀 6위이고, LECLERC로 바꾸면 6위 이내 확률이 9%에서 65%로 오릅니다. RUSSELL은 2025만 보면 효과가 크지만 2023~2025로 보면 거의 사라져, 앞의 우위가 차량 덕분일 수 있다는 신호입니다. 이 슬라이드는 관측 기록이 아니라 가정 위의 추정이라 결론을 바꾸지 않습니다. 관측 기록으로는 RUSSELL이 1순위이고, 이 결과 때문에 RUSSELL은 확정이 아니라 우선 검토이며 다음 시즌 데이터로 다시 판정할 첫 번째 항목입니다.</a:t>
-            </a:r>
-            <a:endParaRPr lang="en-US" dirty="0"/>
+              <a:t>영입하면 성적이 얼마나 바뀌는지 확인하려고 2025 시즌을 4,000번 다시 치렀습니다. 지금 라인업은 시즌 1승 확률이 0.1%이고, 대부분 후보도 1~3%에 머뭅니다. 우승은 차량이 거의 정합니다. 현실적인 목표는 팀 6위이고, LECLERC로 바꾸면 6위 이내 확률이 9%에서 65%로 오릅니다. RUSSELL은 2025만 보면 효과가 크지만 2023~2025로 보면 거의 사라집니다. 차량 효과를 분리한 이 추정도 관측 기록의 같은 자 비교와 같은 방향, 즉 LECLERC 1순위를 지지합니다. 다만 가정 위의 추정이라 보조 근거로만 씁니다.</a:t>
+            </a:r>
           </a:p>
         </p:txBody>
       </p:sp>
@@ -4564,7 +4548,7 @@
           <a:lstStyle/>
           <a:p>
             <a:r>
-              <a:t>선정 기준은 우리 팀 진단에서 출발합니다. 약점인 기본 페이스는 메워야 하고, 강점인 타이어 유지는 지켜야 하고, 피트는 선수가 아니라 팀 운영 과제입니다. RUSSELL과 LECLERC 모두 페이스 기준을 통과합니다. 둘을 가르는 것은 타이어 유지입니다. RUSSELL은 60%로 STROLL과 비슷하고, LECLERC는 95%로 하위라 우리 강점을 깎을 수 있습니다. 다만 페이스 근거만 보면 LECLERC가 더 크고 더 강한 동료를 이겼다는 점은 그대로 말합니다.</a:t>
+              <a:t>선정 기준은 우리 팀 진단에서 출발합니다. 약점인 기본 페이스는 메우고, 강점인 타이어 유지는 잃지 않고, 피트는 선수가 아니라 팀 운영 과제로 둡니다. LECLERC와 RUSSELL 모두 같은 경기 비교와 같은 차 동료 비교를 통과합니다. 다만 동료가 다릅니다. RUSSELL의 동료 ANTONELLI는 신인입니다. 그래서 두 후보 모두 같은 차에서 함께 달린 적이 있는 HAMILTON을 같은 자로 썼습니다. 정제 데이터에서 직접 다시 계산하면 LECLERC는 HAMILTON보다 랩당 0.217초 빠르고 9경기 모두 빨랐으며, RUSSELL은 0.037초 느려 21경기 중 8경기만 빨랐습니다. 타이어 유지는 2025 한 시즌으로는 LECLERC가 하위지만, 2023~2025로 보면 둘의 차이가 오차 범위 안이라 순위를 가르지 않고 영입 전 확인 과제로 둡니다. HAMILTON은 2025가 Ferrari 첫해라 LECLERC가 유리하게 보였을 수 있다는 점도 함께 말합니다.</a:t>
             </a:r>
           </a:p>
         </p:txBody>
@@ -4634,10 +4618,8 @@
           <a:lstStyle/>
           <a:p>
             <a:r>
-              <a:rPr lang="en-US" dirty="0"/>
-              <a:t>결론부터 말씀드립니다. 데이터는 믿을 수 있게 만들었고, Aston Martin의 약점은 페이스와 피트 운영이며, 우선 검토 후보는 RUSSELL과 LECLERC 두 명입니다. 이후 섹션은 이 세 문장의 근거입니다.</a:t>
-            </a:r>
-            <a:endParaRPr lang="en-US" dirty="0"/>
+              <a:t>결론부터 말씀드립니다. 데이터는 믿을 수 있게 만들었고, Aston Martin의 약점은 페이스와 피트 운영이며, 우선 검토 후보는 LECLERC(1순위)와 RUSSELL 두 명입니다. 이후 섹션은 이 세 문장의 근거입니다.</a:t>
+            </a:r>
           </a:p>
         </p:txBody>
       </p:sp>
@@ -6227,7 +6209,7 @@
                   <a:srgbClr val="D0D0D0"/>
                 </a:solidFill>
               </a:rPr>
-              <a:t>오염 데이터 6종과 분석 중 추가 수집한 5종, 87경기를 정제·검증해 직접 분석했습니다. 이 보고서의 모든 숫자는 같은 기준(2023 ~ 2026-10-14 종료 본경기, 정제 v0.3.0)에서 나왔습니다.</a:t>
+              <a:t>오염 데이터 6종과 분석 중 추가 수집한 5종, 87경기를 정제·검증해 직접 분석했습니다. 이 보고서의 모든 숫자는 같은 기준(2023 ~ 2026-10-14 종료 본경기, 정제 v0.3.0)에서 나왔습니다. 후보 지표(Gold)만 v0.2.0 결과 파일입니다.</a:t>
             </a:r>
             <a:endParaRPr lang="en-US" sz="1500" dirty="0"/>
           </a:p>
@@ -6263,7 +6245,7 @@
                   <a:srgbClr val="E10600"/>
                 </a:solidFill>
               </a:rPr>
-              <a:t>RUSSELL</a:t>
+              <a:t>LECLERC</a:t>
             </a:r>
             <a:endParaRPr lang="en-US" sz="3600" dirty="0"/>
           </a:p>
@@ -6277,7 +6259,7 @@
                   <a:srgbClr val="E10600"/>
                 </a:solidFill>
               </a:rPr>
-              <a:t>LECLERC</a:t>
+              <a:t>RUSSELL</a:t>
             </a:r>
             <a:endParaRPr lang="en-US" sz="3600" dirty="0"/>
           </a:p>
@@ -6327,7 +6309,7 @@
                   <a:srgbClr val="B5B5B5"/>
                 </a:solidFill>
               </a:rPr>
-              <a:t>네 조건을 모두 통과한 우선 검토 후보</a:t>
+              <a:t>같은 경기·같은 차 비교를 모두 통과한 우선 검토 후보</a:t>
             </a:r>
             <a:endParaRPr lang="en-US" sz="1200" dirty="0"/>
           </a:p>
@@ -6355,6 +6337,10 @@
             <a:prstDash val="solid"/>
           </a:ln>
         </p:spPr>
+        <p:txBody>
+          <a:bodyPr/>
+          <a:p/>
+        </p:txBody>
       </p:sp>
       <p:sp>
         <p:nvSpPr>
@@ -8095,6 +8081,10 @@
             <a:prstDash val="solid"/>
           </a:ln>
         </p:spPr>
+        <p:txBody>
+          <a:bodyPr/>
+          <a:p/>
+        </p:txBody>
       </p:sp>
       <p:sp>
         <p:nvSpPr>
@@ -8120,6 +8110,10 @@
             <a:prstDash val="solid"/>
           </a:ln>
         </p:spPr>
+        <p:txBody>
+          <a:bodyPr/>
+          <a:p/>
+        </p:txBody>
       </p:sp>
       <p:sp>
         <p:nvSpPr>
@@ -8291,6 +8285,10 @@
             <a:prstDash val="solid"/>
           </a:ln>
         </p:spPr>
+        <p:txBody>
+          <a:bodyPr/>
+          <a:p/>
+        </p:txBody>
       </p:sp>
       <p:sp>
         <p:nvSpPr>
@@ -8316,6 +8314,10 @@
             <a:prstDash val="solid"/>
           </a:ln>
         </p:spPr>
+        <p:txBody>
+          <a:bodyPr/>
+          <a:p/>
+        </p:txBody>
       </p:sp>
       <p:sp>
         <p:nvSpPr>
@@ -8487,6 +8489,10 @@
             <a:prstDash val="solid"/>
           </a:ln>
         </p:spPr>
+        <p:txBody>
+          <a:bodyPr/>
+          <a:p/>
+        </p:txBody>
       </p:sp>
       <p:sp>
         <p:nvSpPr>
@@ -8512,6 +8518,10 @@
             <a:prstDash val="solid"/>
           </a:ln>
         </p:spPr>
+        <p:txBody>
+          <a:bodyPr/>
+          <a:p/>
+        </p:txBody>
       </p:sp>
       <p:sp>
         <p:nvSpPr>
@@ -8683,6 +8693,10 @@
             <a:prstDash val="solid"/>
           </a:ln>
         </p:spPr>
+        <p:txBody>
+          <a:bodyPr/>
+          <a:p/>
+        </p:txBody>
       </p:sp>
       <p:sp>
         <p:nvSpPr>
@@ -8708,6 +8722,10 @@
             <a:prstDash val="solid"/>
           </a:ln>
         </p:spPr>
+        <p:txBody>
+          <a:bodyPr/>
+          <a:p/>
+        </p:txBody>
       </p:sp>
       <p:sp>
         <p:nvSpPr>
@@ -8879,6 +8897,10 @@
             <a:prstDash val="solid"/>
           </a:ln>
         </p:spPr>
+        <p:txBody>
+          <a:bodyPr/>
+          <a:p/>
+        </p:txBody>
       </p:sp>
       <p:sp>
         <p:nvSpPr>
@@ -8904,6 +8926,10 @@
             <a:prstDash val="solid"/>
           </a:ln>
         </p:spPr>
+        <p:txBody>
+          <a:bodyPr/>
+          <a:p/>
+        </p:txBody>
       </p:sp>
       <p:sp>
         <p:nvSpPr>
@@ -9075,6 +9101,10 @@
             <a:prstDash val="solid"/>
           </a:ln>
         </p:spPr>
+        <p:txBody>
+          <a:bodyPr/>
+          <a:p/>
+        </p:txBody>
       </p:sp>
       <p:sp>
         <p:nvSpPr>
@@ -9100,6 +9130,10 @@
             <a:prstDash val="solid"/>
           </a:ln>
         </p:spPr>
+        <p:txBody>
+          <a:bodyPr/>
+          <a:p/>
+        </p:txBody>
       </p:sp>
       <p:sp>
         <p:nvSpPr>
@@ -9203,7 +9237,7 @@
                   <a:srgbClr val="1A1A1A"/>
                 </a:solidFill>
               </a:rPr>
-              <a:t>“정제 기준을 바꿔도 후보 RUSSELL이 빠를 것”</a:t>
+              <a:t>“정제 기준을 바꿔도 후보 비교 결과가 유지될 것”</a:t>
             </a:r>
             <a:endParaRPr lang="en-US" sz="1300" dirty="0"/>
           </a:p>
@@ -9239,7 +9273,7 @@
                   <a:srgbClr val="1A1A1A"/>
                 </a:solidFill>
               </a:rPr>
-              <a:t>11 / 11 조건 · 동료 대비도 11 / 11</a:t>
+              <a:t>11가지 조건으로 재계산 · 결과는 ③에서</a:t>
             </a:r>
             <a:endParaRPr lang="en-US" sz="1200" dirty="0"/>
           </a:p>
@@ -14164,7 +14198,7 @@
                   <a:srgbClr val="1A1A1A"/>
                 </a:solidFill>
               </a:rPr>
-              <a:t>가장 빠른 세 명이 아니라 RUSSELL·LECLERC가 끝까지 남았다 — 빠른 선수와 팀에 맞는 선수는 다르다</a:t>
+              <a:t>가장 빠른 세 명이 아니라 LECLERC·RUSSELL이 끝까지 남았다 — 빠른 선수와 팀에 맞는 선수는 다르다</a:t>
             </a:r>
             <a:endParaRPr lang="en-US" sz="1400" dirty="0"/>
           </a:p>
@@ -14306,7 +14340,7 @@
                   <a:srgbClr val="6B6B6B"/>
                 </a:solidFill>
               </a:rPr>
-              <a:t>① 같은 경기 비교(차량 포함) × ② 같은 차 동료 비교(선수만) · 2025 STROLL 자리 타 팀 후보 18명 · 정제 조건 11가지로 반복 확인</a:t>
+              <a:t>① 같은 경기 비교(차량 포함) × ② 같은 차 동료 비교(선수만) · 2025 STROLL 자리 타 팀 후보 19명 중 판정 가능한 18명(DOOHAN 표본 부족) · 정제 조건 11가지로 반복 확인</a:t>
             </a:r>
             <a:endParaRPr lang="en-US" sz="1400" dirty="0"/>
           </a:p>
@@ -15889,6 +15923,19 @@
                         <a:t>② 같은 차 동료 비교</a:t>
                       </a:r>
                     </a:p>
+                    <a:p>
+                      <a:pPr algn="l" indent="0" marL="0">
+                        <a:buNone/>
+                      </a:pPr>
+                      <a:r>
+                        <a:rPr lang="en-US" sz="1100" b="0" dirty="0">
+                          <a:solidFill>
+                            <a:srgbClr val="6B6B6B"/>
+                          </a:solidFill>
+                        </a:rPr>
+                        <a:t>Gold 2025</a:t>
+                      </a:r>
+                    </a:p>
                   </a:txBody>
                   <a:tcPr marL="91440" marR="91440" marT="45720" marB="45720" anchor="ctr">
                     <a:lnL w="9525" cap="flat" cmpd="sng" algn="ctr">
@@ -15946,7 +15993,20 @@
                             <a:srgbClr val="6B6B6B"/>
                           </a:solidFill>
                         </a:rPr>
-                        <a:t>11/11 조건에서 동료보다 빠름</a:t>
+                        <a:t>11/11 조건에서</a:t>
+                      </a:r>
+                    </a:p>
+                    <a:p>
+                      <a:pPr algn="l" indent="0" marL="0">
+                        <a:buNone/>
+                      </a:pPr>
+                      <a:r>
+                        <a:rPr lang="en-US" sz="1100" b="0" dirty="0">
+                          <a:solidFill>
+                            <a:srgbClr val="6B6B6B"/>
+                          </a:solidFill>
+                        </a:rPr>
+                        <a:t>동료보다 빠름</a:t>
                       </a:r>
                     </a:p>
                   </a:txBody>
@@ -16019,7 +16079,7 @@
                             <a:srgbClr val="E10600"/>
                           </a:solidFill>
                         </a:rPr>
-                        <a:t>ANTONELLI</a:t>
+                        <a:t>신인 ANTONELLI</a:t>
                       </a:r>
                     </a:p>
                   </a:txBody>
@@ -16274,20 +16334,7 @@
                             <a:srgbClr val="1A1A1A"/>
                           </a:solidFill>
                         </a:rPr>
-                        <a:t>타이어 유지 강함</a:t>
-                      </a:r>
-                    </a:p>
-                    <a:p>
-                      <a:pPr algn="l" indent="0" marL="0">
-                        <a:buNone/>
-                      </a:pPr>
-                      <a:r>
-                        <a:rPr lang="en-US" sz="1100" b="1" dirty="0">
-                          <a:solidFill>
-                            <a:srgbClr val="1A1A1A"/>
-                          </a:solidFill>
-                        </a:rPr>
-                        <a:t>10팀 중 1위</a:t>
+                        <a:t>같은 자로 재면</a:t>
                       </a:r>
                     </a:p>
                   </a:txBody>
@@ -16347,7 +16394,7 @@
                             <a:srgbClr val="6B6B6B"/>
                           </a:solidFill>
                         </a:rPr>
-                        <a:t>예 → 지킨다</a:t>
+                        <a:t>—</a:t>
                       </a:r>
                     </a:p>
                   </a:txBody>
@@ -16390,6 +16437,540 @@
                     </a:lnB>
                     <a:solidFill>
                       <a:srgbClr val="F4F4F4"/>
+                    </a:solidFill>
+                  </a:tcPr>
+                </a:tc>
+                <a:tc>
+                  <a:txBody>
+                    <a:bodyPr/>
+                    <a:lstStyle/>
+                    <a:p>
+                      <a:pPr algn="l" indent="0" marL="0">
+                        <a:buNone/>
+                      </a:pPr>
+                      <a:r>
+                        <a:rPr lang="en-US" sz="1100" dirty="0" b="0">
+                          <a:solidFill>
+                            <a:srgbClr val="6B6B6B"/>
+                          </a:solidFill>
+                        </a:rPr>
+                        <a:t>같은 동료 HAMILTON 대비</a:t>
+                      </a:r>
+                    </a:p>
+                    <a:p>
+                      <a:pPr algn="l" indent="0" marL="0">
+                        <a:buNone/>
+                      </a:pPr>
+                      <a:r>
+                        <a:rPr lang="en-US" sz="1100" dirty="0" b="0">
+                          <a:solidFill>
+                            <a:srgbClr val="6B6B6B"/>
+                          </a:solidFill>
+                        </a:rPr>
+                        <a:t>Silver 재계산</a:t>
+                      </a:r>
+                    </a:p>
+                  </a:txBody>
+                  <a:tcPr marL="91440" marR="91440" marT="45720" marB="45720" anchor="ctr">
+                    <a:lnL w="9525" cap="flat" cmpd="sng" algn="ctr">
+                      <a:solidFill>
+                        <a:srgbClr val="E5E5E5"/>
+                      </a:solidFill>
+                      <a:prstDash val="solid"/>
+                      <a:round/>
+                      <a:headEnd type="none" w="med" len="med"/>
+                      <a:tailEnd type="none" w="med" len="med"/>
+                    </a:lnL>
+                    <a:lnR w="9525" cap="flat" cmpd="sng" algn="ctr">
+                      <a:solidFill>
+                        <a:srgbClr val="E5E5E5"/>
+                      </a:solidFill>
+                      <a:prstDash val="solid"/>
+                      <a:round/>
+                      <a:headEnd type="none" w="med" len="med"/>
+                      <a:tailEnd type="none" w="med" len="med"/>
+                    </a:lnR>
+                    <a:lnT w="9525" cap="flat" cmpd="sng" algn="ctr">
+                      <a:solidFill>
+                        <a:srgbClr val="E5E5E5"/>
+                      </a:solidFill>
+                      <a:prstDash val="solid"/>
+                      <a:round/>
+                      <a:headEnd type="none" w="med" len="med"/>
+                      <a:tailEnd type="none" w="med" len="med"/>
+                    </a:lnT>
+                    <a:lnB w="9525" cap="flat" cmpd="sng" algn="ctr">
+                      <a:solidFill>
+                        <a:srgbClr val="E5E5E5"/>
+                      </a:solidFill>
+                      <a:prstDash val="solid"/>
+                      <a:round/>
+                      <a:headEnd type="none" w="med" len="med"/>
+                      <a:tailEnd type="none" w="med" len="med"/>
+                    </a:lnB>
+                    <a:solidFill>
+                      <a:srgbClr val="F4F4F4"/>
+                    </a:solidFill>
+                  </a:tcPr>
+                </a:tc>
+                <a:tc>
+                  <a:txBody>
+                    <a:bodyPr/>
+                    <a:lstStyle/>
+                    <a:p>
+                      <a:pPr algn="l" indent="0" marL="0">
+                        <a:buNone/>
+                      </a:pPr>
+                      <a:r>
+                        <a:rPr lang="en-US" sz="1100" dirty="0" b="0">
+                          <a:solidFill>
+                            <a:srgbClr val="6B6B6B"/>
+                          </a:solidFill>
+                        </a:rPr>
+                        <a:t>95% 구간 0 미만</a:t>
+                      </a:r>
+                    </a:p>
+                  </a:txBody>
+                  <a:tcPr marL="91440" marR="91440" marT="45720" marB="45720" anchor="ctr">
+                    <a:lnL w="9525" cap="flat" cmpd="sng" algn="ctr">
+                      <a:solidFill>
+                        <a:srgbClr val="E5E5E5"/>
+                      </a:solidFill>
+                      <a:prstDash val="solid"/>
+                      <a:round/>
+                      <a:headEnd type="none" w="med" len="med"/>
+                      <a:tailEnd type="none" w="med" len="med"/>
+                    </a:lnL>
+                    <a:lnR w="9525" cap="flat" cmpd="sng" algn="ctr">
+                      <a:solidFill>
+                        <a:srgbClr val="E5E5E5"/>
+                      </a:solidFill>
+                      <a:prstDash val="solid"/>
+                      <a:round/>
+                      <a:headEnd type="none" w="med" len="med"/>
+                      <a:tailEnd type="none" w="med" len="med"/>
+                    </a:lnR>
+                    <a:lnT w="9525" cap="flat" cmpd="sng" algn="ctr">
+                      <a:solidFill>
+                        <a:srgbClr val="E5E5E5"/>
+                      </a:solidFill>
+                      <a:prstDash val="solid"/>
+                      <a:round/>
+                      <a:headEnd type="none" w="med" len="med"/>
+                      <a:tailEnd type="none" w="med" len="med"/>
+                    </a:lnT>
+                    <a:lnB w="9525" cap="flat" cmpd="sng" algn="ctr">
+                      <a:solidFill>
+                        <a:srgbClr val="E5E5E5"/>
+                      </a:solidFill>
+                      <a:prstDash val="solid"/>
+                      <a:round/>
+                      <a:headEnd type="none" w="med" len="med"/>
+                      <a:tailEnd type="none" w="med" len="med"/>
+                    </a:lnB>
+                    <a:solidFill>
+                      <a:srgbClr val="F4F4F4"/>
+                    </a:solidFill>
+                  </a:tcPr>
+                </a:tc>
+                <a:tc>
+                  <a:txBody>
+                    <a:bodyPr/>
+                    <a:lstStyle/>
+                    <a:p>
+                      <a:pPr algn="l" indent="0" marL="0">
+                        <a:buNone/>
+                      </a:pPr>
+                      <a:r>
+                        <a:rPr lang="en-US" sz="1100" dirty="0" b="0">
+                          <a:solidFill>
+                            <a:srgbClr val="6B6B6B"/>
+                          </a:solidFill>
+                        </a:rPr>
+                        <a:t>미달 +0.037초</a:t>
+                      </a:r>
+                    </a:p>
+                    <a:p>
+                      <a:pPr algn="l" indent="0" marL="0">
+                        <a:buNone/>
+                      </a:pPr>
+                      <a:r>
+                        <a:rPr lang="en-US" sz="1100" dirty="0" b="0">
+                          <a:solidFill>
+                            <a:srgbClr val="6B6B6B"/>
+                          </a:solidFill>
+                        </a:rPr>
+                        <a:t>8/21경기 (2023~24)</a:t>
+                      </a:r>
+                    </a:p>
+                  </a:txBody>
+                  <a:tcPr marL="91440" marR="91440" marT="45720" marB="45720" anchor="ctr">
+                    <a:lnL w="9525" cap="flat" cmpd="sng" algn="ctr">
+                      <a:solidFill>
+                        <a:srgbClr val="E5E5E5"/>
+                      </a:solidFill>
+                      <a:prstDash val="solid"/>
+                      <a:round/>
+                      <a:headEnd type="none" w="med" len="med"/>
+                      <a:tailEnd type="none" w="med" len="med"/>
+                    </a:lnL>
+                    <a:lnR w="9525" cap="flat" cmpd="sng" algn="ctr">
+                      <a:solidFill>
+                        <a:srgbClr val="E5E5E5"/>
+                      </a:solidFill>
+                      <a:prstDash val="solid"/>
+                      <a:round/>
+                      <a:headEnd type="none" w="med" len="med"/>
+                      <a:tailEnd type="none" w="med" len="med"/>
+                    </a:lnR>
+                    <a:lnT w="9525" cap="flat" cmpd="sng" algn="ctr">
+                      <a:solidFill>
+                        <a:srgbClr val="E5E5E5"/>
+                      </a:solidFill>
+                      <a:prstDash val="solid"/>
+                      <a:round/>
+                      <a:headEnd type="none" w="med" len="med"/>
+                      <a:tailEnd type="none" w="med" len="med"/>
+                    </a:lnT>
+                    <a:lnB w="9525" cap="flat" cmpd="sng" algn="ctr">
+                      <a:solidFill>
+                        <a:srgbClr val="E5E5E5"/>
+                      </a:solidFill>
+                      <a:prstDash val="solid"/>
+                      <a:round/>
+                      <a:headEnd type="none" w="med" len="med"/>
+                      <a:tailEnd type="none" w="med" len="med"/>
+                    </a:lnB>
+                    <a:solidFill>
+                      <a:srgbClr val="F4F4F4"/>
+                    </a:solidFill>
+                  </a:tcPr>
+                </a:tc>
+                <a:tc>
+                  <a:txBody>
+                    <a:bodyPr/>
+                    <a:lstStyle/>
+                    <a:p>
+                      <a:pPr algn="l" indent="0" marL="0">
+                        <a:buNone/>
+                      </a:pPr>
+                      <a:r>
+                        <a:rPr lang="en-US" sz="1100" dirty="0" b="1">
+                          <a:solidFill>
+                            <a:srgbClr val="E10600"/>
+                          </a:solidFill>
+                        </a:rPr>
+                        <a:t>통과 −0.217초</a:t>
+                      </a:r>
+                    </a:p>
+                    <a:p>
+                      <a:pPr algn="l" indent="0" marL="0">
+                        <a:buNone/>
+                      </a:pPr>
+                      <a:r>
+                        <a:rPr lang="en-US" sz="1100" dirty="0" b="1">
+                          <a:solidFill>
+                            <a:srgbClr val="E10600"/>
+                          </a:solidFill>
+                        </a:rPr>
+                        <a:t>9/9경기 (2025)</a:t>
+                      </a:r>
+                    </a:p>
+                  </a:txBody>
+                  <a:tcPr marL="91440" marR="91440" marT="45720" marB="45720" anchor="ctr">
+                    <a:lnL w="9525" cap="flat" cmpd="sng" algn="ctr">
+                      <a:solidFill>
+                        <a:srgbClr val="E5E5E5"/>
+                      </a:solidFill>
+                      <a:prstDash val="solid"/>
+                      <a:round/>
+                      <a:headEnd type="none" w="med" len="med"/>
+                      <a:tailEnd type="none" w="med" len="med"/>
+                    </a:lnL>
+                    <a:lnR w="9525" cap="flat" cmpd="sng" algn="ctr">
+                      <a:solidFill>
+                        <a:srgbClr val="E5E5E5"/>
+                      </a:solidFill>
+                      <a:prstDash val="solid"/>
+                      <a:round/>
+                      <a:headEnd type="none" w="med" len="med"/>
+                      <a:tailEnd type="none" w="med" len="med"/>
+                    </a:lnR>
+                    <a:lnT w="9525" cap="flat" cmpd="sng" algn="ctr">
+                      <a:solidFill>
+                        <a:srgbClr val="E5E5E5"/>
+                      </a:solidFill>
+                      <a:prstDash val="solid"/>
+                      <a:round/>
+                      <a:headEnd type="none" w="med" len="med"/>
+                      <a:tailEnd type="none" w="med" len="med"/>
+                    </a:lnT>
+                    <a:lnB w="9525" cap="flat" cmpd="sng" algn="ctr">
+                      <a:solidFill>
+                        <a:srgbClr val="E5E5E5"/>
+                      </a:solidFill>
+                      <a:prstDash val="solid"/>
+                      <a:round/>
+                      <a:headEnd type="none" w="med" len="med"/>
+                      <a:tailEnd type="none" w="med" len="med"/>
+                    </a:lnB>
+                    <a:solidFill>
+                      <a:srgbClr val="F4F4F4"/>
+                    </a:solidFill>
+                  </a:tcPr>
+                </a:tc>
+                <a:tc>
+                  <a:txBody>
+                    <a:bodyPr/>
+                    <a:lstStyle/>
+                    <a:p>
+                      <a:pPr algn="l" indent="0" marL="0">
+                        <a:buNone/>
+                      </a:pPr>
+                      <a:r>
+                        <a:rPr lang="en-US" sz="1100" dirty="0" b="0">
+                          <a:solidFill>
+                            <a:srgbClr val="6B6B6B"/>
+                          </a:solidFill>
+                        </a:rPr>
+                        <a:t>—</a:t>
+                      </a:r>
+                    </a:p>
+                  </a:txBody>
+                  <a:tcPr marL="91440" marR="91440" marT="45720" marB="45720" anchor="ctr">
+                    <a:lnL w="9525" cap="flat" cmpd="sng" algn="ctr">
+                      <a:solidFill>
+                        <a:srgbClr val="E5E5E5"/>
+                      </a:solidFill>
+                      <a:prstDash val="solid"/>
+                      <a:round/>
+                      <a:headEnd type="none" w="med" len="med"/>
+                      <a:tailEnd type="none" w="med" len="med"/>
+                    </a:lnL>
+                    <a:lnR w="9525" cap="flat" cmpd="sng" algn="ctr">
+                      <a:solidFill>
+                        <a:srgbClr val="E5E5E5"/>
+                      </a:solidFill>
+                      <a:prstDash val="solid"/>
+                      <a:round/>
+                      <a:headEnd type="none" w="med" len="med"/>
+                      <a:tailEnd type="none" w="med" len="med"/>
+                    </a:lnR>
+                    <a:lnT w="9525" cap="flat" cmpd="sng" algn="ctr">
+                      <a:solidFill>
+                        <a:srgbClr val="E5E5E5"/>
+                      </a:solidFill>
+                      <a:prstDash val="solid"/>
+                      <a:round/>
+                      <a:headEnd type="none" w="med" len="med"/>
+                      <a:tailEnd type="none" w="med" len="med"/>
+                    </a:lnT>
+                    <a:lnB w="9525" cap="flat" cmpd="sng" algn="ctr">
+                      <a:solidFill>
+                        <a:srgbClr val="E5E5E5"/>
+                      </a:solidFill>
+                      <a:prstDash val="solid"/>
+                      <a:round/>
+                      <a:headEnd type="none" w="med" len="med"/>
+                      <a:tailEnd type="none" w="med" len="med"/>
+                    </a:lnB>
+                    <a:solidFill>
+                      <a:srgbClr val="F4F4F4"/>
+                    </a:solidFill>
+                  </a:tcPr>
+                </a:tc>
+                <a:tc>
+                  <a:txBody>
+                    <a:bodyPr/>
+                    <a:lstStyle/>
+                    <a:p>
+                      <a:pPr algn="l" indent="0" marL="0">
+                        <a:buNone/>
+                      </a:pPr>
+                      <a:r>
+                        <a:rPr lang="en-US" sz="1100" dirty="0" b="0">
+                          <a:solidFill>
+                            <a:srgbClr val="6B6B6B"/>
+                          </a:solidFill>
+                        </a:rPr>
+                        <a:t>—</a:t>
+                      </a:r>
+                    </a:p>
+                  </a:txBody>
+                  <a:tcPr marL="91440" marR="91440" marT="45720" marB="45720" anchor="ctr">
+                    <a:lnL w="9525" cap="flat" cmpd="sng" algn="ctr">
+                      <a:solidFill>
+                        <a:srgbClr val="E5E5E5"/>
+                      </a:solidFill>
+                      <a:prstDash val="solid"/>
+                      <a:round/>
+                      <a:headEnd type="none" w="med" len="med"/>
+                      <a:tailEnd type="none" w="med" len="med"/>
+                    </a:lnL>
+                    <a:lnR w="9525" cap="flat" cmpd="sng" algn="ctr">
+                      <a:solidFill>
+                        <a:srgbClr val="E5E5E5"/>
+                      </a:solidFill>
+                      <a:prstDash val="solid"/>
+                      <a:round/>
+                      <a:headEnd type="none" w="med" len="med"/>
+                      <a:tailEnd type="none" w="med" len="med"/>
+                    </a:lnR>
+                    <a:lnT w="9525" cap="flat" cmpd="sng" algn="ctr">
+                      <a:solidFill>
+                        <a:srgbClr val="E5E5E5"/>
+                      </a:solidFill>
+                      <a:prstDash val="solid"/>
+                      <a:round/>
+                      <a:headEnd type="none" w="med" len="med"/>
+                      <a:tailEnd type="none" w="med" len="med"/>
+                    </a:lnT>
+                    <a:lnB w="9525" cap="flat" cmpd="sng" algn="ctr">
+                      <a:solidFill>
+                        <a:srgbClr val="E5E5E5"/>
+                      </a:solidFill>
+                      <a:prstDash val="solid"/>
+                      <a:round/>
+                      <a:headEnd type="none" w="med" len="med"/>
+                      <a:tailEnd type="none" w="med" len="med"/>
+                    </a:lnB>
+                    <a:solidFill>
+                      <a:srgbClr val="F4F4F4"/>
+                    </a:solidFill>
+                  </a:tcPr>
+                </a:tc>
+              </a:tr>
+              <a:tr h="640080">
+                <a:tc>
+                  <a:txBody>
+                    <a:bodyPr/>
+                    <a:lstStyle/>
+                    <a:p>
+                      <a:pPr algn="l" indent="0" marL="0">
+                        <a:buNone/>
+                      </a:pPr>
+                      <a:r>
+                        <a:rPr lang="en-US" sz="1100" b="1" dirty="0">
+                          <a:solidFill>
+                            <a:srgbClr val="1A1A1A"/>
+                          </a:solidFill>
+                        </a:rPr>
+                        <a:t>타이어 유지 강함</a:t>
+                      </a:r>
+                    </a:p>
+                    <a:p>
+                      <a:pPr algn="l" indent="0" marL="0">
+                        <a:buNone/>
+                      </a:pPr>
+                      <a:r>
+                        <a:rPr lang="en-US" sz="1100" b="1" dirty="0">
+                          <a:solidFill>
+                            <a:srgbClr val="1A1A1A"/>
+                          </a:solidFill>
+                        </a:rPr>
+                        <a:t>10팀 중 1위</a:t>
+                      </a:r>
+                    </a:p>
+                  </a:txBody>
+                  <a:tcPr marL="91440" marR="91440" marT="45720" marB="45720" anchor="ctr">
+                    <a:lnL w="9525" cap="flat" cmpd="sng" algn="ctr">
+                      <a:solidFill>
+                        <a:srgbClr val="E5E5E5"/>
+                      </a:solidFill>
+                      <a:prstDash val="solid"/>
+                      <a:round/>
+                      <a:headEnd type="none" w="med" len="med"/>
+                      <a:tailEnd type="none" w="med" len="med"/>
+                    </a:lnL>
+                    <a:lnR w="9525" cap="flat" cmpd="sng" algn="ctr">
+                      <a:solidFill>
+                        <a:srgbClr val="E5E5E5"/>
+                      </a:solidFill>
+                      <a:prstDash val="solid"/>
+                      <a:round/>
+                      <a:headEnd type="none" w="med" len="med"/>
+                      <a:tailEnd type="none" w="med" len="med"/>
+                    </a:lnR>
+                    <a:lnT w="9525" cap="flat" cmpd="sng" algn="ctr">
+                      <a:solidFill>
+                        <a:srgbClr val="E5E5E5"/>
+                      </a:solidFill>
+                      <a:prstDash val="solid"/>
+                      <a:round/>
+                      <a:headEnd type="none" w="med" len="med"/>
+                      <a:tailEnd type="none" w="med" len="med"/>
+                    </a:lnT>
+                    <a:lnB w="9525" cap="flat" cmpd="sng" algn="ctr">
+                      <a:solidFill>
+                        <a:srgbClr val="E5E5E5"/>
+                      </a:solidFill>
+                      <a:prstDash val="solid"/>
+                      <a:round/>
+                      <a:headEnd type="none" w="med" len="med"/>
+                      <a:tailEnd type="none" w="med" len="med"/>
+                    </a:lnB>
+                    <a:solidFill>
+                      <a:srgbClr val="FFFFFF"/>
+                    </a:solidFill>
+                  </a:tcPr>
+                </a:tc>
+                <a:tc>
+                  <a:txBody>
+                    <a:bodyPr/>
+                    <a:lstStyle/>
+                    <a:p>
+                      <a:pPr algn="l" indent="0" marL="0">
+                        <a:buNone/>
+                      </a:pPr>
+                      <a:r>
+                        <a:rPr lang="en-US" sz="1100" dirty="0" b="0">
+                          <a:solidFill>
+                            <a:srgbClr val="6B6B6B"/>
+                          </a:solidFill>
+                        </a:rPr>
+                        <a:t>예 → 잃지 않는다</a:t>
+                      </a:r>
+                    </a:p>
+                  </a:txBody>
+                  <a:tcPr marL="91440" marR="91440" marT="45720" marB="45720" anchor="ctr">
+                    <a:lnL w="9525" cap="flat" cmpd="sng" algn="ctr">
+                      <a:solidFill>
+                        <a:srgbClr val="E5E5E5"/>
+                      </a:solidFill>
+                      <a:prstDash val="solid"/>
+                      <a:round/>
+                      <a:headEnd type="none" w="med" len="med"/>
+                      <a:tailEnd type="none" w="med" len="med"/>
+                    </a:lnL>
+                    <a:lnR w="9525" cap="flat" cmpd="sng" algn="ctr">
+                      <a:solidFill>
+                        <a:srgbClr val="E5E5E5"/>
+                      </a:solidFill>
+                      <a:prstDash val="solid"/>
+                      <a:round/>
+                      <a:headEnd type="none" w="med" len="med"/>
+                      <a:tailEnd type="none" w="med" len="med"/>
+                    </a:lnR>
+                    <a:lnT w="9525" cap="flat" cmpd="sng" algn="ctr">
+                      <a:solidFill>
+                        <a:srgbClr val="E5E5E5"/>
+                      </a:solidFill>
+                      <a:prstDash val="solid"/>
+                      <a:round/>
+                      <a:headEnd type="none" w="med" len="med"/>
+                      <a:tailEnd type="none" w="med" len="med"/>
+                    </a:lnT>
+                    <a:lnB w="9525" cap="flat" cmpd="sng" algn="ctr">
+                      <a:solidFill>
+                        <a:srgbClr val="E5E5E5"/>
+                      </a:solidFill>
+                      <a:prstDash val="solid"/>
+                      <a:round/>
+                      <a:headEnd type="none" w="med" len="med"/>
+                      <a:tailEnd type="none" w="med" len="med"/>
+                    </a:lnB>
+                    <a:solidFill>
+                      <a:srgbClr val="FFFFFF"/>
                     </a:solidFill>
                   </a:tcPr>
                 </a:tc>
@@ -16462,7 +17043,7 @@
                       <a:tailEnd type="none" w="med" len="med"/>
                     </a:lnB>
                     <a:solidFill>
-                      <a:srgbClr val="F4F4F4"/>
+                      <a:srgbClr val="FFFFFF"/>
                     </a:solidFill>
                   </a:tcPr>
                 </a:tc>
@@ -16480,7 +17061,7 @@
                             <a:srgbClr val="6B6B6B"/>
                           </a:solidFill>
                         </a:rPr>
-                        <a:t>STROLL 55%와</a:t>
+                        <a:t>STROLL 55%에</a:t>
                       </a:r>
                     </a:p>
                     <a:p>
@@ -16493,7 +17074,7 @@
                             <a:srgbClr val="6B6B6B"/>
                           </a:solidFill>
                         </a:rPr>
-                        <a:t>비슷하거나 좋음</a:t>
+                        <a:t>가까울수록 좋음</a:t>
                       </a:r>
                     </a:p>
                   </a:txBody>
@@ -16535,67 +17116,7 @@
                       <a:tailEnd type="none" w="med" len="med"/>
                     </a:lnB>
                     <a:solidFill>
-                      <a:srgbClr val="F4F4F4"/>
-                    </a:solidFill>
-                  </a:tcPr>
-                </a:tc>
-                <a:tc>
-                  <a:txBody>
-                    <a:bodyPr/>
-                    <a:lstStyle/>
-                    <a:p>
-                      <a:pPr algn="l" indent="0" marL="0">
-                        <a:buNone/>
-                      </a:pPr>
-                      <a:r>
-                        <a:rPr lang="en-US" sz="1100" dirty="0" b="1">
-                          <a:solidFill>
-                            <a:srgbClr val="E10600"/>
-                          </a:solidFill>
-                        </a:rPr>
-                        <a:t>60% (유지)</a:t>
-                      </a:r>
-                    </a:p>
-                  </a:txBody>
-                  <a:tcPr marL="91440" marR="91440" marT="45720" marB="45720" anchor="ctr">
-                    <a:lnL w="9525" cap="flat" cmpd="sng" algn="ctr">
-                      <a:solidFill>
-                        <a:srgbClr val="E5E5E5"/>
-                      </a:solidFill>
-                      <a:prstDash val="solid"/>
-                      <a:round/>
-                      <a:headEnd type="none" w="med" len="med"/>
-                      <a:tailEnd type="none" w="med" len="med"/>
-                    </a:lnL>
-                    <a:lnR w="9525" cap="flat" cmpd="sng" algn="ctr">
-                      <a:solidFill>
-                        <a:srgbClr val="E5E5E5"/>
-                      </a:solidFill>
-                      <a:prstDash val="solid"/>
-                      <a:round/>
-                      <a:headEnd type="none" w="med" len="med"/>
-                      <a:tailEnd type="none" w="med" len="med"/>
-                    </a:lnR>
-                    <a:lnT w="9525" cap="flat" cmpd="sng" algn="ctr">
-                      <a:solidFill>
-                        <a:srgbClr val="E5E5E5"/>
-                      </a:solidFill>
-                      <a:prstDash val="solid"/>
-                      <a:round/>
-                      <a:headEnd type="none" w="med" len="med"/>
-                      <a:tailEnd type="none" w="med" len="med"/>
-                    </a:lnT>
-                    <a:lnB w="9525" cap="flat" cmpd="sng" algn="ctr">
-                      <a:solidFill>
-                        <a:srgbClr val="E5E5E5"/>
-                      </a:solidFill>
-                      <a:prstDash val="solid"/>
-                      <a:round/>
-                      <a:headEnd type="none" w="med" len="med"/>
-                      <a:tailEnd type="none" w="med" len="med"/>
-                    </a:lnB>
-                    <a:solidFill>
-                      <a:srgbClr val="F4F4F4"/>
+                      <a:srgbClr val="FFFFFF"/>
                     </a:solidFill>
                   </a:tcPr>
                 </a:tc>
@@ -16610,10 +17131,23 @@
                       <a:r>
                         <a:rPr lang="en-US" sz="1100" dirty="0" b="0">
                           <a:solidFill>
-                            <a:srgbClr val="6B6B6B"/>
+                            <a:srgbClr val="1A1A1A"/>
                           </a:solidFill>
                         </a:rPr>
-                        <a:t>95% (하위)</a:t>
+                        <a:t>60%</a:t>
+                      </a:r>
+                    </a:p>
+                    <a:p>
+                      <a:pPr algn="l" indent="0" marL="0">
+                        <a:buNone/>
+                      </a:pPr>
+                      <a:r>
+                        <a:rPr lang="en-US" sz="1100" dirty="0" b="0">
+                          <a:solidFill>
+                            <a:srgbClr val="1A1A1A"/>
+                          </a:solidFill>
+                        </a:rPr>
+                        <a:t>2023~25: 46%</a:t>
                       </a:r>
                     </a:p>
                   </a:txBody>
@@ -16655,7 +17189,80 @@
                       <a:tailEnd type="none" w="med" len="med"/>
                     </a:lnB>
                     <a:solidFill>
-                      <a:srgbClr val="F4F4F4"/>
+                      <a:srgbClr val="FFFFFF"/>
+                    </a:solidFill>
+                  </a:tcPr>
+                </a:tc>
+                <a:tc>
+                  <a:txBody>
+                    <a:bodyPr/>
+                    <a:lstStyle/>
+                    <a:p>
+                      <a:pPr algn="l" indent="0" marL="0">
+                        <a:buNone/>
+                      </a:pPr>
+                      <a:r>
+                        <a:rPr lang="en-US" sz="1100" dirty="0" b="0">
+                          <a:solidFill>
+                            <a:srgbClr val="1A1A1A"/>
+                          </a:solidFill>
+                        </a:rPr>
+                        <a:t>95%</a:t>
+                      </a:r>
+                    </a:p>
+                    <a:p>
+                      <a:pPr algn="l" indent="0" marL="0">
+                        <a:buNone/>
+                      </a:pPr>
+                      <a:r>
+                        <a:rPr lang="en-US" sz="1100" dirty="0" b="0">
+                          <a:solidFill>
+                            <a:srgbClr val="1A1A1A"/>
+                          </a:solidFill>
+                        </a:rPr>
+                        <a:t>2023~25: 65%</a:t>
+                      </a:r>
+                    </a:p>
+                  </a:txBody>
+                  <a:tcPr marL="91440" marR="91440" marT="45720" marB="45720" anchor="ctr">
+                    <a:lnL w="9525" cap="flat" cmpd="sng" algn="ctr">
+                      <a:solidFill>
+                        <a:srgbClr val="E5E5E5"/>
+                      </a:solidFill>
+                      <a:prstDash val="solid"/>
+                      <a:round/>
+                      <a:headEnd type="none" w="med" len="med"/>
+                      <a:tailEnd type="none" w="med" len="med"/>
+                    </a:lnL>
+                    <a:lnR w="9525" cap="flat" cmpd="sng" algn="ctr">
+                      <a:solidFill>
+                        <a:srgbClr val="E5E5E5"/>
+                      </a:solidFill>
+                      <a:prstDash val="solid"/>
+                      <a:round/>
+                      <a:headEnd type="none" w="med" len="med"/>
+                      <a:tailEnd type="none" w="med" len="med"/>
+                    </a:lnR>
+                    <a:lnT w="9525" cap="flat" cmpd="sng" algn="ctr">
+                      <a:solidFill>
+                        <a:srgbClr val="E5E5E5"/>
+                      </a:solidFill>
+                      <a:prstDash val="solid"/>
+                      <a:round/>
+                      <a:headEnd type="none" w="med" len="med"/>
+                      <a:tailEnd type="none" w="med" len="med"/>
+                    </a:lnT>
+                    <a:lnB w="9525" cap="flat" cmpd="sng" algn="ctr">
+                      <a:solidFill>
+                        <a:srgbClr val="E5E5E5"/>
+                      </a:solidFill>
+                      <a:prstDash val="solid"/>
+                      <a:round/>
+                      <a:headEnd type="none" w="med" len="med"/>
+                      <a:tailEnd type="none" w="med" len="med"/>
+                    </a:lnB>
+                    <a:solidFill>
+                      <a:srgbClr val="FFFFFF"/>
                     </a:solidFill>
                   </a:tcPr>
                 </a:tc>
@@ -16715,7 +17322,7 @@
                       <a:tailEnd type="none" w="med" len="med"/>
                     </a:lnB>
                     <a:solidFill>
-                      <a:srgbClr val="F4F4F4"/>
+                      <a:srgbClr val="FFFFFF"/>
                     </a:solidFill>
                   </a:tcPr>
                 </a:tc>
@@ -16734,488 +17341,6 @@
                           </a:solidFill>
                         </a:rPr>
                         <a:t>70%</a:t>
-                      </a:r>
-                    </a:p>
-                  </a:txBody>
-                  <a:tcPr marL="91440" marR="91440" marT="45720" marB="45720" anchor="ctr">
-                    <a:lnL w="9525" cap="flat" cmpd="sng" algn="ctr">
-                      <a:solidFill>
-                        <a:srgbClr val="E5E5E5"/>
-                      </a:solidFill>
-                      <a:prstDash val="solid"/>
-                      <a:round/>
-                      <a:headEnd type="none" w="med" len="med"/>
-                      <a:tailEnd type="none" w="med" len="med"/>
-                    </a:lnL>
-                    <a:lnR w="9525" cap="flat" cmpd="sng" algn="ctr">
-                      <a:solidFill>
-                        <a:srgbClr val="E5E5E5"/>
-                      </a:solidFill>
-                      <a:prstDash val="solid"/>
-                      <a:round/>
-                      <a:headEnd type="none" w="med" len="med"/>
-                      <a:tailEnd type="none" w="med" len="med"/>
-                    </a:lnR>
-                    <a:lnT w="9525" cap="flat" cmpd="sng" algn="ctr">
-                      <a:solidFill>
-                        <a:srgbClr val="E5E5E5"/>
-                      </a:solidFill>
-                      <a:prstDash val="solid"/>
-                      <a:round/>
-                      <a:headEnd type="none" w="med" len="med"/>
-                      <a:tailEnd type="none" w="med" len="med"/>
-                    </a:lnT>
-                    <a:lnB w="9525" cap="flat" cmpd="sng" algn="ctr">
-                      <a:solidFill>
-                        <a:srgbClr val="E5E5E5"/>
-                      </a:solidFill>
-                      <a:prstDash val="solid"/>
-                      <a:round/>
-                      <a:headEnd type="none" w="med" len="med"/>
-                      <a:tailEnd type="none" w="med" len="med"/>
-                    </a:lnB>
-                    <a:solidFill>
-                      <a:srgbClr val="F4F4F4"/>
-                    </a:solidFill>
-                  </a:tcPr>
-                </a:tc>
-              </a:tr>
-              <a:tr h="640080">
-                <a:tc>
-                  <a:txBody>
-                    <a:bodyPr/>
-                    <a:lstStyle/>
-                    <a:p>
-                      <a:pPr algn="l" indent="0" marL="0">
-                        <a:buNone/>
-                      </a:pPr>
-                      <a:r>
-                        <a:rPr lang="en-US" sz="1100" b="1" dirty="0">
-                          <a:solidFill>
-                            <a:srgbClr val="1A1A1A"/>
-                          </a:solidFill>
-                        </a:rPr>
-                        <a:t>안정성</a:t>
-                      </a:r>
-                    </a:p>
-                  </a:txBody>
-                  <a:tcPr marL="91440" marR="91440" marT="45720" marB="45720" anchor="ctr">
-                    <a:lnL w="9525" cap="flat" cmpd="sng" algn="ctr">
-                      <a:solidFill>
-                        <a:srgbClr val="E5E5E5"/>
-                      </a:solidFill>
-                      <a:prstDash val="solid"/>
-                      <a:round/>
-                      <a:headEnd type="none" w="med" len="med"/>
-                      <a:tailEnd type="none" w="med" len="med"/>
-                    </a:lnL>
-                    <a:lnR w="9525" cap="flat" cmpd="sng" algn="ctr">
-                      <a:solidFill>
-                        <a:srgbClr val="E5E5E5"/>
-                      </a:solidFill>
-                      <a:prstDash val="solid"/>
-                      <a:round/>
-                      <a:headEnd type="none" w="med" len="med"/>
-                      <a:tailEnd type="none" w="med" len="med"/>
-                    </a:lnR>
-                    <a:lnT w="9525" cap="flat" cmpd="sng" algn="ctr">
-                      <a:solidFill>
-                        <a:srgbClr val="E5E5E5"/>
-                      </a:solidFill>
-                      <a:prstDash val="solid"/>
-                      <a:round/>
-                      <a:headEnd type="none" w="med" len="med"/>
-                      <a:tailEnd type="none" w="med" len="med"/>
-                    </a:lnT>
-                    <a:lnB w="9525" cap="flat" cmpd="sng" algn="ctr">
-                      <a:solidFill>
-                        <a:srgbClr val="E5E5E5"/>
-                      </a:solidFill>
-                      <a:prstDash val="solid"/>
-                      <a:round/>
-                      <a:headEnd type="none" w="med" len="med"/>
-                      <a:tailEnd type="none" w="med" len="med"/>
-                    </a:lnB>
-                    <a:solidFill>
-                      <a:srgbClr val="FFFFFF"/>
-                    </a:solidFill>
-                  </a:tcPr>
-                </a:tc>
-                <a:tc>
-                  <a:txBody>
-                    <a:bodyPr/>
-                    <a:lstStyle/>
-                    <a:p>
-                      <a:pPr algn="l" indent="0" marL="0">
-                        <a:buNone/>
-                      </a:pPr>
-                      <a:r>
-                        <a:rPr lang="en-US" sz="1100" dirty="0" b="0">
-                          <a:solidFill>
-                            <a:srgbClr val="6B6B6B"/>
-                          </a:solidFill>
-                        </a:rPr>
-                        <a:t>보조</a:t>
-                      </a:r>
-                    </a:p>
-                  </a:txBody>
-                  <a:tcPr marL="91440" marR="91440" marT="45720" marB="45720" anchor="ctr">
-                    <a:lnL w="9525" cap="flat" cmpd="sng" algn="ctr">
-                      <a:solidFill>
-                        <a:srgbClr val="E5E5E5"/>
-                      </a:solidFill>
-                      <a:prstDash val="solid"/>
-                      <a:round/>
-                      <a:headEnd type="none" w="med" len="med"/>
-                      <a:tailEnd type="none" w="med" len="med"/>
-                    </a:lnL>
-                    <a:lnR w="9525" cap="flat" cmpd="sng" algn="ctr">
-                      <a:solidFill>
-                        <a:srgbClr val="E5E5E5"/>
-                      </a:solidFill>
-                      <a:prstDash val="solid"/>
-                      <a:round/>
-                      <a:headEnd type="none" w="med" len="med"/>
-                      <a:tailEnd type="none" w="med" len="med"/>
-                    </a:lnR>
-                    <a:lnT w="9525" cap="flat" cmpd="sng" algn="ctr">
-                      <a:solidFill>
-                        <a:srgbClr val="E5E5E5"/>
-                      </a:solidFill>
-                      <a:prstDash val="solid"/>
-                      <a:round/>
-                      <a:headEnd type="none" w="med" len="med"/>
-                      <a:tailEnd type="none" w="med" len="med"/>
-                    </a:lnT>
-                    <a:lnB w="9525" cap="flat" cmpd="sng" algn="ctr">
-                      <a:solidFill>
-                        <a:srgbClr val="E5E5E5"/>
-                      </a:solidFill>
-                      <a:prstDash val="solid"/>
-                      <a:round/>
-                      <a:headEnd type="none" w="med" len="med"/>
-                      <a:tailEnd type="none" w="med" len="med"/>
-                    </a:lnB>
-                    <a:solidFill>
-                      <a:srgbClr val="FFFFFF"/>
-                    </a:solidFill>
-                  </a:tcPr>
-                </a:tc>
-                <a:tc>
-                  <a:txBody>
-                    <a:bodyPr/>
-                    <a:lstStyle/>
-                    <a:p>
-                      <a:pPr algn="l" indent="0" marL="0">
-                        <a:buNone/>
-                      </a:pPr>
-                      <a:r>
-                        <a:rPr lang="en-US" sz="1100" dirty="0" b="0">
-                          <a:solidFill>
-                            <a:srgbClr val="6B6B6B"/>
-                          </a:solidFill>
-                        </a:rPr>
-                        <a:t>일관성 상위 %</a:t>
-                      </a:r>
-                    </a:p>
-                  </a:txBody>
-                  <a:tcPr marL="91440" marR="91440" marT="45720" marB="45720" anchor="ctr">
-                    <a:lnL w="9525" cap="flat" cmpd="sng" algn="ctr">
-                      <a:solidFill>
-                        <a:srgbClr val="E5E5E5"/>
-                      </a:solidFill>
-                      <a:prstDash val="solid"/>
-                      <a:round/>
-                      <a:headEnd type="none" w="med" len="med"/>
-                      <a:tailEnd type="none" w="med" len="med"/>
-                    </a:lnL>
-                    <a:lnR w="9525" cap="flat" cmpd="sng" algn="ctr">
-                      <a:solidFill>
-                        <a:srgbClr val="E5E5E5"/>
-                      </a:solidFill>
-                      <a:prstDash val="solid"/>
-                      <a:round/>
-                      <a:headEnd type="none" w="med" len="med"/>
-                      <a:tailEnd type="none" w="med" len="med"/>
-                    </a:lnR>
-                    <a:lnT w="9525" cap="flat" cmpd="sng" algn="ctr">
-                      <a:solidFill>
-                        <a:srgbClr val="E5E5E5"/>
-                      </a:solidFill>
-                      <a:prstDash val="solid"/>
-                      <a:round/>
-                      <a:headEnd type="none" w="med" len="med"/>
-                      <a:tailEnd type="none" w="med" len="med"/>
-                    </a:lnT>
-                    <a:lnB w="9525" cap="flat" cmpd="sng" algn="ctr">
-                      <a:solidFill>
-                        <a:srgbClr val="E5E5E5"/>
-                      </a:solidFill>
-                      <a:prstDash val="solid"/>
-                      <a:round/>
-                      <a:headEnd type="none" w="med" len="med"/>
-                      <a:tailEnd type="none" w="med" len="med"/>
-                    </a:lnB>
-                    <a:solidFill>
-                      <a:srgbClr val="FFFFFF"/>
-                    </a:solidFill>
-                  </a:tcPr>
-                </a:tc>
-                <a:tc>
-                  <a:txBody>
-                    <a:bodyPr/>
-                    <a:lstStyle/>
-                    <a:p>
-                      <a:pPr algn="l" indent="0" marL="0">
-                        <a:buNone/>
-                      </a:pPr>
-                      <a:r>
-                        <a:rPr lang="en-US" sz="1100" dirty="0" b="0">
-                          <a:solidFill>
-                            <a:srgbClr val="6B6B6B"/>
-                          </a:solidFill>
-                        </a:rPr>
-                        <a:t>동률일 때 참고</a:t>
-                      </a:r>
-                    </a:p>
-                  </a:txBody>
-                  <a:tcPr marL="91440" marR="91440" marT="45720" marB="45720" anchor="ctr">
-                    <a:lnL w="9525" cap="flat" cmpd="sng" algn="ctr">
-                      <a:solidFill>
-                        <a:srgbClr val="E5E5E5"/>
-                      </a:solidFill>
-                      <a:prstDash val="solid"/>
-                      <a:round/>
-                      <a:headEnd type="none" w="med" len="med"/>
-                      <a:tailEnd type="none" w="med" len="med"/>
-                    </a:lnL>
-                    <a:lnR w="9525" cap="flat" cmpd="sng" algn="ctr">
-                      <a:solidFill>
-                        <a:srgbClr val="E5E5E5"/>
-                      </a:solidFill>
-                      <a:prstDash val="solid"/>
-                      <a:round/>
-                      <a:headEnd type="none" w="med" len="med"/>
-                      <a:tailEnd type="none" w="med" len="med"/>
-                    </a:lnR>
-                    <a:lnT w="9525" cap="flat" cmpd="sng" algn="ctr">
-                      <a:solidFill>
-                        <a:srgbClr val="E5E5E5"/>
-                      </a:solidFill>
-                      <a:prstDash val="solid"/>
-                      <a:round/>
-                      <a:headEnd type="none" w="med" len="med"/>
-                      <a:tailEnd type="none" w="med" len="med"/>
-                    </a:lnT>
-                    <a:lnB w="9525" cap="flat" cmpd="sng" algn="ctr">
-                      <a:solidFill>
-                        <a:srgbClr val="E5E5E5"/>
-                      </a:solidFill>
-                      <a:prstDash val="solid"/>
-                      <a:round/>
-                      <a:headEnd type="none" w="med" len="med"/>
-                      <a:tailEnd type="none" w="med" len="med"/>
-                    </a:lnB>
-                    <a:solidFill>
-                      <a:srgbClr val="FFFFFF"/>
-                    </a:solidFill>
-                  </a:tcPr>
-                </a:tc>
-                <a:tc>
-                  <a:txBody>
-                    <a:bodyPr/>
-                    <a:lstStyle/>
-                    <a:p>
-                      <a:pPr algn="l" indent="0" marL="0">
-                        <a:buNone/>
-                      </a:pPr>
-                      <a:r>
-                        <a:rPr lang="en-US" sz="1100" dirty="0" b="0">
-                          <a:solidFill>
-                            <a:srgbClr val="1A1A1A"/>
-                          </a:solidFill>
-                        </a:rPr>
-                        <a:t>10%</a:t>
-                      </a:r>
-                    </a:p>
-                  </a:txBody>
-                  <a:tcPr marL="91440" marR="91440" marT="45720" marB="45720" anchor="ctr">
-                    <a:lnL w="9525" cap="flat" cmpd="sng" algn="ctr">
-                      <a:solidFill>
-                        <a:srgbClr val="E5E5E5"/>
-                      </a:solidFill>
-                      <a:prstDash val="solid"/>
-                      <a:round/>
-                      <a:headEnd type="none" w="med" len="med"/>
-                      <a:tailEnd type="none" w="med" len="med"/>
-                    </a:lnL>
-                    <a:lnR w="9525" cap="flat" cmpd="sng" algn="ctr">
-                      <a:solidFill>
-                        <a:srgbClr val="E5E5E5"/>
-                      </a:solidFill>
-                      <a:prstDash val="solid"/>
-                      <a:round/>
-                      <a:headEnd type="none" w="med" len="med"/>
-                      <a:tailEnd type="none" w="med" len="med"/>
-                    </a:lnR>
-                    <a:lnT w="9525" cap="flat" cmpd="sng" algn="ctr">
-                      <a:solidFill>
-                        <a:srgbClr val="E5E5E5"/>
-                      </a:solidFill>
-                      <a:prstDash val="solid"/>
-                      <a:round/>
-                      <a:headEnd type="none" w="med" len="med"/>
-                      <a:tailEnd type="none" w="med" len="med"/>
-                    </a:lnT>
-                    <a:lnB w="9525" cap="flat" cmpd="sng" algn="ctr">
-                      <a:solidFill>
-                        <a:srgbClr val="E5E5E5"/>
-                      </a:solidFill>
-                      <a:prstDash val="solid"/>
-                      <a:round/>
-                      <a:headEnd type="none" w="med" len="med"/>
-                      <a:tailEnd type="none" w="med" len="med"/>
-                    </a:lnB>
-                    <a:solidFill>
-                      <a:srgbClr val="FFFFFF"/>
-                    </a:solidFill>
-                  </a:tcPr>
-                </a:tc>
-                <a:tc>
-                  <a:txBody>
-                    <a:bodyPr/>
-                    <a:lstStyle/>
-                    <a:p>
-                      <a:pPr algn="l" indent="0" marL="0">
-                        <a:buNone/>
-                      </a:pPr>
-                      <a:r>
-                        <a:rPr lang="en-US" sz="1100" dirty="0" b="0">
-                          <a:solidFill>
-                            <a:srgbClr val="1A1A1A"/>
-                          </a:solidFill>
-                        </a:rPr>
-                        <a:t>55%</a:t>
-                      </a:r>
-                    </a:p>
-                  </a:txBody>
-                  <a:tcPr marL="91440" marR="91440" marT="45720" marB="45720" anchor="ctr">
-                    <a:lnL w="9525" cap="flat" cmpd="sng" algn="ctr">
-                      <a:solidFill>
-                        <a:srgbClr val="E5E5E5"/>
-                      </a:solidFill>
-                      <a:prstDash val="solid"/>
-                      <a:round/>
-                      <a:headEnd type="none" w="med" len="med"/>
-                      <a:tailEnd type="none" w="med" len="med"/>
-                    </a:lnL>
-                    <a:lnR w="9525" cap="flat" cmpd="sng" algn="ctr">
-                      <a:solidFill>
-                        <a:srgbClr val="E5E5E5"/>
-                      </a:solidFill>
-                      <a:prstDash val="solid"/>
-                      <a:round/>
-                      <a:headEnd type="none" w="med" len="med"/>
-                      <a:tailEnd type="none" w="med" len="med"/>
-                    </a:lnR>
-                    <a:lnT w="9525" cap="flat" cmpd="sng" algn="ctr">
-                      <a:solidFill>
-                        <a:srgbClr val="E5E5E5"/>
-                      </a:solidFill>
-                      <a:prstDash val="solid"/>
-                      <a:round/>
-                      <a:headEnd type="none" w="med" len="med"/>
-                      <a:tailEnd type="none" w="med" len="med"/>
-                    </a:lnT>
-                    <a:lnB w="9525" cap="flat" cmpd="sng" algn="ctr">
-                      <a:solidFill>
-                        <a:srgbClr val="E5E5E5"/>
-                      </a:solidFill>
-                      <a:prstDash val="solid"/>
-                      <a:round/>
-                      <a:headEnd type="none" w="med" len="med"/>
-                      <a:tailEnd type="none" w="med" len="med"/>
-                    </a:lnB>
-                    <a:solidFill>
-                      <a:srgbClr val="FFFFFF"/>
-                    </a:solidFill>
-                  </a:tcPr>
-                </a:tc>
-                <a:tc>
-                  <a:txBody>
-                    <a:bodyPr/>
-                    <a:lstStyle/>
-                    <a:p>
-                      <a:pPr algn="l" indent="0" marL="0">
-                        <a:buNone/>
-                      </a:pPr>
-                      <a:r>
-                        <a:rPr lang="en-US" sz="1100" dirty="0" b="0">
-                          <a:solidFill>
-                            <a:srgbClr val="1A1A1A"/>
-                          </a:solidFill>
-                        </a:rPr>
-                        <a:t>20%</a:t>
-                      </a:r>
-                    </a:p>
-                  </a:txBody>
-                  <a:tcPr marL="91440" marR="91440" marT="45720" marB="45720" anchor="ctr">
-                    <a:lnL w="9525" cap="flat" cmpd="sng" algn="ctr">
-                      <a:solidFill>
-                        <a:srgbClr val="E5E5E5"/>
-                      </a:solidFill>
-                      <a:prstDash val="solid"/>
-                      <a:round/>
-                      <a:headEnd type="none" w="med" len="med"/>
-                      <a:tailEnd type="none" w="med" len="med"/>
-                    </a:lnL>
-                    <a:lnR w="9525" cap="flat" cmpd="sng" algn="ctr">
-                      <a:solidFill>
-                        <a:srgbClr val="E5E5E5"/>
-                      </a:solidFill>
-                      <a:prstDash val="solid"/>
-                      <a:round/>
-                      <a:headEnd type="none" w="med" len="med"/>
-                      <a:tailEnd type="none" w="med" len="med"/>
-                    </a:lnR>
-                    <a:lnT w="9525" cap="flat" cmpd="sng" algn="ctr">
-                      <a:solidFill>
-                        <a:srgbClr val="E5E5E5"/>
-                      </a:solidFill>
-                      <a:prstDash val="solid"/>
-                      <a:round/>
-                      <a:headEnd type="none" w="med" len="med"/>
-                      <a:tailEnd type="none" w="med" len="med"/>
-                    </a:lnT>
-                    <a:lnB w="9525" cap="flat" cmpd="sng" algn="ctr">
-                      <a:solidFill>
-                        <a:srgbClr val="E5E5E5"/>
-                      </a:solidFill>
-                      <a:prstDash val="solid"/>
-                      <a:round/>
-                      <a:headEnd type="none" w="med" len="med"/>
-                      <a:tailEnd type="none" w="med" len="med"/>
-                    </a:lnB>
-                    <a:solidFill>
-                      <a:srgbClr val="FFFFFF"/>
-                    </a:solidFill>
-                  </a:tcPr>
-                </a:tc>
-                <a:tc>
-                  <a:txBody>
-                    <a:bodyPr/>
-                    <a:lstStyle/>
-                    <a:p>
-                      <a:pPr algn="l" indent="0" marL="0">
-                        <a:buNone/>
-                      </a:pPr>
-                      <a:r>
-                        <a:rPr lang="en-US" sz="1100" dirty="0" b="0">
-                          <a:solidFill>
-                            <a:srgbClr val="1A1A1A"/>
-                          </a:solidFill>
-                        </a:rPr>
-                        <a:t>30%</a:t>
                       </a:r>
                     </a:p>
                   </a:txBody>
@@ -17791,7 +17916,7 @@
                   <a:srgbClr val="6B6B6B"/>
                 </a:solidFill>
               </a:rPr>
-              <a:t>① 같은 경기 비교는 차량이 섞인 값이라 1차 선별에만 쓴다 · RUSSELL의 동료 ANTONELLI는 2025 신인이라 동료 대비 값은 같은 자로 잰 숫자가 아니다</a:t>
+              <a:t>같은 자 = 두 후보를 같은 차에서 같은 동료 HAMILTON과 비교(pipeline/driver_check.py) · HAMILTON은 2025가 Ferrari 첫해라 LECLERC가 유리할 수 있음 · 타이어 유지 차이(−1.2ms/랩)는 95% 구간 −8.8~+3.5로 구분되지 않아 확인 과제로 둔다</a:t>
             </a:r>
           </a:p>
         </p:txBody>
@@ -17837,7 +17962,7 @@
                   <a:srgbClr val="1A1A1A"/>
                 </a:solidFill>
               </a:rPr>
-              <a:t>둘 다 페이스를 메운다 · RUSSELL은 팀 강점인 타이어 유지까지 지켜 1순위, LECLERC는 페이스 근거가 더 크지만 타이어 확인이 먼저</a:t>
+              <a:t>둘 다 페이스를 메운다 · 같은 자(HAMILTON)로 재면 LECLERC가 앞서 1순위 · 타이어 유지 차이는 오차 범위 안이라 확인 과제</a:t>
             </a:r>
             <a:endParaRPr lang="en-US" sz="1400" dirty="0"/>
           </a:p>
@@ -17995,7 +18120,7 @@
                   <a:srgbClr val="E10600"/>
                 </a:solidFill>
               </a:rPr>
-              <a:t>George RUSSELL</a:t>
+              <a:t>Charles LECLERC</a:t>
             </a:r>
             <a:pPr indent="0" marL="0">
               <a:buNone/>
@@ -18006,7 +18131,7 @@
                   <a:srgbClr val="FFFFFF"/>
                 </a:solidFill>
               </a:rPr>
-              <a:t>을 1순위로 검토한다</a:t>
+              <a:t>를 1순위로 검토한다</a:t>
             </a:r>
             <a:endParaRPr lang="en-US" sz="3200" dirty="0"/>
           </a:p>
@@ -18074,6 +18199,10 @@
             <a:prstDash val="solid"/>
           </a:ln>
         </p:spPr>
+        <p:txBody>
+          <a:bodyPr/>
+          <a:p/>
+        </p:txBody>
       </p:sp>
       <p:sp>
         <p:nvSpPr>
@@ -18105,7 +18234,7 @@
                   <a:srgbClr val="E10600"/>
                 </a:solidFill>
               </a:rPr>
-              <a:t>1순위 · RUSSELL</a:t>
+              <a:t>1순위 · LECLERC</a:t>
             </a:r>
             <a:endParaRPr lang="en-US" sz="1300" dirty="0"/>
           </a:p>
@@ -18141,7 +18270,7 @@
                   <a:srgbClr val="FFFFFF"/>
                 </a:solidFill>
               </a:rPr>
-              <a:t>−1.03%p · −0.138초</a:t>
+              <a:t>−1.12%p · −0.202초</a:t>
             </a:r>
             <a:endParaRPr lang="en-US" sz="2200" dirty="0"/>
           </a:p>
@@ -18177,7 +18306,7 @@
                   <a:srgbClr val="D0D0D0"/>
                 </a:solidFill>
               </a:rPr>
-              <a:t>같은 경기에서 기준 선수보다 빠르고, 같은 차의 동료보다도 빠르다 — 11가지 조건 모두 반복. 팀 강점인 타이어 유지도 STROLL과 비슷해 지킨다.</a:t>
+              <a:t>같은 경기·같은 차 비교를 11가지 조건에서 모두 통과했고, 두 후보를 같은 동료 HAMILTON 기준으로 재도 −0.217초/랩(9/9경기) 앞선다. 타이어 유지는 영입 전 확인한다.</a:t>
             </a:r>
             <a:endParaRPr lang="en-US" sz="1200" dirty="0"/>
           </a:p>
@@ -18209,6 +18338,10 @@
             <a:prstDash val="solid"/>
           </a:ln>
         </p:spPr>
+        <p:txBody>
+          <a:bodyPr/>
+          <a:p/>
+        </p:txBody>
       </p:sp>
       <p:sp>
         <p:nvSpPr>
@@ -18240,7 +18373,7 @@
                   <a:srgbClr val="D0D0D0"/>
                 </a:solidFill>
               </a:rPr>
-              <a:t>2순위 · LECLERC</a:t>
+              <a:t>2순위 · RUSSELL</a:t>
             </a:r>
             <a:endParaRPr lang="en-US" sz="1300" dirty="0"/>
           </a:p>
@@ -18276,7 +18409,7 @@
                   <a:srgbClr val="FFFFFF"/>
                 </a:solidFill>
               </a:rPr>
-              <a:t>−1.12%p · −0.202초</a:t>
+              <a:t>−1.03%p · −0.138초</a:t>
             </a:r>
             <a:endParaRPr lang="en-US" sz="2200" dirty="0"/>
           </a:p>
@@ -18312,7 +18445,7 @@
                   <a:srgbClr val="D0D0D0"/>
                 </a:solidFill>
               </a:rPr>
-              <a:t>우위는 가장 크지만 타이어 유지가 하위(상위 95%). 장기 스틴트에서 페이스가 떨어지는지 확인한 뒤 검토한다.</a:t>
+              <a:t>같은 두 비교는 통과했지만 동료 우위가 신인 ANTONELLI 기준이고, HAMILTON 기준으로는 +0.037초(8/21경기)로 비슷하다.</a:t>
             </a:r>
             <a:endParaRPr lang="en-US" sz="1200" dirty="0"/>
           </a:p>
@@ -18344,6 +18477,10 @@
             <a:prstDash val="solid"/>
           </a:ln>
         </p:spPr>
+        <p:txBody>
+          <a:bodyPr/>
+          <a:p/>
+        </p:txBody>
       </p:sp>
       <p:sp>
         <p:nvSpPr>
@@ -18546,7 +18683,7 @@
                   <a:srgbClr val="1A1A1A"/>
                 </a:solidFill>
               </a:rPr>
-              <a:t>결과: 우선 검토 후보는 RUSSELL과 LECLERC</a:t>
+              <a:t>결과: 우선 검토 후보는 LECLERC와 RUSSELL</a:t>
             </a:r>
             <a:endParaRPr lang="en-US" sz="2800" dirty="0"/>
           </a:p>
@@ -18614,6 +18751,10 @@
             <a:prstDash val="solid"/>
           </a:ln>
         </p:spPr>
+        <p:txBody>
+          <a:bodyPr/>
+          <a:p/>
+        </p:txBody>
       </p:sp>
       <p:sp>
         <p:nvSpPr>
@@ -18711,6 +18852,10 @@
             <a:prstDash val="solid"/>
           </a:ln>
         </p:spPr>
+        <p:txBody>
+          <a:bodyPr/>
+          <a:p/>
+        </p:txBody>
       </p:sp>
       <p:sp>
         <p:nvSpPr>
@@ -18778,7 +18923,7 @@
                   <a:srgbClr val="FFFFFF"/>
                 </a:solidFill>
               </a:rPr>
-              <a:t>기준 선수보다 빠름 · 정제 조건 11/11 반복</a:t>
+              <a:t>같은 경기 비교: 11/11 조건 · 95% 구간 · 전·후반</a:t>
             </a:r>
             <a:endParaRPr lang="en-US" sz="1100" dirty="0"/>
           </a:p>
@@ -18808,6 +18953,10 @@
             <a:prstDash val="solid"/>
           </a:ln>
         </p:spPr>
+        <p:txBody>
+          <a:bodyPr/>
+          <a:p/>
+        </p:txBody>
       </p:sp>
       <p:sp>
         <p:nvSpPr>
@@ -18875,7 +19024,7 @@
                   <a:srgbClr val="FFFFFF"/>
                 </a:solidFill>
               </a:rPr>
-              <a:t>자기 팀 동료 대비까지 11/11 반복</a:t>
+              <a:t>같은 차 동료 비교까지 11/11</a:t>
             </a:r>
             <a:endParaRPr lang="en-US" sz="1100" dirty="0"/>
           </a:p>
@@ -18907,6 +19056,10 @@
             <a:prstDash val="solid"/>
           </a:ln>
         </p:spPr>
+        <p:txBody>
+          <a:bodyPr/>
+          <a:p/>
+        </p:txBody>
       </p:sp>
       <p:sp>
         <p:nvSpPr>
@@ -18974,7 +19127,7 @@
                   <a:srgbClr val="1A1A1A"/>
                 </a:solidFill>
               </a:rPr>
-              <a:t>George RUSSELL</a:t>
+              <a:t>Charles LECLERC</a:t>
             </a:r>
             <a:endParaRPr lang="en-US" sz="1900" dirty="0"/>
           </a:p>
@@ -19010,7 +19163,7 @@
                   <a:srgbClr val="6B6B6B"/>
                 </a:solidFill>
               </a:rPr>
-              <a:t>Mercedes</a:t>
+              <a:t>Ferrari</a:t>
             </a:r>
             <a:endParaRPr lang="en-US" sz="1100" dirty="0"/>
           </a:p>
@@ -19082,7 +19235,7 @@
                   <a:srgbClr val="1A1A1A"/>
                 </a:solidFill>
               </a:rPr>
-              <a:t>−1.03%p</a:t>
+              <a:t>−1.12%p</a:t>
             </a:r>
             <a:endParaRPr lang="en-US" sz="1400" dirty="0"/>
           </a:p>
@@ -19118,7 +19271,7 @@
                   <a:srgbClr val="6B6B6B"/>
                 </a:solidFill>
               </a:rPr>
-              <a:t>95% 구간 −1.48 ~ −0.68 · 공통 18경기</a:t>
+              <a:t>95% 구간 −1.60 ~ −1.00 · 공통 17경기</a:t>
             </a:r>
             <a:endParaRPr lang="en-US" sz="950" dirty="0"/>
           </a:p>
@@ -19190,7 +19343,7 @@
                   <a:srgbClr val="1A1A1A"/>
                 </a:solidFill>
               </a:rPr>
-              <a:t>−0.138초/랩</a:t>
+              <a:t>−0.202초/랩</a:t>
             </a:r>
             <a:endParaRPr lang="en-US" sz="1400" dirty="0"/>
           </a:p>
@@ -19226,7 +19379,7 @@
                   <a:srgbClr val="6B6B6B"/>
                 </a:solidFill>
               </a:rPr>
-              <a:t>95% 구간 −0.48 ~ −0.08 · 11/11 조건</a:t>
+              <a:t>95% 구간 −0.35 ~ −0.11 · 11/11 조건</a:t>
             </a:r>
             <a:endParaRPr lang="en-US" sz="950" dirty="0"/>
           </a:p>
@@ -19262,7 +19415,7 @@
                   <a:srgbClr val="6B6B6B"/>
                 </a:solidFill>
               </a:rPr>
-              <a:t>일관성 · 타이어 유지</a:t>
+              <a:t>같은 자: HAMILTON 대비</a:t>
             </a:r>
             <a:endParaRPr lang="en-US" sz="1000" dirty="0"/>
           </a:p>
@@ -19295,10 +19448,10 @@
             <a:r>
               <a:rPr lang="en-US" sz="1400" b="1" dirty="0">
                 <a:solidFill>
-                  <a:srgbClr val="1A1A1A"/>
-                </a:solidFill>
-              </a:rPr>
-              <a:t>상위 10% · 60%</a:t>
+                  <a:srgbClr val="E10600"/>
+                </a:solidFill>
+              </a:rPr>
+              <a:t>−0.217초/랩</a:t>
             </a:r>
             <a:endParaRPr lang="en-US" sz="1400" dirty="0"/>
           </a:p>
@@ -19334,7 +19487,7 @@
                   <a:srgbClr val="6B6B6B"/>
                 </a:solidFill>
               </a:rPr>
-              <a:t>랩 편차가 작고 타이어 유지는 STROLL(55%)과 비슷</a:t>
+              <a:t>2025 · 9/9경기 빠름 · Silver 재계산</a:t>
             </a:r>
             <a:endParaRPr lang="en-US" sz="950" dirty="0"/>
           </a:p>
@@ -19370,7 +19523,7 @@
                   <a:srgbClr val="E10600"/>
                 </a:solidFill>
               </a:rPr>
-              <a:t>우위 반복 + 팀 강점(타이어) 유지</a:t>
+              <a:t>같은 자로 재도 우위 · 타이어는 확인 과제</a:t>
             </a:r>
             <a:endParaRPr lang="en-US" sz="1200" dirty="0"/>
           </a:p>
@@ -19402,6 +19555,10 @@
             <a:prstDash val="solid"/>
           </a:ln>
         </p:spPr>
+        <p:txBody>
+          <a:bodyPr/>
+          <a:p/>
+        </p:txBody>
       </p:sp>
       <p:sp>
         <p:nvSpPr>
@@ -19469,7 +19626,7 @@
                   <a:srgbClr val="1A1A1A"/>
                 </a:solidFill>
               </a:rPr>
-              <a:t>Charles LECLERC</a:t>
+              <a:t>George RUSSELL</a:t>
             </a:r>
             <a:endParaRPr lang="en-US" sz="1900" dirty="0"/>
           </a:p>
@@ -19505,7 +19662,7 @@
                   <a:srgbClr val="6B6B6B"/>
                 </a:solidFill>
               </a:rPr>
-              <a:t>Ferrari</a:t>
+              <a:t>Mercedes</a:t>
             </a:r>
             <a:endParaRPr lang="en-US" sz="1100" dirty="0"/>
           </a:p>
@@ -19577,7 +19734,7 @@
                   <a:srgbClr val="1A1A1A"/>
                 </a:solidFill>
               </a:rPr>
-              <a:t>−1.12%p</a:t>
+              <a:t>−1.03%p</a:t>
             </a:r>
             <a:endParaRPr lang="en-US" sz="1400" dirty="0"/>
           </a:p>
@@ -19613,7 +19770,7 @@
                   <a:srgbClr val="6B6B6B"/>
                 </a:solidFill>
               </a:rPr>
-              <a:t>95% 구간 −1.60 ~ −1.00 · 공통 17경기</a:t>
+              <a:t>95% 구간 −1.48 ~ −0.68 · 공통 18경기</a:t>
             </a:r>
             <a:endParaRPr lang="en-US" sz="950" dirty="0"/>
           </a:p>
@@ -19685,7 +19842,7 @@
                   <a:srgbClr val="1A1A1A"/>
                 </a:solidFill>
               </a:rPr>
-              <a:t>−0.202초/랩</a:t>
+              <a:t>−0.138초/랩</a:t>
             </a:r>
             <a:endParaRPr lang="en-US" sz="1400" dirty="0"/>
           </a:p>
@@ -19721,7 +19878,7 @@
                   <a:srgbClr val="6B6B6B"/>
                 </a:solidFill>
               </a:rPr>
-              <a:t>95% 구간 −0.35 ~ −0.11 · 11/11 조건</a:t>
+              <a:t>동료는 신인 ANTONELLI · 11/11 조건</a:t>
             </a:r>
             <a:endParaRPr lang="en-US" sz="950" dirty="0"/>
           </a:p>
@@ -19757,7 +19914,7 @@
                   <a:srgbClr val="6B6B6B"/>
                 </a:solidFill>
               </a:rPr>
-              <a:t>일관성 · 타이어 유지</a:t>
+              <a:t>같은 자: HAMILTON 대비</a:t>
             </a:r>
             <a:endParaRPr lang="en-US" sz="1000" dirty="0"/>
           </a:p>
@@ -19790,10 +19947,10 @@
             <a:r>
               <a:rPr lang="en-US" sz="1400" b="1" dirty="0">
                 <a:solidFill>
-                  <a:srgbClr val="E10600"/>
-                </a:solidFill>
-              </a:rPr>
-              <a:t>55% · 95%</a:t>
+                  <a:srgbClr val="1A1A1A"/>
+                </a:solidFill>
+              </a:rPr>
+              <a:t>+0.037초/랩</a:t>
             </a:r>
             <a:endParaRPr lang="en-US" sz="1400" dirty="0"/>
           </a:p>
@@ -19829,7 +19986,7 @@
                   <a:srgbClr val="6B6B6B"/>
                 </a:solidFill>
               </a:rPr>
-              <a:t>타이어를 오래 쓸수록 페이스가 떨어짐</a:t>
+              <a:t>2023~24 · 8/21경기 빠름 · Silver 재계산</a:t>
             </a:r>
             <a:endParaRPr lang="en-US" sz="950" dirty="0"/>
           </a:p>
@@ -19862,10 +20019,10 @@
             <a:r>
               <a:rPr lang="en-US" sz="1200" b="1" dirty="0">
                 <a:solidFill>
-                  <a:srgbClr val="E10600"/>
-                </a:solidFill>
-              </a:rPr>
-              <a:t>페이스 근거는 더 크지만 타이어 유지 확인 필요</a:t>
+                  <a:srgbClr val="6B6B6B"/>
+                </a:solidFill>
+              </a:rPr>
+              <a:t>동료 우위가 신인 기준 · 같은 자로는 비슷</a:t>
             </a:r>
             <a:endParaRPr lang="en-US" sz="1200" dirty="0"/>
           </a:p>
@@ -19912,7 +20069,7 @@
                   <a:srgbClr val="1A1A1A"/>
                 </a:solidFill>
               </a:rPr>
-              <a:t>RUSSELL 1순위: 페이스를 메우면서 팀 강점(타이어 유지)을 지킨다 · LECLERC는 페이스 근거가 더 크지만 타이어 유지 확인이 먼저</a:t>
+              <a:t>LECLERC 1순위: 같은 자(HAMILTON)로 재도 앞선다 · RUSSELL은 동료 우위가 신인 기준이라 2순위 · 둘 다 확정이 아닌 우선 검토</a:t>
             </a:r>
             <a:endParaRPr lang="en-US" sz="1400" dirty="0"/>
           </a:p>
@@ -20093,6 +20250,10 @@
             <a:prstDash val="solid"/>
           </a:ln>
         </p:spPr>
+        <p:txBody>
+          <a:bodyPr/>
+          <a:p/>
+        </p:txBody>
       </p:sp>
       <p:sp>
         <p:nvSpPr>
@@ -20232,7 +20393,7 @@
                   <a:srgbClr val="1A1A1A"/>
                 </a:solidFill>
               </a:rPr>
-              <a:t>−1.48%p</a:t>
+              <a:t>−1.47%p</a:t>
             </a:r>
             <a:endParaRPr lang="en-US" sz="1400" dirty="0"/>
           </a:p>
@@ -20444,6 +20605,10 @@
             <a:prstDash val="solid"/>
           </a:ln>
         </p:spPr>
+        <p:txBody>
+          <a:bodyPr/>
+          <a:p/>
+        </p:txBody>
       </p:sp>
       <p:sp>
         <p:nvSpPr>
@@ -20795,6 +20960,10 @@
             <a:prstDash val="solid"/>
           </a:ln>
         </p:spPr>
+        <p:txBody>
+          <a:bodyPr/>
+          <a:p/>
+        </p:txBody>
       </p:sp>
       <p:sp>
         <p:nvSpPr>
@@ -21146,6 +21315,10 @@
             <a:prstDash val="solid"/>
           </a:ln>
         </p:spPr>
+        <p:txBody>
+          <a:bodyPr/>
+          <a:p/>
+        </p:txBody>
       </p:sp>
       <p:sp>
         <p:nvSpPr>
@@ -21235,7 +21408,7 @@
                   <a:srgbClr val="1A1A1A"/>
                 </a:solidFill>
               </a:rPr>
-              <a:t>빠르다는 사실만으로는 영입 근거가 되지 않는다 — 결론이 RUSSELL·LECLERC가 된 이유다</a:t>
+              <a:t>빠르다는 사실만으로는 영입 근거가 되지 않는다 — 결론이 LECLERC·RUSSELL이 된 이유다</a:t>
             </a:r>
             <a:endParaRPr lang="en-US" sz="1400" dirty="0"/>
           </a:p>
@@ -26572,7 +26745,7 @@
                   <a:srgbClr val="1A1A1A"/>
                 </a:solidFill>
               </a:rPr>
-              <a:t>RUSSELL·LECLERC를 우선 검토 후보로 올린다 (1순위 RUSSELL)</a:t>
+              <a:t>LECLERC·RUSSELL을 우선 검토 후보로 올린다 (1순위 LECLERC)</a:t>
             </a:r>
             <a:endParaRPr lang="en-US" sz="1400" dirty="0"/>
           </a:p>
@@ -26608,7 +26781,7 @@
                   <a:srgbClr val="6B6B6B"/>
                 </a:solidFill>
               </a:rPr>
-              <a:t>후보 19명 중 같은 경기 비교와 같은 차(동료) 비교를 11/11 조건에서 모두 통과한 두 명이다. RUSSELL은 팀 강점인 타이어 유지도 지킨다. 계약 가능성은 별도로 확인한다.</a:t>
+              <a:t>후보 19명 중 같은 경기·같은 차 비교를 11/11 조건에서 모두 통과한 두 명이다. 같은 동료 HAMILTON 기준으로 재면 LECLERC가 앞선다. 계약 가능성은 별도로 확인한다.</a:t>
             </a:r>
             <a:endParaRPr lang="en-US" sz="1050" dirty="0"/>
           </a:p>
@@ -27568,7 +27741,7 @@
                   <a:srgbClr val="6B6B6B"/>
                 </a:solidFill>
               </a:rPr>
-              <a:t>Aston Martin은 타이어 유지가 10팀 중 가장 좋은데, LECLERC의 타이어 유지는 선수 20명 중 하위(상위 95%)다. 영입하면 약점이 하나 생길 수 있다.</a:t>
+              <a:t>Aston Martin은 타이어 유지가 10팀 중 가장 좋은데, LECLERC는 2025 선수 20명 중 하위(상위 95%)다. 2023~2025로 보면 차이가 오차 범위 안이지만 영입 전 장기 스틴트로 확인한다.</a:t>
             </a:r>
             <a:endParaRPr lang="en-US" sz="1050" dirty="0"/>
           </a:p>
@@ -27822,12 +27995,12 @@
               <a:buChar char="•"/>
             </a:pPr>
             <a:r>
-              <a:rPr lang="en-US" sz="1400" dirty="0">
+              <a:rPr lang="en-US" sz="1200" dirty="0">
                 <a:solidFill>
                   <a:srgbClr val="E5E5E5"/>
                 </a:solidFill>
               </a:rPr>
-              <a:t>후보 지표는 차량 효과를 분리하지 않았다 — 교체 시뮬레이션(23)에서만 분리했고, 그 결과는 추정 기간에 따라 달라진다.</a:t>
+              <a:t>후보 지표는 차량 효과를 분리하지 않았다 — 같은 경기 비교(①)에는 차량 몫이 섞여 있어 1차 선별에만 쓴다.</a:t>
             </a:r>
             <a:endParaRPr lang="en-US" sz="1400" dirty="0"/>
           </a:p>
@@ -27840,12 +28013,12 @@
               <a:buChar char="•"/>
             </a:pPr>
             <a:r>
-              <a:rPr lang="en-US" sz="1400" dirty="0">
+              <a:rPr lang="en-US" sz="1200" dirty="0">
                 <a:solidFill>
                   <a:srgbClr val="E5E5E5"/>
                 </a:solidFill>
               </a:rPr>
-              <a:t>영입 효과를 말하지 않았다 — 조건별 우위가 반복되어도 이적 후 성과·순위 상승이 입증되는 것은 아니다.</a:t>
+              <a:t>같은 자(HAMILTON) 비교에도 한계가 있다 — 2025는 HAMILTON의 Ferrari 첫해라 LECLERC가 유리할 수 있고, 2026에는 LECLERC의 우위가 0 근처로 줄었다.</a:t>
             </a:r>
             <a:endParaRPr lang="en-US" sz="1400" dirty="0"/>
           </a:p>
@@ -27858,12 +28031,12 @@
               <a:buChar char="•"/>
             </a:pPr>
             <a:r>
-              <a:rPr lang="en-US" sz="1400" dirty="0">
+              <a:rPr lang="en-US" sz="1200" dirty="0">
                 <a:solidFill>
                   <a:srgbClr val="E5E5E5"/>
                 </a:solidFill>
               </a:rPr>
-              <a:t>공식 챔피언십 점수가 아니다 — 본경기 기본 포인트는 Sprint·보너스·예외 배점·사후 정정을 뺀 재구성 값이다.</a:t>
+              <a:t>STROLL 쪽 차량 몫은 분리할 수 없다 — STROLL은 2023~2025 ALONSO하고만 같은 차를 타 후보와 이어지는 비교 고리가 없다.</a:t>
             </a:r>
             <a:endParaRPr lang="en-US" sz="1400" dirty="0"/>
           </a:p>
@@ -27876,12 +28049,12 @@
               <a:buChar char="•"/>
             </a:pPr>
             <a:r>
-              <a:rPr lang="en-US" sz="1400" dirty="0">
+              <a:rPr lang="en-US" sz="1200" dirty="0">
                 <a:solidFill>
                   <a:srgbClr val="E5E5E5"/>
                 </a:solidFill>
               </a:rPr>
-              <a:t>금액을 추정하지 않았다 — 배분금·스폰서 수익은 계산하지 않고, 성적과의 관계만 정성적으로 설명한다.</a:t>
+              <a:t>재계산 값은 Gold와 방향은 같지만 크기가 다르다 — RUSSELL 대 ANTONELLI −0.281초(Gold −0.138초). 타이어 유지 지표는 시즌마다 크게 흔들린다.</a:t>
             </a:r>
             <a:endParaRPr lang="en-US" sz="1400" dirty="0"/>
           </a:p>
@@ -27894,12 +28067,12 @@
               <a:buChar char="•"/>
             </a:pPr>
             <a:r>
-              <a:rPr lang="en-US" sz="1400" dirty="0">
+              <a:rPr lang="en-US" sz="1200" dirty="0">
                 <a:solidFill>
                   <a:srgbClr val="E5E5E5"/>
                 </a:solidFill>
               </a:rPr>
-              <a:t>다중 비교를 보정하지 않았다 — 95% 구간은 탐색적 선별용이며, 확정하려면 독립 시즌으로 검증해야 한다.</a:t>
+              <a:t>영입 효과·금액을 말하지 않는다 — 우위가 반복되어도 이적 후 성과는 입증되지 않고, 배분금·스폰서 수익은 계산하지 않았다.</a:t>
             </a:r>
             <a:endParaRPr lang="en-US" sz="1400" dirty="0"/>
           </a:p>
@@ -27912,12 +28085,30 @@
               <a:buChar char="•"/>
             </a:pPr>
             <a:r>
-              <a:rPr lang="en-US" sz="1400" dirty="0">
+              <a:rPr lang="en-US" sz="1200" dirty="0">
                 <a:solidFill>
                   <a:srgbClr val="E5E5E5"/>
                 </a:solidFill>
               </a:rPr>
-              <a:t>Gold 수치의 계산 코드가 저장소에 없다 — 후보 지표는 정제 v0.2.0으로 계산한 결과 파일이다(v0.3.0과 차이는 22셀·2행).</a:t>
+              <a:t>공식 챔피언십 점수가 아니다 — Sprint·보너스·예외 배점을 뺀 본경기 기본 포인트다.</a:t>
+            </a:r>
+            <a:endParaRPr lang="en-US" sz="1400" dirty="0"/>
+          </a:p>
+          <a:p>
+            <a:pPr marL="342900" indent="-342900">
+              <a:spcAft>
+                <a:spcPts val="1000"/>
+              </a:spcAft>
+              <a:buSzPct val="100000"/>
+              <a:buChar char="•"/>
+            </a:pPr>
+            <a:r>
+              <a:rPr lang="en-US" sz="1200" dirty="0">
+                <a:solidFill>
+                  <a:srgbClr val="E5E5E5"/>
+                </a:solidFill>
+              </a:rPr>
+              <a:t>95% 구간은 탐색적 선별용이며 다중 비교를 보정하지 않았다. 후보 지표(Gold)는 v0.2.0 결과 파일이고 계산 코드 전체는 저장소에 없다.</a:t>
             </a:r>
             <a:endParaRPr lang="en-US" sz="1400" dirty="0"/>
           </a:p>
@@ -27953,7 +28144,7 @@
                   <a:srgbClr val="E10600"/>
                 </a:solidFill>
               </a:rPr>
-              <a:t>다음에 볼 것 — ① RUSSELL·LECLERC를 다음 시즌 데이터로 다시 판정  ② 분석 코드를 저장소로 가져와 Gold 재계산  ③ 추가 5종 원본 응답 보존</a:t>
+              <a:t>다음에 볼 것 — ① LECLERC·RUSSELL을 2026 전체 시즌으로 다시 판정  ② Gold 계산 전체를 저장소로 옮겨 재계산  ③ 추가 5종 원본 응답 보존</a:t>
             </a:r>
             <a:endParaRPr lang="en-US" sz="1200" dirty="0"/>
           </a:p>
@@ -28671,7 +28862,7 @@
                   <a:srgbClr val="E10600"/>
                 </a:solidFill>
               </a:rPr>
-              <a:t>RUSSELL(1순위)과 LECLERC</a:t>
+              <a:t>LECLERC(1순위)와 RUSSELL이다. 같은 경기·같은 차 비교를 모든 조건에서 통과한 두 명이고, 같은 동료 HAMILTON 기준으로 재면 LECLERC가 앞선다. 가장 빠른 NORRIS·VERSTAPPEN·PIASTRI는 차량 이점을 배제하지 못했다.</a:t>
             </a:r>
             <a:pPr indent="0" marL="0">
               <a:buNone/>
@@ -28682,7 +28873,7 @@
                   <a:srgbClr val="FFFFFF"/>
                 </a:solidFill>
               </a:rPr>
-              <a:t>다. 후보 19명 중 자기 팀 동료 대비 우위까지 모든 조건에서 반복된 두 명이다. 가장 빠른 NORRIS·VERSTAPPEN·PIASTRI는 차량 이점을 배제하지 못했다.</a:t>
+              <a:t/>
             </a:r>
             <a:endParaRPr lang="en-US" sz="2100" dirty="0"/>
           </a:p>
@@ -28755,6 +28946,10 @@
             <a:prstDash val="solid"/>
           </a:ln>
         </p:spPr>
+        <p:txBody>
+          <a:bodyPr/>
+          <a:p/>
+        </p:txBody>
       </p:sp>
       <p:sp>
         <p:nvSpPr>
@@ -28786,7 +28981,7 @@
                   <a:srgbClr val="8C8C8C"/>
                 </a:solidFill>
               </a:rPr>
-              <a:t>모든 숫자는 2023 ~ 2026-10-14 종료 본경기 87경기 · 정제 v0.3.0 · 본경기 기본 포인트(Sprint·보너스 제외) · Team 1</a:t>
+              <a:t>모든 숫자는 2023 ~ 2026-10-14 종료 본경기 87경기 · 정제 v0.3.0 (후보 지표 Gold는 v0.2.0) · 본경기 기본 포인트(Sprint·보너스 제외) · Team 1</a:t>
             </a:r>
             <a:endParaRPr lang="en-US" sz="1100" dirty="0"/>
           </a:p>
@@ -28887,7 +29082,7 @@
                   <a:srgbClr val="6B6B6B"/>
                 </a:solidFill>
               </a:rPr>
-              <a:t>기준: 2023 ~ 2026-10-14 종료 본경기 87경기 · 정제 v0.3.0 · 본경기 기본 포인트(Sprint·보너스 제외)</a:t>
+              <a:t>기준: 2023 ~ 2026-10-14 종료 본경기 87경기 · 정제 v0.3.0 (후보 지표 Gold는 v0.2.0) · 본경기 기본 포인트(Sprint·보너스 제외)</a:t>
             </a:r>
             <a:endParaRPr lang="en-US" sz="1400" dirty="0"/>
           </a:p>
@@ -28919,6 +29114,10 @@
             <a:prstDash val="solid"/>
           </a:ln>
         </p:spPr>
+        <p:txBody>
+          <a:bodyPr/>
+          <a:p/>
+        </p:txBody>
       </p:sp>
       <p:sp>
         <p:nvSpPr>
@@ -29018,6 +29217,10 @@
             <a:prstDash val="solid"/>
           </a:ln>
         </p:spPr>
+        <p:txBody>
+          <a:bodyPr/>
+          <a:p/>
+        </p:txBody>
       </p:sp>
       <p:sp>
         <p:nvSpPr>
@@ -29117,6 +29320,10 @@
             <a:prstDash val="solid"/>
           </a:ln>
         </p:spPr>
+        <p:txBody>
+          <a:bodyPr/>
+          <a:p/>
+        </p:txBody>
       </p:sp>
       <p:sp>
         <p:nvSpPr>
@@ -29216,6 +29423,10 @@
             <a:prstDash val="solid"/>
           </a:ln>
         </p:spPr>
+        <p:txBody>
+          <a:bodyPr/>
+          <a:p/>
+        </p:txBody>
       </p:sp>
       <p:sp>
         <p:nvSpPr>
@@ -29283,7 +29494,7 @@
                   <a:srgbClr val="6B6B6B"/>
                 </a:solidFill>
               </a:rPr>
-              <a:t>STROLL 자리 후보 19명 중 최종 우선 검토 (RUSSELL·LECLERC)</a:t>
+              <a:t>STROLL 자리 후보 19명 중 최종 우선 검토 (LECLERC·RUSSELL)</a:t>
             </a:r>
             <a:endParaRPr lang="en-US" sz="1100" dirty="0"/>
           </a:p>
@@ -29313,6 +29524,10 @@
             <a:prstDash val="solid"/>
           </a:ln>
         </p:spPr>
+        <p:txBody>
+          <a:bodyPr/>
+          <a:p/>
+        </p:txBody>
       </p:sp>
       <p:sp>
         <p:nvSpPr>
@@ -29446,6 +29661,10 @@
             <a:prstDash val="solid"/>
           </a:ln>
         </p:spPr>
+        <p:txBody>
+          <a:bodyPr/>
+          <a:p/>
+        </p:txBody>
       </p:sp>
       <p:sp>
         <p:nvSpPr>
@@ -29579,6 +29798,10 @@
             <a:prstDash val="solid"/>
           </a:ln>
         </p:spPr>
+        <p:txBody>
+          <a:bodyPr/>
+          <a:p/>
+        </p:txBody>
       </p:sp>
       <p:sp>
         <p:nvSpPr>
@@ -29646,7 +29869,7 @@
                   <a:srgbClr val="1A1A1A"/>
                 </a:solidFill>
               </a:rPr>
-              <a:t>우선 검토 후보는 RUSSELL과 LECLERC다</a:t>
+              <a:t>우선 검토 후보는 LECLERC(1순위)와 RUSSELL이다</a:t>
             </a:r>
             <a:endParaRPr lang="en-US" sz="1600" dirty="0"/>
           </a:p>

--- a/docs/F1_TeamBuilder_발표자료.pptx
+++ b/docs/F1_TeamBuilder_발표자료.pptx
@@ -4478,7 +4478,7 @@
           <a:lstStyle/>
           <a:p>
             <a:r>
-              <a:t>같은 환경을 두 단계로 나눠 봤습니다. 가로축은 같은 경기에서 STROLL과 비교한 값인데, 차가 다르니 차량 차이가 섞여 있습니다. 세로축은 같은 차를 탄 자기 팀 동료와 비교한 값이라 선수 차이만 남습니다. 오른쪽 위, 그리고 세로 막대가 0 위에 있는 선수는 RUSSELL과 LECLERC뿐입니다. McLaren 두 선수는 서로를 거의 못 이겨서 빠름이 차의 몫일 수 있고, VERSTAPPEN은 11개 조건 중 10개에서만 반복됐습니다.</a:t>
+              <a:t>같은 환경을 두 단계로 나눠 봤습니다. 가로축은 같은 경기에서 STROLL과 비교한 값인데, 차가 다르니 차량 차이가 섞여 있습니다. 세로축은 같은 차를 탄 자기 팀 동료와 비교한 값이라 선수 차이만 남습니다. 오른쪽 위에 있으면서 11가지 조건에서 모두 반복된 선수는 LECLERC와 RUSSELL뿐입니다. McLaren 두 선수는 서로를 거의 못 이겨서 빠름이 차의 몫일 수 있고, VERSTAPPEN은 11개 조건 중 10개에서만 반복됐습니다.</a:t>
             </a:r>
           </a:p>
         </p:txBody>
@@ -14340,7 +14340,7 @@
                   <a:srgbClr val="6B6B6B"/>
                 </a:solidFill>
               </a:rPr>
-              <a:t>① 같은 경기 비교(차량 포함) × ② 같은 차 동료 비교(선수만) · 2025 STROLL 자리 타 팀 후보 19명 중 판정 가능한 18명(DOOHAN 표본 부족) · 정제 조건 11가지로 반복 확인</a:t>
+              <a:t>같은 경기 비교 × 같은 차 동료 비교 · 2025 STROLL 자리 후보 18명(DOOHAN 표본 부족 제외)</a:t>
             </a:r>
             <a:endParaRPr lang="en-US" sz="1400" dirty="0"/>
           </a:p>
@@ -14354,8 +14354,8 @@
         </p:nvSpPr>
         <p:spPr>
           <a:xfrm>
-            <a:off x="7943907" y="1554480"/>
-            <a:ext cx="3714693" cy="4100000"/>
+            <a:off x="8167865" y="1554480"/>
+            <a:ext cx="3490735" cy="4100000"/>
           </a:xfrm>
           <a:prstGeom prst="rect">
             <a:avLst/>
@@ -14454,7 +14454,7 @@
                   <a:srgbClr val="E10600"/>
                 </a:solidFill>
               </a:rPr>
-              <a:t>오른쪽 위 = 차도 빠르고 선수도 빠름</a:t>
+              <a:t>오른쪽 위 = 차도 빠르고 실력도 빠름</a:t>
             </a:r>
           </a:p>
           <a:p>
@@ -14467,7 +14467,7 @@
                   <a:srgbClr val="1A1A1A"/>
                 </a:solidFill>
               </a:rPr>
-              <a:t>RUSSELL·LECLERC만 ②의 95% 구간이 0 위, 11/11 조건 반복</a:t>
+              <a:t>11/11 조건까지 반복된 선수는 LECLERC·RUSSELL뿐</a:t>
             </a:r>
           </a:p>
           <a:p>
@@ -14565,7 +14565,7 @@
                   <a:srgbClr val="1A1A1A"/>
                 </a:solidFill>
               </a:rPr>
-              <a:t>차를 빼고 같은 차 동료와 비교해도 빠른 선수는 RUSSELL·LECLERC 둘뿐이다</a:t>
+              <a:t>차를 빼고 같은 차 동료와 비교해도 빠른 선수는 LECLERC·RUSSELL 둘뿐이다</a:t>
             </a:r>
             <a:endParaRPr lang="en-US" sz="1400" dirty="0"/>
           </a:p>
@@ -14636,7 +14636,7 @@
         <p:spPr>
           <a:xfrm>
             <a:off x="548640" y="1463040"/>
-            <a:ext cx="7166667" cy="4300000"/>
+            <a:ext cx="7390625" cy="4300000"/>
           </a:xfrm>
           <a:prstGeom prst="rect">
             <a:avLst/>

--- a/docs/F1_TeamBuilder_발표자료.pptx
+++ b/docs/F1_TeamBuilder_발표자료.pptx
@@ -27,7 +27,6 @@
     <p:sldId id="273" r:id="rId19"/>
     <p:sldId id="274" r:id="rId20"/>
     <p:sldId id="275" r:id="rId21"/>
-    <p:sldId id="282" r:id="rId33"/>
     <p:sldId id="276" r:id="rId22"/>
     <p:sldId id="277" r:id="rId23"/>
     <p:sldId id="278" r:id="rId24"/>
@@ -3609,7 +3608,7 @@
           <a:p>
             <a:r>
               <a:rPr lang="en-US" dirty="0"/>
-              <a:t>가장 빠른 세 명은 모두 페이스 우위는 반복됐지만 자기 팀 동료 대비 우위가 반복되지 않았습니다. NORRIS와 PIASTRI는 서로 동료이고 차이가 0을 포함하며, VERSTAPPEN은 11개 중 1개 조건에서 반복되지 않았습니다.</a:t>
+              <a:t>가장 빠른 세 명은 모두 페이스 우위는 반복됐지만 자기 팀 동료 대비 우위가 11가지 조건 모두에서 확인되지는 않았습니다. NORRIS와 PIASTRI는 서로 동료이고 차이가 0을 포함하며, VERSTAPPEN은 동료보다 느린 조건은 없지만 1개 조건(근접 차량 제한)에서 동료 비교 표본이 부족해 확인되지 않았습니다. 또 Red Bull 계열은 HAMILTON과 같은 차를 탄 적이 없어 같은 자로 잴 수도 없습니다.</a:t>
             </a:r>
             <a:endParaRPr lang="en-US" dirty="0"/>
           </a:p>
@@ -3696,7 +3695,7 @@
           <a:lstStyle/>
           <a:p>
             <a:r>
-              <a:t>결론부터 말씀드립니다. 2025 Aston Martin의 STROLL 자리에는 LECLERC를 1순위, RUSSELL을 2순위로 검토합니다. 두 선수 모두 같은 경기 비교와 같은 차 동료 비교에서 11가지 조건 모두 빠릅니다. 둘을 가르는 것은 같은 자로 잰 비교입니다. 두 선수 모두 같은 차에서 HAMILTON과 달린 적이 있어, 같은 동료를 기준으로 재면 LECLERC는 9경기 모두 빨랐고 RUSSELL은 비슷했습니다. 교체 시뮬레이션도 같은 방향입니다. LECLERC의 타이어 유지는 영입 전에 장기 스틴트로 확인합니다. 영입과 별개로 피트레인 손실은 지금 바로 점검할 수 있습니다.</a:t>
+              <a:t>결론부터 말씀드립니다. 2025 Aston Martin의 STROLL 자리에는 LECLERC를 1순위, RUSSELL을 2순위로 검토합니다. 두 선수 모두 같은 경기 비교와 같은 차 동료 비교에서 11가지 조건 모두 빠릅니다. 둘을 가르는 것은 같은 자로 잰 비교입니다. 두 선수 모두 같은 차에서 HAMILTON과 달린 적이 있어, 같은 동료를 기준으로 재면 LECLERC는 9경기 모두 빨랐고 RUSSELL은 비슷했습니다. LECLERC의 타이어 유지는 영입 전에 장기 스틴트로 확인합니다. 영입과 별개로 피트레인 손실은 지금 바로 점검할 수 있습니다.</a:t>
             </a:r>
           </a:p>
         </p:txBody>
@@ -4347,92 +4346,6 @@
 </p:notes>
 </file>
 
-<file path=ppt/notesSlides/notesSlide27.xml><?xml version="1.0" encoding="utf-8"?>
-<p:notes xmlns:a="http://schemas.openxmlformats.org/drawingml/2006/main" xmlns:r="http://schemas.openxmlformats.org/officeDocument/2006/relationships" xmlns:p="http://schemas.openxmlformats.org/presentationml/2006/main">
-  <p:cSld>
-    <p:spTree>
-      <p:nvGrpSpPr>
-        <p:cNvPr id="1" name=""/>
-        <p:cNvGrpSpPr/>
-        <p:nvPr/>
-      </p:nvGrpSpPr>
-      <p:grpSpPr>
-        <a:xfrm>
-          <a:off x="0" y="0"/>
-          <a:ext cx="0" cy="0"/>
-          <a:chOff x="0" y="0"/>
-          <a:chExt cx="0" cy="0"/>
-        </a:xfrm>
-      </p:grpSpPr>
-      <p:sp>
-        <p:nvSpPr>
-          <p:cNvPr id="2" name="Slide Image Placeholder 1"/>
-          <p:cNvSpPr>
-            <a:spLocks noGrp="1" noRot="1" noChangeAspect="1"/>
-          </p:cNvSpPr>
-          <p:nvPr>
-            <p:ph type="sldImg"/>
-          </p:nvPr>
-        </p:nvSpPr>
-        <p:spPr/>
-      </p:sp>
-      <p:sp>
-        <p:nvSpPr>
-          <p:cNvPr id="3" name="Notes Placeholder 2"/>
-          <p:cNvSpPr>
-            <a:spLocks noGrp="1"/>
-          </p:cNvSpPr>
-          <p:nvPr>
-            <p:ph type="body" idx="1"/>
-          </p:nvPr>
-        </p:nvSpPr>
-        <p:spPr/>
-        <p:txBody>
-          <a:bodyPr/>
-          <a:lstStyle/>
-          <a:p>
-            <a:r>
-              <a:t>영입하면 성적이 얼마나 바뀌는지 확인하려고 2025 시즌을 4,000번 다시 치렀습니다. 지금 라인업은 시즌 1승 확률이 0.1%이고, 대부분 후보도 1~3%에 머뭅니다. 우승은 차량이 거의 정합니다. 현실적인 목표는 팀 6위이고, LECLERC로 바꾸면 6위 이내 확률이 9%에서 65%로 오릅니다. RUSSELL은 2025만 보면 효과가 크지만 2023~2025로 보면 거의 사라집니다. 차량 효과를 분리한 이 추정도 관측 기록의 같은 자 비교와 같은 방향, 즉 LECLERC 1순위를 지지합니다. 다만 가정 위의 추정이라 보조 근거로만 씁니다.</a:t>
-            </a:r>
-          </a:p>
-        </p:txBody>
-      </p:sp>
-      <p:sp>
-        <p:nvSpPr>
-          <p:cNvPr id="4" name="Slide Number Placeholder 3"/>
-          <p:cNvSpPr>
-            <a:spLocks noGrp="1"/>
-          </p:cNvSpPr>
-          <p:nvPr>
-            <p:ph type="sldNum" sz="quarter" idx="10"/>
-          </p:nvPr>
-        </p:nvSpPr>
-        <p:spPr/>
-        <p:txBody>
-          <a:bodyPr/>
-          <a:lstStyle/>
-          <a:p>
-            <a:fld id="{F7021451-1387-4CA6-816F-3879F97B5CBC}" type="slidenum">
-              <a:rPr lang="en-US"/>
-              <a:t>21</a:t>
-            </a:fld>
-            <a:endParaRPr lang="en-US"/>
-          </a:p>
-        </p:txBody>
-      </p:sp>
-    </p:spTree>
-    <p:extLst>
-      <p:ext uri="{BB962C8B-B14F-4D97-AF65-F5344CB8AC3E}">
-        <p14:creationId xmlns:p14="http://schemas.microsoft.com/office/powerpoint/2010/main" val="1024086991"/>
-      </p:ext>
-    </p:extLst>
-  </p:cSld>
-  <p:clrMapOvr>
-    <a:masterClrMapping/>
-  </p:clrMapOvr>
-</p:notes>
-</file>
-
 <file path=ppt/notesSlides/notesSlide28.xml><?xml version="1.0" encoding="utf-8"?>
 <p:notes xmlns:a="http://schemas.openxmlformats.org/drawingml/2006/main" xmlns:p="http://schemas.openxmlformats.org/presentationml/2006/main" xmlns:r="http://schemas.openxmlformats.org/officeDocument/2006/relationships">
   <p:cSld>
@@ -4478,7 +4391,7 @@
           <a:lstStyle/>
           <a:p>
             <a:r>
-              <a:t>같은 환경을 두 단계로 나눠 봤습니다. 가로축은 같은 경기에서 STROLL과 비교한 값인데, 차가 다르니 차량 차이가 섞여 있습니다. 세로축은 같은 차를 탄 자기 팀 동료와 비교한 값이라 선수 차이만 남습니다. 오른쪽 위에 있으면서 11가지 조건에서 모두 반복된 선수는 LECLERC와 RUSSELL뿐입니다. McLaren 두 선수는 서로를 거의 못 이겨서 빠름이 차의 몫일 수 있고, VERSTAPPEN은 11개 조건 중 10개에서만 반복됐습니다.</a:t>
+              <a:t>같은 환경을 두 단계로 나눠 봤습니다. 가로축은 같은 경기에서 STROLL과 비교한 값인데, 차가 다르니 차량 차이가 섞여 있습니다. 세로축은 같은 차를 탄 자기 팀 동료와 비교한 값이라 선수 차이만 남습니다. 오른쪽 위에 있으면서 11가지 조건에서 모두 반복된 선수는 LECLERC와 RUSSELL뿐입니다. McLaren 두 선수는 서로를 거의 못 이겨서 빠름이 차의 몫일 수 있고, VERSTAPPEN은 동료보다 느린 조건은 없지만 근접 차량 제한 조건에서 동료 비교 표본이 부족해 11가지 모두 확인되지 않았고, 기준대로 후보에서 뺐습니다.</a:t>
             </a:r>
           </a:p>
         </p:txBody>
@@ -14506,7 +14419,7 @@
                   <a:srgbClr val="6B6B6B"/>
                 </a:solidFill>
               </a:rPr>
-              <a:t>VERSTAPPEN: 10/11 조건 → 기준 미달</a:t>
+              <a:t>VERSTAPPEN: 동료보다 느린 조건은 없지만 1개 조건 표본 부족 → 확인 불가로 제외</a:t>
             </a:r>
           </a:p>
           <a:p>
@@ -16272,7 +16185,7 @@
                             <a:srgbClr val="6B6B6B"/>
                           </a:solidFill>
                         </a:rPr>
-                        <a:t>미달 10/11</a:t>
+                        <a:t>미확인 10/11 (1개 표본 부족)</a:t>
                       </a:r>
                     </a:p>
                   </a:txBody>
@@ -18620,7 +18533,7 @@
                   <a:srgbClr val="8C8C8C"/>
                 </a:solidFill>
               </a:rPr>
-              <a:t>가장 빠른 NORRIS·VERSTAPPEN·PIASTRI는 자기 팀 동료 대비 우위가 반복되지 않아 차량 이점을 배제하지 못했다 · 계약 가능성과 이적 후 성과는 판단하지 않는다</a:t>
+              <a:t>가장 빠른 NORRIS·VERSTAPPEN·PIASTRI는 자기 팀 동료 대비 우위가 11가지 조건 모두에서 확인되지 않아 차량 이점을 배제하지 못했다 · 계약 가능성과 이적 후 성과는 판단하지 않는다</a:t>
             </a:r>
             <a:endParaRPr lang="en-US" sz="1100" dirty="0"/>
           </a:p>
@@ -20180,7 +20093,7 @@
                   <a:srgbClr val="1A1A1A"/>
                 </a:solidFill>
               </a:rPr>
-              <a:t>가장 빠른 세 명이 빠진 이유 — 자기 팀 동료를 이기지 못했다</a:t>
+              <a:t>가장 빠른 세 명이 빠진 이유 — 동료 대비 우위 미확인</a:t>
             </a:r>
             <a:endParaRPr lang="en-US" sz="2800" dirty="0"/>
           </a:p>
@@ -20928,7 +20841,7 @@
                   <a:srgbClr val="E10600"/>
                 </a:solidFill>
               </a:rPr>
-              <a:t>동료 대비 1개 조건에서 반복 안 됨</a:t>
+              <a:t>느린 조건은 없지만 1개 조건 표본 부족</a:t>
             </a:r>
             <a:endParaRPr lang="en-US" sz="1100" dirty="0"/>
           </a:p>
@@ -21361,7 +21274,7 @@
                   <a:srgbClr val="1A1A1A"/>
                 </a:solidFill>
               </a:rPr>
-              <a:t>세 명 모두 기준 선수보다 1.5%p 가까이 빠르고 정제 조건 11/11에서도 빨랐다. 그러나 이 차이가 차량 덕분인지 선수 덕분인지는 자기 팀 동료를 꾸준히 이겨야 가를 수 있다.</a:t>
+              <a:t>세 명 모두 기준 선수보다 1.5%p 가까이 빠르고 정제 조건 11/11에서도 빨랐다. 그러나 이 차이가 차량 덕분인지 선수 덕분인지는 자기 팀 동료를 11가지 조건 모두에서 이겨야 가를 수 있다.</a:t>
             </a:r>
             <a:endParaRPr lang="en-US" sz="1200" dirty="0"/>
           </a:p>
@@ -21877,3704 +21790,6 @@
 
 <file path=ppt/slides/slide23.xml><?xml version="1.0" encoding="utf-8"?>
 <p:sld xmlns:a="http://schemas.openxmlformats.org/drawingml/2006/main" xmlns:r="http://schemas.openxmlformats.org/officeDocument/2006/relationships" xmlns:p="http://schemas.openxmlformats.org/presentationml/2006/main">
-  <p:cSld name="Slide 17">
-    <p:spTree>
-      <p:nvGrpSpPr>
-        <p:cNvPr id="1" name=""/>
-        <p:cNvGrpSpPr/>
-        <p:nvPr/>
-      </p:nvGrpSpPr>
-      <p:grpSpPr>
-        <a:xfrm>
-          <a:off x="0" y="0"/>
-          <a:ext cx="0" cy="0"/>
-          <a:chOff x="0" y="0"/>
-          <a:chExt cx="0" cy="0"/>
-        </a:xfrm>
-      </p:grpSpPr>
-      <p:sp>
-        <p:nvSpPr>
-          <p:cNvPr id="2" name="Text 0"/>
-          <p:cNvSpPr/>
-          <p:nvPr>
-            <p:ph idx="100" type="title" hasCustomPrompt="1"/>
-          </p:nvPr>
-        </p:nvSpPr>
-        <p:spPr>
-          <a:xfrm>
-            <a:off x="548640" y="365760"/>
-            <a:ext cx="11109960" cy="640080"/>
-          </a:xfrm>
-          <a:prstGeom prst="rect">
-            <a:avLst/>
-          </a:prstGeom>
-          <a:noFill/>
-          <a:ln/>
-        </p:spPr>
-        <p:txBody>
-          <a:bodyPr wrap="square" lIns="0" tIns="0" rIns="0" bIns="0" rtlCol="0" anchor="ctr"/>
-          <a:lstStyle/>
-          <a:p>
-            <a:pPr algn="l" indent="0" marL="0">
-              <a:buNone/>
-            </a:pPr>
-            <a:r>
-              <a:rPr lang="en-US" sz="2800" b="1" dirty="0">
-                <a:solidFill>
-                  <a:srgbClr val="1A1A1A"/>
-                </a:solidFill>
-              </a:rPr>
-              <a:t>교체해도 우승은 어렵다 — 현실적 목표는 팀 6위</a:t>
-            </a:r>
-            <a:endParaRPr lang="en-US" sz="2800" dirty="0"/>
-          </a:p>
-        </p:txBody>
-      </p:sp>
-      <p:sp>
-        <p:nvSpPr>
-          <p:cNvPr id="3" name="Text 0"/>
-          <p:cNvSpPr/>
-          <p:nvPr>
-            <p:ph idx="101" type="body" hasCustomPrompt="1"/>
-          </p:nvPr>
-        </p:nvSpPr>
-        <p:spPr>
-          <a:xfrm>
-            <a:off x="548640" y="1005840"/>
-            <a:ext cx="11109960" cy="365760"/>
-          </a:xfrm>
-          <a:prstGeom prst="rect">
-            <a:avLst/>
-          </a:prstGeom>
-          <a:noFill/>
-          <a:ln/>
-        </p:spPr>
-        <p:txBody>
-          <a:bodyPr wrap="square" lIns="0" tIns="0" rIns="0" bIns="0" rtlCol="0" anchor="t"/>
-          <a:lstStyle/>
-          <a:p>
-            <a:pPr indent="0" marL="0">
-              <a:buNone/>
-            </a:pPr>
-            <a:r>
-              <a:rPr lang="en-US" sz="1400" dirty="0">
-                <a:solidFill>
-                  <a:srgbClr val="6B6B6B"/>
-                </a:solidFill>
-              </a:rPr>
-              <a:t>시뮬레이션 · 가정 기반 추정 (Gold 관측 근거와 구분) · 2025 본경기 24경기 4,000번 재현 · 차량·선수 효과는 2023~2025로 분리</a:t>
-            </a:r>
-            <a:endParaRPr lang="en-US" sz="1400" dirty="0"/>
-          </a:p>
-        </p:txBody>
-      </p:sp>
-      <p:graphicFrame>
-        <p:nvGraphicFramePr>
-          <p:cNvPr id="18" name="cand-table"/>
-          <p:cNvGraphicFramePr>
-            <a:graphicFrameLocks noGrp="1"/>
-          </p:cNvGraphicFramePr>
-          <p:nvPr>
-            <p:extLst>
-              <p:ext uri="{D42A27DB-BD31-4B8C-83A1-F6EECF244321}">
-                <p14:modId xmlns:p14="http://schemas.microsoft.com/office/powerpoint/2010/main" val="1579011935"/>
-              </p:ext>
-            </p:extLst>
-          </p:nvPr>
-        </p:nvGraphicFramePr>
-        <p:xfrm>
-          <a:off x="548640" y="1508760"/>
-          <a:ext cx="11109960" cy="914400"/>
-        </p:xfrm>
-        <a:graphic>
-          <a:graphicData uri="http://schemas.openxmlformats.org/drawingml/2006/table">
-            <a:tbl>
-              <a:tblPr/>
-              <a:tblGrid>
-                <a:gridCol w="1691640"/>
-                <a:gridCol w="1463040"/>
-                <a:gridCol w="1371600"/>
-                <a:gridCol w="1371600"/>
-                <a:gridCol w="1280160"/>
-                <a:gridCol w="1325880"/>
-                <a:gridCol w="1051560"/>
-                <a:gridCol w="1554480"/>
-              </a:tblGrid>
-              <a:tr h="512064">
-                <a:tc>
-                  <a:txBody>
-                    <a:bodyPr/>
-                    <a:lstStyle/>
-                    <a:p>
-                      <a:pPr algn="l" indent="0" marL="0">
-                        <a:buNone/>
-                      </a:pPr>
-                      <a:r>
-                        <a:rPr lang="en-US" sz="1100" b="1" dirty="0">
-                          <a:solidFill>
-                            <a:srgbClr val="FFFFFF"/>
-                          </a:solidFill>
-                        </a:rPr>
-                        <a:t>시나리오</a:t>
-                      </a:r>
-                      <a:endParaRPr lang="en-US" sz="1100" dirty="0"/>
-                    </a:p>
-                  </a:txBody>
-                  <a:tcPr marL="91440" marR="91440" marT="45720" marB="45720" anchor="ctr">
-                    <a:lnL w="9525" cap="flat" cmpd="sng" algn="ctr">
-                      <a:solidFill>
-                        <a:srgbClr val="E5E5E5"/>
-                      </a:solidFill>
-                      <a:prstDash val="solid"/>
-                      <a:round/>
-                      <a:headEnd type="none" w="med" len="med"/>
-                      <a:tailEnd type="none" w="med" len="med"/>
-                    </a:lnL>
-                    <a:lnR w="9525" cap="flat" cmpd="sng" algn="ctr">
-                      <a:solidFill>
-                        <a:srgbClr val="E5E5E5"/>
-                      </a:solidFill>
-                      <a:prstDash val="solid"/>
-                      <a:round/>
-                      <a:headEnd type="none" w="med" len="med"/>
-                      <a:tailEnd type="none" w="med" len="med"/>
-                    </a:lnR>
-                    <a:lnT w="9525" cap="flat" cmpd="sng" algn="ctr">
-                      <a:solidFill>
-                        <a:srgbClr val="E5E5E5"/>
-                      </a:solidFill>
-                      <a:prstDash val="solid"/>
-                      <a:round/>
-                      <a:headEnd type="none" w="med" len="med"/>
-                      <a:tailEnd type="none" w="med" len="med"/>
-                    </a:lnT>
-                    <a:lnB w="9525" cap="flat" cmpd="sng" algn="ctr">
-                      <a:solidFill>
-                        <a:srgbClr val="E5E5E5"/>
-                      </a:solidFill>
-                      <a:prstDash val="solid"/>
-                      <a:round/>
-                      <a:headEnd type="none" w="med" len="med"/>
-                      <a:tailEnd type="none" w="med" len="med"/>
-                    </a:lnB>
-                    <a:solidFill>
-                      <a:srgbClr val="1A1A1A"/>
-                    </a:solidFill>
-                  </a:tcPr>
-                </a:tc>
-                <a:tc>
-                  <a:txBody>
-                    <a:bodyPr/>
-                    <a:lstStyle/>
-                    <a:p>
-                      <a:pPr algn="l" indent="0" marL="0">
-                        <a:buNone/>
-                      </a:pPr>
-                      <a:r>
-                        <a:rPr lang="en-US" sz="1100" b="1" dirty="0">
-                          <a:solidFill>
-                            <a:srgbClr val="FFFFFF"/>
-                          </a:solidFill>
-                        </a:rPr>
-                        <a:t>원래 팀</a:t>
-                      </a:r>
-                      <a:endParaRPr lang="en-US" sz="1100" dirty="0"/>
-                    </a:p>
-                  </a:txBody>
-                  <a:tcPr marL="91440" marR="91440" marT="45720" marB="45720" anchor="ctr">
-                    <a:lnL w="9525" cap="flat" cmpd="sng" algn="ctr">
-                      <a:solidFill>
-                        <a:srgbClr val="E5E5E5"/>
-                      </a:solidFill>
-                      <a:prstDash val="solid"/>
-                      <a:round/>
-                      <a:headEnd type="none" w="med" len="med"/>
-                      <a:tailEnd type="none" w="med" len="med"/>
-                    </a:lnL>
-                    <a:lnR w="9525" cap="flat" cmpd="sng" algn="ctr">
-                      <a:solidFill>
-                        <a:srgbClr val="E5E5E5"/>
-                      </a:solidFill>
-                      <a:prstDash val="solid"/>
-                      <a:round/>
-                      <a:headEnd type="none" w="med" len="med"/>
-                      <a:tailEnd type="none" w="med" len="med"/>
-                    </a:lnR>
-                    <a:lnT w="9525" cap="flat" cmpd="sng" algn="ctr">
-                      <a:solidFill>
-                        <a:srgbClr val="E5E5E5"/>
-                      </a:solidFill>
-                      <a:prstDash val="solid"/>
-                      <a:round/>
-                      <a:headEnd type="none" w="med" len="med"/>
-                      <a:tailEnd type="none" w="med" len="med"/>
-                    </a:lnT>
-                    <a:lnB w="9525" cap="flat" cmpd="sng" algn="ctr">
-                      <a:solidFill>
-                        <a:srgbClr val="E5E5E5"/>
-                      </a:solidFill>
-                      <a:prstDash val="solid"/>
-                      <a:round/>
-                      <a:headEnd type="none" w="med" len="med"/>
-                      <a:tailEnd type="none" w="med" len="med"/>
-                    </a:lnB>
-                    <a:solidFill>
-                      <a:srgbClr val="1A1A1A"/>
-                    </a:solidFill>
-                  </a:tcPr>
-                </a:tc>
-                <a:tc>
-                  <a:txBody>
-                    <a:bodyPr/>
-                    <a:lstStyle/>
-                    <a:p>
-                      <a:pPr algn="l" indent="0" marL="0">
-                        <a:buNone/>
-                      </a:pPr>
-                      <a:r>
-                        <a:rPr lang="en-US" sz="1100" b="1" dirty="0">
-                          <a:solidFill>
-                            <a:srgbClr val="FFFFFF"/>
-                          </a:solidFill>
-                        </a:rPr>
-                        <a:t>시즌 1승 이상</a:t>
-                      </a:r>
-                      <a:endParaRPr lang="en-US" sz="1100" dirty="0"/>
-                    </a:p>
-                  </a:txBody>
-                  <a:tcPr marL="91440" marR="91440" marT="45720" marB="45720" anchor="ctr">
-                    <a:lnL w="9525" cap="flat" cmpd="sng" algn="ctr">
-                      <a:solidFill>
-                        <a:srgbClr val="E5E5E5"/>
-                      </a:solidFill>
-                      <a:prstDash val="solid"/>
-                      <a:round/>
-                      <a:headEnd type="none" w="med" len="med"/>
-                      <a:tailEnd type="none" w="med" len="med"/>
-                    </a:lnL>
-                    <a:lnR w="9525" cap="flat" cmpd="sng" algn="ctr">
-                      <a:solidFill>
-                        <a:srgbClr val="E5E5E5"/>
-                      </a:solidFill>
-                      <a:prstDash val="solid"/>
-                      <a:round/>
-                      <a:headEnd type="none" w="med" len="med"/>
-                      <a:tailEnd type="none" w="med" len="med"/>
-                    </a:lnR>
-                    <a:lnT w="9525" cap="flat" cmpd="sng" algn="ctr">
-                      <a:solidFill>
-                        <a:srgbClr val="E5E5E5"/>
-                      </a:solidFill>
-                      <a:prstDash val="solid"/>
-                      <a:round/>
-                      <a:headEnd type="none" w="med" len="med"/>
-                      <a:tailEnd type="none" w="med" len="med"/>
-                    </a:lnT>
-                    <a:lnB w="9525" cap="flat" cmpd="sng" algn="ctr">
-                      <a:solidFill>
-                        <a:srgbClr val="E5E5E5"/>
-                      </a:solidFill>
-                      <a:prstDash val="solid"/>
-                      <a:round/>
-                      <a:headEnd type="none" w="med" len="med"/>
-                      <a:tailEnd type="none" w="med" len="med"/>
-                    </a:lnB>
-                    <a:solidFill>
-                      <a:srgbClr val="1A1A1A"/>
-                    </a:solidFill>
-                  </a:tcPr>
-                </a:tc>
-                <a:tc>
-                  <a:txBody>
-                    <a:bodyPr/>
-                    <a:lstStyle/>
-                    <a:p>
-                      <a:pPr algn="l" indent="0" marL="0">
-                        <a:buNone/>
-                      </a:pPr>
-                      <a:r>
-                        <a:rPr lang="en-US" sz="1100" b="1" dirty="0">
-                          <a:solidFill>
-                            <a:srgbClr val="FFFFFF"/>
-                          </a:solidFill>
-                        </a:rPr>
-                        <a:t>포디움 1회 이상</a:t>
-                      </a:r>
-                      <a:endParaRPr lang="en-US" sz="1100" dirty="0"/>
-                    </a:p>
-                  </a:txBody>
-                  <a:tcPr marL="91440" marR="91440" marT="45720" marB="45720" anchor="ctr">
-                    <a:lnL w="9525" cap="flat" cmpd="sng" algn="ctr">
-                      <a:solidFill>
-                        <a:srgbClr val="E5E5E5"/>
-                      </a:solidFill>
-                      <a:prstDash val="solid"/>
-                      <a:round/>
-                      <a:headEnd type="none" w="med" len="med"/>
-                      <a:tailEnd type="none" w="med" len="med"/>
-                    </a:lnL>
-                    <a:lnR w="9525" cap="flat" cmpd="sng" algn="ctr">
-                      <a:solidFill>
-                        <a:srgbClr val="E5E5E5"/>
-                      </a:solidFill>
-                      <a:prstDash val="solid"/>
-                      <a:round/>
-                      <a:headEnd type="none" w="med" len="med"/>
-                      <a:tailEnd type="none" w="med" len="med"/>
-                    </a:lnR>
-                    <a:lnT w="9525" cap="flat" cmpd="sng" algn="ctr">
-                      <a:solidFill>
-                        <a:srgbClr val="E5E5E5"/>
-                      </a:solidFill>
-                      <a:prstDash val="solid"/>
-                      <a:round/>
-                      <a:headEnd type="none" w="med" len="med"/>
-                      <a:tailEnd type="none" w="med" len="med"/>
-                    </a:lnT>
-                    <a:lnB w="9525" cap="flat" cmpd="sng" algn="ctr">
-                      <a:solidFill>
-                        <a:srgbClr val="E5E5E5"/>
-                      </a:solidFill>
-                      <a:prstDash val="solid"/>
-                      <a:round/>
-                      <a:headEnd type="none" w="med" len="med"/>
-                      <a:tailEnd type="none" w="med" len="med"/>
-                    </a:lnB>
-                    <a:solidFill>
-                      <a:srgbClr val="1A1A1A"/>
-                    </a:solidFill>
-                  </a:tcPr>
-                </a:tc>
-                <a:tc>
-                  <a:txBody>
-                    <a:bodyPr/>
-                    <a:lstStyle/>
-                    <a:p>
-                      <a:pPr algn="l" indent="0" marL="0">
-                        <a:buNone/>
-                      </a:pPr>
-                      <a:r>
-                        <a:rPr lang="en-US" sz="1100" b="1" dirty="0">
-                          <a:solidFill>
-                            <a:srgbClr val="FFFFFF"/>
-                          </a:solidFill>
-                        </a:rPr>
-                        <a:t>팀 기대 포인트</a:t>
-                      </a:r>
-                      <a:endParaRPr lang="en-US" sz="1100" dirty="0"/>
-                    </a:p>
-                  </a:txBody>
-                  <a:tcPr marL="91440" marR="91440" marT="45720" marB="45720" anchor="ctr">
-                    <a:lnL w="9525" cap="flat" cmpd="sng" algn="ctr">
-                      <a:solidFill>
-                        <a:srgbClr val="E5E5E5"/>
-                      </a:solidFill>
-                      <a:prstDash val="solid"/>
-                      <a:round/>
-                      <a:headEnd type="none" w="med" len="med"/>
-                      <a:tailEnd type="none" w="med" len="med"/>
-                    </a:lnL>
-                    <a:lnR w="9525" cap="flat" cmpd="sng" algn="ctr">
-                      <a:solidFill>
-                        <a:srgbClr val="E5E5E5"/>
-                      </a:solidFill>
-                      <a:prstDash val="solid"/>
-                      <a:round/>
-                      <a:headEnd type="none" w="med" len="med"/>
-                      <a:tailEnd type="none" w="med" len="med"/>
-                    </a:lnR>
-                    <a:lnT w="9525" cap="flat" cmpd="sng" algn="ctr">
-                      <a:solidFill>
-                        <a:srgbClr val="E5E5E5"/>
-                      </a:solidFill>
-                      <a:prstDash val="solid"/>
-                      <a:round/>
-                      <a:headEnd type="none" w="med" len="med"/>
-                      <a:tailEnd type="none" w="med" len="med"/>
-                    </a:lnT>
-                    <a:lnB w="9525" cap="flat" cmpd="sng" algn="ctr">
-                      <a:solidFill>
-                        <a:srgbClr val="E5E5E5"/>
-                      </a:solidFill>
-                      <a:prstDash val="solid"/>
-                      <a:round/>
-                      <a:headEnd type="none" w="med" len="med"/>
-                      <a:tailEnd type="none" w="med" len="med"/>
-                    </a:lnB>
-                    <a:solidFill>
-                      <a:srgbClr val="1A1A1A"/>
-                    </a:solidFill>
-                  </a:tcPr>
-                </a:tc>
-                <a:tc>
-                  <a:txBody>
-                    <a:bodyPr/>
-                    <a:lstStyle/>
-                    <a:p>
-                      <a:pPr algn="l" indent="0" marL="0">
-                        <a:buNone/>
-                      </a:pPr>
-                      <a:r>
-                        <a:rPr lang="en-US" sz="1100" b="1" dirty="0">
-                          <a:solidFill>
-                            <a:srgbClr val="FFFFFF"/>
-                          </a:solidFill>
-                        </a:rPr>
-                        <a:t>팀 기대 순위</a:t>
-                      </a:r>
-                      <a:endParaRPr lang="en-US" sz="1100" dirty="0"/>
-                    </a:p>
-                  </a:txBody>
-                  <a:tcPr marL="91440" marR="91440" marT="45720" marB="45720" anchor="ctr">
-                    <a:lnL w="9525" cap="flat" cmpd="sng" algn="ctr">
-                      <a:solidFill>
-                        <a:srgbClr val="E5E5E5"/>
-                      </a:solidFill>
-                      <a:prstDash val="solid"/>
-                      <a:round/>
-                      <a:headEnd type="none" w="med" len="med"/>
-                      <a:tailEnd type="none" w="med" len="med"/>
-                    </a:lnL>
-                    <a:lnR w="9525" cap="flat" cmpd="sng" algn="ctr">
-                      <a:solidFill>
-                        <a:srgbClr val="E5E5E5"/>
-                      </a:solidFill>
-                      <a:prstDash val="solid"/>
-                      <a:round/>
-                      <a:headEnd type="none" w="med" len="med"/>
-                      <a:tailEnd type="none" w="med" len="med"/>
-                    </a:lnR>
-                    <a:lnT w="9525" cap="flat" cmpd="sng" algn="ctr">
-                      <a:solidFill>
-                        <a:srgbClr val="E5E5E5"/>
-                      </a:solidFill>
-                      <a:prstDash val="solid"/>
-                      <a:round/>
-                      <a:headEnd type="none" w="med" len="med"/>
-                      <a:tailEnd type="none" w="med" len="med"/>
-                    </a:lnT>
-                    <a:lnB w="9525" cap="flat" cmpd="sng" algn="ctr">
-                      <a:solidFill>
-                        <a:srgbClr val="E5E5E5"/>
-                      </a:solidFill>
-                      <a:prstDash val="solid"/>
-                      <a:round/>
-                      <a:headEnd type="none" w="med" len="med"/>
-                      <a:tailEnd type="none" w="med" len="med"/>
-                    </a:lnB>
-                    <a:solidFill>
-                      <a:srgbClr val="1A1A1A"/>
-                    </a:solidFill>
-                  </a:tcPr>
-                </a:tc>
-                <a:tc>
-                  <a:txBody>
-                    <a:bodyPr/>
-                    <a:lstStyle/>
-                    <a:p>
-                      <a:pPr algn="l" indent="0" marL="0">
-                        <a:buNone/>
-                      </a:pPr>
-                      <a:r>
-                        <a:rPr lang="en-US" sz="1100" b="1" dirty="0">
-                          <a:solidFill>
-                            <a:srgbClr val="FFFFFF"/>
-                          </a:solidFill>
-                        </a:rPr>
-                        <a:t>팀 6위 이내</a:t>
-                      </a:r>
-                      <a:endParaRPr lang="en-US" sz="1100" dirty="0"/>
-                    </a:p>
-                  </a:txBody>
-                  <a:tcPr marL="91440" marR="91440" marT="45720" marB="45720" anchor="ctr">
-                    <a:lnL w="9525" cap="flat" cmpd="sng" algn="ctr">
-                      <a:solidFill>
-                        <a:srgbClr val="E5E5E5"/>
-                      </a:solidFill>
-                      <a:prstDash val="solid"/>
-                      <a:round/>
-                      <a:headEnd type="none" w="med" len="med"/>
-                      <a:tailEnd type="none" w="med" len="med"/>
-                    </a:lnL>
-                    <a:lnR w="9525" cap="flat" cmpd="sng" algn="ctr">
-                      <a:solidFill>
-                        <a:srgbClr val="E5E5E5"/>
-                      </a:solidFill>
-                      <a:prstDash val="solid"/>
-                      <a:round/>
-                      <a:headEnd type="none" w="med" len="med"/>
-                      <a:tailEnd type="none" w="med" len="med"/>
-                    </a:lnR>
-                    <a:lnT w="9525" cap="flat" cmpd="sng" algn="ctr">
-                      <a:solidFill>
-                        <a:srgbClr val="E5E5E5"/>
-                      </a:solidFill>
-                      <a:prstDash val="solid"/>
-                      <a:round/>
-                      <a:headEnd type="none" w="med" len="med"/>
-                      <a:tailEnd type="none" w="med" len="med"/>
-                    </a:lnT>
-                    <a:lnB w="9525" cap="flat" cmpd="sng" algn="ctr">
-                      <a:solidFill>
-                        <a:srgbClr val="E5E5E5"/>
-                      </a:solidFill>
-                      <a:prstDash val="solid"/>
-                      <a:round/>
-                      <a:headEnd type="none" w="med" len="med"/>
-                      <a:tailEnd type="none" w="med" len="med"/>
-                    </a:lnB>
-                    <a:solidFill>
-                      <a:srgbClr val="1A1A1A"/>
-                    </a:solidFill>
-                  </a:tcPr>
-                </a:tc>
-                <a:tc>
-                  <a:txBody>
-                    <a:bodyPr/>
-                    <a:lstStyle/>
-                    <a:p>
-                      <a:pPr algn="l" indent="0" marL="0">
-                        <a:buNone/>
-                      </a:pPr>
-                      <a:r>
-                        <a:rPr lang="en-US" sz="1100" b="1" dirty="0">
-                          <a:solidFill>
-                            <a:srgbClr val="FFFFFF"/>
-                          </a:solidFill>
-                        </a:rPr>
-                        <a:t>2025만 추정 · 6위 이내</a:t>
-                      </a:r>
-                      <a:endParaRPr lang="en-US" sz="1100" dirty="0"/>
-                    </a:p>
-                  </a:txBody>
-                  <a:tcPr marL="91440" marR="91440" marT="45720" marB="45720" anchor="ctr">
-                    <a:lnL w="9525" cap="flat" cmpd="sng" algn="ctr">
-                      <a:solidFill>
-                        <a:srgbClr val="E5E5E5"/>
-                      </a:solidFill>
-                      <a:prstDash val="solid"/>
-                      <a:round/>
-                      <a:headEnd type="none" w="med" len="med"/>
-                      <a:tailEnd type="none" w="med" len="med"/>
-                    </a:lnL>
-                    <a:lnR w="9525" cap="flat" cmpd="sng" algn="ctr">
-                      <a:solidFill>
-                        <a:srgbClr val="E5E5E5"/>
-                      </a:solidFill>
-                      <a:prstDash val="solid"/>
-                      <a:round/>
-                      <a:headEnd type="none" w="med" len="med"/>
-                      <a:tailEnd type="none" w="med" len="med"/>
-                    </a:lnR>
-                    <a:lnT w="9525" cap="flat" cmpd="sng" algn="ctr">
-                      <a:solidFill>
-                        <a:srgbClr val="E5E5E5"/>
-                      </a:solidFill>
-                      <a:prstDash val="solid"/>
-                      <a:round/>
-                      <a:headEnd type="none" w="med" len="med"/>
-                      <a:tailEnd type="none" w="med" len="med"/>
-                    </a:lnT>
-                    <a:lnB w="9525" cap="flat" cmpd="sng" algn="ctr">
-                      <a:solidFill>
-                        <a:srgbClr val="E5E5E5"/>
-                      </a:solidFill>
-                      <a:prstDash val="solid"/>
-                      <a:round/>
-                      <a:headEnd type="none" w="med" len="med"/>
-                      <a:tailEnd type="none" w="med" len="med"/>
-                    </a:lnB>
-                    <a:solidFill>
-                      <a:srgbClr val="1A1A1A"/>
-                    </a:solidFill>
-                  </a:tcPr>
-                </a:tc>
-              </a:tr>
-              <a:tr h="512064">
-                <a:tc>
-                  <a:txBody>
-                    <a:bodyPr/>
-                    <a:lstStyle/>
-                    <a:p>
-                      <a:pPr algn="l" indent="0" marL="0">
-                        <a:buNone/>
-                      </a:pPr>
-                      <a:r>
-                        <a:rPr lang="en-US" sz="1100" b="1" dirty="0">
-                          <a:solidFill>
-                            <a:srgbClr val="1A1A1A"/>
-                          </a:solidFill>
-                        </a:rPr>
-                        <a:t>실제 라인업 (STROLL)</a:t>
-                      </a:r>
-                      <a:endParaRPr lang="en-US" sz="1100" dirty="0"/>
-                    </a:p>
-                  </a:txBody>
-                  <a:tcPr marL="91440" marR="91440" marT="45720" marB="45720" anchor="ctr">
-                    <a:lnL w="9525" cap="flat" cmpd="sng" algn="ctr">
-                      <a:solidFill>
-                        <a:srgbClr val="E5E5E5"/>
-                      </a:solidFill>
-                      <a:prstDash val="solid"/>
-                      <a:round/>
-                      <a:headEnd type="none" w="med" len="med"/>
-                      <a:tailEnd type="none" w="med" len="med"/>
-                    </a:lnL>
-                    <a:lnR w="9525" cap="flat" cmpd="sng" algn="ctr">
-                      <a:solidFill>
-                        <a:srgbClr val="E5E5E5"/>
-                      </a:solidFill>
-                      <a:prstDash val="solid"/>
-                      <a:round/>
-                      <a:headEnd type="none" w="med" len="med"/>
-                      <a:tailEnd type="none" w="med" len="med"/>
-                    </a:lnR>
-                    <a:lnT w="9525" cap="flat" cmpd="sng" algn="ctr">
-                      <a:solidFill>
-                        <a:srgbClr val="E5E5E5"/>
-                      </a:solidFill>
-                      <a:prstDash val="solid"/>
-                      <a:round/>
-                      <a:headEnd type="none" w="med" len="med"/>
-                      <a:tailEnd type="none" w="med" len="med"/>
-                    </a:lnT>
-                    <a:lnB w="9525" cap="flat" cmpd="sng" algn="ctr">
-                      <a:solidFill>
-                        <a:srgbClr val="E5E5E5"/>
-                      </a:solidFill>
-                      <a:prstDash val="solid"/>
-                      <a:round/>
-                      <a:headEnd type="none" w="med" len="med"/>
-                      <a:tailEnd type="none" w="med" len="med"/>
-                    </a:lnB>
-                    <a:solidFill>
-                      <a:srgbClr val="FDECEC"/>
-                    </a:solidFill>
-                  </a:tcPr>
-                </a:tc>
-                <a:tc>
-                  <a:txBody>
-                    <a:bodyPr/>
-                    <a:lstStyle/>
-                    <a:p>
-                      <a:pPr algn="l" indent="0" marL="0">
-                        <a:buNone/>
-                      </a:pPr>
-                      <a:r>
-                        <a:rPr lang="en-US" sz="1100" dirty="0">
-                          <a:solidFill>
-                            <a:srgbClr val="1A1A1A"/>
-                          </a:solidFill>
-                        </a:rPr>
-                        <a:t>Aston Martin</a:t>
-                      </a:r>
-                      <a:endParaRPr lang="en-US" sz="1100" dirty="0"/>
-                    </a:p>
-                  </a:txBody>
-                  <a:tcPr marL="91440" marR="91440" marT="45720" marB="45720" anchor="ctr">
-                    <a:lnL w="9525" cap="flat" cmpd="sng" algn="ctr">
-                      <a:solidFill>
-                        <a:srgbClr val="E5E5E5"/>
-                      </a:solidFill>
-                      <a:prstDash val="solid"/>
-                      <a:round/>
-                      <a:headEnd type="none" w="med" len="med"/>
-                      <a:tailEnd type="none" w="med" len="med"/>
-                    </a:lnL>
-                    <a:lnR w="9525" cap="flat" cmpd="sng" algn="ctr">
-                      <a:solidFill>
-                        <a:srgbClr val="E5E5E5"/>
-                      </a:solidFill>
-                      <a:prstDash val="solid"/>
-                      <a:round/>
-                      <a:headEnd type="none" w="med" len="med"/>
-                      <a:tailEnd type="none" w="med" len="med"/>
-                    </a:lnR>
-                    <a:lnT w="9525" cap="flat" cmpd="sng" algn="ctr">
-                      <a:solidFill>
-                        <a:srgbClr val="E5E5E5"/>
-                      </a:solidFill>
-                      <a:prstDash val="solid"/>
-                      <a:round/>
-                      <a:headEnd type="none" w="med" len="med"/>
-                      <a:tailEnd type="none" w="med" len="med"/>
-                    </a:lnT>
-                    <a:lnB w="9525" cap="flat" cmpd="sng" algn="ctr">
-                      <a:solidFill>
-                        <a:srgbClr val="E5E5E5"/>
-                      </a:solidFill>
-                      <a:prstDash val="solid"/>
-                      <a:round/>
-                      <a:headEnd type="none" w="med" len="med"/>
-                      <a:tailEnd type="none" w="med" len="med"/>
-                    </a:lnB>
-                    <a:solidFill>
-                      <a:srgbClr val="FDECEC"/>
-                    </a:solidFill>
-                  </a:tcPr>
-                </a:tc>
-                <a:tc>
-                  <a:txBody>
-                    <a:bodyPr/>
-                    <a:lstStyle/>
-                    <a:p>
-                      <a:pPr algn="l" indent="0" marL="0">
-                        <a:buNone/>
-                      </a:pPr>
-                      <a:r>
-                        <a:rPr lang="en-US" sz="1100" dirty="0">
-                          <a:solidFill>
-                            <a:srgbClr val="1A1A1A"/>
-                          </a:solidFill>
-                        </a:rPr>
-                        <a:t>0.1%</a:t>
-                      </a:r>
-                      <a:endParaRPr lang="en-US" sz="1100" dirty="0"/>
-                    </a:p>
-                  </a:txBody>
-                  <a:tcPr marL="91440" marR="91440" marT="45720" marB="45720" anchor="ctr">
-                    <a:lnL w="9525" cap="flat" cmpd="sng" algn="ctr">
-                      <a:solidFill>
-                        <a:srgbClr val="E5E5E5"/>
-                      </a:solidFill>
-                      <a:prstDash val="solid"/>
-                      <a:round/>
-                      <a:headEnd type="none" w="med" len="med"/>
-                      <a:tailEnd type="none" w="med" len="med"/>
-                    </a:lnL>
-                    <a:lnR w="9525" cap="flat" cmpd="sng" algn="ctr">
-                      <a:solidFill>
-                        <a:srgbClr val="E5E5E5"/>
-                      </a:solidFill>
-                      <a:prstDash val="solid"/>
-                      <a:round/>
-                      <a:headEnd type="none" w="med" len="med"/>
-                      <a:tailEnd type="none" w="med" len="med"/>
-                    </a:lnR>
-                    <a:lnT w="9525" cap="flat" cmpd="sng" algn="ctr">
-                      <a:solidFill>
-                        <a:srgbClr val="E5E5E5"/>
-                      </a:solidFill>
-                      <a:prstDash val="solid"/>
-                      <a:round/>
-                      <a:headEnd type="none" w="med" len="med"/>
-                      <a:tailEnd type="none" w="med" len="med"/>
-                    </a:lnT>
-                    <a:lnB w="9525" cap="flat" cmpd="sng" algn="ctr">
-                      <a:solidFill>
-                        <a:srgbClr val="E5E5E5"/>
-                      </a:solidFill>
-                      <a:prstDash val="solid"/>
-                      <a:round/>
-                      <a:headEnd type="none" w="med" len="med"/>
-                      <a:tailEnd type="none" w="med" len="med"/>
-                    </a:lnB>
-                    <a:solidFill>
-                      <a:srgbClr val="FDECEC"/>
-                    </a:solidFill>
-                  </a:tcPr>
-                </a:tc>
-                <a:tc>
-                  <a:txBody>
-                    <a:bodyPr/>
-                    <a:lstStyle/>
-                    <a:p>
-                      <a:pPr algn="l" indent="0" marL="0">
-                        <a:buNone/>
-                      </a:pPr>
-                      <a:r>
-                        <a:rPr lang="en-US" sz="1100" dirty="0">
-                          <a:solidFill>
-                            <a:srgbClr val="1A1A1A"/>
-                          </a:solidFill>
-                        </a:rPr>
-                        <a:t>8.6%</a:t>
-                      </a:r>
-                      <a:endParaRPr lang="en-US" sz="1100" dirty="0"/>
-                    </a:p>
-                  </a:txBody>
-                  <a:tcPr marL="91440" marR="91440" marT="45720" marB="45720" anchor="ctr">
-                    <a:lnL w="9525" cap="flat" cmpd="sng" algn="ctr">
-                      <a:solidFill>
-                        <a:srgbClr val="E5E5E5"/>
-                      </a:solidFill>
-                      <a:prstDash val="solid"/>
-                      <a:round/>
-                      <a:headEnd type="none" w="med" len="med"/>
-                      <a:tailEnd type="none" w="med" len="med"/>
-                    </a:lnL>
-                    <a:lnR w="9525" cap="flat" cmpd="sng" algn="ctr">
-                      <a:solidFill>
-                        <a:srgbClr val="E5E5E5"/>
-                      </a:solidFill>
-                      <a:prstDash val="solid"/>
-                      <a:round/>
-                      <a:headEnd type="none" w="med" len="med"/>
-                      <a:tailEnd type="none" w="med" len="med"/>
-                    </a:lnR>
-                    <a:lnT w="9525" cap="flat" cmpd="sng" algn="ctr">
-                      <a:solidFill>
-                        <a:srgbClr val="E5E5E5"/>
-                      </a:solidFill>
-                      <a:prstDash val="solid"/>
-                      <a:round/>
-                      <a:headEnd type="none" w="med" len="med"/>
-                      <a:tailEnd type="none" w="med" len="med"/>
-                    </a:lnT>
-                    <a:lnB w="9525" cap="flat" cmpd="sng" algn="ctr">
-                      <a:solidFill>
-                        <a:srgbClr val="E5E5E5"/>
-                      </a:solidFill>
-                      <a:prstDash val="solid"/>
-                      <a:round/>
-                      <a:headEnd type="none" w="med" len="med"/>
-                      <a:tailEnd type="none" w="med" len="med"/>
-                    </a:lnB>
-                    <a:solidFill>
-                      <a:srgbClr val="FDECEC"/>
-                    </a:solidFill>
-                  </a:tcPr>
-                </a:tc>
-                <a:tc>
-                  <a:txBody>
-                    <a:bodyPr/>
-                    <a:lstStyle/>
-                    <a:p>
-                      <a:pPr algn="l" indent="0" marL="0">
-                        <a:buNone/>
-                      </a:pPr>
-                      <a:r>
-                        <a:rPr lang="en-US" sz="1100" dirty="0">
-                          <a:solidFill>
-                            <a:srgbClr val="1A1A1A"/>
-                          </a:solidFill>
-                        </a:rPr>
-                        <a:t>64.6</a:t>
-                      </a:r>
-                      <a:endParaRPr lang="en-US" sz="1100" dirty="0"/>
-                    </a:p>
-                  </a:txBody>
-                  <a:tcPr marL="91440" marR="91440" marT="45720" marB="45720" anchor="ctr">
-                    <a:lnL w="9525" cap="flat" cmpd="sng" algn="ctr">
-                      <a:solidFill>
-                        <a:srgbClr val="E5E5E5"/>
-                      </a:solidFill>
-                      <a:prstDash val="solid"/>
-                      <a:round/>
-                      <a:headEnd type="none" w="med" len="med"/>
-                      <a:tailEnd type="none" w="med" len="med"/>
-                    </a:lnL>
-                    <a:lnR w="9525" cap="flat" cmpd="sng" algn="ctr">
-                      <a:solidFill>
-                        <a:srgbClr val="E5E5E5"/>
-                      </a:solidFill>
-                      <a:prstDash val="solid"/>
-                      <a:round/>
-                      <a:headEnd type="none" w="med" len="med"/>
-                      <a:tailEnd type="none" w="med" len="med"/>
-                    </a:lnR>
-                    <a:lnT w="9525" cap="flat" cmpd="sng" algn="ctr">
-                      <a:solidFill>
-                        <a:srgbClr val="E5E5E5"/>
-                      </a:solidFill>
-                      <a:prstDash val="solid"/>
-                      <a:round/>
-                      <a:headEnd type="none" w="med" len="med"/>
-                      <a:tailEnd type="none" w="med" len="med"/>
-                    </a:lnT>
-                    <a:lnB w="9525" cap="flat" cmpd="sng" algn="ctr">
-                      <a:solidFill>
-                        <a:srgbClr val="E5E5E5"/>
-                      </a:solidFill>
-                      <a:prstDash val="solid"/>
-                      <a:round/>
-                      <a:headEnd type="none" w="med" len="med"/>
-                      <a:tailEnd type="none" w="med" len="med"/>
-                    </a:lnB>
-                    <a:solidFill>
-                      <a:srgbClr val="FDECEC"/>
-                    </a:solidFill>
-                  </a:tcPr>
-                </a:tc>
-                <a:tc>
-                  <a:txBody>
-                    <a:bodyPr/>
-                    <a:lstStyle/>
-                    <a:p>
-                      <a:pPr algn="l" indent="0" marL="0">
-                        <a:buNone/>
-                      </a:pPr>
-                      <a:r>
-                        <a:rPr lang="en-US" sz="1100" dirty="0">
-                          <a:solidFill>
-                            <a:srgbClr val="1A1A1A"/>
-                          </a:solidFill>
-                        </a:rPr>
-                        <a:t>8.1</a:t>
-                      </a:r>
-                      <a:endParaRPr lang="en-US" sz="1100" dirty="0"/>
-                    </a:p>
-                  </a:txBody>
-                  <a:tcPr marL="91440" marR="91440" marT="45720" marB="45720" anchor="ctr">
-                    <a:lnL w="9525" cap="flat" cmpd="sng" algn="ctr">
-                      <a:solidFill>
-                        <a:srgbClr val="E5E5E5"/>
-                      </a:solidFill>
-                      <a:prstDash val="solid"/>
-                      <a:round/>
-                      <a:headEnd type="none" w="med" len="med"/>
-                      <a:tailEnd type="none" w="med" len="med"/>
-                    </a:lnL>
-                    <a:lnR w="9525" cap="flat" cmpd="sng" algn="ctr">
-                      <a:solidFill>
-                        <a:srgbClr val="E5E5E5"/>
-                      </a:solidFill>
-                      <a:prstDash val="solid"/>
-                      <a:round/>
-                      <a:headEnd type="none" w="med" len="med"/>
-                      <a:tailEnd type="none" w="med" len="med"/>
-                    </a:lnR>
-                    <a:lnT w="9525" cap="flat" cmpd="sng" algn="ctr">
-                      <a:solidFill>
-                        <a:srgbClr val="E5E5E5"/>
-                      </a:solidFill>
-                      <a:prstDash val="solid"/>
-                      <a:round/>
-                      <a:headEnd type="none" w="med" len="med"/>
-                      <a:tailEnd type="none" w="med" len="med"/>
-                    </a:lnT>
-                    <a:lnB w="9525" cap="flat" cmpd="sng" algn="ctr">
-                      <a:solidFill>
-                        <a:srgbClr val="E5E5E5"/>
-                      </a:solidFill>
-                      <a:prstDash val="solid"/>
-                      <a:round/>
-                      <a:headEnd type="none" w="med" len="med"/>
-                      <a:tailEnd type="none" w="med" len="med"/>
-                    </a:lnB>
-                    <a:solidFill>
-                      <a:srgbClr val="FDECEC"/>
-                    </a:solidFill>
-                  </a:tcPr>
-                </a:tc>
-                <a:tc>
-                  <a:txBody>
-                    <a:bodyPr/>
-                    <a:lstStyle/>
-                    <a:p>
-                      <a:pPr algn="l" indent="0" marL="0">
-                        <a:buNone/>
-                      </a:pPr>
-                      <a:r>
-                        <a:rPr lang="en-US" sz="1100" dirty="0">
-                          <a:solidFill>
-                            <a:srgbClr val="1A1A1A"/>
-                          </a:solidFill>
-                        </a:rPr>
-                        <a:t>9.3%</a:t>
-                      </a:r>
-                      <a:endParaRPr lang="en-US" sz="1100" dirty="0"/>
-                    </a:p>
-                  </a:txBody>
-                  <a:tcPr marL="91440" marR="91440" marT="45720" marB="45720" anchor="ctr">
-                    <a:lnL w="9525" cap="flat" cmpd="sng" algn="ctr">
-                      <a:solidFill>
-                        <a:srgbClr val="E5E5E5"/>
-                      </a:solidFill>
-                      <a:prstDash val="solid"/>
-                      <a:round/>
-                      <a:headEnd type="none" w="med" len="med"/>
-                      <a:tailEnd type="none" w="med" len="med"/>
-                    </a:lnL>
-                    <a:lnR w="9525" cap="flat" cmpd="sng" algn="ctr">
-                      <a:solidFill>
-                        <a:srgbClr val="E5E5E5"/>
-                      </a:solidFill>
-                      <a:prstDash val="solid"/>
-                      <a:round/>
-                      <a:headEnd type="none" w="med" len="med"/>
-                      <a:tailEnd type="none" w="med" len="med"/>
-                    </a:lnR>
-                    <a:lnT w="9525" cap="flat" cmpd="sng" algn="ctr">
-                      <a:solidFill>
-                        <a:srgbClr val="E5E5E5"/>
-                      </a:solidFill>
-                      <a:prstDash val="solid"/>
-                      <a:round/>
-                      <a:headEnd type="none" w="med" len="med"/>
-                      <a:tailEnd type="none" w="med" len="med"/>
-                    </a:lnT>
-                    <a:lnB w="9525" cap="flat" cmpd="sng" algn="ctr">
-                      <a:solidFill>
-                        <a:srgbClr val="E5E5E5"/>
-                      </a:solidFill>
-                      <a:prstDash val="solid"/>
-                      <a:round/>
-                      <a:headEnd type="none" w="med" len="med"/>
-                      <a:tailEnd type="none" w="med" len="med"/>
-                    </a:lnB>
-                    <a:solidFill>
-                      <a:srgbClr val="FDECEC"/>
-                    </a:solidFill>
-                  </a:tcPr>
-                </a:tc>
-                <a:tc>
-                  <a:txBody>
-                    <a:bodyPr/>
-                    <a:lstStyle/>
-                    <a:p>
-                      <a:pPr algn="l" indent="0" marL="0">
-                        <a:buNone/>
-                      </a:pPr>
-                      <a:r>
-                        <a:rPr lang="en-US" sz="1100" dirty="0">
-                          <a:solidFill>
-                            <a:srgbClr val="1A1A1A"/>
-                          </a:solidFill>
-                        </a:rPr>
-                        <a:t>7.7%</a:t>
-                      </a:r>
-                      <a:endParaRPr lang="en-US" sz="1100" dirty="0"/>
-                    </a:p>
-                  </a:txBody>
-                  <a:tcPr marL="91440" marR="91440" marT="45720" marB="45720" anchor="ctr">
-                    <a:lnL w="9525" cap="flat" cmpd="sng" algn="ctr">
-                      <a:solidFill>
-                        <a:srgbClr val="E5E5E5"/>
-                      </a:solidFill>
-                      <a:prstDash val="solid"/>
-                      <a:round/>
-                      <a:headEnd type="none" w="med" len="med"/>
-                      <a:tailEnd type="none" w="med" len="med"/>
-                    </a:lnL>
-                    <a:lnR w="9525" cap="flat" cmpd="sng" algn="ctr">
-                      <a:solidFill>
-                        <a:srgbClr val="E5E5E5"/>
-                      </a:solidFill>
-                      <a:prstDash val="solid"/>
-                      <a:round/>
-                      <a:headEnd type="none" w="med" len="med"/>
-                      <a:tailEnd type="none" w="med" len="med"/>
-                    </a:lnR>
-                    <a:lnT w="9525" cap="flat" cmpd="sng" algn="ctr">
-                      <a:solidFill>
-                        <a:srgbClr val="E5E5E5"/>
-                      </a:solidFill>
-                      <a:prstDash val="solid"/>
-                      <a:round/>
-                      <a:headEnd type="none" w="med" len="med"/>
-                      <a:tailEnd type="none" w="med" len="med"/>
-                    </a:lnT>
-                    <a:lnB w="9525" cap="flat" cmpd="sng" algn="ctr">
-                      <a:solidFill>
-                        <a:srgbClr val="E5E5E5"/>
-                      </a:solidFill>
-                      <a:prstDash val="solid"/>
-                      <a:round/>
-                      <a:headEnd type="none" w="med" len="med"/>
-                      <a:tailEnd type="none" w="med" len="med"/>
-                    </a:lnB>
-                    <a:solidFill>
-                      <a:srgbClr val="FDECEC"/>
-                    </a:solidFill>
-                  </a:tcPr>
-                </a:tc>
-              </a:tr>
-              <a:tr h="512064">
-                <a:tc>
-                  <a:txBody>
-                    <a:bodyPr/>
-                    <a:lstStyle/>
-                    <a:p>
-                      <a:pPr algn="l" indent="0" marL="0">
-                        <a:buNone/>
-                      </a:pPr>
-                      <a:r>
-                        <a:rPr lang="en-US" sz="1100" b="1" dirty="0">
-                          <a:solidFill>
-                            <a:srgbClr val="1A1A1A"/>
-                          </a:solidFill>
-                        </a:rPr>
-                        <a:t>↔ Max VERSTAPPEN</a:t>
-                      </a:r>
-                      <a:endParaRPr lang="en-US" sz="1100" dirty="0"/>
-                    </a:p>
-                  </a:txBody>
-                  <a:tcPr marL="91440" marR="91440" marT="45720" marB="45720" anchor="ctr">
-                    <a:lnL w="9525" cap="flat" cmpd="sng" algn="ctr">
-                      <a:solidFill>
-                        <a:srgbClr val="E5E5E5"/>
-                      </a:solidFill>
-                      <a:prstDash val="solid"/>
-                      <a:round/>
-                      <a:headEnd type="none" w="med" len="med"/>
-                      <a:tailEnd type="none" w="med" len="med"/>
-                    </a:lnL>
-                    <a:lnR w="9525" cap="flat" cmpd="sng" algn="ctr">
-                      <a:solidFill>
-                        <a:srgbClr val="E5E5E5"/>
-                      </a:solidFill>
-                      <a:prstDash val="solid"/>
-                      <a:round/>
-                      <a:headEnd type="none" w="med" len="med"/>
-                      <a:tailEnd type="none" w="med" len="med"/>
-                    </a:lnR>
-                    <a:lnT w="9525" cap="flat" cmpd="sng" algn="ctr">
-                      <a:solidFill>
-                        <a:srgbClr val="E5E5E5"/>
-                      </a:solidFill>
-                      <a:prstDash val="solid"/>
-                      <a:round/>
-                      <a:headEnd type="none" w="med" len="med"/>
-                      <a:tailEnd type="none" w="med" len="med"/>
-                    </a:lnT>
-                    <a:lnB w="9525" cap="flat" cmpd="sng" algn="ctr">
-                      <a:solidFill>
-                        <a:srgbClr val="E5E5E5"/>
-                      </a:solidFill>
-                      <a:prstDash val="solid"/>
-                      <a:round/>
-                      <a:headEnd type="none" w="med" len="med"/>
-                      <a:tailEnd type="none" w="med" len="med"/>
-                    </a:lnB>
-                    <a:solidFill>
-                      <a:srgbClr val="F4F4F4"/>
-                    </a:solidFill>
-                  </a:tcPr>
-                </a:tc>
-                <a:tc>
-                  <a:txBody>
-                    <a:bodyPr/>
-                    <a:lstStyle/>
-                    <a:p>
-                      <a:pPr algn="l" indent="0" marL="0">
-                        <a:buNone/>
-                      </a:pPr>
-                      <a:r>
-                        <a:rPr lang="en-US" sz="1100" b="1" dirty="0">
-                          <a:solidFill>
-                            <a:srgbClr val="1A1A1A"/>
-                          </a:solidFill>
-                        </a:rPr>
-                        <a:t>Red Bull Racing</a:t>
-                      </a:r>
-                      <a:endParaRPr lang="en-US" sz="1100" dirty="0"/>
-                    </a:p>
-                  </a:txBody>
-                  <a:tcPr marL="91440" marR="91440" marT="45720" marB="45720" anchor="ctr">
-                    <a:lnL w="9525" cap="flat" cmpd="sng" algn="ctr">
-                      <a:solidFill>
-                        <a:srgbClr val="E5E5E5"/>
-                      </a:solidFill>
-                      <a:prstDash val="solid"/>
-                      <a:round/>
-                      <a:headEnd type="none" w="med" len="med"/>
-                      <a:tailEnd type="none" w="med" len="med"/>
-                    </a:lnL>
-                    <a:lnR w="9525" cap="flat" cmpd="sng" algn="ctr">
-                      <a:solidFill>
-                        <a:srgbClr val="E5E5E5"/>
-                      </a:solidFill>
-                      <a:prstDash val="solid"/>
-                      <a:round/>
-                      <a:headEnd type="none" w="med" len="med"/>
-                      <a:tailEnd type="none" w="med" len="med"/>
-                    </a:lnR>
-                    <a:lnT w="9525" cap="flat" cmpd="sng" algn="ctr">
-                      <a:solidFill>
-                        <a:srgbClr val="E5E5E5"/>
-                      </a:solidFill>
-                      <a:prstDash val="solid"/>
-                      <a:round/>
-                      <a:headEnd type="none" w="med" len="med"/>
-                      <a:tailEnd type="none" w="med" len="med"/>
-                    </a:lnT>
-                    <a:lnB w="9525" cap="flat" cmpd="sng" algn="ctr">
-                      <a:solidFill>
-                        <a:srgbClr val="E5E5E5"/>
-                      </a:solidFill>
-                      <a:prstDash val="solid"/>
-                      <a:round/>
-                      <a:headEnd type="none" w="med" len="med"/>
-                      <a:tailEnd type="none" w="med" len="med"/>
-                    </a:lnB>
-                    <a:solidFill>
-                      <a:srgbClr val="F4F4F4"/>
-                    </a:solidFill>
-                  </a:tcPr>
-                </a:tc>
-                <a:tc>
-                  <a:txBody>
-                    <a:bodyPr/>
-                    <a:lstStyle/>
-                    <a:p>
-                      <a:pPr algn="l" indent="0" marL="0">
-                        <a:buNone/>
-                      </a:pPr>
-                      <a:r>
-                        <a:rPr lang="en-US" sz="1100" b="1" dirty="0">
-                          <a:solidFill>
-                            <a:srgbClr val="1A1A1A"/>
-                          </a:solidFill>
-                        </a:rPr>
-                        <a:t>63.8%</a:t>
-                      </a:r>
-                      <a:endParaRPr lang="en-US" sz="1100" dirty="0"/>
-                    </a:p>
-                  </a:txBody>
-                  <a:tcPr marL="91440" marR="91440" marT="45720" marB="45720" anchor="ctr">
-                    <a:lnL w="9525" cap="flat" cmpd="sng" algn="ctr">
-                      <a:solidFill>
-                        <a:srgbClr val="E5E5E5"/>
-                      </a:solidFill>
-                      <a:prstDash val="solid"/>
-                      <a:round/>
-                      <a:headEnd type="none" w="med" len="med"/>
-                      <a:tailEnd type="none" w="med" len="med"/>
-                    </a:lnL>
-                    <a:lnR w="9525" cap="flat" cmpd="sng" algn="ctr">
-                      <a:solidFill>
-                        <a:srgbClr val="E5E5E5"/>
-                      </a:solidFill>
-                      <a:prstDash val="solid"/>
-                      <a:round/>
-                      <a:headEnd type="none" w="med" len="med"/>
-                      <a:tailEnd type="none" w="med" len="med"/>
-                    </a:lnR>
-                    <a:lnT w="9525" cap="flat" cmpd="sng" algn="ctr">
-                      <a:solidFill>
-                        <a:srgbClr val="E5E5E5"/>
-                      </a:solidFill>
-                      <a:prstDash val="solid"/>
-                      <a:round/>
-                      <a:headEnd type="none" w="med" len="med"/>
-                      <a:tailEnd type="none" w="med" len="med"/>
-                    </a:lnT>
-                    <a:lnB w="9525" cap="flat" cmpd="sng" algn="ctr">
-                      <a:solidFill>
-                        <a:srgbClr val="E5E5E5"/>
-                      </a:solidFill>
-                      <a:prstDash val="solid"/>
-                      <a:round/>
-                      <a:headEnd type="none" w="med" len="med"/>
-                      <a:tailEnd type="none" w="med" len="med"/>
-                    </a:lnB>
-                    <a:solidFill>
-                      <a:srgbClr val="F4F4F4"/>
-                    </a:solidFill>
-                  </a:tcPr>
-                </a:tc>
-                <a:tc>
-                  <a:txBody>
-                    <a:bodyPr/>
-                    <a:lstStyle/>
-                    <a:p>
-                      <a:pPr algn="l" indent="0" marL="0">
-                        <a:buNone/>
-                      </a:pPr>
-                      <a:r>
-                        <a:rPr lang="en-US" sz="1100" b="1" dirty="0">
-                          <a:solidFill>
-                            <a:srgbClr val="1A1A1A"/>
-                          </a:solidFill>
-                        </a:rPr>
-                        <a:t>99.9%</a:t>
-                      </a:r>
-                      <a:endParaRPr lang="en-US" sz="1100" dirty="0"/>
-                    </a:p>
-                  </a:txBody>
-                  <a:tcPr marL="91440" marR="91440" marT="45720" marB="45720" anchor="ctr">
-                    <a:lnL w="9525" cap="flat" cmpd="sng" algn="ctr">
-                      <a:solidFill>
-                        <a:srgbClr val="E5E5E5"/>
-                      </a:solidFill>
-                      <a:prstDash val="solid"/>
-                      <a:round/>
-                      <a:headEnd type="none" w="med" len="med"/>
-                      <a:tailEnd type="none" w="med" len="med"/>
-                    </a:lnL>
-                    <a:lnR w="9525" cap="flat" cmpd="sng" algn="ctr">
-                      <a:solidFill>
-                        <a:srgbClr val="E5E5E5"/>
-                      </a:solidFill>
-                      <a:prstDash val="solid"/>
-                      <a:round/>
-                      <a:headEnd type="none" w="med" len="med"/>
-                      <a:tailEnd type="none" w="med" len="med"/>
-                    </a:lnR>
-                    <a:lnT w="9525" cap="flat" cmpd="sng" algn="ctr">
-                      <a:solidFill>
-                        <a:srgbClr val="E5E5E5"/>
-                      </a:solidFill>
-                      <a:prstDash val="solid"/>
-                      <a:round/>
-                      <a:headEnd type="none" w="med" len="med"/>
-                      <a:tailEnd type="none" w="med" len="med"/>
-                    </a:lnT>
-                    <a:lnB w="9525" cap="flat" cmpd="sng" algn="ctr">
-                      <a:solidFill>
-                        <a:srgbClr val="E5E5E5"/>
-                      </a:solidFill>
-                      <a:prstDash val="solid"/>
-                      <a:round/>
-                      <a:headEnd type="none" w="med" len="med"/>
-                      <a:tailEnd type="none" w="med" len="med"/>
-                    </a:lnB>
-                    <a:solidFill>
-                      <a:srgbClr val="F4F4F4"/>
-                    </a:solidFill>
-                  </a:tcPr>
-                </a:tc>
-                <a:tc>
-                  <a:txBody>
-                    <a:bodyPr/>
-                    <a:lstStyle/>
-                    <a:p>
-                      <a:pPr algn="l" indent="0" marL="0">
-                        <a:buNone/>
-                      </a:pPr>
-                      <a:r>
-                        <a:rPr lang="en-US" sz="1100" b="1" dirty="0">
-                          <a:solidFill>
-                            <a:srgbClr val="1A1A1A"/>
-                          </a:solidFill>
-                        </a:rPr>
-                        <a:t>235.0</a:t>
-                      </a:r>
-                      <a:endParaRPr lang="en-US" sz="1100" dirty="0"/>
-                    </a:p>
-                  </a:txBody>
-                  <a:tcPr marL="91440" marR="91440" marT="45720" marB="45720" anchor="ctr">
-                    <a:lnL w="9525" cap="flat" cmpd="sng" algn="ctr">
-                      <a:solidFill>
-                        <a:srgbClr val="E5E5E5"/>
-                      </a:solidFill>
-                      <a:prstDash val="solid"/>
-                      <a:round/>
-                      <a:headEnd type="none" w="med" len="med"/>
-                      <a:tailEnd type="none" w="med" len="med"/>
-                    </a:lnL>
-                    <a:lnR w="9525" cap="flat" cmpd="sng" algn="ctr">
-                      <a:solidFill>
-                        <a:srgbClr val="E5E5E5"/>
-                      </a:solidFill>
-                      <a:prstDash val="solid"/>
-                      <a:round/>
-                      <a:headEnd type="none" w="med" len="med"/>
-                      <a:tailEnd type="none" w="med" len="med"/>
-                    </a:lnR>
-                    <a:lnT w="9525" cap="flat" cmpd="sng" algn="ctr">
-                      <a:solidFill>
-                        <a:srgbClr val="E5E5E5"/>
-                      </a:solidFill>
-                      <a:prstDash val="solid"/>
-                      <a:round/>
-                      <a:headEnd type="none" w="med" len="med"/>
-                      <a:tailEnd type="none" w="med" len="med"/>
-                    </a:lnT>
-                    <a:lnB w="9525" cap="flat" cmpd="sng" algn="ctr">
-                      <a:solidFill>
-                        <a:srgbClr val="E5E5E5"/>
-                      </a:solidFill>
-                      <a:prstDash val="solid"/>
-                      <a:round/>
-                      <a:headEnd type="none" w="med" len="med"/>
-                      <a:tailEnd type="none" w="med" len="med"/>
-                    </a:lnB>
-                    <a:solidFill>
-                      <a:srgbClr val="F4F4F4"/>
-                    </a:solidFill>
-                  </a:tcPr>
-                </a:tc>
-                <a:tc>
-                  <a:txBody>
-                    <a:bodyPr/>
-                    <a:lstStyle/>
-                    <a:p>
-                      <a:pPr algn="l" indent="0" marL="0">
-                        <a:buNone/>
-                      </a:pPr>
-                      <a:r>
-                        <a:rPr lang="en-US" sz="1100" b="1" dirty="0">
-                          <a:solidFill>
-                            <a:srgbClr val="1A1A1A"/>
-                          </a:solidFill>
-                        </a:rPr>
-                        <a:t>4.0</a:t>
-                      </a:r>
-                      <a:endParaRPr lang="en-US" sz="1100" dirty="0"/>
-                    </a:p>
-                  </a:txBody>
-                  <a:tcPr marL="91440" marR="91440" marT="45720" marB="45720" anchor="ctr">
-                    <a:lnL w="9525" cap="flat" cmpd="sng" algn="ctr">
-                      <a:solidFill>
-                        <a:srgbClr val="E5E5E5"/>
-                      </a:solidFill>
-                      <a:prstDash val="solid"/>
-                      <a:round/>
-                      <a:headEnd type="none" w="med" len="med"/>
-                      <a:tailEnd type="none" w="med" len="med"/>
-                    </a:lnL>
-                    <a:lnR w="9525" cap="flat" cmpd="sng" algn="ctr">
-                      <a:solidFill>
-                        <a:srgbClr val="E5E5E5"/>
-                      </a:solidFill>
-                      <a:prstDash val="solid"/>
-                      <a:round/>
-                      <a:headEnd type="none" w="med" len="med"/>
-                      <a:tailEnd type="none" w="med" len="med"/>
-                    </a:lnR>
-                    <a:lnT w="9525" cap="flat" cmpd="sng" algn="ctr">
-                      <a:solidFill>
-                        <a:srgbClr val="E5E5E5"/>
-                      </a:solidFill>
-                      <a:prstDash val="solid"/>
-                      <a:round/>
-                      <a:headEnd type="none" w="med" len="med"/>
-                      <a:tailEnd type="none" w="med" len="med"/>
-                    </a:lnT>
-                    <a:lnB w="9525" cap="flat" cmpd="sng" algn="ctr">
-                      <a:solidFill>
-                        <a:srgbClr val="E5E5E5"/>
-                      </a:solidFill>
-                      <a:prstDash val="solid"/>
-                      <a:round/>
-                      <a:headEnd type="none" w="med" len="med"/>
-                      <a:tailEnd type="none" w="med" len="med"/>
-                    </a:lnB>
-                    <a:solidFill>
-                      <a:srgbClr val="F4F4F4"/>
-                    </a:solidFill>
-                  </a:tcPr>
-                </a:tc>
-                <a:tc>
-                  <a:txBody>
-                    <a:bodyPr/>
-                    <a:lstStyle/>
-                    <a:p>
-                      <a:pPr algn="l" indent="0" marL="0">
-                        <a:buNone/>
-                      </a:pPr>
-                      <a:r>
-                        <a:rPr lang="en-US" sz="1100" b="1" dirty="0">
-                          <a:solidFill>
-                            <a:srgbClr val="1A1A1A"/>
-                          </a:solidFill>
-                        </a:rPr>
-                        <a:t>100%</a:t>
-                      </a:r>
-                      <a:endParaRPr lang="en-US" sz="1100" dirty="0"/>
-                    </a:p>
-                  </a:txBody>
-                  <a:tcPr marL="91440" marR="91440" marT="45720" marB="45720" anchor="ctr">
-                    <a:lnL w="9525" cap="flat" cmpd="sng" algn="ctr">
-                      <a:solidFill>
-                        <a:srgbClr val="E5E5E5"/>
-                      </a:solidFill>
-                      <a:prstDash val="solid"/>
-                      <a:round/>
-                      <a:headEnd type="none" w="med" len="med"/>
-                      <a:tailEnd type="none" w="med" len="med"/>
-                    </a:lnL>
-                    <a:lnR w="9525" cap="flat" cmpd="sng" algn="ctr">
-                      <a:solidFill>
-                        <a:srgbClr val="E5E5E5"/>
-                      </a:solidFill>
-                      <a:prstDash val="solid"/>
-                      <a:round/>
-                      <a:headEnd type="none" w="med" len="med"/>
-                      <a:tailEnd type="none" w="med" len="med"/>
-                    </a:lnR>
-                    <a:lnT w="9525" cap="flat" cmpd="sng" algn="ctr">
-                      <a:solidFill>
-                        <a:srgbClr val="E5E5E5"/>
-                      </a:solidFill>
-                      <a:prstDash val="solid"/>
-                      <a:round/>
-                      <a:headEnd type="none" w="med" len="med"/>
-                      <a:tailEnd type="none" w="med" len="med"/>
-                    </a:lnT>
-                    <a:lnB w="9525" cap="flat" cmpd="sng" algn="ctr">
-                      <a:solidFill>
-                        <a:srgbClr val="E5E5E5"/>
-                      </a:solidFill>
-                      <a:prstDash val="solid"/>
-                      <a:round/>
-                      <a:headEnd type="none" w="med" len="med"/>
-                      <a:tailEnd type="none" w="med" len="med"/>
-                    </a:lnB>
-                    <a:solidFill>
-                      <a:srgbClr val="F4F4F4"/>
-                    </a:solidFill>
-                  </a:tcPr>
-                </a:tc>
-                <a:tc>
-                  <a:txBody>
-                    <a:bodyPr/>
-                    <a:lstStyle/>
-                    <a:p>
-                      <a:pPr algn="l" indent="0" marL="0">
-                        <a:buNone/>
-                      </a:pPr>
-                      <a:r>
-                        <a:rPr lang="en-US" sz="1100" b="1" dirty="0">
-                          <a:solidFill>
-                            <a:srgbClr val="E10600"/>
-                          </a:solidFill>
-                        </a:rPr>
-                        <a:t>100%</a:t>
-                      </a:r>
-                      <a:endParaRPr lang="en-US" sz="1100" dirty="0"/>
-                    </a:p>
-                  </a:txBody>
-                  <a:tcPr marL="91440" marR="91440" marT="45720" marB="45720" anchor="ctr">
-                    <a:lnL w="9525" cap="flat" cmpd="sng" algn="ctr">
-                      <a:solidFill>
-                        <a:srgbClr val="E5E5E5"/>
-                      </a:solidFill>
-                      <a:prstDash val="solid"/>
-                      <a:round/>
-                      <a:headEnd type="none" w="med" len="med"/>
-                      <a:tailEnd type="none" w="med" len="med"/>
-                    </a:lnL>
-                    <a:lnR w="9525" cap="flat" cmpd="sng" algn="ctr">
-                      <a:solidFill>
-                        <a:srgbClr val="E5E5E5"/>
-                      </a:solidFill>
-                      <a:prstDash val="solid"/>
-                      <a:round/>
-                      <a:headEnd type="none" w="med" len="med"/>
-                      <a:tailEnd type="none" w="med" len="med"/>
-                    </a:lnR>
-                    <a:lnT w="9525" cap="flat" cmpd="sng" algn="ctr">
-                      <a:solidFill>
-                        <a:srgbClr val="E5E5E5"/>
-                      </a:solidFill>
-                      <a:prstDash val="solid"/>
-                      <a:round/>
-                      <a:headEnd type="none" w="med" len="med"/>
-                      <a:tailEnd type="none" w="med" len="med"/>
-                    </a:lnT>
-                    <a:lnB w="9525" cap="flat" cmpd="sng" algn="ctr">
-                      <a:solidFill>
-                        <a:srgbClr val="E5E5E5"/>
-                      </a:solidFill>
-                      <a:prstDash val="solid"/>
-                      <a:round/>
-                      <a:headEnd type="none" w="med" len="med"/>
-                      <a:tailEnd type="none" w="med" len="med"/>
-                    </a:lnB>
-                    <a:solidFill>
-                      <a:srgbClr val="F4F4F4"/>
-                    </a:solidFill>
-                  </a:tcPr>
-                </a:tc>
-              </a:tr>
-              <a:tr h="512064">
-                <a:tc>
-                  <a:txBody>
-                    <a:bodyPr/>
-                    <a:lstStyle/>
-                    <a:p>
-                      <a:pPr algn="l" indent="0" marL="0">
-                        <a:buNone/>
-                      </a:pPr>
-                      <a:r>
-                        <a:rPr lang="en-US" sz="1100" b="1" dirty="0">
-                          <a:solidFill>
-                            <a:srgbClr val="1A1A1A"/>
-                          </a:solidFill>
-                        </a:rPr>
-                        <a:t>↔ Charles LECLERC</a:t>
-                      </a:r>
-                      <a:endParaRPr lang="en-US" sz="1100" dirty="0"/>
-                    </a:p>
-                  </a:txBody>
-                  <a:tcPr marL="91440" marR="91440" marT="45720" marB="45720" anchor="ctr">
-                    <a:lnL w="9525" cap="flat" cmpd="sng" algn="ctr">
-                      <a:solidFill>
-                        <a:srgbClr val="E5E5E5"/>
-                      </a:solidFill>
-                      <a:prstDash val="solid"/>
-                      <a:round/>
-                      <a:headEnd type="none" w="med" len="med"/>
-                      <a:tailEnd type="none" w="med" len="med"/>
-                    </a:lnL>
-                    <a:lnR w="9525" cap="flat" cmpd="sng" algn="ctr">
-                      <a:solidFill>
-                        <a:srgbClr val="E5E5E5"/>
-                      </a:solidFill>
-                      <a:prstDash val="solid"/>
-                      <a:round/>
-                      <a:headEnd type="none" w="med" len="med"/>
-                      <a:tailEnd type="none" w="med" len="med"/>
-                    </a:lnR>
-                    <a:lnT w="9525" cap="flat" cmpd="sng" algn="ctr">
-                      <a:solidFill>
-                        <a:srgbClr val="E5E5E5"/>
-                      </a:solidFill>
-                      <a:prstDash val="solid"/>
-                      <a:round/>
-                      <a:headEnd type="none" w="med" len="med"/>
-                      <a:tailEnd type="none" w="med" len="med"/>
-                    </a:lnT>
-                    <a:lnB w="9525" cap="flat" cmpd="sng" algn="ctr">
-                      <a:solidFill>
-                        <a:srgbClr val="E5E5E5"/>
-                      </a:solidFill>
-                      <a:prstDash val="solid"/>
-                      <a:round/>
-                      <a:headEnd type="none" w="med" len="med"/>
-                      <a:tailEnd type="none" w="med" len="med"/>
-                    </a:lnB>
-                    <a:solidFill>
-                      <a:srgbClr val="FFFFFF"/>
-                    </a:solidFill>
-                  </a:tcPr>
-                </a:tc>
-                <a:tc>
-                  <a:txBody>
-                    <a:bodyPr/>
-                    <a:lstStyle/>
-                    <a:p>
-                      <a:pPr algn="l" indent="0" marL="0">
-                        <a:buNone/>
-                      </a:pPr>
-                      <a:r>
-                        <a:rPr lang="en-US" sz="1100" b="1" dirty="0">
-                          <a:solidFill>
-                            <a:srgbClr val="1A1A1A"/>
-                          </a:solidFill>
-                        </a:rPr>
-                        <a:t>Ferrari</a:t>
-                      </a:r>
-                      <a:endParaRPr lang="en-US" sz="1100" dirty="0"/>
-                    </a:p>
-                  </a:txBody>
-                  <a:tcPr marL="91440" marR="91440" marT="45720" marB="45720" anchor="ctr">
-                    <a:lnL w="9525" cap="flat" cmpd="sng" algn="ctr">
-                      <a:solidFill>
-                        <a:srgbClr val="E5E5E5"/>
-                      </a:solidFill>
-                      <a:prstDash val="solid"/>
-                      <a:round/>
-                      <a:headEnd type="none" w="med" len="med"/>
-                      <a:tailEnd type="none" w="med" len="med"/>
-                    </a:lnL>
-                    <a:lnR w="9525" cap="flat" cmpd="sng" algn="ctr">
-                      <a:solidFill>
-                        <a:srgbClr val="E5E5E5"/>
-                      </a:solidFill>
-                      <a:prstDash val="solid"/>
-                      <a:round/>
-                      <a:headEnd type="none" w="med" len="med"/>
-                      <a:tailEnd type="none" w="med" len="med"/>
-                    </a:lnR>
-                    <a:lnT w="9525" cap="flat" cmpd="sng" algn="ctr">
-                      <a:solidFill>
-                        <a:srgbClr val="E5E5E5"/>
-                      </a:solidFill>
-                      <a:prstDash val="solid"/>
-                      <a:round/>
-                      <a:headEnd type="none" w="med" len="med"/>
-                      <a:tailEnd type="none" w="med" len="med"/>
-                    </a:lnT>
-                    <a:lnB w="9525" cap="flat" cmpd="sng" algn="ctr">
-                      <a:solidFill>
-                        <a:srgbClr val="E5E5E5"/>
-                      </a:solidFill>
-                      <a:prstDash val="solid"/>
-                      <a:round/>
-                      <a:headEnd type="none" w="med" len="med"/>
-                      <a:tailEnd type="none" w="med" len="med"/>
-                    </a:lnB>
-                    <a:solidFill>
-                      <a:srgbClr val="FFFFFF"/>
-                    </a:solidFill>
-                  </a:tcPr>
-                </a:tc>
-                <a:tc>
-                  <a:txBody>
-                    <a:bodyPr/>
-                    <a:lstStyle/>
-                    <a:p>
-                      <a:pPr algn="l" indent="0" marL="0">
-                        <a:buNone/>
-                      </a:pPr>
-                      <a:r>
-                        <a:rPr lang="en-US" sz="1100" b="1" dirty="0">
-                          <a:solidFill>
-                            <a:srgbClr val="1A1A1A"/>
-                          </a:solidFill>
-                        </a:rPr>
-                        <a:t>3.1%</a:t>
-                      </a:r>
-                      <a:endParaRPr lang="en-US" sz="1100" dirty="0"/>
-                    </a:p>
-                  </a:txBody>
-                  <a:tcPr marL="91440" marR="91440" marT="45720" marB="45720" anchor="ctr">
-                    <a:lnL w="9525" cap="flat" cmpd="sng" algn="ctr">
-                      <a:solidFill>
-                        <a:srgbClr val="E5E5E5"/>
-                      </a:solidFill>
-                      <a:prstDash val="solid"/>
-                      <a:round/>
-                      <a:headEnd type="none" w="med" len="med"/>
-                      <a:tailEnd type="none" w="med" len="med"/>
-                    </a:lnL>
-                    <a:lnR w="9525" cap="flat" cmpd="sng" algn="ctr">
-                      <a:solidFill>
-                        <a:srgbClr val="E5E5E5"/>
-                      </a:solidFill>
-                      <a:prstDash val="solid"/>
-                      <a:round/>
-                      <a:headEnd type="none" w="med" len="med"/>
-                      <a:tailEnd type="none" w="med" len="med"/>
-                    </a:lnR>
-                    <a:lnT w="9525" cap="flat" cmpd="sng" algn="ctr">
-                      <a:solidFill>
-                        <a:srgbClr val="E5E5E5"/>
-                      </a:solidFill>
-                      <a:prstDash val="solid"/>
-                      <a:round/>
-                      <a:headEnd type="none" w="med" len="med"/>
-                      <a:tailEnd type="none" w="med" len="med"/>
-                    </a:lnT>
-                    <a:lnB w="9525" cap="flat" cmpd="sng" algn="ctr">
-                      <a:solidFill>
-                        <a:srgbClr val="E5E5E5"/>
-                      </a:solidFill>
-                      <a:prstDash val="solid"/>
-                      <a:round/>
-                      <a:headEnd type="none" w="med" len="med"/>
-                      <a:tailEnd type="none" w="med" len="med"/>
-                    </a:lnB>
-                    <a:solidFill>
-                      <a:srgbClr val="FFFFFF"/>
-                    </a:solidFill>
-                  </a:tcPr>
-                </a:tc>
-                <a:tc>
-                  <a:txBody>
-                    <a:bodyPr/>
-                    <a:lstStyle/>
-                    <a:p>
-                      <a:pPr algn="l" indent="0" marL="0">
-                        <a:buNone/>
-                      </a:pPr>
-                      <a:r>
-                        <a:rPr lang="en-US" sz="1100" b="1" dirty="0">
-                          <a:solidFill>
-                            <a:srgbClr val="1A1A1A"/>
-                          </a:solidFill>
-                        </a:rPr>
-                        <a:t>49.4%</a:t>
-                      </a:r>
-                      <a:endParaRPr lang="en-US" sz="1100" dirty="0"/>
-                    </a:p>
-                  </a:txBody>
-                  <a:tcPr marL="91440" marR="91440" marT="45720" marB="45720" anchor="ctr">
-                    <a:lnL w="9525" cap="flat" cmpd="sng" algn="ctr">
-                      <a:solidFill>
-                        <a:srgbClr val="E5E5E5"/>
-                      </a:solidFill>
-                      <a:prstDash val="solid"/>
-                      <a:round/>
-                      <a:headEnd type="none" w="med" len="med"/>
-                      <a:tailEnd type="none" w="med" len="med"/>
-                    </a:lnL>
-                    <a:lnR w="9525" cap="flat" cmpd="sng" algn="ctr">
-                      <a:solidFill>
-                        <a:srgbClr val="E5E5E5"/>
-                      </a:solidFill>
-                      <a:prstDash val="solid"/>
-                      <a:round/>
-                      <a:headEnd type="none" w="med" len="med"/>
-                      <a:tailEnd type="none" w="med" len="med"/>
-                    </a:lnR>
-                    <a:lnT w="9525" cap="flat" cmpd="sng" algn="ctr">
-                      <a:solidFill>
-                        <a:srgbClr val="E5E5E5"/>
-                      </a:solidFill>
-                      <a:prstDash val="solid"/>
-                      <a:round/>
-                      <a:headEnd type="none" w="med" len="med"/>
-                      <a:tailEnd type="none" w="med" len="med"/>
-                    </a:lnT>
-                    <a:lnB w="9525" cap="flat" cmpd="sng" algn="ctr">
-                      <a:solidFill>
-                        <a:srgbClr val="E5E5E5"/>
-                      </a:solidFill>
-                      <a:prstDash val="solid"/>
-                      <a:round/>
-                      <a:headEnd type="none" w="med" len="med"/>
-                      <a:tailEnd type="none" w="med" len="med"/>
-                    </a:lnB>
-                    <a:solidFill>
-                      <a:srgbClr val="FFFFFF"/>
-                    </a:solidFill>
-                  </a:tcPr>
-                </a:tc>
-                <a:tc>
-                  <a:txBody>
-                    <a:bodyPr/>
-                    <a:lstStyle/>
-                    <a:p>
-                      <a:pPr algn="l" indent="0" marL="0">
-                        <a:buNone/>
-                      </a:pPr>
-                      <a:r>
-                        <a:rPr lang="en-US" sz="1100" b="1" dirty="0">
-                          <a:solidFill>
-                            <a:srgbClr val="1A1A1A"/>
-                          </a:solidFill>
-                        </a:rPr>
-                        <a:t>107.6</a:t>
-                      </a:r>
-                      <a:endParaRPr lang="en-US" sz="1100" dirty="0"/>
-                    </a:p>
-                  </a:txBody>
-                  <a:tcPr marL="91440" marR="91440" marT="45720" marB="45720" anchor="ctr">
-                    <a:lnL w="9525" cap="flat" cmpd="sng" algn="ctr">
-                      <a:solidFill>
-                        <a:srgbClr val="E5E5E5"/>
-                      </a:solidFill>
-                      <a:prstDash val="solid"/>
-                      <a:round/>
-                      <a:headEnd type="none" w="med" len="med"/>
-                      <a:tailEnd type="none" w="med" len="med"/>
-                    </a:lnL>
-                    <a:lnR w="9525" cap="flat" cmpd="sng" algn="ctr">
-                      <a:solidFill>
-                        <a:srgbClr val="E5E5E5"/>
-                      </a:solidFill>
-                      <a:prstDash val="solid"/>
-                      <a:round/>
-                      <a:headEnd type="none" w="med" len="med"/>
-                      <a:tailEnd type="none" w="med" len="med"/>
-                    </a:lnR>
-                    <a:lnT w="9525" cap="flat" cmpd="sng" algn="ctr">
-                      <a:solidFill>
-                        <a:srgbClr val="E5E5E5"/>
-                      </a:solidFill>
-                      <a:prstDash val="solid"/>
-                      <a:round/>
-                      <a:headEnd type="none" w="med" len="med"/>
-                      <a:tailEnd type="none" w="med" len="med"/>
-                    </a:lnT>
-                    <a:lnB w="9525" cap="flat" cmpd="sng" algn="ctr">
-                      <a:solidFill>
-                        <a:srgbClr val="E5E5E5"/>
-                      </a:solidFill>
-                      <a:prstDash val="solid"/>
-                      <a:round/>
-                      <a:headEnd type="none" w="med" len="med"/>
-                      <a:tailEnd type="none" w="med" len="med"/>
-                    </a:lnB>
-                    <a:solidFill>
-                      <a:srgbClr val="FFFFFF"/>
-                    </a:solidFill>
-                  </a:tcPr>
-                </a:tc>
-                <a:tc>
-                  <a:txBody>
-                    <a:bodyPr/>
-                    <a:lstStyle/>
-                    <a:p>
-                      <a:pPr algn="l" indent="0" marL="0">
-                        <a:buNone/>
-                      </a:pPr>
-                      <a:r>
-                        <a:rPr lang="en-US" sz="1100" b="1" dirty="0">
-                          <a:solidFill>
-                            <a:srgbClr val="1A1A1A"/>
-                          </a:solidFill>
-                        </a:rPr>
-                        <a:t>6.3</a:t>
-                      </a:r>
-                      <a:endParaRPr lang="en-US" sz="1100" dirty="0"/>
-                    </a:p>
-                  </a:txBody>
-                  <a:tcPr marL="91440" marR="91440" marT="45720" marB="45720" anchor="ctr">
-                    <a:lnL w="9525" cap="flat" cmpd="sng" algn="ctr">
-                      <a:solidFill>
-                        <a:srgbClr val="E5E5E5"/>
-                      </a:solidFill>
-                      <a:prstDash val="solid"/>
-                      <a:round/>
-                      <a:headEnd type="none" w="med" len="med"/>
-                      <a:tailEnd type="none" w="med" len="med"/>
-                    </a:lnL>
-                    <a:lnR w="9525" cap="flat" cmpd="sng" algn="ctr">
-                      <a:solidFill>
-                        <a:srgbClr val="E5E5E5"/>
-                      </a:solidFill>
-                      <a:prstDash val="solid"/>
-                      <a:round/>
-                      <a:headEnd type="none" w="med" len="med"/>
-                      <a:tailEnd type="none" w="med" len="med"/>
-                    </a:lnR>
-                    <a:lnT w="9525" cap="flat" cmpd="sng" algn="ctr">
-                      <a:solidFill>
-                        <a:srgbClr val="E5E5E5"/>
-                      </a:solidFill>
-                      <a:prstDash val="solid"/>
-                      <a:round/>
-                      <a:headEnd type="none" w="med" len="med"/>
-                      <a:tailEnd type="none" w="med" len="med"/>
-                    </a:lnT>
-                    <a:lnB w="9525" cap="flat" cmpd="sng" algn="ctr">
-                      <a:solidFill>
-                        <a:srgbClr val="E5E5E5"/>
-                      </a:solidFill>
-                      <a:prstDash val="solid"/>
-                      <a:round/>
-                      <a:headEnd type="none" w="med" len="med"/>
-                      <a:tailEnd type="none" w="med" len="med"/>
-                    </a:lnB>
-                    <a:solidFill>
-                      <a:srgbClr val="FFFFFF"/>
-                    </a:solidFill>
-                  </a:tcPr>
-                </a:tc>
-                <a:tc>
-                  <a:txBody>
-                    <a:bodyPr/>
-                    <a:lstStyle/>
-                    <a:p>
-                      <a:pPr algn="l" indent="0" marL="0">
-                        <a:buNone/>
-                      </a:pPr>
-                      <a:r>
-                        <a:rPr lang="en-US" sz="1100" b="1" dirty="0">
-                          <a:solidFill>
-                            <a:srgbClr val="1A1A1A"/>
-                          </a:solidFill>
-                        </a:rPr>
-                        <a:t>65.0%</a:t>
-                      </a:r>
-                      <a:endParaRPr lang="en-US" sz="1100" dirty="0"/>
-                    </a:p>
-                  </a:txBody>
-                  <a:tcPr marL="91440" marR="91440" marT="45720" marB="45720" anchor="ctr">
-                    <a:lnL w="9525" cap="flat" cmpd="sng" algn="ctr">
-                      <a:solidFill>
-                        <a:srgbClr val="E5E5E5"/>
-                      </a:solidFill>
-                      <a:prstDash val="solid"/>
-                      <a:round/>
-                      <a:headEnd type="none" w="med" len="med"/>
-                      <a:tailEnd type="none" w="med" len="med"/>
-                    </a:lnL>
-                    <a:lnR w="9525" cap="flat" cmpd="sng" algn="ctr">
-                      <a:solidFill>
-                        <a:srgbClr val="E5E5E5"/>
-                      </a:solidFill>
-                      <a:prstDash val="solid"/>
-                      <a:round/>
-                      <a:headEnd type="none" w="med" len="med"/>
-                      <a:tailEnd type="none" w="med" len="med"/>
-                    </a:lnR>
-                    <a:lnT w="9525" cap="flat" cmpd="sng" algn="ctr">
-                      <a:solidFill>
-                        <a:srgbClr val="E5E5E5"/>
-                      </a:solidFill>
-                      <a:prstDash val="solid"/>
-                      <a:round/>
-                      <a:headEnd type="none" w="med" len="med"/>
-                      <a:tailEnd type="none" w="med" len="med"/>
-                    </a:lnT>
-                    <a:lnB w="9525" cap="flat" cmpd="sng" algn="ctr">
-                      <a:solidFill>
-                        <a:srgbClr val="E5E5E5"/>
-                      </a:solidFill>
-                      <a:prstDash val="solid"/>
-                      <a:round/>
-                      <a:headEnd type="none" w="med" len="med"/>
-                      <a:tailEnd type="none" w="med" len="med"/>
-                    </a:lnB>
-                    <a:solidFill>
-                      <a:srgbClr val="FFFFFF"/>
-                    </a:solidFill>
-                  </a:tcPr>
-                </a:tc>
-                <a:tc>
-                  <a:txBody>
-                    <a:bodyPr/>
-                    <a:lstStyle/>
-                    <a:p>
-                      <a:pPr algn="l" indent="0" marL="0">
-                        <a:buNone/>
-                      </a:pPr>
-                      <a:r>
-                        <a:rPr lang="en-US" sz="1100" b="1" dirty="0">
-                          <a:solidFill>
-                            <a:srgbClr val="E10600"/>
-                          </a:solidFill>
-                        </a:rPr>
-                        <a:t>47.8%</a:t>
-                      </a:r>
-                      <a:endParaRPr lang="en-US" sz="1100" dirty="0"/>
-                    </a:p>
-                  </a:txBody>
-                  <a:tcPr marL="91440" marR="91440" marT="45720" marB="45720" anchor="ctr">
-                    <a:lnL w="9525" cap="flat" cmpd="sng" algn="ctr">
-                      <a:solidFill>
-                        <a:srgbClr val="E5E5E5"/>
-                      </a:solidFill>
-                      <a:prstDash val="solid"/>
-                      <a:round/>
-                      <a:headEnd type="none" w="med" len="med"/>
-                      <a:tailEnd type="none" w="med" len="med"/>
-                    </a:lnL>
-                    <a:lnR w="9525" cap="flat" cmpd="sng" algn="ctr">
-                      <a:solidFill>
-                        <a:srgbClr val="E5E5E5"/>
-                      </a:solidFill>
-                      <a:prstDash val="solid"/>
-                      <a:round/>
-                      <a:headEnd type="none" w="med" len="med"/>
-                      <a:tailEnd type="none" w="med" len="med"/>
-                    </a:lnR>
-                    <a:lnT w="9525" cap="flat" cmpd="sng" algn="ctr">
-                      <a:solidFill>
-                        <a:srgbClr val="E5E5E5"/>
-                      </a:solidFill>
-                      <a:prstDash val="solid"/>
-                      <a:round/>
-                      <a:headEnd type="none" w="med" len="med"/>
-                      <a:tailEnd type="none" w="med" len="med"/>
-                    </a:lnT>
-                    <a:lnB w="9525" cap="flat" cmpd="sng" algn="ctr">
-                      <a:solidFill>
-                        <a:srgbClr val="E5E5E5"/>
-                      </a:solidFill>
-                      <a:prstDash val="solid"/>
-                      <a:round/>
-                      <a:headEnd type="none" w="med" len="med"/>
-                      <a:tailEnd type="none" w="med" len="med"/>
-                    </a:lnB>
-                    <a:solidFill>
-                      <a:srgbClr val="FFFFFF"/>
-                    </a:solidFill>
-                  </a:tcPr>
-                </a:tc>
-              </a:tr>
-              <a:tr h="512064">
-                <a:tc>
-                  <a:txBody>
-                    <a:bodyPr/>
-                    <a:lstStyle/>
-                    <a:p>
-                      <a:pPr algn="l" indent="0" marL="0">
-                        <a:buNone/>
-                      </a:pPr>
-                      <a:r>
-                        <a:rPr lang="en-US" sz="1100" b="1" dirty="0">
-                          <a:solidFill>
-                            <a:srgbClr val="1A1A1A"/>
-                          </a:solidFill>
-                        </a:rPr>
-                        <a:t>↔ Carlos SAINZ</a:t>
-                      </a:r>
-                      <a:endParaRPr lang="en-US" sz="1100" dirty="0"/>
-                    </a:p>
-                  </a:txBody>
-                  <a:tcPr marL="91440" marR="91440" marT="45720" marB="45720" anchor="ctr">
-                    <a:lnL w="9525" cap="flat" cmpd="sng" algn="ctr">
-                      <a:solidFill>
-                        <a:srgbClr val="E5E5E5"/>
-                      </a:solidFill>
-                      <a:prstDash val="solid"/>
-                      <a:round/>
-                      <a:headEnd type="none" w="med" len="med"/>
-                      <a:tailEnd type="none" w="med" len="med"/>
-                    </a:lnL>
-                    <a:lnR w="9525" cap="flat" cmpd="sng" algn="ctr">
-                      <a:solidFill>
-                        <a:srgbClr val="E5E5E5"/>
-                      </a:solidFill>
-                      <a:prstDash val="solid"/>
-                      <a:round/>
-                      <a:headEnd type="none" w="med" len="med"/>
-                      <a:tailEnd type="none" w="med" len="med"/>
-                    </a:lnR>
-                    <a:lnT w="9525" cap="flat" cmpd="sng" algn="ctr">
-                      <a:solidFill>
-                        <a:srgbClr val="E5E5E5"/>
-                      </a:solidFill>
-                      <a:prstDash val="solid"/>
-                      <a:round/>
-                      <a:headEnd type="none" w="med" len="med"/>
-                      <a:tailEnd type="none" w="med" len="med"/>
-                    </a:lnT>
-                    <a:lnB w="9525" cap="flat" cmpd="sng" algn="ctr">
-                      <a:solidFill>
-                        <a:srgbClr val="E5E5E5"/>
-                      </a:solidFill>
-                      <a:prstDash val="solid"/>
-                      <a:round/>
-                      <a:headEnd type="none" w="med" len="med"/>
-                      <a:tailEnd type="none" w="med" len="med"/>
-                    </a:lnB>
-                    <a:solidFill>
-                      <a:srgbClr val="F4F4F4"/>
-                    </a:solidFill>
-                  </a:tcPr>
-                </a:tc>
-                <a:tc>
-                  <a:txBody>
-                    <a:bodyPr/>
-                    <a:lstStyle/>
-                    <a:p>
-                      <a:pPr algn="l" indent="0" marL="0">
-                        <a:buNone/>
-                      </a:pPr>
-                      <a:r>
-                        <a:rPr lang="en-US" sz="1100" dirty="0">
-                          <a:solidFill>
-                            <a:srgbClr val="1A1A1A"/>
-                          </a:solidFill>
-                        </a:rPr>
-                        <a:t>Williams</a:t>
-                      </a:r>
-                      <a:endParaRPr lang="en-US" sz="1100" dirty="0"/>
-                    </a:p>
-                  </a:txBody>
-                  <a:tcPr marL="91440" marR="91440" marT="45720" marB="45720" anchor="ctr">
-                    <a:lnL w="9525" cap="flat" cmpd="sng" algn="ctr">
-                      <a:solidFill>
-                        <a:srgbClr val="E5E5E5"/>
-                      </a:solidFill>
-                      <a:prstDash val="solid"/>
-                      <a:round/>
-                      <a:headEnd type="none" w="med" len="med"/>
-                      <a:tailEnd type="none" w="med" len="med"/>
-                    </a:lnL>
-                    <a:lnR w="9525" cap="flat" cmpd="sng" algn="ctr">
-                      <a:solidFill>
-                        <a:srgbClr val="E5E5E5"/>
-                      </a:solidFill>
-                      <a:prstDash val="solid"/>
-                      <a:round/>
-                      <a:headEnd type="none" w="med" len="med"/>
-                      <a:tailEnd type="none" w="med" len="med"/>
-                    </a:lnR>
-                    <a:lnT w="9525" cap="flat" cmpd="sng" algn="ctr">
-                      <a:solidFill>
-                        <a:srgbClr val="E5E5E5"/>
-                      </a:solidFill>
-                      <a:prstDash val="solid"/>
-                      <a:round/>
-                      <a:headEnd type="none" w="med" len="med"/>
-                      <a:tailEnd type="none" w="med" len="med"/>
-                    </a:lnT>
-                    <a:lnB w="9525" cap="flat" cmpd="sng" algn="ctr">
-                      <a:solidFill>
-                        <a:srgbClr val="E5E5E5"/>
-                      </a:solidFill>
-                      <a:prstDash val="solid"/>
-                      <a:round/>
-                      <a:headEnd type="none" w="med" len="med"/>
-                      <a:tailEnd type="none" w="med" len="med"/>
-                    </a:lnB>
-                    <a:solidFill>
-                      <a:srgbClr val="F4F4F4"/>
-                    </a:solidFill>
-                  </a:tcPr>
-                </a:tc>
-                <a:tc>
-                  <a:txBody>
-                    <a:bodyPr/>
-                    <a:lstStyle/>
-                    <a:p>
-                      <a:pPr algn="l" indent="0" marL="0">
-                        <a:buNone/>
-                      </a:pPr>
-                      <a:r>
-                        <a:rPr lang="en-US" sz="1100" dirty="0">
-                          <a:solidFill>
-                            <a:srgbClr val="1A1A1A"/>
-                          </a:solidFill>
-                        </a:rPr>
-                        <a:t>1.4%</a:t>
-                      </a:r>
-                      <a:endParaRPr lang="en-US" sz="1100" dirty="0"/>
-                    </a:p>
-                  </a:txBody>
-                  <a:tcPr marL="91440" marR="91440" marT="45720" marB="45720" anchor="ctr">
-                    <a:lnL w="9525" cap="flat" cmpd="sng" algn="ctr">
-                      <a:solidFill>
-                        <a:srgbClr val="E5E5E5"/>
-                      </a:solidFill>
-                      <a:prstDash val="solid"/>
-                      <a:round/>
-                      <a:headEnd type="none" w="med" len="med"/>
-                      <a:tailEnd type="none" w="med" len="med"/>
-                    </a:lnL>
-                    <a:lnR w="9525" cap="flat" cmpd="sng" algn="ctr">
-                      <a:solidFill>
-                        <a:srgbClr val="E5E5E5"/>
-                      </a:solidFill>
-                      <a:prstDash val="solid"/>
-                      <a:round/>
-                      <a:headEnd type="none" w="med" len="med"/>
-                      <a:tailEnd type="none" w="med" len="med"/>
-                    </a:lnR>
-                    <a:lnT w="9525" cap="flat" cmpd="sng" algn="ctr">
-                      <a:solidFill>
-                        <a:srgbClr val="E5E5E5"/>
-                      </a:solidFill>
-                      <a:prstDash val="solid"/>
-                      <a:round/>
-                      <a:headEnd type="none" w="med" len="med"/>
-                      <a:tailEnd type="none" w="med" len="med"/>
-                    </a:lnT>
-                    <a:lnB w="9525" cap="flat" cmpd="sng" algn="ctr">
-                      <a:solidFill>
-                        <a:srgbClr val="E5E5E5"/>
-                      </a:solidFill>
-                      <a:prstDash val="solid"/>
-                      <a:round/>
-                      <a:headEnd type="none" w="med" len="med"/>
-                      <a:tailEnd type="none" w="med" len="med"/>
-                    </a:lnB>
-                    <a:solidFill>
-                      <a:srgbClr val="F4F4F4"/>
-                    </a:solidFill>
-                  </a:tcPr>
-                </a:tc>
-                <a:tc>
-                  <a:txBody>
-                    <a:bodyPr/>
-                    <a:lstStyle/>
-                    <a:p>
-                      <a:pPr algn="l" indent="0" marL="0">
-                        <a:buNone/>
-                      </a:pPr>
-                      <a:r>
-                        <a:rPr lang="en-US" sz="1100" dirty="0">
-                          <a:solidFill>
-                            <a:srgbClr val="1A1A1A"/>
-                          </a:solidFill>
-                        </a:rPr>
-                        <a:t>32.5%</a:t>
-                      </a:r>
-                      <a:endParaRPr lang="en-US" sz="1100" dirty="0"/>
-                    </a:p>
-                  </a:txBody>
-                  <a:tcPr marL="91440" marR="91440" marT="45720" marB="45720" anchor="ctr">
-                    <a:lnL w="9525" cap="flat" cmpd="sng" algn="ctr">
-                      <a:solidFill>
-                        <a:srgbClr val="E5E5E5"/>
-                      </a:solidFill>
-                      <a:prstDash val="solid"/>
-                      <a:round/>
-                      <a:headEnd type="none" w="med" len="med"/>
-                      <a:tailEnd type="none" w="med" len="med"/>
-                    </a:lnL>
-                    <a:lnR w="9525" cap="flat" cmpd="sng" algn="ctr">
-                      <a:solidFill>
-                        <a:srgbClr val="E5E5E5"/>
-                      </a:solidFill>
-                      <a:prstDash val="solid"/>
-                      <a:round/>
-                      <a:headEnd type="none" w="med" len="med"/>
-                      <a:tailEnd type="none" w="med" len="med"/>
-                    </a:lnR>
-                    <a:lnT w="9525" cap="flat" cmpd="sng" algn="ctr">
-                      <a:solidFill>
-                        <a:srgbClr val="E5E5E5"/>
-                      </a:solidFill>
-                      <a:prstDash val="solid"/>
-                      <a:round/>
-                      <a:headEnd type="none" w="med" len="med"/>
-                      <a:tailEnd type="none" w="med" len="med"/>
-                    </a:lnT>
-                    <a:lnB w="9525" cap="flat" cmpd="sng" algn="ctr">
-                      <a:solidFill>
-                        <a:srgbClr val="E5E5E5"/>
-                      </a:solidFill>
-                      <a:prstDash val="solid"/>
-                      <a:round/>
-                      <a:headEnd type="none" w="med" len="med"/>
-                      <a:tailEnd type="none" w="med" len="med"/>
-                    </a:lnB>
-                    <a:solidFill>
-                      <a:srgbClr val="F4F4F4"/>
-                    </a:solidFill>
-                  </a:tcPr>
-                </a:tc>
-                <a:tc>
-                  <a:txBody>
-                    <a:bodyPr/>
-                    <a:lstStyle/>
-                    <a:p>
-                      <a:pPr algn="l" indent="0" marL="0">
-                        <a:buNone/>
-                      </a:pPr>
-                      <a:r>
-                        <a:rPr lang="en-US" sz="1100" dirty="0">
-                          <a:solidFill>
-                            <a:srgbClr val="1A1A1A"/>
-                          </a:solidFill>
-                        </a:rPr>
-                        <a:t>90.8</a:t>
-                      </a:r>
-                      <a:endParaRPr lang="en-US" sz="1100" dirty="0"/>
-                    </a:p>
-                  </a:txBody>
-                  <a:tcPr marL="91440" marR="91440" marT="45720" marB="45720" anchor="ctr">
-                    <a:lnL w="9525" cap="flat" cmpd="sng" algn="ctr">
-                      <a:solidFill>
-                        <a:srgbClr val="E5E5E5"/>
-                      </a:solidFill>
-                      <a:prstDash val="solid"/>
-                      <a:round/>
-                      <a:headEnd type="none" w="med" len="med"/>
-                      <a:tailEnd type="none" w="med" len="med"/>
-                    </a:lnL>
-                    <a:lnR w="9525" cap="flat" cmpd="sng" algn="ctr">
-                      <a:solidFill>
-                        <a:srgbClr val="E5E5E5"/>
-                      </a:solidFill>
-                      <a:prstDash val="solid"/>
-                      <a:round/>
-                      <a:headEnd type="none" w="med" len="med"/>
-                      <a:tailEnd type="none" w="med" len="med"/>
-                    </a:lnR>
-                    <a:lnT w="9525" cap="flat" cmpd="sng" algn="ctr">
-                      <a:solidFill>
-                        <a:srgbClr val="E5E5E5"/>
-                      </a:solidFill>
-                      <a:prstDash val="solid"/>
-                      <a:round/>
-                      <a:headEnd type="none" w="med" len="med"/>
-                      <a:tailEnd type="none" w="med" len="med"/>
-                    </a:lnT>
-                    <a:lnB w="9525" cap="flat" cmpd="sng" algn="ctr">
-                      <a:solidFill>
-                        <a:srgbClr val="E5E5E5"/>
-                      </a:solidFill>
-                      <a:prstDash val="solid"/>
-                      <a:round/>
-                      <a:headEnd type="none" w="med" len="med"/>
-                      <a:tailEnd type="none" w="med" len="med"/>
-                    </a:lnB>
-                    <a:solidFill>
-                      <a:srgbClr val="F4F4F4"/>
-                    </a:solidFill>
-                  </a:tcPr>
-                </a:tc>
-                <a:tc>
-                  <a:txBody>
-                    <a:bodyPr/>
-                    <a:lstStyle/>
-                    <a:p>
-                      <a:pPr algn="l" indent="0" marL="0">
-                        <a:buNone/>
-                      </a:pPr>
-                      <a:r>
-                        <a:rPr lang="en-US" sz="1100" dirty="0">
-                          <a:solidFill>
-                            <a:srgbClr val="1A1A1A"/>
-                          </a:solidFill>
-                        </a:rPr>
-                        <a:t>6.5</a:t>
-                      </a:r>
-                      <a:endParaRPr lang="en-US" sz="1100" dirty="0"/>
-                    </a:p>
-                  </a:txBody>
-                  <a:tcPr marL="91440" marR="91440" marT="45720" marB="45720" anchor="ctr">
-                    <a:lnL w="9525" cap="flat" cmpd="sng" algn="ctr">
-                      <a:solidFill>
-                        <a:srgbClr val="E5E5E5"/>
-                      </a:solidFill>
-                      <a:prstDash val="solid"/>
-                      <a:round/>
-                      <a:headEnd type="none" w="med" len="med"/>
-                      <a:tailEnd type="none" w="med" len="med"/>
-                    </a:lnL>
-                    <a:lnR w="9525" cap="flat" cmpd="sng" algn="ctr">
-                      <a:solidFill>
-                        <a:srgbClr val="E5E5E5"/>
-                      </a:solidFill>
-                      <a:prstDash val="solid"/>
-                      <a:round/>
-                      <a:headEnd type="none" w="med" len="med"/>
-                      <a:tailEnd type="none" w="med" len="med"/>
-                    </a:lnR>
-                    <a:lnT w="9525" cap="flat" cmpd="sng" algn="ctr">
-                      <a:solidFill>
-                        <a:srgbClr val="E5E5E5"/>
-                      </a:solidFill>
-                      <a:prstDash val="solid"/>
-                      <a:round/>
-                      <a:headEnd type="none" w="med" len="med"/>
-                      <a:tailEnd type="none" w="med" len="med"/>
-                    </a:lnT>
-                    <a:lnB w="9525" cap="flat" cmpd="sng" algn="ctr">
-                      <a:solidFill>
-                        <a:srgbClr val="E5E5E5"/>
-                      </a:solidFill>
-                      <a:prstDash val="solid"/>
-                      <a:round/>
-                      <a:headEnd type="none" w="med" len="med"/>
-                      <a:tailEnd type="none" w="med" len="med"/>
-                    </a:lnB>
-                    <a:solidFill>
-                      <a:srgbClr val="F4F4F4"/>
-                    </a:solidFill>
-                  </a:tcPr>
-                </a:tc>
-                <a:tc>
-                  <a:txBody>
-                    <a:bodyPr/>
-                    <a:lstStyle/>
-                    <a:p>
-                      <a:pPr algn="l" indent="0" marL="0">
-                        <a:buNone/>
-                      </a:pPr>
-                      <a:r>
-                        <a:rPr lang="en-US" sz="1100" dirty="0">
-                          <a:solidFill>
-                            <a:srgbClr val="1A1A1A"/>
-                          </a:solidFill>
-                        </a:rPr>
-                        <a:t>53.9%</a:t>
-                      </a:r>
-                      <a:endParaRPr lang="en-US" sz="1100" dirty="0"/>
-                    </a:p>
-                  </a:txBody>
-                  <a:tcPr marL="91440" marR="91440" marT="45720" marB="45720" anchor="ctr">
-                    <a:lnL w="9525" cap="flat" cmpd="sng" algn="ctr">
-                      <a:solidFill>
-                        <a:srgbClr val="E5E5E5"/>
-                      </a:solidFill>
-                      <a:prstDash val="solid"/>
-                      <a:round/>
-                      <a:headEnd type="none" w="med" len="med"/>
-                      <a:tailEnd type="none" w="med" len="med"/>
-                    </a:lnL>
-                    <a:lnR w="9525" cap="flat" cmpd="sng" algn="ctr">
-                      <a:solidFill>
-                        <a:srgbClr val="E5E5E5"/>
-                      </a:solidFill>
-                      <a:prstDash val="solid"/>
-                      <a:round/>
-                      <a:headEnd type="none" w="med" len="med"/>
-                      <a:tailEnd type="none" w="med" len="med"/>
-                    </a:lnR>
-                    <a:lnT w="9525" cap="flat" cmpd="sng" algn="ctr">
-                      <a:solidFill>
-                        <a:srgbClr val="E5E5E5"/>
-                      </a:solidFill>
-                      <a:prstDash val="solid"/>
-                      <a:round/>
-                      <a:headEnd type="none" w="med" len="med"/>
-                      <a:tailEnd type="none" w="med" len="med"/>
-                    </a:lnT>
-                    <a:lnB w="9525" cap="flat" cmpd="sng" algn="ctr">
-                      <a:solidFill>
-                        <a:srgbClr val="E5E5E5"/>
-                      </a:solidFill>
-                      <a:prstDash val="solid"/>
-                      <a:round/>
-                      <a:headEnd type="none" w="med" len="med"/>
-                      <a:tailEnd type="none" w="med" len="med"/>
-                    </a:lnB>
-                    <a:solidFill>
-                      <a:srgbClr val="F4F4F4"/>
-                    </a:solidFill>
-                  </a:tcPr>
-                </a:tc>
-                <a:tc>
-                  <a:txBody>
-                    <a:bodyPr/>
-                    <a:lstStyle/>
-                    <a:p>
-                      <a:pPr algn="l" indent="0" marL="0">
-                        <a:buNone/>
-                      </a:pPr>
-                      <a:r>
-                        <a:rPr lang="en-US" sz="1100" dirty="0">
-                          <a:solidFill>
-                            <a:srgbClr val="6B6B6B"/>
-                          </a:solidFill>
-                        </a:rPr>
-                        <a:t>17.6%</a:t>
-                      </a:r>
-                      <a:endParaRPr lang="en-US" sz="1100" dirty="0"/>
-                    </a:p>
-                  </a:txBody>
-                  <a:tcPr marL="91440" marR="91440" marT="45720" marB="45720" anchor="ctr">
-                    <a:lnL w="9525" cap="flat" cmpd="sng" algn="ctr">
-                      <a:solidFill>
-                        <a:srgbClr val="E5E5E5"/>
-                      </a:solidFill>
-                      <a:prstDash val="solid"/>
-                      <a:round/>
-                      <a:headEnd type="none" w="med" len="med"/>
-                      <a:tailEnd type="none" w="med" len="med"/>
-                    </a:lnL>
-                    <a:lnR w="9525" cap="flat" cmpd="sng" algn="ctr">
-                      <a:solidFill>
-                        <a:srgbClr val="E5E5E5"/>
-                      </a:solidFill>
-                      <a:prstDash val="solid"/>
-                      <a:round/>
-                      <a:headEnd type="none" w="med" len="med"/>
-                      <a:tailEnd type="none" w="med" len="med"/>
-                    </a:lnR>
-                    <a:lnT w="9525" cap="flat" cmpd="sng" algn="ctr">
-                      <a:solidFill>
-                        <a:srgbClr val="E5E5E5"/>
-                      </a:solidFill>
-                      <a:prstDash val="solid"/>
-                      <a:round/>
-                      <a:headEnd type="none" w="med" len="med"/>
-                      <a:tailEnd type="none" w="med" len="med"/>
-                    </a:lnT>
-                    <a:lnB w="9525" cap="flat" cmpd="sng" algn="ctr">
-                      <a:solidFill>
-                        <a:srgbClr val="E5E5E5"/>
-                      </a:solidFill>
-                      <a:prstDash val="solid"/>
-                      <a:round/>
-                      <a:headEnd type="none" w="med" len="med"/>
-                      <a:tailEnd type="none" w="med" len="med"/>
-                    </a:lnB>
-                    <a:solidFill>
-                      <a:srgbClr val="F4F4F4"/>
-                    </a:solidFill>
-                  </a:tcPr>
-                </a:tc>
-              </a:tr>
-              <a:tr h="512064">
-                <a:tc>
-                  <a:txBody>
-                    <a:bodyPr/>
-                    <a:lstStyle/>
-                    <a:p>
-                      <a:pPr algn="l" indent="0" marL="0">
-                        <a:buNone/>
-                      </a:pPr>
-                      <a:r>
-                        <a:rPr lang="en-US" sz="1100" b="1" dirty="0">
-                          <a:solidFill>
-                            <a:srgbClr val="1A1A1A"/>
-                          </a:solidFill>
-                        </a:rPr>
-                        <a:t>↔ Lando NORRIS</a:t>
-                      </a:r>
-                      <a:endParaRPr lang="en-US" sz="1100" dirty="0"/>
-                    </a:p>
-                  </a:txBody>
-                  <a:tcPr marL="91440" marR="91440" marT="45720" marB="45720" anchor="ctr">
-                    <a:lnL w="9525" cap="flat" cmpd="sng" algn="ctr">
-                      <a:solidFill>
-                        <a:srgbClr val="E5E5E5"/>
-                      </a:solidFill>
-                      <a:prstDash val="solid"/>
-                      <a:round/>
-                      <a:headEnd type="none" w="med" len="med"/>
-                      <a:tailEnd type="none" w="med" len="med"/>
-                    </a:lnL>
-                    <a:lnR w="9525" cap="flat" cmpd="sng" algn="ctr">
-                      <a:solidFill>
-                        <a:srgbClr val="E5E5E5"/>
-                      </a:solidFill>
-                      <a:prstDash val="solid"/>
-                      <a:round/>
-                      <a:headEnd type="none" w="med" len="med"/>
-                      <a:tailEnd type="none" w="med" len="med"/>
-                    </a:lnR>
-                    <a:lnT w="9525" cap="flat" cmpd="sng" algn="ctr">
-                      <a:solidFill>
-                        <a:srgbClr val="E5E5E5"/>
-                      </a:solidFill>
-                      <a:prstDash val="solid"/>
-                      <a:round/>
-                      <a:headEnd type="none" w="med" len="med"/>
-                      <a:tailEnd type="none" w="med" len="med"/>
-                    </a:lnT>
-                    <a:lnB w="9525" cap="flat" cmpd="sng" algn="ctr">
-                      <a:solidFill>
-                        <a:srgbClr val="E5E5E5"/>
-                      </a:solidFill>
-                      <a:prstDash val="solid"/>
-                      <a:round/>
-                      <a:headEnd type="none" w="med" len="med"/>
-                      <a:tailEnd type="none" w="med" len="med"/>
-                    </a:lnB>
-                    <a:solidFill>
-                      <a:srgbClr val="FFFFFF"/>
-                    </a:solidFill>
-                  </a:tcPr>
-                </a:tc>
-                <a:tc>
-                  <a:txBody>
-                    <a:bodyPr/>
-                    <a:lstStyle/>
-                    <a:p>
-                      <a:pPr algn="l" indent="0" marL="0">
-                        <a:buNone/>
-                      </a:pPr>
-                      <a:r>
-                        <a:rPr lang="en-US" sz="1100" dirty="0">
-                          <a:solidFill>
-                            <a:srgbClr val="1A1A1A"/>
-                          </a:solidFill>
-                        </a:rPr>
-                        <a:t>McLaren</a:t>
-                      </a:r>
-                      <a:endParaRPr lang="en-US" sz="1100" dirty="0"/>
-                    </a:p>
-                  </a:txBody>
-                  <a:tcPr marL="91440" marR="91440" marT="45720" marB="45720" anchor="ctr">
-                    <a:lnL w="9525" cap="flat" cmpd="sng" algn="ctr">
-                      <a:solidFill>
-                        <a:srgbClr val="E5E5E5"/>
-                      </a:solidFill>
-                      <a:prstDash val="solid"/>
-                      <a:round/>
-                      <a:headEnd type="none" w="med" len="med"/>
-                      <a:tailEnd type="none" w="med" len="med"/>
-                    </a:lnL>
-                    <a:lnR w="9525" cap="flat" cmpd="sng" algn="ctr">
-                      <a:solidFill>
-                        <a:srgbClr val="E5E5E5"/>
-                      </a:solidFill>
-                      <a:prstDash val="solid"/>
-                      <a:round/>
-                      <a:headEnd type="none" w="med" len="med"/>
-                      <a:tailEnd type="none" w="med" len="med"/>
-                    </a:lnR>
-                    <a:lnT w="9525" cap="flat" cmpd="sng" algn="ctr">
-                      <a:solidFill>
-                        <a:srgbClr val="E5E5E5"/>
-                      </a:solidFill>
-                      <a:prstDash val="solid"/>
-                      <a:round/>
-                      <a:headEnd type="none" w="med" len="med"/>
-                      <a:tailEnd type="none" w="med" len="med"/>
-                    </a:lnT>
-                    <a:lnB w="9525" cap="flat" cmpd="sng" algn="ctr">
-                      <a:solidFill>
-                        <a:srgbClr val="E5E5E5"/>
-                      </a:solidFill>
-                      <a:prstDash val="solid"/>
-                      <a:round/>
-                      <a:headEnd type="none" w="med" len="med"/>
-                      <a:tailEnd type="none" w="med" len="med"/>
-                    </a:lnB>
-                    <a:solidFill>
-                      <a:srgbClr val="FFFFFF"/>
-                    </a:solidFill>
-                  </a:tcPr>
-                </a:tc>
-                <a:tc>
-                  <a:txBody>
-                    <a:bodyPr/>
-                    <a:lstStyle/>
-                    <a:p>
-                      <a:pPr algn="l" indent="0" marL="0">
-                        <a:buNone/>
-                      </a:pPr>
-                      <a:r>
-                        <a:rPr lang="en-US" sz="1100" dirty="0">
-                          <a:solidFill>
-                            <a:srgbClr val="1A1A1A"/>
-                          </a:solidFill>
-                        </a:rPr>
-                        <a:t>1.6%</a:t>
-                      </a:r>
-                      <a:endParaRPr lang="en-US" sz="1100" dirty="0"/>
-                    </a:p>
-                  </a:txBody>
-                  <a:tcPr marL="91440" marR="91440" marT="45720" marB="45720" anchor="ctr">
-                    <a:lnL w="9525" cap="flat" cmpd="sng" algn="ctr">
-                      <a:solidFill>
-                        <a:srgbClr val="E5E5E5"/>
-                      </a:solidFill>
-                      <a:prstDash val="solid"/>
-                      <a:round/>
-                      <a:headEnd type="none" w="med" len="med"/>
-                      <a:tailEnd type="none" w="med" len="med"/>
-                    </a:lnL>
-                    <a:lnR w="9525" cap="flat" cmpd="sng" algn="ctr">
-                      <a:solidFill>
-                        <a:srgbClr val="E5E5E5"/>
-                      </a:solidFill>
-                      <a:prstDash val="solid"/>
-                      <a:round/>
-                      <a:headEnd type="none" w="med" len="med"/>
-                      <a:tailEnd type="none" w="med" len="med"/>
-                    </a:lnR>
-                    <a:lnT w="9525" cap="flat" cmpd="sng" algn="ctr">
-                      <a:solidFill>
-                        <a:srgbClr val="E5E5E5"/>
-                      </a:solidFill>
-                      <a:prstDash val="solid"/>
-                      <a:round/>
-                      <a:headEnd type="none" w="med" len="med"/>
-                      <a:tailEnd type="none" w="med" len="med"/>
-                    </a:lnT>
-                    <a:lnB w="9525" cap="flat" cmpd="sng" algn="ctr">
-                      <a:solidFill>
-                        <a:srgbClr val="E5E5E5"/>
-                      </a:solidFill>
-                      <a:prstDash val="solid"/>
-                      <a:round/>
-                      <a:headEnd type="none" w="med" len="med"/>
-                      <a:tailEnd type="none" w="med" len="med"/>
-                    </a:lnB>
-                    <a:solidFill>
-                      <a:srgbClr val="FFFFFF"/>
-                    </a:solidFill>
-                  </a:tcPr>
-                </a:tc>
-                <a:tc>
-                  <a:txBody>
-                    <a:bodyPr/>
-                    <a:lstStyle/>
-                    <a:p>
-                      <a:pPr algn="l" indent="0" marL="0">
-                        <a:buNone/>
-                      </a:pPr>
-                      <a:r>
-                        <a:rPr lang="en-US" sz="1100" dirty="0">
-                          <a:solidFill>
-                            <a:srgbClr val="1A1A1A"/>
-                          </a:solidFill>
-                        </a:rPr>
-                        <a:t>31.6%</a:t>
-                      </a:r>
-                      <a:endParaRPr lang="en-US" sz="1100" dirty="0"/>
-                    </a:p>
-                  </a:txBody>
-                  <a:tcPr marL="91440" marR="91440" marT="45720" marB="45720" anchor="ctr">
-                    <a:lnL w="9525" cap="flat" cmpd="sng" algn="ctr">
-                      <a:solidFill>
-                        <a:srgbClr val="E5E5E5"/>
-                      </a:solidFill>
-                      <a:prstDash val="solid"/>
-                      <a:round/>
-                      <a:headEnd type="none" w="med" len="med"/>
-                      <a:tailEnd type="none" w="med" len="med"/>
-                    </a:lnL>
-                    <a:lnR w="9525" cap="flat" cmpd="sng" algn="ctr">
-                      <a:solidFill>
-                        <a:srgbClr val="E5E5E5"/>
-                      </a:solidFill>
-                      <a:prstDash val="solid"/>
-                      <a:round/>
-                      <a:headEnd type="none" w="med" len="med"/>
-                      <a:tailEnd type="none" w="med" len="med"/>
-                    </a:lnR>
-                    <a:lnT w="9525" cap="flat" cmpd="sng" algn="ctr">
-                      <a:solidFill>
-                        <a:srgbClr val="E5E5E5"/>
-                      </a:solidFill>
-                      <a:prstDash val="solid"/>
-                      <a:round/>
-                      <a:headEnd type="none" w="med" len="med"/>
-                      <a:tailEnd type="none" w="med" len="med"/>
-                    </a:lnT>
-                    <a:lnB w="9525" cap="flat" cmpd="sng" algn="ctr">
-                      <a:solidFill>
-                        <a:srgbClr val="E5E5E5"/>
-                      </a:solidFill>
-                      <a:prstDash val="solid"/>
-                      <a:round/>
-                      <a:headEnd type="none" w="med" len="med"/>
-                      <a:tailEnd type="none" w="med" len="med"/>
-                    </a:lnB>
-                    <a:solidFill>
-                      <a:srgbClr val="FFFFFF"/>
-                    </a:solidFill>
-                  </a:tcPr>
-                </a:tc>
-                <a:tc>
-                  <a:txBody>
-                    <a:bodyPr/>
-                    <a:lstStyle/>
-                    <a:p>
-                      <a:pPr algn="l" indent="0" marL="0">
-                        <a:buNone/>
-                      </a:pPr>
-                      <a:r>
-                        <a:rPr lang="en-US" sz="1100" dirty="0">
-                          <a:solidFill>
-                            <a:srgbClr val="1A1A1A"/>
-                          </a:solidFill>
-                        </a:rPr>
-                        <a:t>88.2</a:t>
-                      </a:r>
-                      <a:endParaRPr lang="en-US" sz="1100" dirty="0"/>
-                    </a:p>
-                  </a:txBody>
-                  <a:tcPr marL="91440" marR="91440" marT="45720" marB="45720" anchor="ctr">
-                    <a:lnL w="9525" cap="flat" cmpd="sng" algn="ctr">
-                      <a:solidFill>
-                        <a:srgbClr val="E5E5E5"/>
-                      </a:solidFill>
-                      <a:prstDash val="solid"/>
-                      <a:round/>
-                      <a:headEnd type="none" w="med" len="med"/>
-                      <a:tailEnd type="none" w="med" len="med"/>
-                    </a:lnL>
-                    <a:lnR w="9525" cap="flat" cmpd="sng" algn="ctr">
-                      <a:solidFill>
-                        <a:srgbClr val="E5E5E5"/>
-                      </a:solidFill>
-                      <a:prstDash val="solid"/>
-                      <a:round/>
-                      <a:headEnd type="none" w="med" len="med"/>
-                      <a:tailEnd type="none" w="med" len="med"/>
-                    </a:lnR>
-                    <a:lnT w="9525" cap="flat" cmpd="sng" algn="ctr">
-                      <a:solidFill>
-                        <a:srgbClr val="E5E5E5"/>
-                      </a:solidFill>
-                      <a:prstDash val="solid"/>
-                      <a:round/>
-                      <a:headEnd type="none" w="med" len="med"/>
-                      <a:tailEnd type="none" w="med" len="med"/>
-                    </a:lnT>
-                    <a:lnB w="9525" cap="flat" cmpd="sng" algn="ctr">
-                      <a:solidFill>
-                        <a:srgbClr val="E5E5E5"/>
-                      </a:solidFill>
-                      <a:prstDash val="solid"/>
-                      <a:round/>
-                      <a:headEnd type="none" w="med" len="med"/>
-                      <a:tailEnd type="none" w="med" len="med"/>
-                    </a:lnB>
-                    <a:solidFill>
-                      <a:srgbClr val="FFFFFF"/>
-                    </a:solidFill>
-                  </a:tcPr>
-                </a:tc>
-                <a:tc>
-                  <a:txBody>
-                    <a:bodyPr/>
-                    <a:lstStyle/>
-                    <a:p>
-                      <a:pPr algn="l" indent="0" marL="0">
-                        <a:buNone/>
-                      </a:pPr>
-                      <a:r>
-                        <a:rPr lang="en-US" sz="1100" dirty="0">
-                          <a:solidFill>
-                            <a:srgbClr val="1A1A1A"/>
-                          </a:solidFill>
-                        </a:rPr>
-                        <a:t>6.9</a:t>
-                      </a:r>
-                      <a:endParaRPr lang="en-US" sz="1100" dirty="0"/>
-                    </a:p>
-                  </a:txBody>
-                  <a:tcPr marL="91440" marR="91440" marT="45720" marB="45720" anchor="ctr">
-                    <a:lnL w="9525" cap="flat" cmpd="sng" algn="ctr">
-                      <a:solidFill>
-                        <a:srgbClr val="E5E5E5"/>
-                      </a:solidFill>
-                      <a:prstDash val="solid"/>
-                      <a:round/>
-                      <a:headEnd type="none" w="med" len="med"/>
-                      <a:tailEnd type="none" w="med" len="med"/>
-                    </a:lnL>
-                    <a:lnR w="9525" cap="flat" cmpd="sng" algn="ctr">
-                      <a:solidFill>
-                        <a:srgbClr val="E5E5E5"/>
-                      </a:solidFill>
-                      <a:prstDash val="solid"/>
-                      <a:round/>
-                      <a:headEnd type="none" w="med" len="med"/>
-                      <a:tailEnd type="none" w="med" len="med"/>
-                    </a:lnR>
-                    <a:lnT w="9525" cap="flat" cmpd="sng" algn="ctr">
-                      <a:solidFill>
-                        <a:srgbClr val="E5E5E5"/>
-                      </a:solidFill>
-                      <a:prstDash val="solid"/>
-                      <a:round/>
-                      <a:headEnd type="none" w="med" len="med"/>
-                      <a:tailEnd type="none" w="med" len="med"/>
-                    </a:lnT>
-                    <a:lnB w="9525" cap="flat" cmpd="sng" algn="ctr">
-                      <a:solidFill>
-                        <a:srgbClr val="E5E5E5"/>
-                      </a:solidFill>
-                      <a:prstDash val="solid"/>
-                      <a:round/>
-                      <a:headEnd type="none" w="med" len="med"/>
-                      <a:tailEnd type="none" w="med" len="med"/>
-                    </a:lnB>
-                    <a:solidFill>
-                      <a:srgbClr val="FFFFFF"/>
-                    </a:solidFill>
-                  </a:tcPr>
-                </a:tc>
-                <a:tc>
-                  <a:txBody>
-                    <a:bodyPr/>
-                    <a:lstStyle/>
-                    <a:p>
-                      <a:pPr algn="l" indent="0" marL="0">
-                        <a:buNone/>
-                      </a:pPr>
-                      <a:r>
-                        <a:rPr lang="en-US" sz="1100" dirty="0">
-                          <a:solidFill>
-                            <a:srgbClr val="1A1A1A"/>
-                          </a:solidFill>
-                        </a:rPr>
-                        <a:t>39.6%</a:t>
-                      </a:r>
-                      <a:endParaRPr lang="en-US" sz="1100" dirty="0"/>
-                    </a:p>
-                  </a:txBody>
-                  <a:tcPr marL="91440" marR="91440" marT="45720" marB="45720" anchor="ctr">
-                    <a:lnL w="9525" cap="flat" cmpd="sng" algn="ctr">
-                      <a:solidFill>
-                        <a:srgbClr val="E5E5E5"/>
-                      </a:solidFill>
-                      <a:prstDash val="solid"/>
-                      <a:round/>
-                      <a:headEnd type="none" w="med" len="med"/>
-                      <a:tailEnd type="none" w="med" len="med"/>
-                    </a:lnL>
-                    <a:lnR w="9525" cap="flat" cmpd="sng" algn="ctr">
-                      <a:solidFill>
-                        <a:srgbClr val="E5E5E5"/>
-                      </a:solidFill>
-                      <a:prstDash val="solid"/>
-                      <a:round/>
-                      <a:headEnd type="none" w="med" len="med"/>
-                      <a:tailEnd type="none" w="med" len="med"/>
-                    </a:lnR>
-                    <a:lnT w="9525" cap="flat" cmpd="sng" algn="ctr">
-                      <a:solidFill>
-                        <a:srgbClr val="E5E5E5"/>
-                      </a:solidFill>
-                      <a:prstDash val="solid"/>
-                      <a:round/>
-                      <a:headEnd type="none" w="med" len="med"/>
-                      <a:tailEnd type="none" w="med" len="med"/>
-                    </a:lnT>
-                    <a:lnB w="9525" cap="flat" cmpd="sng" algn="ctr">
-                      <a:solidFill>
-                        <a:srgbClr val="E5E5E5"/>
-                      </a:solidFill>
-                      <a:prstDash val="solid"/>
-                      <a:round/>
-                      <a:headEnd type="none" w="med" len="med"/>
-                      <a:tailEnd type="none" w="med" len="med"/>
-                    </a:lnB>
-                    <a:solidFill>
-                      <a:srgbClr val="FFFFFF"/>
-                    </a:solidFill>
-                  </a:tcPr>
-                </a:tc>
-                <a:tc>
-                  <a:txBody>
-                    <a:bodyPr/>
-                    <a:lstStyle/>
-                    <a:p>
-                      <a:pPr algn="l" indent="0" marL="0">
-                        <a:buNone/>
-                      </a:pPr>
-                      <a:r>
-                        <a:rPr lang="en-US" sz="1100" dirty="0">
-                          <a:solidFill>
-                            <a:srgbClr val="6B6B6B"/>
-                          </a:solidFill>
-                        </a:rPr>
-                        <a:t>17.4%</a:t>
-                      </a:r>
-                      <a:endParaRPr lang="en-US" sz="1100" dirty="0"/>
-                    </a:p>
-                  </a:txBody>
-                  <a:tcPr marL="91440" marR="91440" marT="45720" marB="45720" anchor="ctr">
-                    <a:lnL w="9525" cap="flat" cmpd="sng" algn="ctr">
-                      <a:solidFill>
-                        <a:srgbClr val="E5E5E5"/>
-                      </a:solidFill>
-                      <a:prstDash val="solid"/>
-                      <a:round/>
-                      <a:headEnd type="none" w="med" len="med"/>
-                      <a:tailEnd type="none" w="med" len="med"/>
-                    </a:lnL>
-                    <a:lnR w="9525" cap="flat" cmpd="sng" algn="ctr">
-                      <a:solidFill>
-                        <a:srgbClr val="E5E5E5"/>
-                      </a:solidFill>
-                      <a:prstDash val="solid"/>
-                      <a:round/>
-                      <a:headEnd type="none" w="med" len="med"/>
-                      <a:tailEnd type="none" w="med" len="med"/>
-                    </a:lnR>
-                    <a:lnT w="9525" cap="flat" cmpd="sng" algn="ctr">
-                      <a:solidFill>
-                        <a:srgbClr val="E5E5E5"/>
-                      </a:solidFill>
-                      <a:prstDash val="solid"/>
-                      <a:round/>
-                      <a:headEnd type="none" w="med" len="med"/>
-                      <a:tailEnd type="none" w="med" len="med"/>
-                    </a:lnT>
-                    <a:lnB w="9525" cap="flat" cmpd="sng" algn="ctr">
-                      <a:solidFill>
-                        <a:srgbClr val="E5E5E5"/>
-                      </a:solidFill>
-                      <a:prstDash val="solid"/>
-                      <a:round/>
-                      <a:headEnd type="none" w="med" len="med"/>
-                      <a:tailEnd type="none" w="med" len="med"/>
-                    </a:lnB>
-                    <a:solidFill>
-                      <a:srgbClr val="FFFFFF"/>
-                    </a:solidFill>
-                  </a:tcPr>
-                </a:tc>
-              </a:tr>
-              <a:tr h="512064">
-                <a:tc>
-                  <a:txBody>
-                    <a:bodyPr/>
-                    <a:lstStyle/>
-                    <a:p>
-                      <a:pPr algn="l" indent="0" marL="0">
-                        <a:buNone/>
-                      </a:pPr>
-                      <a:r>
-                        <a:rPr lang="en-US" sz="1100" b="1" dirty="0">
-                          <a:solidFill>
-                            <a:srgbClr val="1A1A1A"/>
-                          </a:solidFill>
-                        </a:rPr>
-                        <a:t>↔ George RUSSELL</a:t>
-                      </a:r>
-                      <a:endParaRPr lang="en-US" sz="1100" dirty="0"/>
-                    </a:p>
-                  </a:txBody>
-                  <a:tcPr marL="91440" marR="91440" marT="45720" marB="45720" anchor="ctr">
-                    <a:lnL w="9525" cap="flat" cmpd="sng" algn="ctr">
-                      <a:solidFill>
-                        <a:srgbClr val="E5E5E5"/>
-                      </a:solidFill>
-                      <a:prstDash val="solid"/>
-                      <a:round/>
-                      <a:headEnd type="none" w="med" len="med"/>
-                      <a:tailEnd type="none" w="med" len="med"/>
-                    </a:lnL>
-                    <a:lnR w="9525" cap="flat" cmpd="sng" algn="ctr">
-                      <a:solidFill>
-                        <a:srgbClr val="E5E5E5"/>
-                      </a:solidFill>
-                      <a:prstDash val="solid"/>
-                      <a:round/>
-                      <a:headEnd type="none" w="med" len="med"/>
-                      <a:tailEnd type="none" w="med" len="med"/>
-                    </a:lnR>
-                    <a:lnT w="9525" cap="flat" cmpd="sng" algn="ctr">
-                      <a:solidFill>
-                        <a:srgbClr val="E5E5E5"/>
-                      </a:solidFill>
-                      <a:prstDash val="solid"/>
-                      <a:round/>
-                      <a:headEnd type="none" w="med" len="med"/>
-                      <a:tailEnd type="none" w="med" len="med"/>
-                    </a:lnT>
-                    <a:lnB w="9525" cap="flat" cmpd="sng" algn="ctr">
-                      <a:solidFill>
-                        <a:srgbClr val="E5E5E5"/>
-                      </a:solidFill>
-                      <a:prstDash val="solid"/>
-                      <a:round/>
-                      <a:headEnd type="none" w="med" len="med"/>
-                      <a:tailEnd type="none" w="med" len="med"/>
-                    </a:lnB>
-                    <a:solidFill>
-                      <a:srgbClr val="F4F4F4"/>
-                    </a:solidFill>
-                  </a:tcPr>
-                </a:tc>
-                <a:tc>
-                  <a:txBody>
-                    <a:bodyPr/>
-                    <a:lstStyle/>
-                    <a:p>
-                      <a:pPr algn="l" indent="0" marL="0">
-                        <a:buNone/>
-                      </a:pPr>
-                      <a:r>
-                        <a:rPr lang="en-US" sz="1100" dirty="0">
-                          <a:solidFill>
-                            <a:srgbClr val="1A1A1A"/>
-                          </a:solidFill>
-                        </a:rPr>
-                        <a:t>Mercedes</a:t>
-                      </a:r>
-                      <a:endParaRPr lang="en-US" sz="1100" dirty="0"/>
-                    </a:p>
-                  </a:txBody>
-                  <a:tcPr marL="91440" marR="91440" marT="45720" marB="45720" anchor="ctr">
-                    <a:lnL w="9525" cap="flat" cmpd="sng" algn="ctr">
-                      <a:solidFill>
-                        <a:srgbClr val="E5E5E5"/>
-                      </a:solidFill>
-                      <a:prstDash val="solid"/>
-                      <a:round/>
-                      <a:headEnd type="none" w="med" len="med"/>
-                      <a:tailEnd type="none" w="med" len="med"/>
-                    </a:lnL>
-                    <a:lnR w="9525" cap="flat" cmpd="sng" algn="ctr">
-                      <a:solidFill>
-                        <a:srgbClr val="E5E5E5"/>
-                      </a:solidFill>
-                      <a:prstDash val="solid"/>
-                      <a:round/>
-                      <a:headEnd type="none" w="med" len="med"/>
-                      <a:tailEnd type="none" w="med" len="med"/>
-                    </a:lnR>
-                    <a:lnT w="9525" cap="flat" cmpd="sng" algn="ctr">
-                      <a:solidFill>
-                        <a:srgbClr val="E5E5E5"/>
-                      </a:solidFill>
-                      <a:prstDash val="solid"/>
-                      <a:round/>
-                      <a:headEnd type="none" w="med" len="med"/>
-                      <a:tailEnd type="none" w="med" len="med"/>
-                    </a:lnT>
-                    <a:lnB w="9525" cap="flat" cmpd="sng" algn="ctr">
-                      <a:solidFill>
-                        <a:srgbClr val="E5E5E5"/>
-                      </a:solidFill>
-                      <a:prstDash val="solid"/>
-                      <a:round/>
-                      <a:headEnd type="none" w="med" len="med"/>
-                      <a:tailEnd type="none" w="med" len="med"/>
-                    </a:lnB>
-                    <a:solidFill>
-                      <a:srgbClr val="F4F4F4"/>
-                    </a:solidFill>
-                  </a:tcPr>
-                </a:tc>
-                <a:tc>
-                  <a:txBody>
-                    <a:bodyPr/>
-                    <a:lstStyle/>
-                    <a:p>
-                      <a:pPr algn="l" indent="0" marL="0">
-                        <a:buNone/>
-                      </a:pPr>
-                      <a:r>
-                        <a:rPr lang="en-US" sz="1100" dirty="0">
-                          <a:solidFill>
-                            <a:srgbClr val="1A1A1A"/>
-                          </a:solidFill>
-                        </a:rPr>
-                        <a:t>0.3%</a:t>
-                      </a:r>
-                      <a:endParaRPr lang="en-US" sz="1100" dirty="0"/>
-                    </a:p>
-                  </a:txBody>
-                  <a:tcPr marL="91440" marR="91440" marT="45720" marB="45720" anchor="ctr">
-                    <a:lnL w="9525" cap="flat" cmpd="sng" algn="ctr">
-                      <a:solidFill>
-                        <a:srgbClr val="E5E5E5"/>
-                      </a:solidFill>
-                      <a:prstDash val="solid"/>
-                      <a:round/>
-                      <a:headEnd type="none" w="med" len="med"/>
-                      <a:tailEnd type="none" w="med" len="med"/>
-                    </a:lnL>
-                    <a:lnR w="9525" cap="flat" cmpd="sng" algn="ctr">
-                      <a:solidFill>
-                        <a:srgbClr val="E5E5E5"/>
-                      </a:solidFill>
-                      <a:prstDash val="solid"/>
-                      <a:round/>
-                      <a:headEnd type="none" w="med" len="med"/>
-                      <a:tailEnd type="none" w="med" len="med"/>
-                    </a:lnR>
-                    <a:lnT w="9525" cap="flat" cmpd="sng" algn="ctr">
-                      <a:solidFill>
-                        <a:srgbClr val="E5E5E5"/>
-                      </a:solidFill>
-                      <a:prstDash val="solid"/>
-                      <a:round/>
-                      <a:headEnd type="none" w="med" len="med"/>
-                      <a:tailEnd type="none" w="med" len="med"/>
-                    </a:lnT>
-                    <a:lnB w="9525" cap="flat" cmpd="sng" algn="ctr">
-                      <a:solidFill>
-                        <a:srgbClr val="E5E5E5"/>
-                      </a:solidFill>
-                      <a:prstDash val="solid"/>
-                      <a:round/>
-                      <a:headEnd type="none" w="med" len="med"/>
-                      <a:tailEnd type="none" w="med" len="med"/>
-                    </a:lnB>
-                    <a:solidFill>
-                      <a:srgbClr val="F4F4F4"/>
-                    </a:solidFill>
-                  </a:tcPr>
-                </a:tc>
-                <a:tc>
-                  <a:txBody>
-                    <a:bodyPr/>
-                    <a:lstStyle/>
-                    <a:p>
-                      <a:pPr algn="l" indent="0" marL="0">
-                        <a:buNone/>
-                      </a:pPr>
-                      <a:r>
-                        <a:rPr lang="en-US" sz="1100" dirty="0">
-                          <a:solidFill>
-                            <a:srgbClr val="1A1A1A"/>
-                          </a:solidFill>
-                        </a:rPr>
-                        <a:t>11.6%</a:t>
-                      </a:r>
-                      <a:endParaRPr lang="en-US" sz="1100" dirty="0"/>
-                    </a:p>
-                  </a:txBody>
-                  <a:tcPr marL="91440" marR="91440" marT="45720" marB="45720" anchor="ctr">
-                    <a:lnL w="9525" cap="flat" cmpd="sng" algn="ctr">
-                      <a:solidFill>
-                        <a:srgbClr val="E5E5E5"/>
-                      </a:solidFill>
-                      <a:prstDash val="solid"/>
-                      <a:round/>
-                      <a:headEnd type="none" w="med" len="med"/>
-                      <a:tailEnd type="none" w="med" len="med"/>
-                    </a:lnL>
-                    <a:lnR w="9525" cap="flat" cmpd="sng" algn="ctr">
-                      <a:solidFill>
-                        <a:srgbClr val="E5E5E5"/>
-                      </a:solidFill>
-                      <a:prstDash val="solid"/>
-                      <a:round/>
-                      <a:headEnd type="none" w="med" len="med"/>
-                      <a:tailEnd type="none" w="med" len="med"/>
-                    </a:lnR>
-                    <a:lnT w="9525" cap="flat" cmpd="sng" algn="ctr">
-                      <a:solidFill>
-                        <a:srgbClr val="E5E5E5"/>
-                      </a:solidFill>
-                      <a:prstDash val="solid"/>
-                      <a:round/>
-                      <a:headEnd type="none" w="med" len="med"/>
-                      <a:tailEnd type="none" w="med" len="med"/>
-                    </a:lnT>
-                    <a:lnB w="9525" cap="flat" cmpd="sng" algn="ctr">
-                      <a:solidFill>
-                        <a:srgbClr val="E5E5E5"/>
-                      </a:solidFill>
-                      <a:prstDash val="solid"/>
-                      <a:round/>
-                      <a:headEnd type="none" w="med" len="med"/>
-                      <a:tailEnd type="none" w="med" len="med"/>
-                    </a:lnB>
-                    <a:solidFill>
-                      <a:srgbClr val="F4F4F4"/>
-                    </a:solidFill>
-                  </a:tcPr>
-                </a:tc>
-                <a:tc>
-                  <a:txBody>
-                    <a:bodyPr/>
-                    <a:lstStyle/>
-                    <a:p>
-                      <a:pPr algn="l" indent="0" marL="0">
-                        <a:buNone/>
-                      </a:pPr>
-                      <a:r>
-                        <a:rPr lang="en-US" sz="1100" dirty="0">
-                          <a:solidFill>
-                            <a:srgbClr val="1A1A1A"/>
-                          </a:solidFill>
-                        </a:rPr>
-                        <a:t>69.0</a:t>
-                      </a:r>
-                      <a:endParaRPr lang="en-US" sz="1100" dirty="0"/>
-                    </a:p>
-                  </a:txBody>
-                  <a:tcPr marL="91440" marR="91440" marT="45720" marB="45720" anchor="ctr">
-                    <a:lnL w="9525" cap="flat" cmpd="sng" algn="ctr">
-                      <a:solidFill>
-                        <a:srgbClr val="E5E5E5"/>
-                      </a:solidFill>
-                      <a:prstDash val="solid"/>
-                      <a:round/>
-                      <a:headEnd type="none" w="med" len="med"/>
-                      <a:tailEnd type="none" w="med" len="med"/>
-                    </a:lnL>
-                    <a:lnR w="9525" cap="flat" cmpd="sng" algn="ctr">
-                      <a:solidFill>
-                        <a:srgbClr val="E5E5E5"/>
-                      </a:solidFill>
-                      <a:prstDash val="solid"/>
-                      <a:round/>
-                      <a:headEnd type="none" w="med" len="med"/>
-                      <a:tailEnd type="none" w="med" len="med"/>
-                    </a:lnR>
-                    <a:lnT w="9525" cap="flat" cmpd="sng" algn="ctr">
-                      <a:solidFill>
-                        <a:srgbClr val="E5E5E5"/>
-                      </a:solidFill>
-                      <a:prstDash val="solid"/>
-                      <a:round/>
-                      <a:headEnd type="none" w="med" len="med"/>
-                      <a:tailEnd type="none" w="med" len="med"/>
-                    </a:lnT>
-                    <a:lnB w="9525" cap="flat" cmpd="sng" algn="ctr">
-                      <a:solidFill>
-                        <a:srgbClr val="E5E5E5"/>
-                      </a:solidFill>
-                      <a:prstDash val="solid"/>
-                      <a:round/>
-                      <a:headEnd type="none" w="med" len="med"/>
-                      <a:tailEnd type="none" w="med" len="med"/>
-                    </a:lnB>
-                    <a:solidFill>
-                      <a:srgbClr val="F4F4F4"/>
-                    </a:solidFill>
-                  </a:tcPr>
-                </a:tc>
-                <a:tc>
-                  <a:txBody>
-                    <a:bodyPr/>
-                    <a:lstStyle/>
-                    <a:p>
-                      <a:pPr algn="l" indent="0" marL="0">
-                        <a:buNone/>
-                      </a:pPr>
-                      <a:r>
-                        <a:rPr lang="en-US" sz="1100" dirty="0">
-                          <a:solidFill>
-                            <a:srgbClr val="1A1A1A"/>
-                          </a:solidFill>
-                        </a:rPr>
-                        <a:t>7.9</a:t>
-                      </a:r>
-                      <a:endParaRPr lang="en-US" sz="1100" dirty="0"/>
-                    </a:p>
-                  </a:txBody>
-                  <a:tcPr marL="91440" marR="91440" marT="45720" marB="45720" anchor="ctr">
-                    <a:lnL w="9525" cap="flat" cmpd="sng" algn="ctr">
-                      <a:solidFill>
-                        <a:srgbClr val="E5E5E5"/>
-                      </a:solidFill>
-                      <a:prstDash val="solid"/>
-                      <a:round/>
-                      <a:headEnd type="none" w="med" len="med"/>
-                      <a:tailEnd type="none" w="med" len="med"/>
-                    </a:lnL>
-                    <a:lnR w="9525" cap="flat" cmpd="sng" algn="ctr">
-                      <a:solidFill>
-                        <a:srgbClr val="E5E5E5"/>
-                      </a:solidFill>
-                      <a:prstDash val="solid"/>
-                      <a:round/>
-                      <a:headEnd type="none" w="med" len="med"/>
-                      <a:tailEnd type="none" w="med" len="med"/>
-                    </a:lnR>
-                    <a:lnT w="9525" cap="flat" cmpd="sng" algn="ctr">
-                      <a:solidFill>
-                        <a:srgbClr val="E5E5E5"/>
-                      </a:solidFill>
-                      <a:prstDash val="solid"/>
-                      <a:round/>
-                      <a:headEnd type="none" w="med" len="med"/>
-                      <a:tailEnd type="none" w="med" len="med"/>
-                    </a:lnT>
-                    <a:lnB w="9525" cap="flat" cmpd="sng" algn="ctr">
-                      <a:solidFill>
-                        <a:srgbClr val="E5E5E5"/>
-                      </a:solidFill>
-                      <a:prstDash val="solid"/>
-                      <a:round/>
-                      <a:headEnd type="none" w="med" len="med"/>
-                      <a:tailEnd type="none" w="med" len="med"/>
-                    </a:lnB>
-                    <a:solidFill>
-                      <a:srgbClr val="F4F4F4"/>
-                    </a:solidFill>
-                  </a:tcPr>
-                </a:tc>
-                <a:tc>
-                  <a:txBody>
-                    <a:bodyPr/>
-                    <a:lstStyle/>
-                    <a:p>
-                      <a:pPr algn="l" indent="0" marL="0">
-                        <a:buNone/>
-                      </a:pPr>
-                      <a:r>
-                        <a:rPr lang="en-US" sz="1100" dirty="0">
-                          <a:solidFill>
-                            <a:srgbClr val="1A1A1A"/>
-                          </a:solidFill>
-                        </a:rPr>
-                        <a:t>11.5%</a:t>
-                      </a:r>
-                      <a:endParaRPr lang="en-US" sz="1100" dirty="0"/>
-                    </a:p>
-                  </a:txBody>
-                  <a:tcPr marL="91440" marR="91440" marT="45720" marB="45720" anchor="ctr">
-                    <a:lnL w="9525" cap="flat" cmpd="sng" algn="ctr">
-                      <a:solidFill>
-                        <a:srgbClr val="E5E5E5"/>
-                      </a:solidFill>
-                      <a:prstDash val="solid"/>
-                      <a:round/>
-                      <a:headEnd type="none" w="med" len="med"/>
-                      <a:tailEnd type="none" w="med" len="med"/>
-                    </a:lnL>
-                    <a:lnR w="9525" cap="flat" cmpd="sng" algn="ctr">
-                      <a:solidFill>
-                        <a:srgbClr val="E5E5E5"/>
-                      </a:solidFill>
-                      <a:prstDash val="solid"/>
-                      <a:round/>
-                      <a:headEnd type="none" w="med" len="med"/>
-                      <a:tailEnd type="none" w="med" len="med"/>
-                    </a:lnR>
-                    <a:lnT w="9525" cap="flat" cmpd="sng" algn="ctr">
-                      <a:solidFill>
-                        <a:srgbClr val="E5E5E5"/>
-                      </a:solidFill>
-                      <a:prstDash val="solid"/>
-                      <a:round/>
-                      <a:headEnd type="none" w="med" len="med"/>
-                      <a:tailEnd type="none" w="med" len="med"/>
-                    </a:lnT>
-                    <a:lnB w="9525" cap="flat" cmpd="sng" algn="ctr">
-                      <a:solidFill>
-                        <a:srgbClr val="E5E5E5"/>
-                      </a:solidFill>
-                      <a:prstDash val="solid"/>
-                      <a:round/>
-                      <a:headEnd type="none" w="med" len="med"/>
-                      <a:tailEnd type="none" w="med" len="med"/>
-                    </a:lnB>
-                    <a:solidFill>
-                      <a:srgbClr val="F4F4F4"/>
-                    </a:solidFill>
-                  </a:tcPr>
-                </a:tc>
-                <a:tc>
-                  <a:txBody>
-                    <a:bodyPr/>
-                    <a:lstStyle/>
-                    <a:p>
-                      <a:pPr algn="l" indent="0" marL="0">
-                        <a:buNone/>
-                      </a:pPr>
-                      <a:r>
-                        <a:rPr lang="en-US" sz="1100" dirty="0">
-                          <a:solidFill>
-                            <a:srgbClr val="6B6B6B"/>
-                          </a:solidFill>
-                        </a:rPr>
-                        <a:t>36.0%</a:t>
-                      </a:r>
-                      <a:endParaRPr lang="en-US" sz="1100" dirty="0"/>
-                    </a:p>
-                  </a:txBody>
-                  <a:tcPr marL="91440" marR="91440" marT="45720" marB="45720" anchor="ctr">
-                    <a:lnL w="9525" cap="flat" cmpd="sng" algn="ctr">
-                      <a:solidFill>
-                        <a:srgbClr val="E5E5E5"/>
-                      </a:solidFill>
-                      <a:prstDash val="solid"/>
-                      <a:round/>
-                      <a:headEnd type="none" w="med" len="med"/>
-                      <a:tailEnd type="none" w="med" len="med"/>
-                    </a:lnL>
-                    <a:lnR w="9525" cap="flat" cmpd="sng" algn="ctr">
-                      <a:solidFill>
-                        <a:srgbClr val="E5E5E5"/>
-                      </a:solidFill>
-                      <a:prstDash val="solid"/>
-                      <a:round/>
-                      <a:headEnd type="none" w="med" len="med"/>
-                      <a:tailEnd type="none" w="med" len="med"/>
-                    </a:lnR>
-                    <a:lnT w="9525" cap="flat" cmpd="sng" algn="ctr">
-                      <a:solidFill>
-                        <a:srgbClr val="E5E5E5"/>
-                      </a:solidFill>
-                      <a:prstDash val="solid"/>
-                      <a:round/>
-                      <a:headEnd type="none" w="med" len="med"/>
-                      <a:tailEnd type="none" w="med" len="med"/>
-                    </a:lnT>
-                    <a:lnB w="9525" cap="flat" cmpd="sng" algn="ctr">
-                      <a:solidFill>
-                        <a:srgbClr val="E5E5E5"/>
-                      </a:solidFill>
-                      <a:prstDash val="solid"/>
-                      <a:round/>
-                      <a:headEnd type="none" w="med" len="med"/>
-                      <a:tailEnd type="none" w="med" len="med"/>
-                    </a:lnB>
-                    <a:solidFill>
-                      <a:srgbClr val="F4F4F4"/>
-                    </a:solidFill>
-                  </a:tcPr>
-                </a:tc>
-              </a:tr>
-            </a:tbl>
-          </a:graphicData>
-        </a:graphic>
-      </p:graphicFrame>
-      <p:sp>
-        <p:nvSpPr>
-          <p:cNvPr id="5" name="cand-note"/>
-          <p:cNvSpPr txBox="1"/>
-          <p:nvPr/>
-        </p:nvSpPr>
-        <p:spPr>
-          <a:xfrm>
-            <a:off x="548640" y="5257800"/>
-            <a:ext cx="11109960" cy="365760"/>
-          </a:xfrm>
-          <a:prstGeom prst="rect">
-            <a:avLst/>
-          </a:prstGeom>
-          <a:noFill/>
-          <a:ln/>
-        </p:spPr>
-        <p:txBody>
-          <a:bodyPr wrap="square" lIns="0" tIns="0" rIns="0" bIns="0" rtlCol="0" anchor="t"/>
-          <a:lstStyle/>
-          <a:p>
-            <a:pPr indent="0" marL="0">
-              <a:buNone/>
-            </a:pPr>
-            <a:r>
-              <a:rPr lang="en-US" sz="1100" dirty="0">
-                <a:solidFill>
-                  <a:srgbClr val="6B6B6B"/>
-                </a:solidFill>
-              </a:rPr>
-              <a:t>모델 적중: 실제 라인업 재현 시 팀별 포인트 상관 0.99(평균 오차 20.6점), 경기 우승자 적중 37.5% → 시즌 합계로 읽는다 · STROLL과 후보는 같은 팀에서 뛴 적이 없어 비교에 "연결 그룹 평균이 같다"는 가정이 들어 있다 · VERSTAPPEN은 과대평가 가능</a:t>
-            </a:r>
-            <a:endParaRPr lang="en-US" sz="1100" dirty="0"/>
-          </a:p>
-        </p:txBody>
-      </p:sp>
-      <p:sp>
-        <p:nvSpPr>
-          <p:cNvPr id="6" name="takeaway"/>
-          <p:cNvSpPr txBox="1"/>
-          <p:nvPr/>
-        </p:nvSpPr>
-        <p:spPr>
-          <a:xfrm>
-            <a:off x="548640" y="5870448"/>
-            <a:ext cx="11109960" cy="411480"/>
-          </a:xfrm>
-          <a:prstGeom prst="rect">
-            <a:avLst/>
-          </a:prstGeom>
-          <a:noFill/>
-          <a:ln/>
-        </p:spPr>
-        <p:txBody>
-          <a:bodyPr wrap="square" lIns="0" tIns="0" rIns="0" bIns="0" rtlCol="0" anchor="t"/>
-          <a:lstStyle/>
-          <a:p>
-            <a:pPr indent="0" marL="0">
-              <a:buNone/>
-            </a:pPr>
-            <a:r>
-              <a:rPr lang="en-US" sz="1400" b="1" dirty="0">
-                <a:solidFill>
-                  <a:srgbClr val="E10600"/>
-                </a:solidFill>
-              </a:rPr>
-              <a:t>→  </a:t>
-            </a:r>
-            <a:pPr indent="0" marL="0">
-              <a:buNone/>
-            </a:pPr>
-            <a:r>
-              <a:rPr lang="en-US" sz="1400" dirty="0">
-                <a:solidFill>
-                  <a:srgbClr val="1A1A1A"/>
-                </a:solidFill>
-              </a:rPr>
-              <a:t>LECLERC는 어느 추정 기간에서도 팀 6위 확률을 크게 올린다 — RUSSELL의 이득은 기간에 따라 흔들려 차량 영향일 수 있다</a:t>
-            </a:r>
-            <a:endParaRPr lang="en-US" sz="1400" dirty="0"/>
-          </a:p>
-        </p:txBody>
-      </p:sp>
-      <p:sp>
-        <p:nvSpPr>
-          <p:cNvPr id="25" name="Slide Number Placeholder 0"/>
-          <p:cNvSpPr>
-            <a:spLocks noGrp="1"/>
-          </p:cNvSpPr>
-          <p:nvPr>
-            <p:ph type="sldNum" sz="quarter" idx="4294967295"/>
-          </p:nvPr>
-        </p:nvSpPr>
-        <p:spPr>
-          <a:xfrm>
-            <a:off x="11109960" y="6446520"/>
-            <a:ext cx="548640" cy="256032"/>
-          </a:xfrm>
-          <a:prstGeom prst="rect">
-            <a:avLst/>
-          </a:prstGeom>
-          <a:extLst>
-            <a:ext uri="{C572A759-6A51-4108-AA02-DFA0A04FC94B}">
-              <ma14:wrappingTextBoxFlag xmlns:ma14="http://schemas.microsoft.com/office/mac/drawingml/2011/main" val="0"/>
-            </a:ext>
-          </a:extLst>
-        </p:spPr>
-        <p:txBody>
-          <a:bodyPr/>
-          <a:lstStyle>
-            <a:lvl1pPr>
-              <a:defRPr sz="900">
-                <a:solidFill>
-                  <a:srgbClr val="8C8C8C"/>
-                </a:solidFill>
-                <a:latin typeface="Malgun Gothic"/>
-                <a:ea typeface="Malgun Gothic"/>
-                <a:cs typeface="Malgun Gothic"/>
-              </a:defRPr>
-            </a:lvl1pPr>
-          </a:lstStyle>
-          <a:p>
-            <a:pPr algn="r"/>
-            <a:fld id="{F7021451-1387-4CA6-816F-3879F97B5CBC}" type="slidenum">
-              <a:rPr b="0" lang="en-US"/>
-              <a:t>17</a:t>
-            </a:fld>
-            <a:endParaRPr lang="en-US"/>
-          </a:p>
-        </p:txBody>
-      </p:sp>
-    </p:spTree>
-  </p:cSld>
-  <p:clrMapOvr>
-    <a:masterClrMapping/>
-  </p:clrMapOvr>
-</p:sld>
-</file>
-
-<file path=ppt/slides/slide24.xml><?xml version="1.0" encoding="utf-8"?>
-<p:sld xmlns:a="http://schemas.openxmlformats.org/drawingml/2006/main" xmlns:r="http://schemas.openxmlformats.org/officeDocument/2006/relationships" xmlns:p="http://schemas.openxmlformats.org/presentationml/2006/main">
   <p:cSld name="Slide 21">
     <p:spTree>
       <p:nvGrpSpPr>
@@ -26364,7 +22579,7 @@
 </p:sld>
 </file>
 
-<file path=ppt/slides/slide25.xml><?xml version="1.0" encoding="utf-8"?>
+<file path=ppt/slides/slide24.xml><?xml version="1.0" encoding="utf-8"?>
 <p:sld xmlns:a="http://schemas.openxmlformats.org/drawingml/2006/main" xmlns:r="http://schemas.openxmlformats.org/officeDocument/2006/relationships" xmlns:p="http://schemas.openxmlformats.org/presentationml/2006/main">
   <p:cSld name="Slide 22">
     <p:spTree>
@@ -26526,7 +22741,7 @@
 </p:sld>
 </file>
 
-<file path=ppt/slides/slide26.xml><?xml version="1.0" encoding="utf-8"?>
+<file path=ppt/slides/slide25.xml><?xml version="1.0" encoding="utf-8"?>
 <p:sld xmlns:a="http://schemas.openxmlformats.org/drawingml/2006/main" xmlns:r="http://schemas.openxmlformats.org/officeDocument/2006/relationships" xmlns:p="http://schemas.openxmlformats.org/presentationml/2006/main">
   <p:cSld name="Slide 23">
     <p:spTree>
@@ -26853,7 +23068,7 @@
                   <a:srgbClr val="6B6B6B"/>
                 </a:solidFill>
               </a:rPr>
-              <a:t>근거 18 · 19 · 20 · 23</a:t>
+              <a:t>근거 18 · 19 · 20</a:t>
             </a:r>
             <a:endParaRPr lang="en-US" sz="1000" dirty="0"/>
           </a:p>
@@ -27021,7 +23236,7 @@
                   <a:srgbClr val="6B6B6B"/>
                 </a:solidFill>
               </a:rPr>
-              <a:t>NORRIS·VERSTAPPEN·PIASTRI는 페이스 우위만 반복됐다. 전체 1,824개 조합에서도 네 조건을 모두 통과한 것은 4.8%뿐이다.</a:t>
+              <a:t>NORRIS·VERSTAPPEN·PIASTRI는 동료 비교가 11가지 조건 모두에서 확인되지 않았다. 전체 1,824개 조합에서도 네 조건을 모두 통과한 것은 4.8%뿐이다.</a:t>
             </a:r>
             <a:endParaRPr lang="en-US" sz="1050" dirty="0"/>
           </a:p>
@@ -27875,7 +24090,7 @@
 </p:sld>
 </file>
 
-<file path=ppt/slides/slide27.xml><?xml version="1.0" encoding="utf-8"?>
+<file path=ppt/slides/slide26.xml><?xml version="1.0" encoding="utf-8"?>
 <p:sld xmlns:a="http://schemas.openxmlformats.org/drawingml/2006/main" xmlns:r="http://schemas.openxmlformats.org/officeDocument/2006/relationships" xmlns:p="http://schemas.openxmlformats.org/presentationml/2006/main">
   <p:cSld name="Slide 24">
     <p:spTree>
@@ -28158,7 +24373,7 @@
 </p:sld>
 </file>
 
-<file path=ppt/slides/slide28.xml><?xml version="1.0" encoding="utf-8"?>
+<file path=ppt/slides/slide27.xml><?xml version="1.0" encoding="utf-8"?>
 <p:sld xmlns:a="http://schemas.openxmlformats.org/drawingml/2006/main" xmlns:r="http://schemas.openxmlformats.org/officeDocument/2006/relationships" xmlns:p="http://schemas.openxmlformats.org/presentationml/2006/main">
   <p:cSld name="Slide 25">
     <p:spTree>
@@ -28721,7 +24936,7 @@
 </p:sld>
 </file>
 
-<file path=ppt/slides/slide29.xml><?xml version="1.0" encoding="utf-8"?>
+<file path=ppt/slides/slide28.xml><?xml version="1.0" encoding="utf-8"?>
 <p:sld xmlns:a="http://schemas.openxmlformats.org/drawingml/2006/main" xmlns:r="http://schemas.openxmlformats.org/officeDocument/2006/relationships" xmlns:p="http://schemas.openxmlformats.org/presentationml/2006/main">
   <p:cSld name="Slide 26">
     <p:spTree>
@@ -29905,7 +26120,7 @@
                   <a:srgbClr val="6B6B6B"/>
                 </a:solidFill>
               </a:rPr>
-              <a:t>후보 19명 중 7명이 기준 선수보다 빨랐지만, 자기 팀 동료 대비 우위까지 11/11 조건에서 반복된 것은 두 명뿐이다. 가장 빠른 NORRIS·VERSTAPPEN·PIASTRI는 동료 대비가 반복되지 않아 차량 이점을 배제하지 못했다.</a:t>
+              <a:t>후보 19명 중 7명이 기준 선수보다 빨랐지만, 자기 팀 동료 대비 우위까지 11/11 조건에서 반복된 것은 두 명뿐이다. 가장 빠른 NORRIS·VERSTAPPEN·PIASTRI는 동료 대비 우위가 11가지 조건 모두에서 확인되지 않아 차량 이점을 배제하지 못했다.</a:t>
             </a:r>
             <a:endParaRPr lang="en-US" sz="1200" dirty="0"/>
           </a:p>

--- a/docs/F1_TeamBuilder_발표자료.pptx
+++ b/docs/F1_TeamBuilder_발표자료.pptx
@@ -27,6 +27,7 @@
     <p:sldId id="273" r:id="rId19"/>
     <p:sldId id="274" r:id="rId20"/>
     <p:sldId id="275" r:id="rId21"/>
+    <p:sldId id="282" r:id="rId33"/>
     <p:sldId id="276" r:id="rId22"/>
     <p:sldId id="277" r:id="rId23"/>
     <p:sldId id="278" r:id="rId24"/>
@@ -2737,7 +2738,7 @@
           <a:lstStyle/>
           <a:p>
             <a:r>
-              <a:t>F1 팀이 드라이버를 영입할 때 가장 빠른 선수가 아니라 우리 팀의 약점을 메울 선수를 데이터로 찾는 것이 질문입니다. 모든 숫자는 같은 기준에서 나왔고, 결론은 LECLERC를 1순위, RUSSELL을 2순위로 검토하는 것입니다.</a:t>
+              <a:t>F1 팀이 드라이버를 영입할 때 가장 빠른 선수가 아니라 우리 팀의 약점을 메울 선수를 데이터로 찾는 것이 질문입니다. 모든 숫자는 같은 기준에서 나왔고, 결론은 LECLERC를 우선 검토하는 것입니다.</a:t>
             </a:r>
           </a:p>
         </p:txBody>
@@ -3435,7 +3436,7 @@
           <a:lstStyle/>
           <a:p>
             <a:r>
-              <a:t>후보를 하나의 점수로 줄 세우지 않습니다. 같은 표에서 보면 지표마다 앞서는 선수가 다릅니다. 네 조건을 모두 통과한 후보는 LECLERC와 RUSSELL입니다. 포인트는 차량이 대부분을 정해 참고로만 둡니다.</a:t>
+              <a:t>후보를 하나의 점수로 줄 세우지 않습니다. 같은 표에서 보면 지표마다 앞서는 선수가 다릅니다. 네 조건을 모두 통과한 후보는 LECLERC와 RUSSELL이고, 다시 확인한 뒤 남은 것은 LECLERC입니다. 포인트는 차량이 대부분을 정해 참고로만 둡니다.</a:t>
             </a:r>
           </a:p>
         </p:txBody>
@@ -3521,7 +3522,7 @@
           <a:lstStyle/>
           <a:p>
             <a:r>
-              <a:t>후보 19명 중 7명이 같은 경기 비교에서 11가지 조건, 95% 구간, 시즌 전·후반 모두 기준 선수보다 빨랐고, 그중 같은 차 동료 비교까지 11/11 조건에서 빠른 선수는 LECLERC와 RUSSELL 두 명입니다. 같은 동료 HAMILTON 기준으로 재면 LECLERC는 9경기 모두 빨랐고 RUSSELL은 비슷했습니다. 그래서 LECLERC를 1순위, RUSSELL을 2순위로 둡니다. 2026 시즌으로 확인해 보면 RUSSELL은 ANTONELLI에게 뒤집혔고 LECLERC는 HAMILTON과 비슷해져, 둘 다 확정이 아니라 우선 검토입니다. 계약 가능성과 이적 후 성과는 판단하지 않습니다.</a:t>
+              <a:t>후보 19명 중 7명이 같은 경기 비교에서 11가지 조건, 95% 구간, 시즌 전·후반 모두 기준 선수보다 빨랐고, 그중 같은 차 동료 비교까지 11/11 조건에서 빠른 선수는 LECLERC와 RUSSELL 두 명입니다. 같은 동료 HAMILTON 기준으로 재면 LECLERC는 9경기 모두 빨랐고 RUSSELL은 비슷했습니다. 시즌별로 다시 보면 LECLERC는 2023~2026 어느 시즌에도 동료에게 뚜렷하게 지지 않았고, RUSSELL은 2023에 HAMILTON, 2026에 ANTONELLI에게 뚜렷하게 졌습니다. 그래서 LECLERC를 우선 검토하고 RUSSELL은 보류합니다. LECLERC도 2026에는 HAMILTON과 비슷해져 확정이 아니라 우선 검토입니다. 계약 가능성과 이적 후 성과는 판단하지 않습니다.</a:t>
             </a:r>
           </a:p>
         </p:txBody>
@@ -3695,7 +3696,7 @@
           <a:lstStyle/>
           <a:p>
             <a:r>
-              <a:t>결론부터 말씀드립니다. 2025 Aston Martin의 STROLL 자리에는 LECLERC를 1순위, RUSSELL을 2순위로 검토합니다. 두 선수 모두 같은 경기 비교와 같은 차 동료 비교에서 11가지 조건 모두 빠릅니다. 둘을 가르는 것은 같은 자로 잰 비교입니다. 두 선수 모두 같은 차에서 HAMILTON과 달린 적이 있어, 같은 동료를 기준으로 재면 LECLERC는 9경기 모두 빨랐고 RUSSELL은 비슷했습니다. LECLERC의 타이어 유지는 영입 전에 장기 스틴트로 확인합니다. 영입과 별개로 피트레인 손실은 지금 바로 점검할 수 있습니다.</a:t>
+              <a:t>결론부터 말씀드립니다. 2025 Aston Martin의 STROLL 자리에는 LECLERC를 우선 검토합니다. 같은 경기 비교와 같은 차 동료 비교에서 11가지 조건 모두 빠른 선수는 LECLERC와 RUSSELL 두 명이었습니다. 이 둘을 같은 동료 HAMILTON 기준과 2023~2026 시즌별 동료 비교로 다시 확인하자, LECLERC는 HAMILTON보다 9경기 모두 빨랐고 어느 시즌에도 동료에게 뚜렷하게 지지 않았습니다. RUSSELL은 HAMILTON 기준으로 비슷했고 2023·2026에는 동료에게 뚜렷하게 졌습니다. 그래서 RUSSELL은 보류합니다. LECLERC의 타이어 유지는 영입 전에 장기 스틴트로 확인하고, 피트레인 손실은 영입과 별개로 지금 점검할 수 있습니다.</a:t>
             </a:r>
           </a:p>
         </p:txBody>
@@ -4045,7 +4046,7 @@
           <a:lstStyle/>
           <a:p>
             <a:r>
-              <a:t>다섯 가지 제안입니다. LECLERC를 1순위로 한 우선 검토, 가장 빠른 후보를 바로 고르지 않는 보수적 기준, 피트레인 손실 점검, 접전 구간의 경기별 결과 추적, 그리고 1순위 LECLERC의 장기 스틴트 타이어 유지 확인입니다.</a:t>
+              <a:t>다섯 가지 제안입니다. LECLERC 우선 검토, 가장 빠른 후보를 바로 고르지 않는 보수적 기준, 피트레인 손실 점검, 접전 구간의 경기별 결과 추적, 그리고 LECLERC의 장기 스틴트 타이어 유지 확인입니다.</a:t>
             </a:r>
           </a:p>
         </p:txBody>
@@ -4131,7 +4132,7 @@
           <a:lstStyle/>
           <a:p>
             <a:r>
-              <a:t>한계를 분명히 말씀드립니다. 첫째, 같은 경기 비교에는 차량 몫이 섞여 있어 후보를 거르는 데만 썼습니다. 둘째, 두 후보를 같은 HAMILTON 기준으로 쟀지만 2025는 HAMILTON의 Ferrari 첫해였고, 2026에는 LECLERC의 우위도 0 근처로 줄었습니다. 셋째, STROLL은 ALONSO하고만 같은 차를 타서 STROLL 쪽 차량 몫은 분리할 수 없습니다. 넷째, 정제 데이터로 다시 계산한 값은 Gold와 방향은 같지만 크기가 다르고, 타이어 유지 지표는 시즌마다 흔들립니다. 그래서 결론은 확정이 아니라 우선 검토 순서입니다.</a:t>
+              <a:t>한계를 분명히 말씀드립니다. 첫째, 같은 경기 비교에는 차량 몫이 섞여 있어 후보를 거르는 데만 썼습니다. 둘째, 두 후보를 같은 HAMILTON 기준으로 쟀지만 2025는 HAMILTON의 Ferrari 첫해였고, 2026에는 LECLERC의 우위도 0 근처로 줄었습니다. 셋째, STROLL은 ALONSO하고만 같은 차를 타서 STROLL 쪽 차량 몫은 분리할 수 없습니다. 넷째, 정제 데이터로 다시 계산한 값은 Gold와 방향은 같지만 크기가 다르고, 타이어 유지 지표는 시즌마다 흔들립니다. 다섯째, VERSTAPPEN은 시즌별로 동료보다 빨랐지만 상대가 PEREZ·TSUNODA·HADJAR였고, 2025 한 조건은 표본이 부족했으며, HAMILTON 같은 공통 기준과 이어지지 않아 판정하지 못했습니다. 그래서 결론은 확정이 아니라 우선 검토입니다.</a:t>
             </a:r>
           </a:p>
         </p:txBody>
@@ -4305,7 +4306,7 @@
           <a:lstStyle/>
           <a:p>
             <a:r>
-              <a:t>정리하면, STROLL 자리의 우선 검토 후보는 LECLERC(1순위)와 RUSSELL이고, 영입과 별개로 피트레인 손실을 먼저 점검해야 합니다. 감사합니다.</a:t>
+              <a:t>정리하면, STROLL 자리의 우선 검토 후보는 LECLERC이고, 영입과 별개로 피트레인 손실을 먼저 점검해야 합니다. 감사합니다.</a:t>
             </a:r>
           </a:p>
         </p:txBody>
@@ -4328,6 +4329,92 @@
             <a:fld id="{F7021451-1387-4CA6-816F-3879F97B5CBC}" type="slidenum">
               <a:rPr lang="en-US"/>
               <a:t>26</a:t>
+            </a:fld>
+            <a:endParaRPr lang="en-US"/>
+          </a:p>
+        </p:txBody>
+      </p:sp>
+    </p:spTree>
+    <p:extLst>
+      <p:ext uri="{BB962C8B-B14F-4D97-AF65-F5344CB8AC3E}">
+        <p14:creationId xmlns:p14="http://schemas.microsoft.com/office/powerpoint/2010/main" val="1024086991"/>
+      </p:ext>
+    </p:extLst>
+  </p:cSld>
+  <p:clrMapOvr>
+    <a:masterClrMapping/>
+  </p:clrMapOvr>
+</p:notes>
+</file>
+
+<file path=ppt/notesSlides/notesSlide27.xml><?xml version="1.0" encoding="utf-8"?>
+<p:notes xmlns:a="http://schemas.openxmlformats.org/drawingml/2006/main" xmlns:r="http://schemas.openxmlformats.org/officeDocument/2006/relationships" xmlns:p="http://schemas.openxmlformats.org/presentationml/2006/main">
+  <p:cSld>
+    <p:spTree>
+      <p:nvGrpSpPr>
+        <p:cNvPr id="1" name=""/>
+        <p:cNvGrpSpPr/>
+        <p:nvPr/>
+      </p:nvGrpSpPr>
+      <p:grpSpPr>
+        <a:xfrm>
+          <a:off x="0" y="0"/>
+          <a:ext cx="0" cy="0"/>
+          <a:chOff x="0" y="0"/>
+          <a:chExt cx="0" cy="0"/>
+        </a:xfrm>
+      </p:grpSpPr>
+      <p:sp>
+        <p:nvSpPr>
+          <p:cNvPr id="2" name="Slide Image Placeholder 1"/>
+          <p:cNvSpPr>
+            <a:spLocks noGrp="1" noRot="1" noChangeAspect="1"/>
+          </p:cNvSpPr>
+          <p:nvPr>
+            <p:ph type="sldImg"/>
+          </p:nvPr>
+        </p:nvSpPr>
+        <p:spPr/>
+      </p:sp>
+      <p:sp>
+        <p:nvSpPr>
+          <p:cNvPr id="3" name="Notes Placeholder 2"/>
+          <p:cNvSpPr>
+            <a:spLocks noGrp="1"/>
+          </p:cNvSpPr>
+          <p:nvPr>
+            <p:ph type="body" idx="1"/>
+          </p:nvPr>
+        </p:nvSpPr>
+        <p:spPr/>
+        <p:txBody>
+          <a:bodyPr/>
+          <a:lstStyle/>
+          <a:p>
+            <a:r>
+              <a:t>영입하면 성적이 얼마나 바뀌는지 확인하려고 2025 시즌을 4,000번 다시 치렀습니다. 지금 라인업은 시즌 1승 확률이 0.1%이고, 대부분 후보도 1~3%에 머뭅니다. 우승은 차량이 거의 정합니다. 현실적인 목표는 팀 6위이고, LECLERC로 바꾸면 6위 이내 확률이 9%에서 65%로 오릅니다. RUSSELL은 2025만 보면 효과가 크지만 2023~2025로 보면 거의 사라집니다. 차량 효과를 분리한 이 추정도 관측 기록의 같은 자 비교와 같은 방향, 즉 LECLERC 우선 검토와 RUSSELL 보류를 지지합니다. 다만 가정 위의 추정이라 보조 근거로만 씁니다. VERSTAPPEN은 동료 비교의 표본 근거가 부족해 후보에서 제외했으므로 표에서 뺐습니다.</a:t>
+            </a:r>
+          </a:p>
+        </p:txBody>
+      </p:sp>
+      <p:sp>
+        <p:nvSpPr>
+          <p:cNvPr id="4" name="Slide Number Placeholder 3"/>
+          <p:cNvSpPr>
+            <a:spLocks noGrp="1"/>
+          </p:cNvSpPr>
+          <p:nvPr>
+            <p:ph type="sldNum" sz="quarter" idx="10"/>
+          </p:nvPr>
+        </p:nvSpPr>
+        <p:spPr/>
+        <p:txBody>
+          <a:bodyPr/>
+          <a:lstStyle/>
+          <a:p>
+            <a:fld id="{F7021451-1387-4CA6-816F-3879F97B5CBC}" type="slidenum">
+              <a:rPr lang="en-US"/>
+              <a:t>21</a:t>
             </a:fld>
             <a:endParaRPr lang="en-US"/>
           </a:p>
@@ -4461,7 +4548,7 @@
           <a:lstStyle/>
           <a:p>
             <a:r>
-              <a:t>선정 기준은 우리 팀 진단에서 출발합니다. 약점인 기본 페이스는 메우고, 강점인 타이어 유지는 잃지 않고, 피트는 선수가 아니라 팀 운영 과제로 둡니다. LECLERC와 RUSSELL 모두 같은 경기 비교와 같은 차 동료 비교를 통과합니다. 다만 동료가 다릅니다. RUSSELL의 동료 ANTONELLI는 신인입니다. 그래서 두 후보 모두 같은 차에서 함께 달린 적이 있는 HAMILTON을 같은 자로 썼습니다. 정제 데이터에서 직접 다시 계산하면 LECLERC는 HAMILTON보다 랩당 0.217초 빠르고 9경기 모두 빨랐으며, RUSSELL은 0.037초 느려 21경기 중 8경기만 빨랐습니다. 타이어 유지는 2025 한 시즌으로는 LECLERC가 하위지만, 2023~2025로 보면 둘의 차이가 오차 범위 안이라 순위를 가르지 않고 영입 전 확인 과제로 둡니다. HAMILTON은 2025가 Ferrari 첫해라 LECLERC가 유리하게 보였을 수 있다는 점도 함께 말합니다.</a:t>
+              <a:t>선정 기준은 우리 팀 진단에서 출발합니다. 약점인 기본 페이스는 메우고, 강점인 타이어 유지는 잃지 않고, 피트는 선수가 아니라 팀 운영 과제로 둡니다. LECLERC와 RUSSELL 모두 같은 경기 비교와 같은 차 동료 비교를 통과합니다. 다만 동료가 다릅니다. RUSSELL의 동료 ANTONELLI는 신인입니다. 그래서 두 후보 모두 같은 차에서 함께 달린 적이 있는 HAMILTON을 같은 자로 썼습니다. 정제 데이터에서 직접 다시 계산하면 LECLERC는 HAMILTON보다 랩당 0.217초 빠르고 9경기 모두 빨랐으며, RUSSELL은 0.037초 느려 21경기 중 8경기만 빨랐습니다. 시즌을 바꿔 보면 LECLERC는 2023~2026 어느 시즌에도 동료에게 뚜렷하게 지지 않았고, RUSSELL은 2023에 HAMILTON, 2026에 ANTONELLI에게 뚜렷하게 졌습니다. 타이어 유지는 2025 한 시즌으로는 LECLERC가 하위지만, 2023~2025로 보면 둘의 차이가 오차 범위 안이라 순위를 가르지 않고 영입 전 확인 과제로 둡니다. HAMILTON은 2025가 Ferrari 첫해라 LECLERC가 유리하게 보였을 수 있다는 점도 함께 말합니다.</a:t>
             </a:r>
           </a:p>
         </p:txBody>
@@ -4531,7 +4618,7 @@
           <a:lstStyle/>
           <a:p>
             <a:r>
-              <a:t>결론부터 말씀드립니다. 데이터는 믿을 수 있게 만들었고, Aston Martin의 약점은 페이스와 피트 운영이며, 우선 검토 후보는 LECLERC(1순위)와 RUSSELL 두 명입니다. 이후 섹션은 이 세 문장의 근거입니다.</a:t>
+              <a:t>결론부터 말씀드립니다. 데이터는 믿을 수 있게 만들었고, Aston Martin의 약점은 페이스와 피트 운영이며, 우선 검토 후보는 LECLERC 한 명입니다. 이후 섹션은 이 세 문장의 근거입니다.</a:t>
             </a:r>
           </a:p>
         </p:txBody>
@@ -14111,7 +14198,7 @@
                   <a:srgbClr val="1A1A1A"/>
                 </a:solidFill>
               </a:rPr>
-              <a:t>가장 빠른 세 명이 아니라 LECLERC·RUSSELL이 끝까지 남았다 — 빠른 선수와 팀에 맞는 선수는 다르다</a:t>
+              <a:t>가장 빠른 세 명이 아니라 LECLERC가 끝까지 남았다 — 빠른 선수와 팀에 맞는 선수는 다르다</a:t>
             </a:r>
             <a:endParaRPr lang="en-US" sz="1400" dirty="0"/>
           </a:p>
@@ -14215,7 +14302,7 @@
                   <a:srgbClr val="1A1A1A"/>
                 </a:solidFill>
               </a:rPr>
-              <a:t>같은 환경 두 단계로 비교하면 남는 선수는 둘이다</a:t>
+              <a:t>같은 환경 두 단계로 비교하면 남는 선수는 둘이다 (재확인 전)</a:t>
             </a:r>
             <a:endParaRPr lang="en-US" sz="2800" dirty="0"/>
           </a:p>
@@ -14478,7 +14565,7 @@
                   <a:srgbClr val="1A1A1A"/>
                 </a:solidFill>
               </a:rPr>
-              <a:t>차를 빼고 같은 차 동료와 비교해도 빠른 선수는 LECLERC·RUSSELL 둘뿐이다</a:t>
+              <a:t>차를 빼고 같은 차 동료와 비교해도 빠른 선수는 LECLERC·RUSSELL 둘뿐이다 — 다음 장에서 둘을 다시 확인한다</a:t>
             </a:r>
             <a:endParaRPr lang="en-US" sz="1400" dirty="0"/>
           </a:p>
@@ -14666,7 +14753,7 @@
         </p:nvGraphicFramePr>
         <p:xfrm>
           <a:off x="548640" y="1508760"/>
-          <a:ext cx="11109960" cy="3657600"/>
+          <a:ext cx="11109960" cy="3749040"/>
         </p:xfrm>
         <a:graphic>
           <a:graphicData uri="http://schemas.openxmlformats.org/drawingml/2006/table">
@@ -15164,7 +15251,7 @@
                   </a:tcPr>
                 </a:tc>
               </a:tr>
-              <a:tr h="640080">
+              <a:tr h="548640">
                 <a:tc>
                   <a:txBody>
                     <a:bodyPr/>
@@ -15174,7 +15261,7 @@
                         <a:buNone/>
                       </a:pPr>
                       <a:r>
-                        <a:rPr lang="en-US" sz="1100" b="1" dirty="0">
+                        <a:rPr lang="en-US" sz="1000" b="1" dirty="0">
                           <a:solidFill>
                             <a:srgbClr val="1A1A1A"/>
                           </a:solidFill>
@@ -15187,7 +15274,7 @@
                         <a:buNone/>
                       </a:pPr>
                       <a:r>
-                        <a:rPr lang="en-US" sz="1100" b="1" dirty="0">
+                        <a:rPr lang="en-US" sz="1000" b="1" dirty="0">
                           <a:solidFill>
                             <a:srgbClr val="1A1A1A"/>
                           </a:solidFill>
@@ -15247,7 +15334,7 @@
                         <a:buNone/>
                       </a:pPr>
                       <a:r>
-                        <a:rPr lang="en-US" sz="1100" b="0" dirty="0">
+                        <a:rPr lang="en-US" sz="1000" b="0" dirty="0">
                           <a:solidFill>
                             <a:srgbClr val="6B6B6B"/>
                           </a:solidFill>
@@ -15307,7 +15394,7 @@
                         <a:buNone/>
                       </a:pPr>
                       <a:r>
-                        <a:rPr lang="en-US" sz="1100" b="0" dirty="0">
+                        <a:rPr lang="en-US" sz="1000" b="0" dirty="0">
                           <a:solidFill>
                             <a:srgbClr val="6B6B6B"/>
                           </a:solidFill>
@@ -15367,7 +15454,7 @@
                         <a:buNone/>
                       </a:pPr>
                       <a:r>
-                        <a:rPr lang="en-US" sz="1100" b="0" dirty="0">
+                        <a:rPr lang="en-US" sz="1000" b="0" dirty="0">
                           <a:solidFill>
                             <a:srgbClr val="6B6B6B"/>
                           </a:solidFill>
@@ -15380,7 +15467,7 @@
                         <a:buNone/>
                       </a:pPr>
                       <a:r>
-                        <a:rPr lang="en-US" sz="1100" b="0" dirty="0">
+                        <a:rPr lang="en-US" sz="1000" b="0" dirty="0">
                           <a:solidFill>
                             <a:srgbClr val="6B6B6B"/>
                           </a:solidFill>
@@ -15440,7 +15527,7 @@
                         <a:buNone/>
                       </a:pPr>
                       <a:r>
-                        <a:rPr lang="en-US" sz="1100" b="1" dirty="0">
+                        <a:rPr lang="en-US" sz="1000" b="1" dirty="0">
                           <a:solidFill>
                             <a:srgbClr val="E10600"/>
                           </a:solidFill>
@@ -15453,7 +15540,7 @@
                         <a:buNone/>
                       </a:pPr>
                       <a:r>
-                        <a:rPr lang="en-US" sz="1100" b="1" dirty="0">
+                        <a:rPr lang="en-US" sz="1000" b="1" dirty="0">
                           <a:solidFill>
                             <a:srgbClr val="E10600"/>
                           </a:solidFill>
@@ -15513,7 +15600,7 @@
                         <a:buNone/>
                       </a:pPr>
                       <a:r>
-                        <a:rPr lang="en-US" sz="1100" b="1" dirty="0">
+                        <a:rPr lang="en-US" sz="1000" b="1" dirty="0">
                           <a:solidFill>
                             <a:srgbClr val="E10600"/>
                           </a:solidFill>
@@ -15526,7 +15613,7 @@
                         <a:buNone/>
                       </a:pPr>
                       <a:r>
-                        <a:rPr lang="en-US" sz="1100" b="1" dirty="0">
+                        <a:rPr lang="en-US" sz="1000" b="1" dirty="0">
                           <a:solidFill>
                             <a:srgbClr val="E10600"/>
                           </a:solidFill>
@@ -15586,7 +15673,7 @@
                         <a:buNone/>
                       </a:pPr>
                       <a:r>
-                        <a:rPr lang="en-US" sz="1100" b="0" dirty="0">
+                        <a:rPr lang="en-US" sz="1000" b="0" dirty="0">
                           <a:solidFill>
                             <a:srgbClr val="1A1A1A"/>
                           </a:solidFill>
@@ -15646,7 +15733,7 @@
                         <a:buNone/>
                       </a:pPr>
                       <a:r>
-                        <a:rPr lang="en-US" sz="1100" b="0" dirty="0">
+                        <a:rPr lang="en-US" sz="1000" b="0" dirty="0">
                           <a:solidFill>
                             <a:srgbClr val="1A1A1A"/>
                           </a:solidFill>
@@ -15698,7 +15785,7 @@
                   </a:tcPr>
                 </a:tc>
               </a:tr>
-              <a:tr h="640080">
+              <a:tr h="548640">
                 <a:tc>
                   <a:txBody>
                     <a:bodyPr/>
@@ -15708,7 +15795,7 @@
                         <a:buNone/>
                       </a:pPr>
                       <a:r>
-                        <a:rPr lang="en-US" sz="1100" b="1" dirty="0">
+                        <a:rPr lang="en-US" sz="1000" b="1" dirty="0">
                           <a:solidFill>
                             <a:srgbClr val="1A1A1A"/>
                           </a:solidFill>
@@ -15768,7 +15855,7 @@
                         <a:buNone/>
                       </a:pPr>
                       <a:r>
-                        <a:rPr lang="en-US" sz="1100" b="0" dirty="0">
+                        <a:rPr lang="en-US" sz="1000" b="0" dirty="0">
                           <a:solidFill>
                             <a:srgbClr val="6B6B6B"/>
                           </a:solidFill>
@@ -15828,7 +15915,7 @@
                         <a:buNone/>
                       </a:pPr>
                       <a:r>
-                        <a:rPr lang="en-US" sz="1100" b="0" dirty="0">
+                        <a:rPr lang="en-US" sz="1000" b="0" dirty="0">
                           <a:solidFill>
                             <a:srgbClr val="6B6B6B"/>
                           </a:solidFill>
@@ -15841,7 +15928,7 @@
                         <a:buNone/>
                       </a:pPr>
                       <a:r>
-                        <a:rPr lang="en-US" sz="1100" b="0" dirty="0">
+                        <a:rPr lang="en-US" sz="1000" b="0" dirty="0">
                           <a:solidFill>
                             <a:srgbClr val="6B6B6B"/>
                           </a:solidFill>
@@ -15901,7 +15988,7 @@
                         <a:buNone/>
                       </a:pPr>
                       <a:r>
-                        <a:rPr lang="en-US" sz="1100" b="0" dirty="0">
+                        <a:rPr lang="en-US" sz="1000" b="0" dirty="0">
                           <a:solidFill>
                             <a:srgbClr val="6B6B6B"/>
                           </a:solidFill>
@@ -15914,7 +16001,7 @@
                         <a:buNone/>
                       </a:pPr>
                       <a:r>
-                        <a:rPr lang="en-US" sz="1100" b="0" dirty="0">
+                        <a:rPr lang="en-US" sz="1000" b="0" dirty="0">
                           <a:solidFill>
                             <a:srgbClr val="6B6B6B"/>
                           </a:solidFill>
@@ -15974,7 +16061,7 @@
                         <a:buNone/>
                       </a:pPr>
                       <a:r>
-                        <a:rPr lang="en-US" sz="1100" b="1" dirty="0">
+                        <a:rPr lang="en-US" sz="1000" b="1" dirty="0">
                           <a:solidFill>
                             <a:srgbClr val="E10600"/>
                           </a:solidFill>
@@ -15987,7 +16074,7 @@
                         <a:buNone/>
                       </a:pPr>
                       <a:r>
-                        <a:rPr lang="en-US" sz="1100" b="1" dirty="0">
+                        <a:rPr lang="en-US" sz="1000" b="1" dirty="0">
                           <a:solidFill>
                             <a:srgbClr val="E10600"/>
                           </a:solidFill>
@@ -16047,7 +16134,7 @@
                         <a:buNone/>
                       </a:pPr>
                       <a:r>
-                        <a:rPr lang="en-US" sz="1100" b="1" dirty="0">
+                        <a:rPr lang="en-US" sz="1000" b="1" dirty="0">
                           <a:solidFill>
                             <a:srgbClr val="E10600"/>
                           </a:solidFill>
@@ -16060,7 +16147,7 @@
                         <a:buNone/>
                       </a:pPr>
                       <a:r>
-                        <a:rPr lang="en-US" sz="1100" b="1" dirty="0">
+                        <a:rPr lang="en-US" sz="1000" b="1" dirty="0">
                           <a:solidFill>
                             <a:srgbClr val="E10600"/>
                           </a:solidFill>
@@ -16120,7 +16207,7 @@
                         <a:buNone/>
                       </a:pPr>
                       <a:r>
-                        <a:rPr lang="en-US" sz="1100" b="0" dirty="0">
+                        <a:rPr lang="en-US" sz="1000" b="0" dirty="0">
                           <a:solidFill>
                             <a:srgbClr val="6B6B6B"/>
                           </a:solidFill>
@@ -16180,7 +16267,7 @@
                         <a:buNone/>
                       </a:pPr>
                       <a:r>
-                        <a:rPr lang="en-US" sz="1100" b="0" dirty="0">
+                        <a:rPr lang="en-US" sz="1000" b="0" dirty="0">
                           <a:solidFill>
                             <a:srgbClr val="6B6B6B"/>
                           </a:solidFill>
@@ -16232,7 +16319,7 @@
                   </a:tcPr>
                 </a:tc>
               </a:tr>
-              <a:tr h="640080">
+              <a:tr h="548640">
                 <a:tc>
                   <a:txBody>
                     <a:bodyPr/>
@@ -16242,7 +16329,7 @@
                         <a:buNone/>
                       </a:pPr>
                       <a:r>
-                        <a:rPr lang="en-US" sz="1100" b="1" dirty="0">
+                        <a:rPr lang="en-US" sz="1000" b="1" dirty="0">
                           <a:solidFill>
                             <a:srgbClr val="1A1A1A"/>
                           </a:solidFill>
@@ -16302,7 +16389,7 @@
                         <a:buNone/>
                       </a:pPr>
                       <a:r>
-                        <a:rPr lang="en-US" sz="1100" dirty="0" b="0">
+                        <a:rPr lang="en-US" sz="1000" dirty="0" b="0">
                           <a:solidFill>
                             <a:srgbClr val="6B6B6B"/>
                           </a:solidFill>
@@ -16362,7 +16449,7 @@
                         <a:buNone/>
                       </a:pPr>
                       <a:r>
-                        <a:rPr lang="en-US" sz="1100" dirty="0" b="0">
+                        <a:rPr lang="en-US" sz="1000" dirty="0" b="0">
                           <a:solidFill>
                             <a:srgbClr val="6B6B6B"/>
                           </a:solidFill>
@@ -16375,7 +16462,7 @@
                         <a:buNone/>
                       </a:pPr>
                       <a:r>
-                        <a:rPr lang="en-US" sz="1100" dirty="0" b="0">
+                        <a:rPr lang="en-US" sz="1000" dirty="0" b="0">
                           <a:solidFill>
                             <a:srgbClr val="6B6B6B"/>
                           </a:solidFill>
@@ -16435,7 +16522,7 @@
                         <a:buNone/>
                       </a:pPr>
                       <a:r>
-                        <a:rPr lang="en-US" sz="1100" dirty="0" b="0">
+                        <a:rPr lang="en-US" sz="1000" dirty="0" b="0">
                           <a:solidFill>
                             <a:srgbClr val="6B6B6B"/>
                           </a:solidFill>
@@ -16495,7 +16582,7 @@
                         <a:buNone/>
                       </a:pPr>
                       <a:r>
-                        <a:rPr lang="en-US" sz="1100" dirty="0" b="0">
+                        <a:rPr lang="en-US" sz="1000" dirty="0" b="0">
                           <a:solidFill>
                             <a:srgbClr val="6B6B6B"/>
                           </a:solidFill>
@@ -16508,7 +16595,7 @@
                         <a:buNone/>
                       </a:pPr>
                       <a:r>
-                        <a:rPr lang="en-US" sz="1100" dirty="0" b="0">
+                        <a:rPr lang="en-US" sz="1000" dirty="0" b="0">
                           <a:solidFill>
                             <a:srgbClr val="6B6B6B"/>
                           </a:solidFill>
@@ -16568,7 +16655,7 @@
                         <a:buNone/>
                       </a:pPr>
                       <a:r>
-                        <a:rPr lang="en-US" sz="1100" dirty="0" b="1">
+                        <a:rPr lang="en-US" sz="1000" dirty="0" b="1">
                           <a:solidFill>
                             <a:srgbClr val="E10600"/>
                           </a:solidFill>
@@ -16581,7 +16668,7 @@
                         <a:buNone/>
                       </a:pPr>
                       <a:r>
-                        <a:rPr lang="en-US" sz="1100" dirty="0" b="1">
+                        <a:rPr lang="en-US" sz="1000" dirty="0" b="1">
                           <a:solidFill>
                             <a:srgbClr val="E10600"/>
                           </a:solidFill>
@@ -16641,7 +16728,7 @@
                         <a:buNone/>
                       </a:pPr>
                       <a:r>
-                        <a:rPr lang="en-US" sz="1100" dirty="0" b="0">
+                        <a:rPr lang="en-US" sz="1000" dirty="0" b="0">
                           <a:solidFill>
                             <a:srgbClr val="6B6B6B"/>
                           </a:solidFill>
@@ -16701,7 +16788,7 @@
                         <a:buNone/>
                       </a:pPr>
                       <a:r>
-                        <a:rPr lang="en-US" sz="1100" dirty="0" b="0">
+                        <a:rPr lang="en-US" sz="1000" dirty="0" b="0">
                           <a:solidFill>
                             <a:srgbClr val="6B6B6B"/>
                           </a:solidFill>
@@ -16753,7 +16840,7 @@
                   </a:tcPr>
                 </a:tc>
               </a:tr>
-              <a:tr h="640080">
+              <a:tr h="548640">
                 <a:tc>
                   <a:txBody>
                     <a:bodyPr/>
@@ -16763,7 +16850,529 @@
                         <a:buNone/>
                       </a:pPr>
                       <a:r>
-                        <a:rPr lang="en-US" sz="1100" b="1" dirty="0">
+                        <a:rPr lang="en-US" sz="1000" b="1" dirty="0">
+                          <a:solidFill>
+                            <a:srgbClr val="1A1A1A"/>
+                          </a:solidFill>
+                        </a:rPr>
+                        <a:t>시즌을 바꿔도 빠른가</a:t>
+                      </a:r>
+                    </a:p>
+                  </a:txBody>
+                  <a:tcPr marL="91440" marR="91440" marT="45720" marB="45720" anchor="ctr">
+                    <a:lnL w="9525" cap="flat" cmpd="sng" algn="ctr">
+                      <a:solidFill>
+                        <a:srgbClr val="E5E5E5"/>
+                      </a:solidFill>
+                      <a:prstDash val="solid"/>
+                      <a:round/>
+                      <a:headEnd type="none" w="med" len="med"/>
+                      <a:tailEnd type="none" w="med" len="med"/>
+                    </a:lnL>
+                    <a:lnR w="9525" cap="flat" cmpd="sng" algn="ctr">
+                      <a:solidFill>
+                        <a:srgbClr val="E5E5E5"/>
+                      </a:solidFill>
+                      <a:prstDash val="solid"/>
+                      <a:round/>
+                      <a:headEnd type="none" w="med" len="med"/>
+                      <a:tailEnd type="none" w="med" len="med"/>
+                    </a:lnR>
+                    <a:lnT w="9525" cap="flat" cmpd="sng" algn="ctr">
+                      <a:solidFill>
+                        <a:srgbClr val="E5E5E5"/>
+                      </a:solidFill>
+                      <a:prstDash val="solid"/>
+                      <a:round/>
+                      <a:headEnd type="none" w="med" len="med"/>
+                      <a:tailEnd type="none" w="med" len="med"/>
+                    </a:lnT>
+                    <a:lnB w="9525" cap="flat" cmpd="sng" algn="ctr">
+                      <a:solidFill>
+                        <a:srgbClr val="E5E5E5"/>
+                      </a:solidFill>
+                      <a:prstDash val="solid"/>
+                      <a:round/>
+                      <a:headEnd type="none" w="med" len="med"/>
+                      <a:tailEnd type="none" w="med" len="med"/>
+                    </a:lnB>
+                    <a:solidFill>
+                      <a:srgbClr val="F4F4F4"/>
+                    </a:solidFill>
+                  </a:tcPr>
+                </a:tc>
+                <a:tc>
+                  <a:txBody>
+                    <a:bodyPr/>
+                    <a:lstStyle/>
+                    <a:p>
+                      <a:pPr algn="l" indent="0" marL="0">
+                        <a:buNone/>
+                      </a:pPr>
+                      <a:r>
+                        <a:rPr lang="en-US" sz="1000" dirty="0" b="0">
+                          <a:solidFill>
+                            <a:srgbClr val="6B6B6B"/>
+                          </a:solidFill>
+                        </a:rPr>
+                        <a:t>—</a:t>
+                      </a:r>
+                    </a:p>
+                  </a:txBody>
+                  <a:tcPr marL="91440" marR="91440" marT="45720" marB="45720" anchor="ctr">
+                    <a:lnL w="9525" cap="flat" cmpd="sng" algn="ctr">
+                      <a:solidFill>
+                        <a:srgbClr val="E5E5E5"/>
+                      </a:solidFill>
+                      <a:prstDash val="solid"/>
+                      <a:round/>
+                      <a:headEnd type="none" w="med" len="med"/>
+                      <a:tailEnd type="none" w="med" len="med"/>
+                    </a:lnL>
+                    <a:lnR w="9525" cap="flat" cmpd="sng" algn="ctr">
+                      <a:solidFill>
+                        <a:srgbClr val="E5E5E5"/>
+                      </a:solidFill>
+                      <a:prstDash val="solid"/>
+                      <a:round/>
+                      <a:headEnd type="none" w="med" len="med"/>
+                      <a:tailEnd type="none" w="med" len="med"/>
+                    </a:lnR>
+                    <a:lnT w="9525" cap="flat" cmpd="sng" algn="ctr">
+                      <a:solidFill>
+                        <a:srgbClr val="E5E5E5"/>
+                      </a:solidFill>
+                      <a:prstDash val="solid"/>
+                      <a:round/>
+                      <a:headEnd type="none" w="med" len="med"/>
+                      <a:tailEnd type="none" w="med" len="med"/>
+                    </a:lnT>
+                    <a:lnB w="9525" cap="flat" cmpd="sng" algn="ctr">
+                      <a:solidFill>
+                        <a:srgbClr val="E5E5E5"/>
+                      </a:solidFill>
+                      <a:prstDash val="solid"/>
+                      <a:round/>
+                      <a:headEnd type="none" w="med" len="med"/>
+                      <a:tailEnd type="none" w="med" len="med"/>
+                    </a:lnB>
+                    <a:solidFill>
+                      <a:srgbClr val="F4F4F4"/>
+                    </a:solidFill>
+                  </a:tcPr>
+                </a:tc>
+                <a:tc>
+                  <a:txBody>
+                    <a:bodyPr/>
+                    <a:lstStyle/>
+                    <a:p>
+                      <a:pPr algn="l" indent="0" marL="0">
+                        <a:buNone/>
+                      </a:pPr>
+                      <a:r>
+                        <a:rPr lang="en-US" sz="1000" dirty="0" b="0">
+                          <a:solidFill>
+                            <a:srgbClr val="6B6B6B"/>
+                          </a:solidFill>
+                        </a:rPr>
+                        <a:t>시즌별 동료 비교</a:t>
+                      </a:r>
+                    </a:p>
+                    <a:p>
+                      <a:pPr algn="l" indent="0" marL="0">
+                        <a:buNone/>
+                      </a:pPr>
+                      <a:r>
+                        <a:rPr lang="en-US" sz="1000" dirty="0" b="0">
+                          <a:solidFill>
+                            <a:srgbClr val="6B6B6B"/>
+                          </a:solidFill>
+                        </a:rPr>
+                        <a:t>2023~2026 재계산</a:t>
+                      </a:r>
+                    </a:p>
+                  </a:txBody>
+                  <a:tcPr marL="91440" marR="91440" marT="45720" marB="45720" anchor="ctr">
+                    <a:lnL w="9525" cap="flat" cmpd="sng" algn="ctr">
+                      <a:solidFill>
+                        <a:srgbClr val="E5E5E5"/>
+                      </a:solidFill>
+                      <a:prstDash val="solid"/>
+                      <a:round/>
+                      <a:headEnd type="none" w="med" len="med"/>
+                      <a:tailEnd type="none" w="med" len="med"/>
+                    </a:lnL>
+                    <a:lnR w="9525" cap="flat" cmpd="sng" algn="ctr">
+                      <a:solidFill>
+                        <a:srgbClr val="E5E5E5"/>
+                      </a:solidFill>
+                      <a:prstDash val="solid"/>
+                      <a:round/>
+                      <a:headEnd type="none" w="med" len="med"/>
+                      <a:tailEnd type="none" w="med" len="med"/>
+                    </a:lnR>
+                    <a:lnT w="9525" cap="flat" cmpd="sng" algn="ctr">
+                      <a:solidFill>
+                        <a:srgbClr val="E5E5E5"/>
+                      </a:solidFill>
+                      <a:prstDash val="solid"/>
+                      <a:round/>
+                      <a:headEnd type="none" w="med" len="med"/>
+                      <a:tailEnd type="none" w="med" len="med"/>
+                    </a:lnT>
+                    <a:lnB w="9525" cap="flat" cmpd="sng" algn="ctr">
+                      <a:solidFill>
+                        <a:srgbClr val="E5E5E5"/>
+                      </a:solidFill>
+                      <a:prstDash val="solid"/>
+                      <a:round/>
+                      <a:headEnd type="none" w="med" len="med"/>
+                      <a:tailEnd type="none" w="med" len="med"/>
+                    </a:lnB>
+                    <a:solidFill>
+                      <a:srgbClr val="F4F4F4"/>
+                    </a:solidFill>
+                  </a:tcPr>
+                </a:tc>
+                <a:tc>
+                  <a:txBody>
+                    <a:bodyPr/>
+                    <a:lstStyle/>
+                    <a:p>
+                      <a:pPr algn="l" indent="0" marL="0">
+                        <a:buNone/>
+                      </a:pPr>
+                      <a:r>
+                        <a:rPr lang="en-US" sz="1000" dirty="0" b="0">
+                          <a:solidFill>
+                            <a:srgbClr val="6B6B6B"/>
+                          </a:solidFill>
+                        </a:rPr>
+                        <a:t>뚜렷하게 진
+시즌 없음</a:t>
+                      </a:r>
+                    </a:p>
+                  </a:txBody>
+                  <a:tcPr marL="91440" marR="91440" marT="45720" marB="45720" anchor="ctr">
+                    <a:lnL w="9525" cap="flat" cmpd="sng" algn="ctr">
+                      <a:solidFill>
+                        <a:srgbClr val="E5E5E5"/>
+                      </a:solidFill>
+                      <a:prstDash val="solid"/>
+                      <a:round/>
+                      <a:headEnd type="none" w="med" len="med"/>
+                      <a:tailEnd type="none" w="med" len="med"/>
+                    </a:lnL>
+                    <a:lnR w="9525" cap="flat" cmpd="sng" algn="ctr">
+                      <a:solidFill>
+                        <a:srgbClr val="E5E5E5"/>
+                      </a:solidFill>
+                      <a:prstDash val="solid"/>
+                      <a:round/>
+                      <a:headEnd type="none" w="med" len="med"/>
+                      <a:tailEnd type="none" w="med" len="med"/>
+                    </a:lnR>
+                    <a:lnT w="9525" cap="flat" cmpd="sng" algn="ctr">
+                      <a:solidFill>
+                        <a:srgbClr val="E5E5E5"/>
+                      </a:solidFill>
+                      <a:prstDash val="solid"/>
+                      <a:round/>
+                      <a:headEnd type="none" w="med" len="med"/>
+                      <a:tailEnd type="none" w="med" len="med"/>
+                    </a:lnT>
+                    <a:lnB w="9525" cap="flat" cmpd="sng" algn="ctr">
+                      <a:solidFill>
+                        <a:srgbClr val="E5E5E5"/>
+                      </a:solidFill>
+                      <a:prstDash val="solid"/>
+                      <a:round/>
+                      <a:headEnd type="none" w="med" len="med"/>
+                      <a:tailEnd type="none" w="med" len="med"/>
+                    </a:lnB>
+                    <a:solidFill>
+                      <a:srgbClr val="F4F4F4"/>
+                    </a:solidFill>
+                  </a:tcPr>
+                </a:tc>
+                <a:tc>
+                  <a:txBody>
+                    <a:bodyPr/>
+                    <a:lstStyle/>
+                    <a:p>
+                      <a:pPr algn="l" indent="0" marL="0">
+                        <a:buNone/>
+                      </a:pPr>
+                      <a:r>
+                        <a:rPr lang="en-US" sz="1000" dirty="0" b="0">
+                          <a:solidFill>
+                            <a:srgbClr val="6B6B6B"/>
+                          </a:solidFill>
+                        </a:rPr>
+                        <a:t>미달 2023·2026</a:t>
+                      </a:r>
+                    </a:p>
+                    <a:p>
+                      <a:pPr algn="l" indent="0" marL="0">
+                        <a:buNone/>
+                      </a:pPr>
+                      <a:r>
+                        <a:rPr lang="en-US" sz="1000" dirty="0" b="0">
+                          <a:solidFill>
+                            <a:srgbClr val="6B6B6B"/>
+                          </a:solidFill>
+                        </a:rPr>
+                        <a:t>뚜렷하게 짐</a:t>
+                      </a:r>
+                    </a:p>
+                  </a:txBody>
+                  <a:tcPr marL="91440" marR="91440" marT="45720" marB="45720" anchor="ctr">
+                    <a:lnL w="9525" cap="flat" cmpd="sng" algn="ctr">
+                      <a:solidFill>
+                        <a:srgbClr val="E5E5E5"/>
+                      </a:solidFill>
+                      <a:prstDash val="solid"/>
+                      <a:round/>
+                      <a:headEnd type="none" w="med" len="med"/>
+                      <a:tailEnd type="none" w="med" len="med"/>
+                    </a:lnL>
+                    <a:lnR w="9525" cap="flat" cmpd="sng" algn="ctr">
+                      <a:solidFill>
+                        <a:srgbClr val="E5E5E5"/>
+                      </a:solidFill>
+                      <a:prstDash val="solid"/>
+                      <a:round/>
+                      <a:headEnd type="none" w="med" len="med"/>
+                      <a:tailEnd type="none" w="med" len="med"/>
+                    </a:lnR>
+                    <a:lnT w="9525" cap="flat" cmpd="sng" algn="ctr">
+                      <a:solidFill>
+                        <a:srgbClr val="E5E5E5"/>
+                      </a:solidFill>
+                      <a:prstDash val="solid"/>
+                      <a:round/>
+                      <a:headEnd type="none" w="med" len="med"/>
+                      <a:tailEnd type="none" w="med" len="med"/>
+                    </a:lnT>
+                    <a:lnB w="9525" cap="flat" cmpd="sng" algn="ctr">
+                      <a:solidFill>
+                        <a:srgbClr val="E5E5E5"/>
+                      </a:solidFill>
+                      <a:prstDash val="solid"/>
+                      <a:round/>
+                      <a:headEnd type="none" w="med" len="med"/>
+                      <a:tailEnd type="none" w="med" len="med"/>
+                    </a:lnB>
+                    <a:solidFill>
+                      <a:srgbClr val="F4F4F4"/>
+                    </a:solidFill>
+                  </a:tcPr>
+                </a:tc>
+                <a:tc>
+                  <a:txBody>
+                    <a:bodyPr/>
+                    <a:lstStyle/>
+                    <a:p>
+                      <a:pPr algn="l" indent="0" marL="0">
+                        <a:buNone/>
+                      </a:pPr>
+                      <a:r>
+                        <a:rPr lang="en-US" sz="1000" dirty="0" b="1">
+                          <a:solidFill>
+                            <a:srgbClr val="E10600"/>
+                          </a:solidFill>
+                        </a:rPr>
+                        <a:t>통과 진 시즌 0</a:t>
+                      </a:r>
+                    </a:p>
+                    <a:p>
+                      <a:pPr algn="l" indent="0" marL="0">
+                        <a:buNone/>
+                      </a:pPr>
+                      <a:r>
+                        <a:rPr lang="en-US" sz="1000" dirty="0" b="1">
+                          <a:solidFill>
+                            <a:srgbClr val="E10600"/>
+                          </a:solidFill>
+                        </a:rPr>
+                        <a:t>2023~26</a:t>
+                      </a:r>
+                    </a:p>
+                  </a:txBody>
+                  <a:tcPr marL="91440" marR="91440" marT="45720" marB="45720" anchor="ctr">
+                    <a:lnL w="9525" cap="flat" cmpd="sng" algn="ctr">
+                      <a:solidFill>
+                        <a:srgbClr val="E5E5E5"/>
+                      </a:solidFill>
+                      <a:prstDash val="solid"/>
+                      <a:round/>
+                      <a:headEnd type="none" w="med" len="med"/>
+                      <a:tailEnd type="none" w="med" len="med"/>
+                    </a:lnL>
+                    <a:lnR w="9525" cap="flat" cmpd="sng" algn="ctr">
+                      <a:solidFill>
+                        <a:srgbClr val="E5E5E5"/>
+                      </a:solidFill>
+                      <a:prstDash val="solid"/>
+                      <a:round/>
+                      <a:headEnd type="none" w="med" len="med"/>
+                      <a:tailEnd type="none" w="med" len="med"/>
+                    </a:lnR>
+                    <a:lnT w="9525" cap="flat" cmpd="sng" algn="ctr">
+                      <a:solidFill>
+                        <a:srgbClr val="E5E5E5"/>
+                      </a:solidFill>
+                      <a:prstDash val="solid"/>
+                      <a:round/>
+                      <a:headEnd type="none" w="med" len="med"/>
+                      <a:tailEnd type="none" w="med" len="med"/>
+                    </a:lnT>
+                    <a:lnB w="9525" cap="flat" cmpd="sng" algn="ctr">
+                      <a:solidFill>
+                        <a:srgbClr val="E5E5E5"/>
+                      </a:solidFill>
+                      <a:prstDash val="solid"/>
+                      <a:round/>
+                      <a:headEnd type="none" w="med" len="med"/>
+                      <a:tailEnd type="none" w="med" len="med"/>
+                    </a:lnB>
+                    <a:solidFill>
+                      <a:srgbClr val="F4F4F4"/>
+                    </a:solidFill>
+                  </a:tcPr>
+                </a:tc>
+                <a:tc>
+                  <a:txBody>
+                    <a:bodyPr/>
+                    <a:lstStyle/>
+                    <a:p>
+                      <a:pPr algn="l" indent="0" marL="0">
+                        <a:buNone/>
+                      </a:pPr>
+                      <a:r>
+                        <a:rPr lang="en-US" sz="1000" dirty="0" b="0">
+                          <a:solidFill>
+                            <a:srgbClr val="6B6B6B"/>
+                          </a:solidFill>
+                        </a:rPr>
+                        <a:t>—</a:t>
+                      </a:r>
+                    </a:p>
+                  </a:txBody>
+                  <a:tcPr marL="91440" marR="91440" marT="45720" marB="45720" anchor="ctr">
+                    <a:lnL w="9525" cap="flat" cmpd="sng" algn="ctr">
+                      <a:solidFill>
+                        <a:srgbClr val="E5E5E5"/>
+                      </a:solidFill>
+                      <a:prstDash val="solid"/>
+                      <a:round/>
+                      <a:headEnd type="none" w="med" len="med"/>
+                      <a:tailEnd type="none" w="med" len="med"/>
+                    </a:lnL>
+                    <a:lnR w="9525" cap="flat" cmpd="sng" algn="ctr">
+                      <a:solidFill>
+                        <a:srgbClr val="E5E5E5"/>
+                      </a:solidFill>
+                      <a:prstDash val="solid"/>
+                      <a:round/>
+                      <a:headEnd type="none" w="med" len="med"/>
+                      <a:tailEnd type="none" w="med" len="med"/>
+                    </a:lnR>
+                    <a:lnT w="9525" cap="flat" cmpd="sng" algn="ctr">
+                      <a:solidFill>
+                        <a:srgbClr val="E5E5E5"/>
+                      </a:solidFill>
+                      <a:prstDash val="solid"/>
+                      <a:round/>
+                      <a:headEnd type="none" w="med" len="med"/>
+                      <a:tailEnd type="none" w="med" len="med"/>
+                    </a:lnT>
+                    <a:lnB w="9525" cap="flat" cmpd="sng" algn="ctr">
+                      <a:solidFill>
+                        <a:srgbClr val="E5E5E5"/>
+                      </a:solidFill>
+                      <a:prstDash val="solid"/>
+                      <a:round/>
+                      <a:headEnd type="none" w="med" len="med"/>
+                      <a:tailEnd type="none" w="med" len="med"/>
+                    </a:lnB>
+                    <a:solidFill>
+                      <a:srgbClr val="F4F4F4"/>
+                    </a:solidFill>
+                  </a:tcPr>
+                </a:tc>
+                <a:tc>
+                  <a:txBody>
+                    <a:bodyPr/>
+                    <a:lstStyle/>
+                    <a:p>
+                      <a:pPr algn="l" indent="0" marL="0">
+                        <a:buNone/>
+                      </a:pPr>
+                      <a:r>
+                        <a:rPr lang="en-US" sz="1000" dirty="0" b="0">
+                          <a:solidFill>
+                            <a:srgbClr val="6B6B6B"/>
+                          </a:solidFill>
+                        </a:rPr>
+                        <a:t>—</a:t>
+                      </a:r>
+                    </a:p>
+                  </a:txBody>
+                  <a:tcPr marL="91440" marR="91440" marT="45720" marB="45720" anchor="ctr">
+                    <a:lnL w="9525" cap="flat" cmpd="sng" algn="ctr">
+                      <a:solidFill>
+                        <a:srgbClr val="E5E5E5"/>
+                      </a:solidFill>
+                      <a:prstDash val="solid"/>
+                      <a:round/>
+                      <a:headEnd type="none" w="med" len="med"/>
+                      <a:tailEnd type="none" w="med" len="med"/>
+                    </a:lnL>
+                    <a:lnR w="9525" cap="flat" cmpd="sng" algn="ctr">
+                      <a:solidFill>
+                        <a:srgbClr val="E5E5E5"/>
+                      </a:solidFill>
+                      <a:prstDash val="solid"/>
+                      <a:round/>
+                      <a:headEnd type="none" w="med" len="med"/>
+                      <a:tailEnd type="none" w="med" len="med"/>
+                    </a:lnR>
+                    <a:lnT w="9525" cap="flat" cmpd="sng" algn="ctr">
+                      <a:solidFill>
+                        <a:srgbClr val="E5E5E5"/>
+                      </a:solidFill>
+                      <a:prstDash val="solid"/>
+                      <a:round/>
+                      <a:headEnd type="none" w="med" len="med"/>
+                      <a:tailEnd type="none" w="med" len="med"/>
+                    </a:lnT>
+                    <a:lnB w="9525" cap="flat" cmpd="sng" algn="ctr">
+                      <a:solidFill>
+                        <a:srgbClr val="E5E5E5"/>
+                      </a:solidFill>
+                      <a:prstDash val="solid"/>
+                      <a:round/>
+                      <a:headEnd type="none" w="med" len="med"/>
+                      <a:tailEnd type="none" w="med" len="med"/>
+                    </a:lnB>
+                    <a:solidFill>
+                      <a:srgbClr val="F4F4F4"/>
+                    </a:solidFill>
+                  </a:tcPr>
+                </a:tc>
+              </a:tr>
+              <a:tr h="548640">
+                <a:tc>
+                  <a:txBody>
+                    <a:bodyPr/>
+                    <a:lstStyle/>
+                    <a:p>
+                      <a:pPr algn="l" indent="0" marL="0">
+                        <a:buNone/>
+                      </a:pPr>
+                      <a:r>
+                        <a:rPr lang="en-US" sz="1000" b="1" dirty="0">
                           <a:solidFill>
                             <a:srgbClr val="1A1A1A"/>
                           </a:solidFill>
@@ -16776,7 +17385,7 @@
                         <a:buNone/>
                       </a:pPr>
                       <a:r>
-                        <a:rPr lang="en-US" sz="1100" b="1" dirty="0">
+                        <a:rPr lang="en-US" sz="1000" b="1" dirty="0">
                           <a:solidFill>
                             <a:srgbClr val="1A1A1A"/>
                           </a:solidFill>
@@ -16836,7 +17445,7 @@
                         <a:buNone/>
                       </a:pPr>
                       <a:r>
-                        <a:rPr lang="en-US" sz="1100" dirty="0" b="0">
+                        <a:rPr lang="en-US" sz="1000" dirty="0" b="0">
                           <a:solidFill>
                             <a:srgbClr val="6B6B6B"/>
                           </a:solidFill>
@@ -16896,7 +17505,7 @@
                         <a:buNone/>
                       </a:pPr>
                       <a:r>
-                        <a:rPr lang="en-US" sz="1100" dirty="0" b="0">
+                        <a:rPr lang="en-US" sz="1000" dirty="0" b="0">
                           <a:solidFill>
                             <a:srgbClr val="6B6B6B"/>
                           </a:solidFill>
@@ -16909,7 +17518,7 @@
                         <a:buNone/>
                       </a:pPr>
                       <a:r>
-                        <a:rPr lang="en-US" sz="1100" dirty="0" b="0">
+                        <a:rPr lang="en-US" sz="1000" dirty="0" b="0">
                           <a:solidFill>
                             <a:srgbClr val="6B6B6B"/>
                           </a:solidFill>
@@ -16969,7 +17578,7 @@
                         <a:buNone/>
                       </a:pPr>
                       <a:r>
-                        <a:rPr lang="en-US" sz="1100" dirty="0" b="0">
+                        <a:rPr lang="en-US" sz="1000" dirty="0" b="0">
                           <a:solidFill>
                             <a:srgbClr val="6B6B6B"/>
                           </a:solidFill>
@@ -16982,7 +17591,7 @@
                         <a:buNone/>
                       </a:pPr>
                       <a:r>
-                        <a:rPr lang="en-US" sz="1100" dirty="0" b="0">
+                        <a:rPr lang="en-US" sz="1000" dirty="0" b="0">
                           <a:solidFill>
                             <a:srgbClr val="6B6B6B"/>
                           </a:solidFill>
@@ -17042,7 +17651,7 @@
                         <a:buNone/>
                       </a:pPr>
                       <a:r>
-                        <a:rPr lang="en-US" sz="1100" dirty="0" b="0">
+                        <a:rPr lang="en-US" sz="1000" dirty="0" b="0">
                           <a:solidFill>
                             <a:srgbClr val="1A1A1A"/>
                           </a:solidFill>
@@ -17055,7 +17664,7 @@
                         <a:buNone/>
                       </a:pPr>
                       <a:r>
-                        <a:rPr lang="en-US" sz="1100" dirty="0" b="0">
+                        <a:rPr lang="en-US" sz="1000" dirty="0" b="0">
                           <a:solidFill>
                             <a:srgbClr val="1A1A1A"/>
                           </a:solidFill>
@@ -17115,7 +17724,7 @@
                         <a:buNone/>
                       </a:pPr>
                       <a:r>
-                        <a:rPr lang="en-US" sz="1100" dirty="0" b="0">
+                        <a:rPr lang="en-US" sz="1000" dirty="0" b="0">
                           <a:solidFill>
                             <a:srgbClr val="1A1A1A"/>
                           </a:solidFill>
@@ -17128,7 +17737,7 @@
                         <a:buNone/>
                       </a:pPr>
                       <a:r>
-                        <a:rPr lang="en-US" sz="1100" dirty="0" b="0">
+                        <a:rPr lang="en-US" sz="1000" dirty="0" b="0">
                           <a:solidFill>
                             <a:srgbClr val="1A1A1A"/>
                           </a:solidFill>
@@ -17188,7 +17797,7 @@
                         <a:buNone/>
                       </a:pPr>
                       <a:r>
-                        <a:rPr lang="en-US" sz="1100" dirty="0" b="0">
+                        <a:rPr lang="en-US" sz="1000" dirty="0" b="0">
                           <a:solidFill>
                             <a:srgbClr val="1A1A1A"/>
                           </a:solidFill>
@@ -17248,7 +17857,7 @@
                         <a:buNone/>
                       </a:pPr>
                       <a:r>
-                        <a:rPr lang="en-US" sz="1100" dirty="0" b="0">
+                        <a:rPr lang="en-US" sz="1000" dirty="0" b="0">
                           <a:solidFill>
                             <a:srgbClr val="1A1A1A"/>
                           </a:solidFill>
@@ -17300,7 +17909,7 @@
                   </a:tcPr>
                 </a:tc>
               </a:tr>
-              <a:tr h="640080">
+              <a:tr h="548640">
                 <a:tc>
                   <a:txBody>
                     <a:bodyPr/>
@@ -17310,7 +17919,7 @@
                         <a:buNone/>
                       </a:pPr>
                       <a:r>
-                        <a:rPr lang="en-US" sz="1100" b="1" dirty="0">
+                        <a:rPr lang="en-US" sz="1000" b="1" dirty="0">
                           <a:solidFill>
                             <a:srgbClr val="1A1A1A"/>
                           </a:solidFill>
@@ -17370,12 +17979,12 @@
                         <a:buNone/>
                       </a:pPr>
                       <a:r>
-                        <a:rPr lang="en-US" sz="1100" dirty="0" b="0">
+                        <a:rPr lang="en-US" sz="1000" dirty="0" b="0">
                           <a:solidFill>
                             <a:srgbClr val="6B6B6B"/>
                           </a:solidFill>
                         </a:rPr>
-                        <a:t>아니오</a:t>
+                        <a:t>아니오 ·</a:t>
                       </a:r>
                     </a:p>
                     <a:p>
@@ -17383,7 +17992,7 @@
                         <a:buNone/>
                       </a:pPr>
                       <a:r>
-                        <a:rPr lang="en-US" sz="1100" dirty="0" b="0">
+                        <a:rPr lang="en-US" sz="1000" dirty="0" b="0">
                           <a:solidFill>
                             <a:srgbClr val="6B6B6B"/>
                           </a:solidFill>
@@ -17443,7 +18052,7 @@
                         <a:buNone/>
                       </a:pPr>
                       <a:r>
-                        <a:rPr lang="en-US" sz="1100" dirty="0" b="0">
+                        <a:rPr lang="en-US" sz="1000" dirty="0" b="0">
                           <a:solidFill>
                             <a:srgbClr val="6B6B6B"/>
                           </a:solidFill>
@@ -17503,7 +18112,7 @@
                         <a:buNone/>
                       </a:pPr>
                       <a:r>
-                        <a:rPr lang="en-US" sz="1100" dirty="0" b="0">
+                        <a:rPr lang="en-US" sz="1000" dirty="0" b="0">
                           <a:solidFill>
                             <a:srgbClr val="6B6B6B"/>
                           </a:solidFill>
@@ -17563,7 +18172,7 @@
                         <a:buNone/>
                       </a:pPr>
                       <a:r>
-                        <a:rPr lang="en-US" sz="1100" dirty="0" b="0">
+                        <a:rPr lang="en-US" sz="1000" dirty="0" b="0">
                           <a:solidFill>
                             <a:srgbClr val="6B6B6B"/>
                           </a:solidFill>
@@ -17623,7 +18232,7 @@
                         <a:buNone/>
                       </a:pPr>
                       <a:r>
-                        <a:rPr lang="en-US" sz="1100" dirty="0" b="0">
+                        <a:rPr lang="en-US" sz="1000" dirty="0" b="0">
                           <a:solidFill>
                             <a:srgbClr val="6B6B6B"/>
                           </a:solidFill>
@@ -17683,7 +18292,7 @@
                         <a:buNone/>
                       </a:pPr>
                       <a:r>
-                        <a:rPr lang="en-US" sz="1100" dirty="0" b="0">
+                        <a:rPr lang="en-US" sz="1000" dirty="0" b="0">
                           <a:solidFill>
                             <a:srgbClr val="6B6B6B"/>
                           </a:solidFill>
@@ -17743,7 +18352,7 @@
                         <a:buNone/>
                       </a:pPr>
                       <a:r>
-                        <a:rPr lang="en-US" sz="1100" dirty="0" b="0">
+                        <a:rPr lang="en-US" sz="1000" dirty="0" b="0">
                           <a:solidFill>
                             <a:srgbClr val="6B6B6B"/>
                           </a:solidFill>
@@ -17875,7 +18484,7 @@
                   <a:srgbClr val="1A1A1A"/>
                 </a:solidFill>
               </a:rPr>
-              <a:t>둘 다 페이스를 메운다 · 같은 자(HAMILTON)로 재면 LECLERC가 앞서 1순위 · 타이어 유지 차이는 오차 범위 안이라 확인 과제</a:t>
+              <a:t>둘 다 페이스를 메운다 · 같은 자(HAMILTON)·시즌별 재확인에서 버틴 것은 LECLERC · 타이어 유지 차이는 오차 범위 안이라 확인 과제</a:t>
             </a:r>
             <a:endParaRPr lang="en-US" sz="1400" dirty="0"/>
           </a:p>
@@ -18022,7 +18631,7 @@
                   <a:srgbClr val="FFFFFF"/>
                 </a:solidFill>
               </a:rPr>
-              <a:t>STROLL 자리에는 </a:t>
+              <a:t>STROLL 자리에는 Charles LECLERC를 우선 검토한다</a:t>
             </a:r>
             <a:pPr indent="0" marL="0">
               <a:buNone/>
@@ -18033,7 +18642,7 @@
                   <a:srgbClr val="E10600"/>
                 </a:solidFill>
               </a:rPr>
-              <a:t>Charles LECLERC</a:t>
+              <a:t/>
             </a:r>
             <a:pPr indent="0" marL="0">
               <a:buNone/>
@@ -18044,7 +18653,7 @@
                   <a:srgbClr val="FFFFFF"/>
                 </a:solidFill>
               </a:rPr>
-              <a:t>를 1순위로 검토한다</a:t>
+              <a:t/>
             </a:r>
             <a:endParaRPr lang="en-US" sz="3200" dirty="0"/>
           </a:p>
@@ -18080,7 +18689,7 @@
                   <a:srgbClr val="B5B5B5"/>
                 </a:solidFill>
               </a:rPr>
-              <a:t>2025 Aston Martin · 후보 19명을 같은 경기 비교와 같은 차(동료) 비교로 나눠 보고, 둘 다 모든 조건에서 반복된 선수만 남겼다</a:t>
+              <a:t>2025 Aston Martin · 후보 19명을 같은 경기 비교와 같은 차(동료) 비교로 나눠 보고, 둘 다 모든 조건에서 반복된 뒤 다른 시즌에서도 버틴 선수만 남겼다</a:t>
             </a:r>
             <a:endParaRPr lang="en-US" sz="1400" dirty="0"/>
           </a:p>
@@ -18147,7 +18756,7 @@
                   <a:srgbClr val="E10600"/>
                 </a:solidFill>
               </a:rPr>
-              <a:t>1순위 · LECLERC</a:t>
+              <a:t>우선 검토 · LECLERC</a:t>
             </a:r>
             <a:endParaRPr lang="en-US" sz="1300" dirty="0"/>
           </a:p>
@@ -18286,7 +18895,7 @@
                   <a:srgbClr val="D0D0D0"/>
                 </a:solidFill>
               </a:rPr>
-              <a:t>2순위 · RUSSELL</a:t>
+              <a:t>보류 · RUSSELL</a:t>
             </a:r>
             <a:endParaRPr lang="en-US" sz="1300" dirty="0"/>
           </a:p>
@@ -18358,7 +18967,7 @@
                   <a:srgbClr val="D0D0D0"/>
                 </a:solidFill>
               </a:rPr>
-              <a:t>같은 두 비교는 통과했지만 동료 우위가 신인 ANTONELLI 기준이고, HAMILTON 기준으로는 +0.037초(8/21경기)로 비슷하다.</a:t>
+              <a:t>같은 두 비교는 통과했지만 HAMILTON 기준으로는 +0.037초로 비슷하고, 2023·2026에는 동료에게 뚜렷하게 졌다.</a:t>
             </a:r>
             <a:endParaRPr lang="en-US" sz="1200" dirty="0"/>
           </a:p>
@@ -18596,7 +19205,7 @@
                   <a:srgbClr val="1A1A1A"/>
                 </a:solidFill>
               </a:rPr>
-              <a:t>결과: 우선 검토 후보는 LECLERC와 RUSSELL</a:t>
+              <a:t>결과: 우선 검토 후보는 LECLERC</a:t>
             </a:r>
             <a:endParaRPr lang="en-US" sz="2800" dirty="0"/>
           </a:p>
@@ -18901,7 +19510,7 @@
                   <a:srgbClr val="FFFFFF"/>
                 </a:solidFill>
               </a:rPr>
-              <a:t>2명</a:t>
+              <a:t>1명</a:t>
             </a:r>
             <a:endParaRPr lang="en-US" sz="2800" dirty="0"/>
           </a:p>
@@ -18937,7 +19546,7 @@
                   <a:srgbClr val="FFFFFF"/>
                 </a:solidFill>
               </a:rPr>
-              <a:t>같은 차 동료 비교까지 11/11</a:t>
+              <a:t>동료 11/11 2명 → 재확인</a:t>
             </a:r>
             <a:endParaRPr lang="en-US" sz="1100" dirty="0"/>
           </a:p>
@@ -19004,7 +19613,7 @@
                   <a:srgbClr val="E10600"/>
                 </a:solidFill>
               </a:rPr>
-              <a:t>1순위</a:t>
+              <a:t>우선 검토</a:t>
             </a:r>
             <a:endParaRPr lang="en-US" sz="1200" dirty="0"/>
           </a:p>
@@ -19436,7 +20045,7 @@
                   <a:srgbClr val="E10600"/>
                 </a:solidFill>
               </a:rPr>
-              <a:t>같은 자로 재도 우위 · 타이어는 확인 과제</a:t>
+              <a:t>같은 자·시즌 재확인 통과 · 타이어는 확인 과제</a:t>
             </a:r>
             <a:endParaRPr lang="en-US" sz="1200" dirty="0"/>
           </a:p>
@@ -19503,7 +20112,7 @@
                   <a:srgbClr val="E10600"/>
                 </a:solidFill>
               </a:rPr>
-              <a:t>2순위</a:t>
+              <a:t>보류</a:t>
             </a:r>
             <a:endParaRPr lang="en-US" sz="1200" dirty="0"/>
           </a:p>
@@ -19935,7 +20544,7 @@
                   <a:srgbClr val="6B6B6B"/>
                 </a:solidFill>
               </a:rPr>
-              <a:t>동료 우위가 신인 기준 · 같은 자로는 비슷</a:t>
+              <a:t>같은 자로는 비슷 · 2023·2026 동료에게 짐</a:t>
             </a:r>
             <a:endParaRPr lang="en-US" sz="1200" dirty="0"/>
           </a:p>
@@ -19982,7 +20591,7 @@
                   <a:srgbClr val="1A1A1A"/>
                 </a:solidFill>
               </a:rPr>
-              <a:t>LECLERC 1순위: 같은 자(HAMILTON)로 재도 앞선다 · RUSSELL은 동료 우위가 신인 기준이라 2순위 · 둘 다 확정이 아닌 우선 검토</a:t>
+              <a:t>LECLERC 우선 검토: 같은 자로 재도, 시즌을 바꿔도 앞선다 · RUSSELL은 2025에만 앞서 보류 · 확정이 아닌 우선 검토</a:t>
             </a:r>
             <a:endParaRPr lang="en-US" sz="1400" dirty="0"/>
           </a:p>
@@ -21321,7 +21930,7 @@
                   <a:srgbClr val="1A1A1A"/>
                 </a:solidFill>
               </a:rPr>
-              <a:t>빠르다는 사실만으로는 영입 근거가 되지 않는다 — 결론이 LECLERC·RUSSELL이 된 이유다</a:t>
+              <a:t>빠르다는 사실만으로는 영입 근거가 되지 않는다 — 결론이 LECLERC가 된 이유다</a:t>
             </a:r>
             <a:endParaRPr lang="en-US" sz="1400" dirty="0"/>
           </a:p>
@@ -21790,6 +22399,3214 @@
 
 <file path=ppt/slides/slide23.xml><?xml version="1.0" encoding="utf-8"?>
 <p:sld xmlns:a="http://schemas.openxmlformats.org/drawingml/2006/main" xmlns:r="http://schemas.openxmlformats.org/officeDocument/2006/relationships" xmlns:p="http://schemas.openxmlformats.org/presentationml/2006/main">
+  <p:cSld name="Slide 17">
+    <p:spTree>
+      <p:nvGrpSpPr>
+        <p:cNvPr id="1" name=""/>
+        <p:cNvGrpSpPr/>
+        <p:nvPr/>
+      </p:nvGrpSpPr>
+      <p:grpSpPr>
+        <a:xfrm>
+          <a:off x="0" y="0"/>
+          <a:ext cx="0" cy="0"/>
+          <a:chOff x="0" y="0"/>
+          <a:chExt cx="0" cy="0"/>
+        </a:xfrm>
+      </p:grpSpPr>
+      <p:sp>
+        <p:nvSpPr>
+          <p:cNvPr id="2" name="Text 0"/>
+          <p:cNvSpPr/>
+          <p:nvPr>
+            <p:ph idx="100" type="title" hasCustomPrompt="1"/>
+          </p:nvPr>
+        </p:nvSpPr>
+        <p:spPr>
+          <a:xfrm>
+            <a:off x="548640" y="365760"/>
+            <a:ext cx="11109960" cy="640080"/>
+          </a:xfrm>
+          <a:prstGeom prst="rect">
+            <a:avLst/>
+          </a:prstGeom>
+          <a:noFill/>
+          <a:ln/>
+        </p:spPr>
+        <p:txBody>
+          <a:bodyPr wrap="square" lIns="0" tIns="0" rIns="0" bIns="0" rtlCol="0" anchor="ctr"/>
+          <a:lstStyle/>
+          <a:p>
+            <a:pPr algn="l" indent="0" marL="0">
+              <a:buNone/>
+            </a:pPr>
+            <a:r>
+              <a:rPr lang="en-US" sz="2800" b="1" dirty="0">
+                <a:solidFill>
+                  <a:srgbClr val="1A1A1A"/>
+                </a:solidFill>
+              </a:rPr>
+              <a:t>교체해도 우승은 어렵다 — 현실적 목표는 팀 6위</a:t>
+            </a:r>
+            <a:endParaRPr lang="en-US" sz="2800" dirty="0"/>
+          </a:p>
+        </p:txBody>
+      </p:sp>
+      <p:sp>
+        <p:nvSpPr>
+          <p:cNvPr id="3" name="Text 0"/>
+          <p:cNvSpPr/>
+          <p:nvPr>
+            <p:ph idx="101" type="body" hasCustomPrompt="1"/>
+          </p:nvPr>
+        </p:nvSpPr>
+        <p:spPr>
+          <a:xfrm>
+            <a:off x="548640" y="1005840"/>
+            <a:ext cx="11109960" cy="365760"/>
+          </a:xfrm>
+          <a:prstGeom prst="rect">
+            <a:avLst/>
+          </a:prstGeom>
+          <a:noFill/>
+          <a:ln/>
+        </p:spPr>
+        <p:txBody>
+          <a:bodyPr wrap="square" lIns="0" tIns="0" rIns="0" bIns="0" rtlCol="0" anchor="t"/>
+          <a:lstStyle/>
+          <a:p>
+            <a:pPr indent="0" marL="0">
+              <a:buNone/>
+            </a:pPr>
+            <a:r>
+              <a:rPr lang="en-US" sz="1400" dirty="0">
+                <a:solidFill>
+                  <a:srgbClr val="6B6B6B"/>
+                </a:solidFill>
+              </a:rPr>
+              <a:t>시뮬레이션 · 가정 기반 추정 (Gold 관측 근거와 구분) · 2025 본경기 24경기 4,000번 재현 · 차량·선수 효과는 2023~2025로 분리</a:t>
+            </a:r>
+            <a:endParaRPr lang="en-US" sz="1400" dirty="0"/>
+          </a:p>
+        </p:txBody>
+      </p:sp>
+      <p:graphicFrame>
+        <p:nvGraphicFramePr>
+          <p:cNvPr id="18" name="cand-table"/>
+          <p:cNvGraphicFramePr>
+            <a:graphicFrameLocks noGrp="1"/>
+          </p:cNvGraphicFramePr>
+          <p:nvPr>
+            <p:extLst>
+              <p:ext uri="{D42A27DB-BD31-4B8C-83A1-F6EECF244321}">
+                <p14:modId xmlns:p14="http://schemas.microsoft.com/office/powerpoint/2010/main" val="1579011935"/>
+              </p:ext>
+            </p:extLst>
+          </p:nvPr>
+        </p:nvGraphicFramePr>
+        <p:xfrm>
+          <a:off x="548640" y="1508760"/>
+          <a:ext cx="11109960" cy="402336"/>
+        </p:xfrm>
+        <a:graphic>
+          <a:graphicData uri="http://schemas.openxmlformats.org/drawingml/2006/table">
+            <a:tbl>
+              <a:tblPr/>
+              <a:tblGrid>
+                <a:gridCol w="1691640"/>
+                <a:gridCol w="1463040"/>
+                <a:gridCol w="1371600"/>
+                <a:gridCol w="1371600"/>
+                <a:gridCol w="1280160"/>
+                <a:gridCol w="1325880"/>
+                <a:gridCol w="1051560"/>
+                <a:gridCol w="1554480"/>
+              </a:tblGrid>
+              <a:tr h="512064">
+                <a:tc>
+                  <a:txBody>
+                    <a:bodyPr/>
+                    <a:lstStyle/>
+                    <a:p>
+                      <a:pPr algn="l" indent="0" marL="0">
+                        <a:buNone/>
+                      </a:pPr>
+                      <a:r>
+                        <a:rPr lang="en-US" sz="1100" b="1" dirty="0">
+                          <a:solidFill>
+                            <a:srgbClr val="FFFFFF"/>
+                          </a:solidFill>
+                        </a:rPr>
+                        <a:t>시나리오</a:t>
+                      </a:r>
+                      <a:endParaRPr lang="en-US" sz="1100" dirty="0"/>
+                    </a:p>
+                  </a:txBody>
+                  <a:tcPr marL="91440" marR="91440" marT="45720" marB="45720" anchor="ctr">
+                    <a:lnL w="9525" cap="flat" cmpd="sng" algn="ctr">
+                      <a:solidFill>
+                        <a:srgbClr val="E5E5E5"/>
+                      </a:solidFill>
+                      <a:prstDash val="solid"/>
+                      <a:round/>
+                      <a:headEnd type="none" w="med" len="med"/>
+                      <a:tailEnd type="none" w="med" len="med"/>
+                    </a:lnL>
+                    <a:lnR w="9525" cap="flat" cmpd="sng" algn="ctr">
+                      <a:solidFill>
+                        <a:srgbClr val="E5E5E5"/>
+                      </a:solidFill>
+                      <a:prstDash val="solid"/>
+                      <a:round/>
+                      <a:headEnd type="none" w="med" len="med"/>
+                      <a:tailEnd type="none" w="med" len="med"/>
+                    </a:lnR>
+                    <a:lnT w="9525" cap="flat" cmpd="sng" algn="ctr">
+                      <a:solidFill>
+                        <a:srgbClr val="E5E5E5"/>
+                      </a:solidFill>
+                      <a:prstDash val="solid"/>
+                      <a:round/>
+                      <a:headEnd type="none" w="med" len="med"/>
+                      <a:tailEnd type="none" w="med" len="med"/>
+                    </a:lnT>
+                    <a:lnB w="9525" cap="flat" cmpd="sng" algn="ctr">
+                      <a:solidFill>
+                        <a:srgbClr val="E5E5E5"/>
+                      </a:solidFill>
+                      <a:prstDash val="solid"/>
+                      <a:round/>
+                      <a:headEnd type="none" w="med" len="med"/>
+                      <a:tailEnd type="none" w="med" len="med"/>
+                    </a:lnB>
+                    <a:solidFill>
+                      <a:srgbClr val="1A1A1A"/>
+                    </a:solidFill>
+                  </a:tcPr>
+                </a:tc>
+                <a:tc>
+                  <a:txBody>
+                    <a:bodyPr/>
+                    <a:lstStyle/>
+                    <a:p>
+                      <a:pPr algn="l" indent="0" marL="0">
+                        <a:buNone/>
+                      </a:pPr>
+                      <a:r>
+                        <a:rPr lang="en-US" sz="1100" b="1" dirty="0">
+                          <a:solidFill>
+                            <a:srgbClr val="FFFFFF"/>
+                          </a:solidFill>
+                        </a:rPr>
+                        <a:t>원래 팀</a:t>
+                      </a:r>
+                      <a:endParaRPr lang="en-US" sz="1100" dirty="0"/>
+                    </a:p>
+                  </a:txBody>
+                  <a:tcPr marL="91440" marR="91440" marT="45720" marB="45720" anchor="ctr">
+                    <a:lnL w="9525" cap="flat" cmpd="sng" algn="ctr">
+                      <a:solidFill>
+                        <a:srgbClr val="E5E5E5"/>
+                      </a:solidFill>
+                      <a:prstDash val="solid"/>
+                      <a:round/>
+                      <a:headEnd type="none" w="med" len="med"/>
+                      <a:tailEnd type="none" w="med" len="med"/>
+                    </a:lnL>
+                    <a:lnR w="9525" cap="flat" cmpd="sng" algn="ctr">
+                      <a:solidFill>
+                        <a:srgbClr val="E5E5E5"/>
+                      </a:solidFill>
+                      <a:prstDash val="solid"/>
+                      <a:round/>
+                      <a:headEnd type="none" w="med" len="med"/>
+                      <a:tailEnd type="none" w="med" len="med"/>
+                    </a:lnR>
+                    <a:lnT w="9525" cap="flat" cmpd="sng" algn="ctr">
+                      <a:solidFill>
+                        <a:srgbClr val="E5E5E5"/>
+                      </a:solidFill>
+                      <a:prstDash val="solid"/>
+                      <a:round/>
+                      <a:headEnd type="none" w="med" len="med"/>
+                      <a:tailEnd type="none" w="med" len="med"/>
+                    </a:lnT>
+                    <a:lnB w="9525" cap="flat" cmpd="sng" algn="ctr">
+                      <a:solidFill>
+                        <a:srgbClr val="E5E5E5"/>
+                      </a:solidFill>
+                      <a:prstDash val="solid"/>
+                      <a:round/>
+                      <a:headEnd type="none" w="med" len="med"/>
+                      <a:tailEnd type="none" w="med" len="med"/>
+                    </a:lnB>
+                    <a:solidFill>
+                      <a:srgbClr val="1A1A1A"/>
+                    </a:solidFill>
+                  </a:tcPr>
+                </a:tc>
+                <a:tc>
+                  <a:txBody>
+                    <a:bodyPr/>
+                    <a:lstStyle/>
+                    <a:p>
+                      <a:pPr algn="l" indent="0" marL="0">
+                        <a:buNone/>
+                      </a:pPr>
+                      <a:r>
+                        <a:rPr lang="en-US" sz="1100" b="1" dirty="0">
+                          <a:solidFill>
+                            <a:srgbClr val="FFFFFF"/>
+                          </a:solidFill>
+                        </a:rPr>
+                        <a:t>시즌 1승 이상</a:t>
+                      </a:r>
+                      <a:endParaRPr lang="en-US" sz="1100" dirty="0"/>
+                    </a:p>
+                  </a:txBody>
+                  <a:tcPr marL="91440" marR="91440" marT="45720" marB="45720" anchor="ctr">
+                    <a:lnL w="9525" cap="flat" cmpd="sng" algn="ctr">
+                      <a:solidFill>
+                        <a:srgbClr val="E5E5E5"/>
+                      </a:solidFill>
+                      <a:prstDash val="solid"/>
+                      <a:round/>
+                      <a:headEnd type="none" w="med" len="med"/>
+                      <a:tailEnd type="none" w="med" len="med"/>
+                    </a:lnL>
+                    <a:lnR w="9525" cap="flat" cmpd="sng" algn="ctr">
+                      <a:solidFill>
+                        <a:srgbClr val="E5E5E5"/>
+                      </a:solidFill>
+                      <a:prstDash val="solid"/>
+                      <a:round/>
+                      <a:headEnd type="none" w="med" len="med"/>
+                      <a:tailEnd type="none" w="med" len="med"/>
+                    </a:lnR>
+                    <a:lnT w="9525" cap="flat" cmpd="sng" algn="ctr">
+                      <a:solidFill>
+                        <a:srgbClr val="E5E5E5"/>
+                      </a:solidFill>
+                      <a:prstDash val="solid"/>
+                      <a:round/>
+                      <a:headEnd type="none" w="med" len="med"/>
+                      <a:tailEnd type="none" w="med" len="med"/>
+                    </a:lnT>
+                    <a:lnB w="9525" cap="flat" cmpd="sng" algn="ctr">
+                      <a:solidFill>
+                        <a:srgbClr val="E5E5E5"/>
+                      </a:solidFill>
+                      <a:prstDash val="solid"/>
+                      <a:round/>
+                      <a:headEnd type="none" w="med" len="med"/>
+                      <a:tailEnd type="none" w="med" len="med"/>
+                    </a:lnB>
+                    <a:solidFill>
+                      <a:srgbClr val="1A1A1A"/>
+                    </a:solidFill>
+                  </a:tcPr>
+                </a:tc>
+                <a:tc>
+                  <a:txBody>
+                    <a:bodyPr/>
+                    <a:lstStyle/>
+                    <a:p>
+                      <a:pPr algn="l" indent="0" marL="0">
+                        <a:buNone/>
+                      </a:pPr>
+                      <a:r>
+                        <a:rPr lang="en-US" sz="1100" b="1" dirty="0">
+                          <a:solidFill>
+                            <a:srgbClr val="FFFFFF"/>
+                          </a:solidFill>
+                        </a:rPr>
+                        <a:t>포디움 1회 이상</a:t>
+                      </a:r>
+                      <a:endParaRPr lang="en-US" sz="1100" dirty="0"/>
+                    </a:p>
+                  </a:txBody>
+                  <a:tcPr marL="91440" marR="91440" marT="45720" marB="45720" anchor="ctr">
+                    <a:lnL w="9525" cap="flat" cmpd="sng" algn="ctr">
+                      <a:solidFill>
+                        <a:srgbClr val="E5E5E5"/>
+                      </a:solidFill>
+                      <a:prstDash val="solid"/>
+                      <a:round/>
+                      <a:headEnd type="none" w="med" len="med"/>
+                      <a:tailEnd type="none" w="med" len="med"/>
+                    </a:lnL>
+                    <a:lnR w="9525" cap="flat" cmpd="sng" algn="ctr">
+                      <a:solidFill>
+                        <a:srgbClr val="E5E5E5"/>
+                      </a:solidFill>
+                      <a:prstDash val="solid"/>
+                      <a:round/>
+                      <a:headEnd type="none" w="med" len="med"/>
+                      <a:tailEnd type="none" w="med" len="med"/>
+                    </a:lnR>
+                    <a:lnT w="9525" cap="flat" cmpd="sng" algn="ctr">
+                      <a:solidFill>
+                        <a:srgbClr val="E5E5E5"/>
+                      </a:solidFill>
+                      <a:prstDash val="solid"/>
+                      <a:round/>
+                      <a:headEnd type="none" w="med" len="med"/>
+                      <a:tailEnd type="none" w="med" len="med"/>
+                    </a:lnT>
+                    <a:lnB w="9525" cap="flat" cmpd="sng" algn="ctr">
+                      <a:solidFill>
+                        <a:srgbClr val="E5E5E5"/>
+                      </a:solidFill>
+                      <a:prstDash val="solid"/>
+                      <a:round/>
+                      <a:headEnd type="none" w="med" len="med"/>
+                      <a:tailEnd type="none" w="med" len="med"/>
+                    </a:lnB>
+                    <a:solidFill>
+                      <a:srgbClr val="1A1A1A"/>
+                    </a:solidFill>
+                  </a:tcPr>
+                </a:tc>
+                <a:tc>
+                  <a:txBody>
+                    <a:bodyPr/>
+                    <a:lstStyle/>
+                    <a:p>
+                      <a:pPr algn="l" indent="0" marL="0">
+                        <a:buNone/>
+                      </a:pPr>
+                      <a:r>
+                        <a:rPr lang="en-US" sz="1100" b="1" dirty="0">
+                          <a:solidFill>
+                            <a:srgbClr val="FFFFFF"/>
+                          </a:solidFill>
+                        </a:rPr>
+                        <a:t>팀 기대 포인트</a:t>
+                      </a:r>
+                      <a:endParaRPr lang="en-US" sz="1100" dirty="0"/>
+                    </a:p>
+                  </a:txBody>
+                  <a:tcPr marL="91440" marR="91440" marT="45720" marB="45720" anchor="ctr">
+                    <a:lnL w="9525" cap="flat" cmpd="sng" algn="ctr">
+                      <a:solidFill>
+                        <a:srgbClr val="E5E5E5"/>
+                      </a:solidFill>
+                      <a:prstDash val="solid"/>
+                      <a:round/>
+                      <a:headEnd type="none" w="med" len="med"/>
+                      <a:tailEnd type="none" w="med" len="med"/>
+                    </a:lnL>
+                    <a:lnR w="9525" cap="flat" cmpd="sng" algn="ctr">
+                      <a:solidFill>
+                        <a:srgbClr val="E5E5E5"/>
+                      </a:solidFill>
+                      <a:prstDash val="solid"/>
+                      <a:round/>
+                      <a:headEnd type="none" w="med" len="med"/>
+                      <a:tailEnd type="none" w="med" len="med"/>
+                    </a:lnR>
+                    <a:lnT w="9525" cap="flat" cmpd="sng" algn="ctr">
+                      <a:solidFill>
+                        <a:srgbClr val="E5E5E5"/>
+                      </a:solidFill>
+                      <a:prstDash val="solid"/>
+                      <a:round/>
+                      <a:headEnd type="none" w="med" len="med"/>
+                      <a:tailEnd type="none" w="med" len="med"/>
+                    </a:lnT>
+                    <a:lnB w="9525" cap="flat" cmpd="sng" algn="ctr">
+                      <a:solidFill>
+                        <a:srgbClr val="E5E5E5"/>
+                      </a:solidFill>
+                      <a:prstDash val="solid"/>
+                      <a:round/>
+                      <a:headEnd type="none" w="med" len="med"/>
+                      <a:tailEnd type="none" w="med" len="med"/>
+                    </a:lnB>
+                    <a:solidFill>
+                      <a:srgbClr val="1A1A1A"/>
+                    </a:solidFill>
+                  </a:tcPr>
+                </a:tc>
+                <a:tc>
+                  <a:txBody>
+                    <a:bodyPr/>
+                    <a:lstStyle/>
+                    <a:p>
+                      <a:pPr algn="l" indent="0" marL="0">
+                        <a:buNone/>
+                      </a:pPr>
+                      <a:r>
+                        <a:rPr lang="en-US" sz="1100" b="1" dirty="0">
+                          <a:solidFill>
+                            <a:srgbClr val="FFFFFF"/>
+                          </a:solidFill>
+                        </a:rPr>
+                        <a:t>팀 기대 순위</a:t>
+                      </a:r>
+                      <a:endParaRPr lang="en-US" sz="1100" dirty="0"/>
+                    </a:p>
+                  </a:txBody>
+                  <a:tcPr marL="91440" marR="91440" marT="45720" marB="45720" anchor="ctr">
+                    <a:lnL w="9525" cap="flat" cmpd="sng" algn="ctr">
+                      <a:solidFill>
+                        <a:srgbClr val="E5E5E5"/>
+                      </a:solidFill>
+                      <a:prstDash val="solid"/>
+                      <a:round/>
+                      <a:headEnd type="none" w="med" len="med"/>
+                      <a:tailEnd type="none" w="med" len="med"/>
+                    </a:lnL>
+                    <a:lnR w="9525" cap="flat" cmpd="sng" algn="ctr">
+                      <a:solidFill>
+                        <a:srgbClr val="E5E5E5"/>
+                      </a:solidFill>
+                      <a:prstDash val="solid"/>
+                      <a:round/>
+                      <a:headEnd type="none" w="med" len="med"/>
+                      <a:tailEnd type="none" w="med" len="med"/>
+                    </a:lnR>
+                    <a:lnT w="9525" cap="flat" cmpd="sng" algn="ctr">
+                      <a:solidFill>
+                        <a:srgbClr val="E5E5E5"/>
+                      </a:solidFill>
+                      <a:prstDash val="solid"/>
+                      <a:round/>
+                      <a:headEnd type="none" w="med" len="med"/>
+                      <a:tailEnd type="none" w="med" len="med"/>
+                    </a:lnT>
+                    <a:lnB w="9525" cap="flat" cmpd="sng" algn="ctr">
+                      <a:solidFill>
+                        <a:srgbClr val="E5E5E5"/>
+                      </a:solidFill>
+                      <a:prstDash val="solid"/>
+                      <a:round/>
+                      <a:headEnd type="none" w="med" len="med"/>
+                      <a:tailEnd type="none" w="med" len="med"/>
+                    </a:lnB>
+                    <a:solidFill>
+                      <a:srgbClr val="1A1A1A"/>
+                    </a:solidFill>
+                  </a:tcPr>
+                </a:tc>
+                <a:tc>
+                  <a:txBody>
+                    <a:bodyPr/>
+                    <a:lstStyle/>
+                    <a:p>
+                      <a:pPr algn="l" indent="0" marL="0">
+                        <a:buNone/>
+                      </a:pPr>
+                      <a:r>
+                        <a:rPr lang="en-US" sz="1100" b="1" dirty="0">
+                          <a:solidFill>
+                            <a:srgbClr val="FFFFFF"/>
+                          </a:solidFill>
+                        </a:rPr>
+                        <a:t>팀 6위 이내</a:t>
+                      </a:r>
+                      <a:endParaRPr lang="en-US" sz="1100" dirty="0"/>
+                    </a:p>
+                  </a:txBody>
+                  <a:tcPr marL="91440" marR="91440" marT="45720" marB="45720" anchor="ctr">
+                    <a:lnL w="9525" cap="flat" cmpd="sng" algn="ctr">
+                      <a:solidFill>
+                        <a:srgbClr val="E5E5E5"/>
+                      </a:solidFill>
+                      <a:prstDash val="solid"/>
+                      <a:round/>
+                      <a:headEnd type="none" w="med" len="med"/>
+                      <a:tailEnd type="none" w="med" len="med"/>
+                    </a:lnL>
+                    <a:lnR w="9525" cap="flat" cmpd="sng" algn="ctr">
+                      <a:solidFill>
+                        <a:srgbClr val="E5E5E5"/>
+                      </a:solidFill>
+                      <a:prstDash val="solid"/>
+                      <a:round/>
+                      <a:headEnd type="none" w="med" len="med"/>
+                      <a:tailEnd type="none" w="med" len="med"/>
+                    </a:lnR>
+                    <a:lnT w="9525" cap="flat" cmpd="sng" algn="ctr">
+                      <a:solidFill>
+                        <a:srgbClr val="E5E5E5"/>
+                      </a:solidFill>
+                      <a:prstDash val="solid"/>
+                      <a:round/>
+                      <a:headEnd type="none" w="med" len="med"/>
+                      <a:tailEnd type="none" w="med" len="med"/>
+                    </a:lnT>
+                    <a:lnB w="9525" cap="flat" cmpd="sng" algn="ctr">
+                      <a:solidFill>
+                        <a:srgbClr val="E5E5E5"/>
+                      </a:solidFill>
+                      <a:prstDash val="solid"/>
+                      <a:round/>
+                      <a:headEnd type="none" w="med" len="med"/>
+                      <a:tailEnd type="none" w="med" len="med"/>
+                    </a:lnB>
+                    <a:solidFill>
+                      <a:srgbClr val="1A1A1A"/>
+                    </a:solidFill>
+                  </a:tcPr>
+                </a:tc>
+                <a:tc>
+                  <a:txBody>
+                    <a:bodyPr/>
+                    <a:lstStyle/>
+                    <a:p>
+                      <a:pPr algn="l" indent="0" marL="0">
+                        <a:buNone/>
+                      </a:pPr>
+                      <a:r>
+                        <a:rPr lang="en-US" sz="1100" b="1" dirty="0">
+                          <a:solidFill>
+                            <a:srgbClr val="FFFFFF"/>
+                          </a:solidFill>
+                        </a:rPr>
+                        <a:t>2025만 추정 · 6위 이내</a:t>
+                      </a:r>
+                      <a:endParaRPr lang="en-US" sz="1100" dirty="0"/>
+                    </a:p>
+                  </a:txBody>
+                  <a:tcPr marL="91440" marR="91440" marT="45720" marB="45720" anchor="ctr">
+                    <a:lnL w="9525" cap="flat" cmpd="sng" algn="ctr">
+                      <a:solidFill>
+                        <a:srgbClr val="E5E5E5"/>
+                      </a:solidFill>
+                      <a:prstDash val="solid"/>
+                      <a:round/>
+                      <a:headEnd type="none" w="med" len="med"/>
+                      <a:tailEnd type="none" w="med" len="med"/>
+                    </a:lnL>
+                    <a:lnR w="9525" cap="flat" cmpd="sng" algn="ctr">
+                      <a:solidFill>
+                        <a:srgbClr val="E5E5E5"/>
+                      </a:solidFill>
+                      <a:prstDash val="solid"/>
+                      <a:round/>
+                      <a:headEnd type="none" w="med" len="med"/>
+                      <a:tailEnd type="none" w="med" len="med"/>
+                    </a:lnR>
+                    <a:lnT w="9525" cap="flat" cmpd="sng" algn="ctr">
+                      <a:solidFill>
+                        <a:srgbClr val="E5E5E5"/>
+                      </a:solidFill>
+                      <a:prstDash val="solid"/>
+                      <a:round/>
+                      <a:headEnd type="none" w="med" len="med"/>
+                      <a:tailEnd type="none" w="med" len="med"/>
+                    </a:lnT>
+                    <a:lnB w="9525" cap="flat" cmpd="sng" algn="ctr">
+                      <a:solidFill>
+                        <a:srgbClr val="E5E5E5"/>
+                      </a:solidFill>
+                      <a:prstDash val="solid"/>
+                      <a:round/>
+                      <a:headEnd type="none" w="med" len="med"/>
+                      <a:tailEnd type="none" w="med" len="med"/>
+                    </a:lnB>
+                    <a:solidFill>
+                      <a:srgbClr val="1A1A1A"/>
+                    </a:solidFill>
+                  </a:tcPr>
+                </a:tc>
+              </a:tr>
+              <a:tr h="512064">
+                <a:tc>
+                  <a:txBody>
+                    <a:bodyPr/>
+                    <a:lstStyle/>
+                    <a:p>
+                      <a:pPr algn="l" indent="0" marL="0">
+                        <a:buNone/>
+                      </a:pPr>
+                      <a:r>
+                        <a:rPr lang="en-US" sz="1100" b="1" dirty="0">
+                          <a:solidFill>
+                            <a:srgbClr val="1A1A1A"/>
+                          </a:solidFill>
+                        </a:rPr>
+                        <a:t>실제 라인업 (STROLL)</a:t>
+                      </a:r>
+                      <a:endParaRPr lang="en-US" sz="1100" dirty="0"/>
+                    </a:p>
+                  </a:txBody>
+                  <a:tcPr marL="91440" marR="91440" marT="45720" marB="45720" anchor="ctr">
+                    <a:lnL w="9525" cap="flat" cmpd="sng" algn="ctr">
+                      <a:solidFill>
+                        <a:srgbClr val="E5E5E5"/>
+                      </a:solidFill>
+                      <a:prstDash val="solid"/>
+                      <a:round/>
+                      <a:headEnd type="none" w="med" len="med"/>
+                      <a:tailEnd type="none" w="med" len="med"/>
+                    </a:lnL>
+                    <a:lnR w="9525" cap="flat" cmpd="sng" algn="ctr">
+                      <a:solidFill>
+                        <a:srgbClr val="E5E5E5"/>
+                      </a:solidFill>
+                      <a:prstDash val="solid"/>
+                      <a:round/>
+                      <a:headEnd type="none" w="med" len="med"/>
+                      <a:tailEnd type="none" w="med" len="med"/>
+                    </a:lnR>
+                    <a:lnT w="9525" cap="flat" cmpd="sng" algn="ctr">
+                      <a:solidFill>
+                        <a:srgbClr val="E5E5E5"/>
+                      </a:solidFill>
+                      <a:prstDash val="solid"/>
+                      <a:round/>
+                      <a:headEnd type="none" w="med" len="med"/>
+                      <a:tailEnd type="none" w="med" len="med"/>
+                    </a:lnT>
+                    <a:lnB w="9525" cap="flat" cmpd="sng" algn="ctr">
+                      <a:solidFill>
+                        <a:srgbClr val="E5E5E5"/>
+                      </a:solidFill>
+                      <a:prstDash val="solid"/>
+                      <a:round/>
+                      <a:headEnd type="none" w="med" len="med"/>
+                      <a:tailEnd type="none" w="med" len="med"/>
+                    </a:lnB>
+                    <a:solidFill>
+                      <a:srgbClr val="FDECEC"/>
+                    </a:solidFill>
+                  </a:tcPr>
+                </a:tc>
+                <a:tc>
+                  <a:txBody>
+                    <a:bodyPr/>
+                    <a:lstStyle/>
+                    <a:p>
+                      <a:pPr algn="l" indent="0" marL="0">
+                        <a:buNone/>
+                      </a:pPr>
+                      <a:r>
+                        <a:rPr lang="en-US" sz="1100" dirty="0">
+                          <a:solidFill>
+                            <a:srgbClr val="1A1A1A"/>
+                          </a:solidFill>
+                        </a:rPr>
+                        <a:t>Aston Martin</a:t>
+                      </a:r>
+                      <a:endParaRPr lang="en-US" sz="1100" dirty="0"/>
+                    </a:p>
+                  </a:txBody>
+                  <a:tcPr marL="91440" marR="91440" marT="45720" marB="45720" anchor="ctr">
+                    <a:lnL w="9525" cap="flat" cmpd="sng" algn="ctr">
+                      <a:solidFill>
+                        <a:srgbClr val="E5E5E5"/>
+                      </a:solidFill>
+                      <a:prstDash val="solid"/>
+                      <a:round/>
+                      <a:headEnd type="none" w="med" len="med"/>
+                      <a:tailEnd type="none" w="med" len="med"/>
+                    </a:lnL>
+                    <a:lnR w="9525" cap="flat" cmpd="sng" algn="ctr">
+                      <a:solidFill>
+                        <a:srgbClr val="E5E5E5"/>
+                      </a:solidFill>
+                      <a:prstDash val="solid"/>
+                      <a:round/>
+                      <a:headEnd type="none" w="med" len="med"/>
+                      <a:tailEnd type="none" w="med" len="med"/>
+                    </a:lnR>
+                    <a:lnT w="9525" cap="flat" cmpd="sng" algn="ctr">
+                      <a:solidFill>
+                        <a:srgbClr val="E5E5E5"/>
+                      </a:solidFill>
+                      <a:prstDash val="solid"/>
+                      <a:round/>
+                      <a:headEnd type="none" w="med" len="med"/>
+                      <a:tailEnd type="none" w="med" len="med"/>
+                    </a:lnT>
+                    <a:lnB w="9525" cap="flat" cmpd="sng" algn="ctr">
+                      <a:solidFill>
+                        <a:srgbClr val="E5E5E5"/>
+                      </a:solidFill>
+                      <a:prstDash val="solid"/>
+                      <a:round/>
+                      <a:headEnd type="none" w="med" len="med"/>
+                      <a:tailEnd type="none" w="med" len="med"/>
+                    </a:lnB>
+                    <a:solidFill>
+                      <a:srgbClr val="FDECEC"/>
+                    </a:solidFill>
+                  </a:tcPr>
+                </a:tc>
+                <a:tc>
+                  <a:txBody>
+                    <a:bodyPr/>
+                    <a:lstStyle/>
+                    <a:p>
+                      <a:pPr algn="l" indent="0" marL="0">
+                        <a:buNone/>
+                      </a:pPr>
+                      <a:r>
+                        <a:rPr lang="en-US" sz="1100" dirty="0">
+                          <a:solidFill>
+                            <a:srgbClr val="1A1A1A"/>
+                          </a:solidFill>
+                        </a:rPr>
+                        <a:t>0.1%</a:t>
+                      </a:r>
+                      <a:endParaRPr lang="en-US" sz="1100" dirty="0"/>
+                    </a:p>
+                  </a:txBody>
+                  <a:tcPr marL="91440" marR="91440" marT="45720" marB="45720" anchor="ctr">
+                    <a:lnL w="9525" cap="flat" cmpd="sng" algn="ctr">
+                      <a:solidFill>
+                        <a:srgbClr val="E5E5E5"/>
+                      </a:solidFill>
+                      <a:prstDash val="solid"/>
+                      <a:round/>
+                      <a:headEnd type="none" w="med" len="med"/>
+                      <a:tailEnd type="none" w="med" len="med"/>
+                    </a:lnL>
+                    <a:lnR w="9525" cap="flat" cmpd="sng" algn="ctr">
+                      <a:solidFill>
+                        <a:srgbClr val="E5E5E5"/>
+                      </a:solidFill>
+                      <a:prstDash val="solid"/>
+                      <a:round/>
+                      <a:headEnd type="none" w="med" len="med"/>
+                      <a:tailEnd type="none" w="med" len="med"/>
+                    </a:lnR>
+                    <a:lnT w="9525" cap="flat" cmpd="sng" algn="ctr">
+                      <a:solidFill>
+                        <a:srgbClr val="E5E5E5"/>
+                      </a:solidFill>
+                      <a:prstDash val="solid"/>
+                      <a:round/>
+                      <a:headEnd type="none" w="med" len="med"/>
+                      <a:tailEnd type="none" w="med" len="med"/>
+                    </a:lnT>
+                    <a:lnB w="9525" cap="flat" cmpd="sng" algn="ctr">
+                      <a:solidFill>
+                        <a:srgbClr val="E5E5E5"/>
+                      </a:solidFill>
+                      <a:prstDash val="solid"/>
+                      <a:round/>
+                      <a:headEnd type="none" w="med" len="med"/>
+                      <a:tailEnd type="none" w="med" len="med"/>
+                    </a:lnB>
+                    <a:solidFill>
+                      <a:srgbClr val="FDECEC"/>
+                    </a:solidFill>
+                  </a:tcPr>
+                </a:tc>
+                <a:tc>
+                  <a:txBody>
+                    <a:bodyPr/>
+                    <a:lstStyle/>
+                    <a:p>
+                      <a:pPr algn="l" indent="0" marL="0">
+                        <a:buNone/>
+                      </a:pPr>
+                      <a:r>
+                        <a:rPr lang="en-US" sz="1100" dirty="0">
+                          <a:solidFill>
+                            <a:srgbClr val="1A1A1A"/>
+                          </a:solidFill>
+                        </a:rPr>
+                        <a:t>8.6%</a:t>
+                      </a:r>
+                      <a:endParaRPr lang="en-US" sz="1100" dirty="0"/>
+                    </a:p>
+                  </a:txBody>
+                  <a:tcPr marL="91440" marR="91440" marT="45720" marB="45720" anchor="ctr">
+                    <a:lnL w="9525" cap="flat" cmpd="sng" algn="ctr">
+                      <a:solidFill>
+                        <a:srgbClr val="E5E5E5"/>
+                      </a:solidFill>
+                      <a:prstDash val="solid"/>
+                      <a:round/>
+                      <a:headEnd type="none" w="med" len="med"/>
+                      <a:tailEnd type="none" w="med" len="med"/>
+                    </a:lnL>
+                    <a:lnR w="9525" cap="flat" cmpd="sng" algn="ctr">
+                      <a:solidFill>
+                        <a:srgbClr val="E5E5E5"/>
+                      </a:solidFill>
+                      <a:prstDash val="solid"/>
+                      <a:round/>
+                      <a:headEnd type="none" w="med" len="med"/>
+                      <a:tailEnd type="none" w="med" len="med"/>
+                    </a:lnR>
+                    <a:lnT w="9525" cap="flat" cmpd="sng" algn="ctr">
+                      <a:solidFill>
+                        <a:srgbClr val="E5E5E5"/>
+                      </a:solidFill>
+                      <a:prstDash val="solid"/>
+                      <a:round/>
+                      <a:headEnd type="none" w="med" len="med"/>
+                      <a:tailEnd type="none" w="med" len="med"/>
+                    </a:lnT>
+                    <a:lnB w="9525" cap="flat" cmpd="sng" algn="ctr">
+                      <a:solidFill>
+                        <a:srgbClr val="E5E5E5"/>
+                      </a:solidFill>
+                      <a:prstDash val="solid"/>
+                      <a:round/>
+                      <a:headEnd type="none" w="med" len="med"/>
+                      <a:tailEnd type="none" w="med" len="med"/>
+                    </a:lnB>
+                    <a:solidFill>
+                      <a:srgbClr val="FDECEC"/>
+                    </a:solidFill>
+                  </a:tcPr>
+                </a:tc>
+                <a:tc>
+                  <a:txBody>
+                    <a:bodyPr/>
+                    <a:lstStyle/>
+                    <a:p>
+                      <a:pPr algn="l" indent="0" marL="0">
+                        <a:buNone/>
+                      </a:pPr>
+                      <a:r>
+                        <a:rPr lang="en-US" sz="1100" dirty="0">
+                          <a:solidFill>
+                            <a:srgbClr val="1A1A1A"/>
+                          </a:solidFill>
+                        </a:rPr>
+                        <a:t>64.6</a:t>
+                      </a:r>
+                      <a:endParaRPr lang="en-US" sz="1100" dirty="0"/>
+                    </a:p>
+                  </a:txBody>
+                  <a:tcPr marL="91440" marR="91440" marT="45720" marB="45720" anchor="ctr">
+                    <a:lnL w="9525" cap="flat" cmpd="sng" algn="ctr">
+                      <a:solidFill>
+                        <a:srgbClr val="E5E5E5"/>
+                      </a:solidFill>
+                      <a:prstDash val="solid"/>
+                      <a:round/>
+                      <a:headEnd type="none" w="med" len="med"/>
+                      <a:tailEnd type="none" w="med" len="med"/>
+                    </a:lnL>
+                    <a:lnR w="9525" cap="flat" cmpd="sng" algn="ctr">
+                      <a:solidFill>
+                        <a:srgbClr val="E5E5E5"/>
+                      </a:solidFill>
+                      <a:prstDash val="solid"/>
+                      <a:round/>
+                      <a:headEnd type="none" w="med" len="med"/>
+                      <a:tailEnd type="none" w="med" len="med"/>
+                    </a:lnR>
+                    <a:lnT w="9525" cap="flat" cmpd="sng" algn="ctr">
+                      <a:solidFill>
+                        <a:srgbClr val="E5E5E5"/>
+                      </a:solidFill>
+                      <a:prstDash val="solid"/>
+                      <a:round/>
+                      <a:headEnd type="none" w="med" len="med"/>
+                      <a:tailEnd type="none" w="med" len="med"/>
+                    </a:lnT>
+                    <a:lnB w="9525" cap="flat" cmpd="sng" algn="ctr">
+                      <a:solidFill>
+                        <a:srgbClr val="E5E5E5"/>
+                      </a:solidFill>
+                      <a:prstDash val="solid"/>
+                      <a:round/>
+                      <a:headEnd type="none" w="med" len="med"/>
+                      <a:tailEnd type="none" w="med" len="med"/>
+                    </a:lnB>
+                    <a:solidFill>
+                      <a:srgbClr val="FDECEC"/>
+                    </a:solidFill>
+                  </a:tcPr>
+                </a:tc>
+                <a:tc>
+                  <a:txBody>
+                    <a:bodyPr/>
+                    <a:lstStyle/>
+                    <a:p>
+                      <a:pPr algn="l" indent="0" marL="0">
+                        <a:buNone/>
+                      </a:pPr>
+                      <a:r>
+                        <a:rPr lang="en-US" sz="1100" dirty="0">
+                          <a:solidFill>
+                            <a:srgbClr val="1A1A1A"/>
+                          </a:solidFill>
+                        </a:rPr>
+                        <a:t>8.1</a:t>
+                      </a:r>
+                      <a:endParaRPr lang="en-US" sz="1100" dirty="0"/>
+                    </a:p>
+                  </a:txBody>
+                  <a:tcPr marL="91440" marR="91440" marT="45720" marB="45720" anchor="ctr">
+                    <a:lnL w="9525" cap="flat" cmpd="sng" algn="ctr">
+                      <a:solidFill>
+                        <a:srgbClr val="E5E5E5"/>
+                      </a:solidFill>
+                      <a:prstDash val="solid"/>
+                      <a:round/>
+                      <a:headEnd type="none" w="med" len="med"/>
+                      <a:tailEnd type="none" w="med" len="med"/>
+                    </a:lnL>
+                    <a:lnR w="9525" cap="flat" cmpd="sng" algn="ctr">
+                      <a:solidFill>
+                        <a:srgbClr val="E5E5E5"/>
+                      </a:solidFill>
+                      <a:prstDash val="solid"/>
+                      <a:round/>
+                      <a:headEnd type="none" w="med" len="med"/>
+                      <a:tailEnd type="none" w="med" len="med"/>
+                    </a:lnR>
+                    <a:lnT w="9525" cap="flat" cmpd="sng" algn="ctr">
+                      <a:solidFill>
+                        <a:srgbClr val="E5E5E5"/>
+                      </a:solidFill>
+                      <a:prstDash val="solid"/>
+                      <a:round/>
+                      <a:headEnd type="none" w="med" len="med"/>
+                      <a:tailEnd type="none" w="med" len="med"/>
+                    </a:lnT>
+                    <a:lnB w="9525" cap="flat" cmpd="sng" algn="ctr">
+                      <a:solidFill>
+                        <a:srgbClr val="E5E5E5"/>
+                      </a:solidFill>
+                      <a:prstDash val="solid"/>
+                      <a:round/>
+                      <a:headEnd type="none" w="med" len="med"/>
+                      <a:tailEnd type="none" w="med" len="med"/>
+                    </a:lnB>
+                    <a:solidFill>
+                      <a:srgbClr val="FDECEC"/>
+                    </a:solidFill>
+                  </a:tcPr>
+                </a:tc>
+                <a:tc>
+                  <a:txBody>
+                    <a:bodyPr/>
+                    <a:lstStyle/>
+                    <a:p>
+                      <a:pPr algn="l" indent="0" marL="0">
+                        <a:buNone/>
+                      </a:pPr>
+                      <a:r>
+                        <a:rPr lang="en-US" sz="1100" dirty="0">
+                          <a:solidFill>
+                            <a:srgbClr val="1A1A1A"/>
+                          </a:solidFill>
+                        </a:rPr>
+                        <a:t>9.3%</a:t>
+                      </a:r>
+                      <a:endParaRPr lang="en-US" sz="1100" dirty="0"/>
+                    </a:p>
+                  </a:txBody>
+                  <a:tcPr marL="91440" marR="91440" marT="45720" marB="45720" anchor="ctr">
+                    <a:lnL w="9525" cap="flat" cmpd="sng" algn="ctr">
+                      <a:solidFill>
+                        <a:srgbClr val="E5E5E5"/>
+                      </a:solidFill>
+                      <a:prstDash val="solid"/>
+                      <a:round/>
+                      <a:headEnd type="none" w="med" len="med"/>
+                      <a:tailEnd type="none" w="med" len="med"/>
+                    </a:lnL>
+                    <a:lnR w="9525" cap="flat" cmpd="sng" algn="ctr">
+                      <a:solidFill>
+                        <a:srgbClr val="E5E5E5"/>
+                      </a:solidFill>
+                      <a:prstDash val="solid"/>
+                      <a:round/>
+                      <a:headEnd type="none" w="med" len="med"/>
+                      <a:tailEnd type="none" w="med" len="med"/>
+                    </a:lnR>
+                    <a:lnT w="9525" cap="flat" cmpd="sng" algn="ctr">
+                      <a:solidFill>
+                        <a:srgbClr val="E5E5E5"/>
+                      </a:solidFill>
+                      <a:prstDash val="solid"/>
+                      <a:round/>
+                      <a:headEnd type="none" w="med" len="med"/>
+                      <a:tailEnd type="none" w="med" len="med"/>
+                    </a:lnT>
+                    <a:lnB w="9525" cap="flat" cmpd="sng" algn="ctr">
+                      <a:solidFill>
+                        <a:srgbClr val="E5E5E5"/>
+                      </a:solidFill>
+                      <a:prstDash val="solid"/>
+                      <a:round/>
+                      <a:headEnd type="none" w="med" len="med"/>
+                      <a:tailEnd type="none" w="med" len="med"/>
+                    </a:lnB>
+                    <a:solidFill>
+                      <a:srgbClr val="FDECEC"/>
+                    </a:solidFill>
+                  </a:tcPr>
+                </a:tc>
+                <a:tc>
+                  <a:txBody>
+                    <a:bodyPr/>
+                    <a:lstStyle/>
+                    <a:p>
+                      <a:pPr algn="l" indent="0" marL="0">
+                        <a:buNone/>
+                      </a:pPr>
+                      <a:r>
+                        <a:rPr lang="en-US" sz="1100" dirty="0">
+                          <a:solidFill>
+                            <a:srgbClr val="1A1A1A"/>
+                          </a:solidFill>
+                        </a:rPr>
+                        <a:t>7.7%</a:t>
+                      </a:r>
+                      <a:endParaRPr lang="en-US" sz="1100" dirty="0"/>
+                    </a:p>
+                  </a:txBody>
+                  <a:tcPr marL="91440" marR="91440" marT="45720" marB="45720" anchor="ctr">
+                    <a:lnL w="9525" cap="flat" cmpd="sng" algn="ctr">
+                      <a:solidFill>
+                        <a:srgbClr val="E5E5E5"/>
+                      </a:solidFill>
+                      <a:prstDash val="solid"/>
+                      <a:round/>
+                      <a:headEnd type="none" w="med" len="med"/>
+                      <a:tailEnd type="none" w="med" len="med"/>
+                    </a:lnL>
+                    <a:lnR w="9525" cap="flat" cmpd="sng" algn="ctr">
+                      <a:solidFill>
+                        <a:srgbClr val="E5E5E5"/>
+                      </a:solidFill>
+                      <a:prstDash val="solid"/>
+                      <a:round/>
+                      <a:headEnd type="none" w="med" len="med"/>
+                      <a:tailEnd type="none" w="med" len="med"/>
+                    </a:lnR>
+                    <a:lnT w="9525" cap="flat" cmpd="sng" algn="ctr">
+                      <a:solidFill>
+                        <a:srgbClr val="E5E5E5"/>
+                      </a:solidFill>
+                      <a:prstDash val="solid"/>
+                      <a:round/>
+                      <a:headEnd type="none" w="med" len="med"/>
+                      <a:tailEnd type="none" w="med" len="med"/>
+                    </a:lnT>
+                    <a:lnB w="9525" cap="flat" cmpd="sng" algn="ctr">
+                      <a:solidFill>
+                        <a:srgbClr val="E5E5E5"/>
+                      </a:solidFill>
+                      <a:prstDash val="solid"/>
+                      <a:round/>
+                      <a:headEnd type="none" w="med" len="med"/>
+                      <a:tailEnd type="none" w="med" len="med"/>
+                    </a:lnB>
+                    <a:solidFill>
+                      <a:srgbClr val="FDECEC"/>
+                    </a:solidFill>
+                  </a:tcPr>
+                </a:tc>
+              </a:tr>
+              <a:tr h="512064">
+                <a:tc>
+                  <a:txBody>
+                    <a:bodyPr/>
+                    <a:lstStyle/>
+                    <a:p>
+                      <a:pPr algn="l" indent="0" marL="0">
+                        <a:buNone/>
+                      </a:pPr>
+                      <a:r>
+                        <a:rPr lang="en-US" sz="1100" b="1" dirty="0">
+                          <a:solidFill>
+                            <a:srgbClr val="1A1A1A"/>
+                          </a:solidFill>
+                        </a:rPr>
+                        <a:t>↔ Charles LECLERC</a:t>
+                      </a:r>
+                      <a:endParaRPr lang="en-US" sz="1100" dirty="0"/>
+                    </a:p>
+                  </a:txBody>
+                  <a:tcPr marL="91440" marR="91440" marT="45720" marB="45720" anchor="ctr">
+                    <a:lnL w="9525" cap="flat" cmpd="sng" algn="ctr">
+                      <a:solidFill>
+                        <a:srgbClr val="E5E5E5"/>
+                      </a:solidFill>
+                      <a:prstDash val="solid"/>
+                      <a:round/>
+                      <a:headEnd type="none" w="med" len="med"/>
+                      <a:tailEnd type="none" w="med" len="med"/>
+                    </a:lnL>
+                    <a:lnR w="9525" cap="flat" cmpd="sng" algn="ctr">
+                      <a:solidFill>
+                        <a:srgbClr val="E5E5E5"/>
+                      </a:solidFill>
+                      <a:prstDash val="solid"/>
+                      <a:round/>
+                      <a:headEnd type="none" w="med" len="med"/>
+                      <a:tailEnd type="none" w="med" len="med"/>
+                    </a:lnR>
+                    <a:lnT w="9525" cap="flat" cmpd="sng" algn="ctr">
+                      <a:solidFill>
+                        <a:srgbClr val="E5E5E5"/>
+                      </a:solidFill>
+                      <a:prstDash val="solid"/>
+                      <a:round/>
+                      <a:headEnd type="none" w="med" len="med"/>
+                      <a:tailEnd type="none" w="med" len="med"/>
+                    </a:lnT>
+                    <a:lnB w="9525" cap="flat" cmpd="sng" algn="ctr">
+                      <a:solidFill>
+                        <a:srgbClr val="E5E5E5"/>
+                      </a:solidFill>
+                      <a:prstDash val="solid"/>
+                      <a:round/>
+                      <a:headEnd type="none" w="med" len="med"/>
+                      <a:tailEnd type="none" w="med" len="med"/>
+                    </a:lnB>
+                    <a:solidFill>
+                      <a:srgbClr val="FFFFFF"/>
+                    </a:solidFill>
+                  </a:tcPr>
+                </a:tc>
+                <a:tc>
+                  <a:txBody>
+                    <a:bodyPr/>
+                    <a:lstStyle/>
+                    <a:p>
+                      <a:pPr algn="l" indent="0" marL="0">
+                        <a:buNone/>
+                      </a:pPr>
+                      <a:r>
+                        <a:rPr lang="en-US" sz="1100" b="1" dirty="0">
+                          <a:solidFill>
+                            <a:srgbClr val="1A1A1A"/>
+                          </a:solidFill>
+                        </a:rPr>
+                        <a:t>Ferrari</a:t>
+                      </a:r>
+                      <a:endParaRPr lang="en-US" sz="1100" dirty="0"/>
+                    </a:p>
+                  </a:txBody>
+                  <a:tcPr marL="91440" marR="91440" marT="45720" marB="45720" anchor="ctr">
+                    <a:lnL w="9525" cap="flat" cmpd="sng" algn="ctr">
+                      <a:solidFill>
+                        <a:srgbClr val="E5E5E5"/>
+                      </a:solidFill>
+                      <a:prstDash val="solid"/>
+                      <a:round/>
+                      <a:headEnd type="none" w="med" len="med"/>
+                      <a:tailEnd type="none" w="med" len="med"/>
+                    </a:lnL>
+                    <a:lnR w="9525" cap="flat" cmpd="sng" algn="ctr">
+                      <a:solidFill>
+                        <a:srgbClr val="E5E5E5"/>
+                      </a:solidFill>
+                      <a:prstDash val="solid"/>
+                      <a:round/>
+                      <a:headEnd type="none" w="med" len="med"/>
+                      <a:tailEnd type="none" w="med" len="med"/>
+                    </a:lnR>
+                    <a:lnT w="9525" cap="flat" cmpd="sng" algn="ctr">
+                      <a:solidFill>
+                        <a:srgbClr val="E5E5E5"/>
+                      </a:solidFill>
+                      <a:prstDash val="solid"/>
+                      <a:round/>
+                      <a:headEnd type="none" w="med" len="med"/>
+                      <a:tailEnd type="none" w="med" len="med"/>
+                    </a:lnT>
+                    <a:lnB w="9525" cap="flat" cmpd="sng" algn="ctr">
+                      <a:solidFill>
+                        <a:srgbClr val="E5E5E5"/>
+                      </a:solidFill>
+                      <a:prstDash val="solid"/>
+                      <a:round/>
+                      <a:headEnd type="none" w="med" len="med"/>
+                      <a:tailEnd type="none" w="med" len="med"/>
+                    </a:lnB>
+                    <a:solidFill>
+                      <a:srgbClr val="FFFFFF"/>
+                    </a:solidFill>
+                  </a:tcPr>
+                </a:tc>
+                <a:tc>
+                  <a:txBody>
+                    <a:bodyPr/>
+                    <a:lstStyle/>
+                    <a:p>
+                      <a:pPr algn="l" indent="0" marL="0">
+                        <a:buNone/>
+                      </a:pPr>
+                      <a:r>
+                        <a:rPr lang="en-US" sz="1100" b="1" dirty="0">
+                          <a:solidFill>
+                            <a:srgbClr val="1A1A1A"/>
+                          </a:solidFill>
+                        </a:rPr>
+                        <a:t>3.1%</a:t>
+                      </a:r>
+                      <a:endParaRPr lang="en-US" sz="1100" dirty="0"/>
+                    </a:p>
+                  </a:txBody>
+                  <a:tcPr marL="91440" marR="91440" marT="45720" marB="45720" anchor="ctr">
+                    <a:lnL w="9525" cap="flat" cmpd="sng" algn="ctr">
+                      <a:solidFill>
+                        <a:srgbClr val="E5E5E5"/>
+                      </a:solidFill>
+                      <a:prstDash val="solid"/>
+                      <a:round/>
+                      <a:headEnd type="none" w="med" len="med"/>
+                      <a:tailEnd type="none" w="med" len="med"/>
+                    </a:lnL>
+                    <a:lnR w="9525" cap="flat" cmpd="sng" algn="ctr">
+                      <a:solidFill>
+                        <a:srgbClr val="E5E5E5"/>
+                      </a:solidFill>
+                      <a:prstDash val="solid"/>
+                      <a:round/>
+                      <a:headEnd type="none" w="med" len="med"/>
+                      <a:tailEnd type="none" w="med" len="med"/>
+                    </a:lnR>
+                    <a:lnT w="9525" cap="flat" cmpd="sng" algn="ctr">
+                      <a:solidFill>
+                        <a:srgbClr val="E5E5E5"/>
+                      </a:solidFill>
+                      <a:prstDash val="solid"/>
+                      <a:round/>
+                      <a:headEnd type="none" w="med" len="med"/>
+                      <a:tailEnd type="none" w="med" len="med"/>
+                    </a:lnT>
+                    <a:lnB w="9525" cap="flat" cmpd="sng" algn="ctr">
+                      <a:solidFill>
+                        <a:srgbClr val="E5E5E5"/>
+                      </a:solidFill>
+                      <a:prstDash val="solid"/>
+                      <a:round/>
+                      <a:headEnd type="none" w="med" len="med"/>
+                      <a:tailEnd type="none" w="med" len="med"/>
+                    </a:lnB>
+                    <a:solidFill>
+                      <a:srgbClr val="FFFFFF"/>
+                    </a:solidFill>
+                  </a:tcPr>
+                </a:tc>
+                <a:tc>
+                  <a:txBody>
+                    <a:bodyPr/>
+                    <a:lstStyle/>
+                    <a:p>
+                      <a:pPr algn="l" indent="0" marL="0">
+                        <a:buNone/>
+                      </a:pPr>
+                      <a:r>
+                        <a:rPr lang="en-US" sz="1100" b="1" dirty="0">
+                          <a:solidFill>
+                            <a:srgbClr val="1A1A1A"/>
+                          </a:solidFill>
+                        </a:rPr>
+                        <a:t>49.4%</a:t>
+                      </a:r>
+                      <a:endParaRPr lang="en-US" sz="1100" dirty="0"/>
+                    </a:p>
+                  </a:txBody>
+                  <a:tcPr marL="91440" marR="91440" marT="45720" marB="45720" anchor="ctr">
+                    <a:lnL w="9525" cap="flat" cmpd="sng" algn="ctr">
+                      <a:solidFill>
+                        <a:srgbClr val="E5E5E5"/>
+                      </a:solidFill>
+                      <a:prstDash val="solid"/>
+                      <a:round/>
+                      <a:headEnd type="none" w="med" len="med"/>
+                      <a:tailEnd type="none" w="med" len="med"/>
+                    </a:lnL>
+                    <a:lnR w="9525" cap="flat" cmpd="sng" algn="ctr">
+                      <a:solidFill>
+                        <a:srgbClr val="E5E5E5"/>
+                      </a:solidFill>
+                      <a:prstDash val="solid"/>
+                      <a:round/>
+                      <a:headEnd type="none" w="med" len="med"/>
+                      <a:tailEnd type="none" w="med" len="med"/>
+                    </a:lnR>
+                    <a:lnT w="9525" cap="flat" cmpd="sng" algn="ctr">
+                      <a:solidFill>
+                        <a:srgbClr val="E5E5E5"/>
+                      </a:solidFill>
+                      <a:prstDash val="solid"/>
+                      <a:round/>
+                      <a:headEnd type="none" w="med" len="med"/>
+                      <a:tailEnd type="none" w="med" len="med"/>
+                    </a:lnT>
+                    <a:lnB w="9525" cap="flat" cmpd="sng" algn="ctr">
+                      <a:solidFill>
+                        <a:srgbClr val="E5E5E5"/>
+                      </a:solidFill>
+                      <a:prstDash val="solid"/>
+                      <a:round/>
+                      <a:headEnd type="none" w="med" len="med"/>
+                      <a:tailEnd type="none" w="med" len="med"/>
+                    </a:lnB>
+                    <a:solidFill>
+                      <a:srgbClr val="FFFFFF"/>
+                    </a:solidFill>
+                  </a:tcPr>
+                </a:tc>
+                <a:tc>
+                  <a:txBody>
+                    <a:bodyPr/>
+                    <a:lstStyle/>
+                    <a:p>
+                      <a:pPr algn="l" indent="0" marL="0">
+                        <a:buNone/>
+                      </a:pPr>
+                      <a:r>
+                        <a:rPr lang="en-US" sz="1100" b="1" dirty="0">
+                          <a:solidFill>
+                            <a:srgbClr val="1A1A1A"/>
+                          </a:solidFill>
+                        </a:rPr>
+                        <a:t>107.6</a:t>
+                      </a:r>
+                      <a:endParaRPr lang="en-US" sz="1100" dirty="0"/>
+                    </a:p>
+                  </a:txBody>
+                  <a:tcPr marL="91440" marR="91440" marT="45720" marB="45720" anchor="ctr">
+                    <a:lnL w="9525" cap="flat" cmpd="sng" algn="ctr">
+                      <a:solidFill>
+                        <a:srgbClr val="E5E5E5"/>
+                      </a:solidFill>
+                      <a:prstDash val="solid"/>
+                      <a:round/>
+                      <a:headEnd type="none" w="med" len="med"/>
+                      <a:tailEnd type="none" w="med" len="med"/>
+                    </a:lnL>
+                    <a:lnR w="9525" cap="flat" cmpd="sng" algn="ctr">
+                      <a:solidFill>
+                        <a:srgbClr val="E5E5E5"/>
+                      </a:solidFill>
+                      <a:prstDash val="solid"/>
+                      <a:round/>
+                      <a:headEnd type="none" w="med" len="med"/>
+                      <a:tailEnd type="none" w="med" len="med"/>
+                    </a:lnR>
+                    <a:lnT w="9525" cap="flat" cmpd="sng" algn="ctr">
+                      <a:solidFill>
+                        <a:srgbClr val="E5E5E5"/>
+                      </a:solidFill>
+                      <a:prstDash val="solid"/>
+                      <a:round/>
+                      <a:headEnd type="none" w="med" len="med"/>
+                      <a:tailEnd type="none" w="med" len="med"/>
+                    </a:lnT>
+                    <a:lnB w="9525" cap="flat" cmpd="sng" algn="ctr">
+                      <a:solidFill>
+                        <a:srgbClr val="E5E5E5"/>
+                      </a:solidFill>
+                      <a:prstDash val="solid"/>
+                      <a:round/>
+                      <a:headEnd type="none" w="med" len="med"/>
+                      <a:tailEnd type="none" w="med" len="med"/>
+                    </a:lnB>
+                    <a:solidFill>
+                      <a:srgbClr val="FFFFFF"/>
+                    </a:solidFill>
+                  </a:tcPr>
+                </a:tc>
+                <a:tc>
+                  <a:txBody>
+                    <a:bodyPr/>
+                    <a:lstStyle/>
+                    <a:p>
+                      <a:pPr algn="l" indent="0" marL="0">
+                        <a:buNone/>
+                      </a:pPr>
+                      <a:r>
+                        <a:rPr lang="en-US" sz="1100" b="1" dirty="0">
+                          <a:solidFill>
+                            <a:srgbClr val="1A1A1A"/>
+                          </a:solidFill>
+                        </a:rPr>
+                        <a:t>6.3</a:t>
+                      </a:r>
+                      <a:endParaRPr lang="en-US" sz="1100" dirty="0"/>
+                    </a:p>
+                  </a:txBody>
+                  <a:tcPr marL="91440" marR="91440" marT="45720" marB="45720" anchor="ctr">
+                    <a:lnL w="9525" cap="flat" cmpd="sng" algn="ctr">
+                      <a:solidFill>
+                        <a:srgbClr val="E5E5E5"/>
+                      </a:solidFill>
+                      <a:prstDash val="solid"/>
+                      <a:round/>
+                      <a:headEnd type="none" w="med" len="med"/>
+                      <a:tailEnd type="none" w="med" len="med"/>
+                    </a:lnL>
+                    <a:lnR w="9525" cap="flat" cmpd="sng" algn="ctr">
+                      <a:solidFill>
+                        <a:srgbClr val="E5E5E5"/>
+                      </a:solidFill>
+                      <a:prstDash val="solid"/>
+                      <a:round/>
+                      <a:headEnd type="none" w="med" len="med"/>
+                      <a:tailEnd type="none" w="med" len="med"/>
+                    </a:lnR>
+                    <a:lnT w="9525" cap="flat" cmpd="sng" algn="ctr">
+                      <a:solidFill>
+                        <a:srgbClr val="E5E5E5"/>
+                      </a:solidFill>
+                      <a:prstDash val="solid"/>
+                      <a:round/>
+                      <a:headEnd type="none" w="med" len="med"/>
+                      <a:tailEnd type="none" w="med" len="med"/>
+                    </a:lnT>
+                    <a:lnB w="9525" cap="flat" cmpd="sng" algn="ctr">
+                      <a:solidFill>
+                        <a:srgbClr val="E5E5E5"/>
+                      </a:solidFill>
+                      <a:prstDash val="solid"/>
+                      <a:round/>
+                      <a:headEnd type="none" w="med" len="med"/>
+                      <a:tailEnd type="none" w="med" len="med"/>
+                    </a:lnB>
+                    <a:solidFill>
+                      <a:srgbClr val="FFFFFF"/>
+                    </a:solidFill>
+                  </a:tcPr>
+                </a:tc>
+                <a:tc>
+                  <a:txBody>
+                    <a:bodyPr/>
+                    <a:lstStyle/>
+                    <a:p>
+                      <a:pPr algn="l" indent="0" marL="0">
+                        <a:buNone/>
+                      </a:pPr>
+                      <a:r>
+                        <a:rPr lang="en-US" sz="1100" b="1" dirty="0">
+                          <a:solidFill>
+                            <a:srgbClr val="1A1A1A"/>
+                          </a:solidFill>
+                        </a:rPr>
+                        <a:t>65.0%</a:t>
+                      </a:r>
+                      <a:endParaRPr lang="en-US" sz="1100" dirty="0"/>
+                    </a:p>
+                  </a:txBody>
+                  <a:tcPr marL="91440" marR="91440" marT="45720" marB="45720" anchor="ctr">
+                    <a:lnL w="9525" cap="flat" cmpd="sng" algn="ctr">
+                      <a:solidFill>
+                        <a:srgbClr val="E5E5E5"/>
+                      </a:solidFill>
+                      <a:prstDash val="solid"/>
+                      <a:round/>
+                      <a:headEnd type="none" w="med" len="med"/>
+                      <a:tailEnd type="none" w="med" len="med"/>
+                    </a:lnL>
+                    <a:lnR w="9525" cap="flat" cmpd="sng" algn="ctr">
+                      <a:solidFill>
+                        <a:srgbClr val="E5E5E5"/>
+                      </a:solidFill>
+                      <a:prstDash val="solid"/>
+                      <a:round/>
+                      <a:headEnd type="none" w="med" len="med"/>
+                      <a:tailEnd type="none" w="med" len="med"/>
+                    </a:lnR>
+                    <a:lnT w="9525" cap="flat" cmpd="sng" algn="ctr">
+                      <a:solidFill>
+                        <a:srgbClr val="E5E5E5"/>
+                      </a:solidFill>
+                      <a:prstDash val="solid"/>
+                      <a:round/>
+                      <a:headEnd type="none" w="med" len="med"/>
+                      <a:tailEnd type="none" w="med" len="med"/>
+                    </a:lnT>
+                    <a:lnB w="9525" cap="flat" cmpd="sng" algn="ctr">
+                      <a:solidFill>
+                        <a:srgbClr val="E5E5E5"/>
+                      </a:solidFill>
+                      <a:prstDash val="solid"/>
+                      <a:round/>
+                      <a:headEnd type="none" w="med" len="med"/>
+                      <a:tailEnd type="none" w="med" len="med"/>
+                    </a:lnB>
+                    <a:solidFill>
+                      <a:srgbClr val="FFFFFF"/>
+                    </a:solidFill>
+                  </a:tcPr>
+                </a:tc>
+                <a:tc>
+                  <a:txBody>
+                    <a:bodyPr/>
+                    <a:lstStyle/>
+                    <a:p>
+                      <a:pPr algn="l" indent="0" marL="0">
+                        <a:buNone/>
+                      </a:pPr>
+                      <a:r>
+                        <a:rPr lang="en-US" sz="1100" b="1" dirty="0">
+                          <a:solidFill>
+                            <a:srgbClr val="E10600"/>
+                          </a:solidFill>
+                        </a:rPr>
+                        <a:t>47.8%</a:t>
+                      </a:r>
+                      <a:endParaRPr lang="en-US" sz="1100" dirty="0"/>
+                    </a:p>
+                  </a:txBody>
+                  <a:tcPr marL="91440" marR="91440" marT="45720" marB="45720" anchor="ctr">
+                    <a:lnL w="9525" cap="flat" cmpd="sng" algn="ctr">
+                      <a:solidFill>
+                        <a:srgbClr val="E5E5E5"/>
+                      </a:solidFill>
+                      <a:prstDash val="solid"/>
+                      <a:round/>
+                      <a:headEnd type="none" w="med" len="med"/>
+                      <a:tailEnd type="none" w="med" len="med"/>
+                    </a:lnL>
+                    <a:lnR w="9525" cap="flat" cmpd="sng" algn="ctr">
+                      <a:solidFill>
+                        <a:srgbClr val="E5E5E5"/>
+                      </a:solidFill>
+                      <a:prstDash val="solid"/>
+                      <a:round/>
+                      <a:headEnd type="none" w="med" len="med"/>
+                      <a:tailEnd type="none" w="med" len="med"/>
+                    </a:lnR>
+                    <a:lnT w="9525" cap="flat" cmpd="sng" algn="ctr">
+                      <a:solidFill>
+                        <a:srgbClr val="E5E5E5"/>
+                      </a:solidFill>
+                      <a:prstDash val="solid"/>
+                      <a:round/>
+                      <a:headEnd type="none" w="med" len="med"/>
+                      <a:tailEnd type="none" w="med" len="med"/>
+                    </a:lnT>
+                    <a:lnB w="9525" cap="flat" cmpd="sng" algn="ctr">
+                      <a:solidFill>
+                        <a:srgbClr val="E5E5E5"/>
+                      </a:solidFill>
+                      <a:prstDash val="solid"/>
+                      <a:round/>
+                      <a:headEnd type="none" w="med" len="med"/>
+                      <a:tailEnd type="none" w="med" len="med"/>
+                    </a:lnB>
+                    <a:solidFill>
+                      <a:srgbClr val="FFFFFF"/>
+                    </a:solidFill>
+                  </a:tcPr>
+                </a:tc>
+              </a:tr>
+              <a:tr h="512064">
+                <a:tc>
+                  <a:txBody>
+                    <a:bodyPr/>
+                    <a:lstStyle/>
+                    <a:p>
+                      <a:pPr algn="l" indent="0" marL="0">
+                        <a:buNone/>
+                      </a:pPr>
+                      <a:r>
+                        <a:rPr lang="en-US" sz="1100" b="1" dirty="0">
+                          <a:solidFill>
+                            <a:srgbClr val="1A1A1A"/>
+                          </a:solidFill>
+                        </a:rPr>
+                        <a:t>↔ Carlos SAINZ</a:t>
+                      </a:r>
+                      <a:endParaRPr lang="en-US" sz="1100" dirty="0"/>
+                    </a:p>
+                  </a:txBody>
+                  <a:tcPr marL="91440" marR="91440" marT="45720" marB="45720" anchor="ctr">
+                    <a:lnL w="9525" cap="flat" cmpd="sng" algn="ctr">
+                      <a:solidFill>
+                        <a:srgbClr val="E5E5E5"/>
+                      </a:solidFill>
+                      <a:prstDash val="solid"/>
+                      <a:round/>
+                      <a:headEnd type="none" w="med" len="med"/>
+                      <a:tailEnd type="none" w="med" len="med"/>
+                    </a:lnL>
+                    <a:lnR w="9525" cap="flat" cmpd="sng" algn="ctr">
+                      <a:solidFill>
+                        <a:srgbClr val="E5E5E5"/>
+                      </a:solidFill>
+                      <a:prstDash val="solid"/>
+                      <a:round/>
+                      <a:headEnd type="none" w="med" len="med"/>
+                      <a:tailEnd type="none" w="med" len="med"/>
+                    </a:lnR>
+                    <a:lnT w="9525" cap="flat" cmpd="sng" algn="ctr">
+                      <a:solidFill>
+                        <a:srgbClr val="E5E5E5"/>
+                      </a:solidFill>
+                      <a:prstDash val="solid"/>
+                      <a:round/>
+                      <a:headEnd type="none" w="med" len="med"/>
+                      <a:tailEnd type="none" w="med" len="med"/>
+                    </a:lnT>
+                    <a:lnB w="9525" cap="flat" cmpd="sng" algn="ctr">
+                      <a:solidFill>
+                        <a:srgbClr val="E5E5E5"/>
+                      </a:solidFill>
+                      <a:prstDash val="solid"/>
+                      <a:round/>
+                      <a:headEnd type="none" w="med" len="med"/>
+                      <a:tailEnd type="none" w="med" len="med"/>
+                    </a:lnB>
+                    <a:solidFill>
+                      <a:srgbClr val="F4F4F4"/>
+                    </a:solidFill>
+                  </a:tcPr>
+                </a:tc>
+                <a:tc>
+                  <a:txBody>
+                    <a:bodyPr/>
+                    <a:lstStyle/>
+                    <a:p>
+                      <a:pPr algn="l" indent="0" marL="0">
+                        <a:buNone/>
+                      </a:pPr>
+                      <a:r>
+                        <a:rPr lang="en-US" sz="1100" dirty="0">
+                          <a:solidFill>
+                            <a:srgbClr val="1A1A1A"/>
+                          </a:solidFill>
+                        </a:rPr>
+                        <a:t>Williams</a:t>
+                      </a:r>
+                      <a:endParaRPr lang="en-US" sz="1100" dirty="0"/>
+                    </a:p>
+                  </a:txBody>
+                  <a:tcPr marL="91440" marR="91440" marT="45720" marB="45720" anchor="ctr">
+                    <a:lnL w="9525" cap="flat" cmpd="sng" algn="ctr">
+                      <a:solidFill>
+                        <a:srgbClr val="E5E5E5"/>
+                      </a:solidFill>
+                      <a:prstDash val="solid"/>
+                      <a:round/>
+                      <a:headEnd type="none" w="med" len="med"/>
+                      <a:tailEnd type="none" w="med" len="med"/>
+                    </a:lnL>
+                    <a:lnR w="9525" cap="flat" cmpd="sng" algn="ctr">
+                      <a:solidFill>
+                        <a:srgbClr val="E5E5E5"/>
+                      </a:solidFill>
+                      <a:prstDash val="solid"/>
+                      <a:round/>
+                      <a:headEnd type="none" w="med" len="med"/>
+                      <a:tailEnd type="none" w="med" len="med"/>
+                    </a:lnR>
+                    <a:lnT w="9525" cap="flat" cmpd="sng" algn="ctr">
+                      <a:solidFill>
+                        <a:srgbClr val="E5E5E5"/>
+                      </a:solidFill>
+                      <a:prstDash val="solid"/>
+                      <a:round/>
+                      <a:headEnd type="none" w="med" len="med"/>
+                      <a:tailEnd type="none" w="med" len="med"/>
+                    </a:lnT>
+                    <a:lnB w="9525" cap="flat" cmpd="sng" algn="ctr">
+                      <a:solidFill>
+                        <a:srgbClr val="E5E5E5"/>
+                      </a:solidFill>
+                      <a:prstDash val="solid"/>
+                      <a:round/>
+                      <a:headEnd type="none" w="med" len="med"/>
+                      <a:tailEnd type="none" w="med" len="med"/>
+                    </a:lnB>
+                    <a:solidFill>
+                      <a:srgbClr val="F4F4F4"/>
+                    </a:solidFill>
+                  </a:tcPr>
+                </a:tc>
+                <a:tc>
+                  <a:txBody>
+                    <a:bodyPr/>
+                    <a:lstStyle/>
+                    <a:p>
+                      <a:pPr algn="l" indent="0" marL="0">
+                        <a:buNone/>
+                      </a:pPr>
+                      <a:r>
+                        <a:rPr lang="en-US" sz="1100" dirty="0">
+                          <a:solidFill>
+                            <a:srgbClr val="1A1A1A"/>
+                          </a:solidFill>
+                        </a:rPr>
+                        <a:t>1.4%</a:t>
+                      </a:r>
+                      <a:endParaRPr lang="en-US" sz="1100" dirty="0"/>
+                    </a:p>
+                  </a:txBody>
+                  <a:tcPr marL="91440" marR="91440" marT="45720" marB="45720" anchor="ctr">
+                    <a:lnL w="9525" cap="flat" cmpd="sng" algn="ctr">
+                      <a:solidFill>
+                        <a:srgbClr val="E5E5E5"/>
+                      </a:solidFill>
+                      <a:prstDash val="solid"/>
+                      <a:round/>
+                      <a:headEnd type="none" w="med" len="med"/>
+                      <a:tailEnd type="none" w="med" len="med"/>
+                    </a:lnL>
+                    <a:lnR w="9525" cap="flat" cmpd="sng" algn="ctr">
+                      <a:solidFill>
+                        <a:srgbClr val="E5E5E5"/>
+                      </a:solidFill>
+                      <a:prstDash val="solid"/>
+                      <a:round/>
+                      <a:headEnd type="none" w="med" len="med"/>
+                      <a:tailEnd type="none" w="med" len="med"/>
+                    </a:lnR>
+                    <a:lnT w="9525" cap="flat" cmpd="sng" algn="ctr">
+                      <a:solidFill>
+                        <a:srgbClr val="E5E5E5"/>
+                      </a:solidFill>
+                      <a:prstDash val="solid"/>
+                      <a:round/>
+                      <a:headEnd type="none" w="med" len="med"/>
+                      <a:tailEnd type="none" w="med" len="med"/>
+                    </a:lnT>
+                    <a:lnB w="9525" cap="flat" cmpd="sng" algn="ctr">
+                      <a:solidFill>
+                        <a:srgbClr val="E5E5E5"/>
+                      </a:solidFill>
+                      <a:prstDash val="solid"/>
+                      <a:round/>
+                      <a:headEnd type="none" w="med" len="med"/>
+                      <a:tailEnd type="none" w="med" len="med"/>
+                    </a:lnB>
+                    <a:solidFill>
+                      <a:srgbClr val="F4F4F4"/>
+                    </a:solidFill>
+                  </a:tcPr>
+                </a:tc>
+                <a:tc>
+                  <a:txBody>
+                    <a:bodyPr/>
+                    <a:lstStyle/>
+                    <a:p>
+                      <a:pPr algn="l" indent="0" marL="0">
+                        <a:buNone/>
+                      </a:pPr>
+                      <a:r>
+                        <a:rPr lang="en-US" sz="1100" dirty="0">
+                          <a:solidFill>
+                            <a:srgbClr val="1A1A1A"/>
+                          </a:solidFill>
+                        </a:rPr>
+                        <a:t>32.5%</a:t>
+                      </a:r>
+                      <a:endParaRPr lang="en-US" sz="1100" dirty="0"/>
+                    </a:p>
+                  </a:txBody>
+                  <a:tcPr marL="91440" marR="91440" marT="45720" marB="45720" anchor="ctr">
+                    <a:lnL w="9525" cap="flat" cmpd="sng" algn="ctr">
+                      <a:solidFill>
+                        <a:srgbClr val="E5E5E5"/>
+                      </a:solidFill>
+                      <a:prstDash val="solid"/>
+                      <a:round/>
+                      <a:headEnd type="none" w="med" len="med"/>
+                      <a:tailEnd type="none" w="med" len="med"/>
+                    </a:lnL>
+                    <a:lnR w="9525" cap="flat" cmpd="sng" algn="ctr">
+                      <a:solidFill>
+                        <a:srgbClr val="E5E5E5"/>
+                      </a:solidFill>
+                      <a:prstDash val="solid"/>
+                      <a:round/>
+                      <a:headEnd type="none" w="med" len="med"/>
+                      <a:tailEnd type="none" w="med" len="med"/>
+                    </a:lnR>
+                    <a:lnT w="9525" cap="flat" cmpd="sng" algn="ctr">
+                      <a:solidFill>
+                        <a:srgbClr val="E5E5E5"/>
+                      </a:solidFill>
+                      <a:prstDash val="solid"/>
+                      <a:round/>
+                      <a:headEnd type="none" w="med" len="med"/>
+                      <a:tailEnd type="none" w="med" len="med"/>
+                    </a:lnT>
+                    <a:lnB w="9525" cap="flat" cmpd="sng" algn="ctr">
+                      <a:solidFill>
+                        <a:srgbClr val="E5E5E5"/>
+                      </a:solidFill>
+                      <a:prstDash val="solid"/>
+                      <a:round/>
+                      <a:headEnd type="none" w="med" len="med"/>
+                      <a:tailEnd type="none" w="med" len="med"/>
+                    </a:lnB>
+                    <a:solidFill>
+                      <a:srgbClr val="F4F4F4"/>
+                    </a:solidFill>
+                  </a:tcPr>
+                </a:tc>
+                <a:tc>
+                  <a:txBody>
+                    <a:bodyPr/>
+                    <a:lstStyle/>
+                    <a:p>
+                      <a:pPr algn="l" indent="0" marL="0">
+                        <a:buNone/>
+                      </a:pPr>
+                      <a:r>
+                        <a:rPr lang="en-US" sz="1100" dirty="0">
+                          <a:solidFill>
+                            <a:srgbClr val="1A1A1A"/>
+                          </a:solidFill>
+                        </a:rPr>
+                        <a:t>90.8</a:t>
+                      </a:r>
+                      <a:endParaRPr lang="en-US" sz="1100" dirty="0"/>
+                    </a:p>
+                  </a:txBody>
+                  <a:tcPr marL="91440" marR="91440" marT="45720" marB="45720" anchor="ctr">
+                    <a:lnL w="9525" cap="flat" cmpd="sng" algn="ctr">
+                      <a:solidFill>
+                        <a:srgbClr val="E5E5E5"/>
+                      </a:solidFill>
+                      <a:prstDash val="solid"/>
+                      <a:round/>
+                      <a:headEnd type="none" w="med" len="med"/>
+                      <a:tailEnd type="none" w="med" len="med"/>
+                    </a:lnL>
+                    <a:lnR w="9525" cap="flat" cmpd="sng" algn="ctr">
+                      <a:solidFill>
+                        <a:srgbClr val="E5E5E5"/>
+                      </a:solidFill>
+                      <a:prstDash val="solid"/>
+                      <a:round/>
+                      <a:headEnd type="none" w="med" len="med"/>
+                      <a:tailEnd type="none" w="med" len="med"/>
+                    </a:lnR>
+                    <a:lnT w="9525" cap="flat" cmpd="sng" algn="ctr">
+                      <a:solidFill>
+                        <a:srgbClr val="E5E5E5"/>
+                      </a:solidFill>
+                      <a:prstDash val="solid"/>
+                      <a:round/>
+                      <a:headEnd type="none" w="med" len="med"/>
+                      <a:tailEnd type="none" w="med" len="med"/>
+                    </a:lnT>
+                    <a:lnB w="9525" cap="flat" cmpd="sng" algn="ctr">
+                      <a:solidFill>
+                        <a:srgbClr val="E5E5E5"/>
+                      </a:solidFill>
+                      <a:prstDash val="solid"/>
+                      <a:round/>
+                      <a:headEnd type="none" w="med" len="med"/>
+                      <a:tailEnd type="none" w="med" len="med"/>
+                    </a:lnB>
+                    <a:solidFill>
+                      <a:srgbClr val="F4F4F4"/>
+                    </a:solidFill>
+                  </a:tcPr>
+                </a:tc>
+                <a:tc>
+                  <a:txBody>
+                    <a:bodyPr/>
+                    <a:lstStyle/>
+                    <a:p>
+                      <a:pPr algn="l" indent="0" marL="0">
+                        <a:buNone/>
+                      </a:pPr>
+                      <a:r>
+                        <a:rPr lang="en-US" sz="1100" dirty="0">
+                          <a:solidFill>
+                            <a:srgbClr val="1A1A1A"/>
+                          </a:solidFill>
+                        </a:rPr>
+                        <a:t>6.5</a:t>
+                      </a:r>
+                      <a:endParaRPr lang="en-US" sz="1100" dirty="0"/>
+                    </a:p>
+                  </a:txBody>
+                  <a:tcPr marL="91440" marR="91440" marT="45720" marB="45720" anchor="ctr">
+                    <a:lnL w="9525" cap="flat" cmpd="sng" algn="ctr">
+                      <a:solidFill>
+                        <a:srgbClr val="E5E5E5"/>
+                      </a:solidFill>
+                      <a:prstDash val="solid"/>
+                      <a:round/>
+                      <a:headEnd type="none" w="med" len="med"/>
+                      <a:tailEnd type="none" w="med" len="med"/>
+                    </a:lnL>
+                    <a:lnR w="9525" cap="flat" cmpd="sng" algn="ctr">
+                      <a:solidFill>
+                        <a:srgbClr val="E5E5E5"/>
+                      </a:solidFill>
+                      <a:prstDash val="solid"/>
+                      <a:round/>
+                      <a:headEnd type="none" w="med" len="med"/>
+                      <a:tailEnd type="none" w="med" len="med"/>
+                    </a:lnR>
+                    <a:lnT w="9525" cap="flat" cmpd="sng" algn="ctr">
+                      <a:solidFill>
+                        <a:srgbClr val="E5E5E5"/>
+                      </a:solidFill>
+                      <a:prstDash val="solid"/>
+                      <a:round/>
+                      <a:headEnd type="none" w="med" len="med"/>
+                      <a:tailEnd type="none" w="med" len="med"/>
+                    </a:lnT>
+                    <a:lnB w="9525" cap="flat" cmpd="sng" algn="ctr">
+                      <a:solidFill>
+                        <a:srgbClr val="E5E5E5"/>
+                      </a:solidFill>
+                      <a:prstDash val="solid"/>
+                      <a:round/>
+                      <a:headEnd type="none" w="med" len="med"/>
+                      <a:tailEnd type="none" w="med" len="med"/>
+                    </a:lnB>
+                    <a:solidFill>
+                      <a:srgbClr val="F4F4F4"/>
+                    </a:solidFill>
+                  </a:tcPr>
+                </a:tc>
+                <a:tc>
+                  <a:txBody>
+                    <a:bodyPr/>
+                    <a:lstStyle/>
+                    <a:p>
+                      <a:pPr algn="l" indent="0" marL="0">
+                        <a:buNone/>
+                      </a:pPr>
+                      <a:r>
+                        <a:rPr lang="en-US" sz="1100" dirty="0">
+                          <a:solidFill>
+                            <a:srgbClr val="1A1A1A"/>
+                          </a:solidFill>
+                        </a:rPr>
+                        <a:t>53.9%</a:t>
+                      </a:r>
+                      <a:endParaRPr lang="en-US" sz="1100" dirty="0"/>
+                    </a:p>
+                  </a:txBody>
+                  <a:tcPr marL="91440" marR="91440" marT="45720" marB="45720" anchor="ctr">
+                    <a:lnL w="9525" cap="flat" cmpd="sng" algn="ctr">
+                      <a:solidFill>
+                        <a:srgbClr val="E5E5E5"/>
+                      </a:solidFill>
+                      <a:prstDash val="solid"/>
+                      <a:round/>
+                      <a:headEnd type="none" w="med" len="med"/>
+                      <a:tailEnd type="none" w="med" len="med"/>
+                    </a:lnL>
+                    <a:lnR w="9525" cap="flat" cmpd="sng" algn="ctr">
+                      <a:solidFill>
+                        <a:srgbClr val="E5E5E5"/>
+                      </a:solidFill>
+                      <a:prstDash val="solid"/>
+                      <a:round/>
+                      <a:headEnd type="none" w="med" len="med"/>
+                      <a:tailEnd type="none" w="med" len="med"/>
+                    </a:lnR>
+                    <a:lnT w="9525" cap="flat" cmpd="sng" algn="ctr">
+                      <a:solidFill>
+                        <a:srgbClr val="E5E5E5"/>
+                      </a:solidFill>
+                      <a:prstDash val="solid"/>
+                      <a:round/>
+                      <a:headEnd type="none" w="med" len="med"/>
+                      <a:tailEnd type="none" w="med" len="med"/>
+                    </a:lnT>
+                    <a:lnB w="9525" cap="flat" cmpd="sng" algn="ctr">
+                      <a:solidFill>
+                        <a:srgbClr val="E5E5E5"/>
+                      </a:solidFill>
+                      <a:prstDash val="solid"/>
+                      <a:round/>
+                      <a:headEnd type="none" w="med" len="med"/>
+                      <a:tailEnd type="none" w="med" len="med"/>
+                    </a:lnB>
+                    <a:solidFill>
+                      <a:srgbClr val="F4F4F4"/>
+                    </a:solidFill>
+                  </a:tcPr>
+                </a:tc>
+                <a:tc>
+                  <a:txBody>
+                    <a:bodyPr/>
+                    <a:lstStyle/>
+                    <a:p>
+                      <a:pPr algn="l" indent="0" marL="0">
+                        <a:buNone/>
+                      </a:pPr>
+                      <a:r>
+                        <a:rPr lang="en-US" sz="1100" dirty="0">
+                          <a:solidFill>
+                            <a:srgbClr val="6B6B6B"/>
+                          </a:solidFill>
+                        </a:rPr>
+                        <a:t>17.6%</a:t>
+                      </a:r>
+                      <a:endParaRPr lang="en-US" sz="1100" dirty="0"/>
+                    </a:p>
+                  </a:txBody>
+                  <a:tcPr marL="91440" marR="91440" marT="45720" marB="45720" anchor="ctr">
+                    <a:lnL w="9525" cap="flat" cmpd="sng" algn="ctr">
+                      <a:solidFill>
+                        <a:srgbClr val="E5E5E5"/>
+                      </a:solidFill>
+                      <a:prstDash val="solid"/>
+                      <a:round/>
+                      <a:headEnd type="none" w="med" len="med"/>
+                      <a:tailEnd type="none" w="med" len="med"/>
+                    </a:lnL>
+                    <a:lnR w="9525" cap="flat" cmpd="sng" algn="ctr">
+                      <a:solidFill>
+                        <a:srgbClr val="E5E5E5"/>
+                      </a:solidFill>
+                      <a:prstDash val="solid"/>
+                      <a:round/>
+                      <a:headEnd type="none" w="med" len="med"/>
+                      <a:tailEnd type="none" w="med" len="med"/>
+                    </a:lnR>
+                    <a:lnT w="9525" cap="flat" cmpd="sng" algn="ctr">
+                      <a:solidFill>
+                        <a:srgbClr val="E5E5E5"/>
+                      </a:solidFill>
+                      <a:prstDash val="solid"/>
+                      <a:round/>
+                      <a:headEnd type="none" w="med" len="med"/>
+                      <a:tailEnd type="none" w="med" len="med"/>
+                    </a:lnT>
+                    <a:lnB w="9525" cap="flat" cmpd="sng" algn="ctr">
+                      <a:solidFill>
+                        <a:srgbClr val="E5E5E5"/>
+                      </a:solidFill>
+                      <a:prstDash val="solid"/>
+                      <a:round/>
+                      <a:headEnd type="none" w="med" len="med"/>
+                      <a:tailEnd type="none" w="med" len="med"/>
+                    </a:lnB>
+                    <a:solidFill>
+                      <a:srgbClr val="F4F4F4"/>
+                    </a:solidFill>
+                  </a:tcPr>
+                </a:tc>
+              </a:tr>
+              <a:tr h="512064">
+                <a:tc>
+                  <a:txBody>
+                    <a:bodyPr/>
+                    <a:lstStyle/>
+                    <a:p>
+                      <a:pPr algn="l" indent="0" marL="0">
+                        <a:buNone/>
+                      </a:pPr>
+                      <a:r>
+                        <a:rPr lang="en-US" sz="1100" b="1" dirty="0">
+                          <a:solidFill>
+                            <a:srgbClr val="1A1A1A"/>
+                          </a:solidFill>
+                        </a:rPr>
+                        <a:t>↔ Lando NORRIS</a:t>
+                      </a:r>
+                      <a:endParaRPr lang="en-US" sz="1100" dirty="0"/>
+                    </a:p>
+                  </a:txBody>
+                  <a:tcPr marL="91440" marR="91440" marT="45720" marB="45720" anchor="ctr">
+                    <a:lnL w="9525" cap="flat" cmpd="sng" algn="ctr">
+                      <a:solidFill>
+                        <a:srgbClr val="E5E5E5"/>
+                      </a:solidFill>
+                      <a:prstDash val="solid"/>
+                      <a:round/>
+                      <a:headEnd type="none" w="med" len="med"/>
+                      <a:tailEnd type="none" w="med" len="med"/>
+                    </a:lnL>
+                    <a:lnR w="9525" cap="flat" cmpd="sng" algn="ctr">
+                      <a:solidFill>
+                        <a:srgbClr val="E5E5E5"/>
+                      </a:solidFill>
+                      <a:prstDash val="solid"/>
+                      <a:round/>
+                      <a:headEnd type="none" w="med" len="med"/>
+                      <a:tailEnd type="none" w="med" len="med"/>
+                    </a:lnR>
+                    <a:lnT w="9525" cap="flat" cmpd="sng" algn="ctr">
+                      <a:solidFill>
+                        <a:srgbClr val="E5E5E5"/>
+                      </a:solidFill>
+                      <a:prstDash val="solid"/>
+                      <a:round/>
+                      <a:headEnd type="none" w="med" len="med"/>
+                      <a:tailEnd type="none" w="med" len="med"/>
+                    </a:lnT>
+                    <a:lnB w="9525" cap="flat" cmpd="sng" algn="ctr">
+                      <a:solidFill>
+                        <a:srgbClr val="E5E5E5"/>
+                      </a:solidFill>
+                      <a:prstDash val="solid"/>
+                      <a:round/>
+                      <a:headEnd type="none" w="med" len="med"/>
+                      <a:tailEnd type="none" w="med" len="med"/>
+                    </a:lnB>
+                    <a:solidFill>
+                      <a:srgbClr val="FFFFFF"/>
+                    </a:solidFill>
+                  </a:tcPr>
+                </a:tc>
+                <a:tc>
+                  <a:txBody>
+                    <a:bodyPr/>
+                    <a:lstStyle/>
+                    <a:p>
+                      <a:pPr algn="l" indent="0" marL="0">
+                        <a:buNone/>
+                      </a:pPr>
+                      <a:r>
+                        <a:rPr lang="en-US" sz="1100" dirty="0">
+                          <a:solidFill>
+                            <a:srgbClr val="1A1A1A"/>
+                          </a:solidFill>
+                        </a:rPr>
+                        <a:t>McLaren</a:t>
+                      </a:r>
+                      <a:endParaRPr lang="en-US" sz="1100" dirty="0"/>
+                    </a:p>
+                  </a:txBody>
+                  <a:tcPr marL="91440" marR="91440" marT="45720" marB="45720" anchor="ctr">
+                    <a:lnL w="9525" cap="flat" cmpd="sng" algn="ctr">
+                      <a:solidFill>
+                        <a:srgbClr val="E5E5E5"/>
+                      </a:solidFill>
+                      <a:prstDash val="solid"/>
+                      <a:round/>
+                      <a:headEnd type="none" w="med" len="med"/>
+                      <a:tailEnd type="none" w="med" len="med"/>
+                    </a:lnL>
+                    <a:lnR w="9525" cap="flat" cmpd="sng" algn="ctr">
+                      <a:solidFill>
+                        <a:srgbClr val="E5E5E5"/>
+                      </a:solidFill>
+                      <a:prstDash val="solid"/>
+                      <a:round/>
+                      <a:headEnd type="none" w="med" len="med"/>
+                      <a:tailEnd type="none" w="med" len="med"/>
+                    </a:lnR>
+                    <a:lnT w="9525" cap="flat" cmpd="sng" algn="ctr">
+                      <a:solidFill>
+                        <a:srgbClr val="E5E5E5"/>
+                      </a:solidFill>
+                      <a:prstDash val="solid"/>
+                      <a:round/>
+                      <a:headEnd type="none" w="med" len="med"/>
+                      <a:tailEnd type="none" w="med" len="med"/>
+                    </a:lnT>
+                    <a:lnB w="9525" cap="flat" cmpd="sng" algn="ctr">
+                      <a:solidFill>
+                        <a:srgbClr val="E5E5E5"/>
+                      </a:solidFill>
+                      <a:prstDash val="solid"/>
+                      <a:round/>
+                      <a:headEnd type="none" w="med" len="med"/>
+                      <a:tailEnd type="none" w="med" len="med"/>
+                    </a:lnB>
+                    <a:solidFill>
+                      <a:srgbClr val="FFFFFF"/>
+                    </a:solidFill>
+                  </a:tcPr>
+                </a:tc>
+                <a:tc>
+                  <a:txBody>
+                    <a:bodyPr/>
+                    <a:lstStyle/>
+                    <a:p>
+                      <a:pPr algn="l" indent="0" marL="0">
+                        <a:buNone/>
+                      </a:pPr>
+                      <a:r>
+                        <a:rPr lang="en-US" sz="1100" dirty="0">
+                          <a:solidFill>
+                            <a:srgbClr val="1A1A1A"/>
+                          </a:solidFill>
+                        </a:rPr>
+                        <a:t>1.6%</a:t>
+                      </a:r>
+                      <a:endParaRPr lang="en-US" sz="1100" dirty="0"/>
+                    </a:p>
+                  </a:txBody>
+                  <a:tcPr marL="91440" marR="91440" marT="45720" marB="45720" anchor="ctr">
+                    <a:lnL w="9525" cap="flat" cmpd="sng" algn="ctr">
+                      <a:solidFill>
+                        <a:srgbClr val="E5E5E5"/>
+                      </a:solidFill>
+                      <a:prstDash val="solid"/>
+                      <a:round/>
+                      <a:headEnd type="none" w="med" len="med"/>
+                      <a:tailEnd type="none" w="med" len="med"/>
+                    </a:lnL>
+                    <a:lnR w="9525" cap="flat" cmpd="sng" algn="ctr">
+                      <a:solidFill>
+                        <a:srgbClr val="E5E5E5"/>
+                      </a:solidFill>
+                      <a:prstDash val="solid"/>
+                      <a:round/>
+                      <a:headEnd type="none" w="med" len="med"/>
+                      <a:tailEnd type="none" w="med" len="med"/>
+                    </a:lnR>
+                    <a:lnT w="9525" cap="flat" cmpd="sng" algn="ctr">
+                      <a:solidFill>
+                        <a:srgbClr val="E5E5E5"/>
+                      </a:solidFill>
+                      <a:prstDash val="solid"/>
+                      <a:round/>
+                      <a:headEnd type="none" w="med" len="med"/>
+                      <a:tailEnd type="none" w="med" len="med"/>
+                    </a:lnT>
+                    <a:lnB w="9525" cap="flat" cmpd="sng" algn="ctr">
+                      <a:solidFill>
+                        <a:srgbClr val="E5E5E5"/>
+                      </a:solidFill>
+                      <a:prstDash val="solid"/>
+                      <a:round/>
+                      <a:headEnd type="none" w="med" len="med"/>
+                      <a:tailEnd type="none" w="med" len="med"/>
+                    </a:lnB>
+                    <a:solidFill>
+                      <a:srgbClr val="FFFFFF"/>
+                    </a:solidFill>
+                  </a:tcPr>
+                </a:tc>
+                <a:tc>
+                  <a:txBody>
+                    <a:bodyPr/>
+                    <a:lstStyle/>
+                    <a:p>
+                      <a:pPr algn="l" indent="0" marL="0">
+                        <a:buNone/>
+                      </a:pPr>
+                      <a:r>
+                        <a:rPr lang="en-US" sz="1100" dirty="0">
+                          <a:solidFill>
+                            <a:srgbClr val="1A1A1A"/>
+                          </a:solidFill>
+                        </a:rPr>
+                        <a:t>31.6%</a:t>
+                      </a:r>
+                      <a:endParaRPr lang="en-US" sz="1100" dirty="0"/>
+                    </a:p>
+                  </a:txBody>
+                  <a:tcPr marL="91440" marR="91440" marT="45720" marB="45720" anchor="ctr">
+                    <a:lnL w="9525" cap="flat" cmpd="sng" algn="ctr">
+                      <a:solidFill>
+                        <a:srgbClr val="E5E5E5"/>
+                      </a:solidFill>
+                      <a:prstDash val="solid"/>
+                      <a:round/>
+                      <a:headEnd type="none" w="med" len="med"/>
+                      <a:tailEnd type="none" w="med" len="med"/>
+                    </a:lnL>
+                    <a:lnR w="9525" cap="flat" cmpd="sng" algn="ctr">
+                      <a:solidFill>
+                        <a:srgbClr val="E5E5E5"/>
+                      </a:solidFill>
+                      <a:prstDash val="solid"/>
+                      <a:round/>
+                      <a:headEnd type="none" w="med" len="med"/>
+                      <a:tailEnd type="none" w="med" len="med"/>
+                    </a:lnR>
+                    <a:lnT w="9525" cap="flat" cmpd="sng" algn="ctr">
+                      <a:solidFill>
+                        <a:srgbClr val="E5E5E5"/>
+                      </a:solidFill>
+                      <a:prstDash val="solid"/>
+                      <a:round/>
+                      <a:headEnd type="none" w="med" len="med"/>
+                      <a:tailEnd type="none" w="med" len="med"/>
+                    </a:lnT>
+                    <a:lnB w="9525" cap="flat" cmpd="sng" algn="ctr">
+                      <a:solidFill>
+                        <a:srgbClr val="E5E5E5"/>
+                      </a:solidFill>
+                      <a:prstDash val="solid"/>
+                      <a:round/>
+                      <a:headEnd type="none" w="med" len="med"/>
+                      <a:tailEnd type="none" w="med" len="med"/>
+                    </a:lnB>
+                    <a:solidFill>
+                      <a:srgbClr val="FFFFFF"/>
+                    </a:solidFill>
+                  </a:tcPr>
+                </a:tc>
+                <a:tc>
+                  <a:txBody>
+                    <a:bodyPr/>
+                    <a:lstStyle/>
+                    <a:p>
+                      <a:pPr algn="l" indent="0" marL="0">
+                        <a:buNone/>
+                      </a:pPr>
+                      <a:r>
+                        <a:rPr lang="en-US" sz="1100" dirty="0">
+                          <a:solidFill>
+                            <a:srgbClr val="1A1A1A"/>
+                          </a:solidFill>
+                        </a:rPr>
+                        <a:t>88.2</a:t>
+                      </a:r>
+                      <a:endParaRPr lang="en-US" sz="1100" dirty="0"/>
+                    </a:p>
+                  </a:txBody>
+                  <a:tcPr marL="91440" marR="91440" marT="45720" marB="45720" anchor="ctr">
+                    <a:lnL w="9525" cap="flat" cmpd="sng" algn="ctr">
+                      <a:solidFill>
+                        <a:srgbClr val="E5E5E5"/>
+                      </a:solidFill>
+                      <a:prstDash val="solid"/>
+                      <a:round/>
+                      <a:headEnd type="none" w="med" len="med"/>
+                      <a:tailEnd type="none" w="med" len="med"/>
+                    </a:lnL>
+                    <a:lnR w="9525" cap="flat" cmpd="sng" algn="ctr">
+                      <a:solidFill>
+                        <a:srgbClr val="E5E5E5"/>
+                      </a:solidFill>
+                      <a:prstDash val="solid"/>
+                      <a:round/>
+                      <a:headEnd type="none" w="med" len="med"/>
+                      <a:tailEnd type="none" w="med" len="med"/>
+                    </a:lnR>
+                    <a:lnT w="9525" cap="flat" cmpd="sng" algn="ctr">
+                      <a:solidFill>
+                        <a:srgbClr val="E5E5E5"/>
+                      </a:solidFill>
+                      <a:prstDash val="solid"/>
+                      <a:round/>
+                      <a:headEnd type="none" w="med" len="med"/>
+                      <a:tailEnd type="none" w="med" len="med"/>
+                    </a:lnT>
+                    <a:lnB w="9525" cap="flat" cmpd="sng" algn="ctr">
+                      <a:solidFill>
+                        <a:srgbClr val="E5E5E5"/>
+                      </a:solidFill>
+                      <a:prstDash val="solid"/>
+                      <a:round/>
+                      <a:headEnd type="none" w="med" len="med"/>
+                      <a:tailEnd type="none" w="med" len="med"/>
+                    </a:lnB>
+                    <a:solidFill>
+                      <a:srgbClr val="FFFFFF"/>
+                    </a:solidFill>
+                  </a:tcPr>
+                </a:tc>
+                <a:tc>
+                  <a:txBody>
+                    <a:bodyPr/>
+                    <a:lstStyle/>
+                    <a:p>
+                      <a:pPr algn="l" indent="0" marL="0">
+                        <a:buNone/>
+                      </a:pPr>
+                      <a:r>
+                        <a:rPr lang="en-US" sz="1100" dirty="0">
+                          <a:solidFill>
+                            <a:srgbClr val="1A1A1A"/>
+                          </a:solidFill>
+                        </a:rPr>
+                        <a:t>6.9</a:t>
+                      </a:r>
+                      <a:endParaRPr lang="en-US" sz="1100" dirty="0"/>
+                    </a:p>
+                  </a:txBody>
+                  <a:tcPr marL="91440" marR="91440" marT="45720" marB="45720" anchor="ctr">
+                    <a:lnL w="9525" cap="flat" cmpd="sng" algn="ctr">
+                      <a:solidFill>
+                        <a:srgbClr val="E5E5E5"/>
+                      </a:solidFill>
+                      <a:prstDash val="solid"/>
+                      <a:round/>
+                      <a:headEnd type="none" w="med" len="med"/>
+                      <a:tailEnd type="none" w="med" len="med"/>
+                    </a:lnL>
+                    <a:lnR w="9525" cap="flat" cmpd="sng" algn="ctr">
+                      <a:solidFill>
+                        <a:srgbClr val="E5E5E5"/>
+                      </a:solidFill>
+                      <a:prstDash val="solid"/>
+                      <a:round/>
+                      <a:headEnd type="none" w="med" len="med"/>
+                      <a:tailEnd type="none" w="med" len="med"/>
+                    </a:lnR>
+                    <a:lnT w="9525" cap="flat" cmpd="sng" algn="ctr">
+                      <a:solidFill>
+                        <a:srgbClr val="E5E5E5"/>
+                      </a:solidFill>
+                      <a:prstDash val="solid"/>
+                      <a:round/>
+                      <a:headEnd type="none" w="med" len="med"/>
+                      <a:tailEnd type="none" w="med" len="med"/>
+                    </a:lnT>
+                    <a:lnB w="9525" cap="flat" cmpd="sng" algn="ctr">
+                      <a:solidFill>
+                        <a:srgbClr val="E5E5E5"/>
+                      </a:solidFill>
+                      <a:prstDash val="solid"/>
+                      <a:round/>
+                      <a:headEnd type="none" w="med" len="med"/>
+                      <a:tailEnd type="none" w="med" len="med"/>
+                    </a:lnB>
+                    <a:solidFill>
+                      <a:srgbClr val="FFFFFF"/>
+                    </a:solidFill>
+                  </a:tcPr>
+                </a:tc>
+                <a:tc>
+                  <a:txBody>
+                    <a:bodyPr/>
+                    <a:lstStyle/>
+                    <a:p>
+                      <a:pPr algn="l" indent="0" marL="0">
+                        <a:buNone/>
+                      </a:pPr>
+                      <a:r>
+                        <a:rPr lang="en-US" sz="1100" dirty="0">
+                          <a:solidFill>
+                            <a:srgbClr val="1A1A1A"/>
+                          </a:solidFill>
+                        </a:rPr>
+                        <a:t>39.6%</a:t>
+                      </a:r>
+                      <a:endParaRPr lang="en-US" sz="1100" dirty="0"/>
+                    </a:p>
+                  </a:txBody>
+                  <a:tcPr marL="91440" marR="91440" marT="45720" marB="45720" anchor="ctr">
+                    <a:lnL w="9525" cap="flat" cmpd="sng" algn="ctr">
+                      <a:solidFill>
+                        <a:srgbClr val="E5E5E5"/>
+                      </a:solidFill>
+                      <a:prstDash val="solid"/>
+                      <a:round/>
+                      <a:headEnd type="none" w="med" len="med"/>
+                      <a:tailEnd type="none" w="med" len="med"/>
+                    </a:lnL>
+                    <a:lnR w="9525" cap="flat" cmpd="sng" algn="ctr">
+                      <a:solidFill>
+                        <a:srgbClr val="E5E5E5"/>
+                      </a:solidFill>
+                      <a:prstDash val="solid"/>
+                      <a:round/>
+                      <a:headEnd type="none" w="med" len="med"/>
+                      <a:tailEnd type="none" w="med" len="med"/>
+                    </a:lnR>
+                    <a:lnT w="9525" cap="flat" cmpd="sng" algn="ctr">
+                      <a:solidFill>
+                        <a:srgbClr val="E5E5E5"/>
+                      </a:solidFill>
+                      <a:prstDash val="solid"/>
+                      <a:round/>
+                      <a:headEnd type="none" w="med" len="med"/>
+                      <a:tailEnd type="none" w="med" len="med"/>
+                    </a:lnT>
+                    <a:lnB w="9525" cap="flat" cmpd="sng" algn="ctr">
+                      <a:solidFill>
+                        <a:srgbClr val="E5E5E5"/>
+                      </a:solidFill>
+                      <a:prstDash val="solid"/>
+                      <a:round/>
+                      <a:headEnd type="none" w="med" len="med"/>
+                      <a:tailEnd type="none" w="med" len="med"/>
+                    </a:lnB>
+                    <a:solidFill>
+                      <a:srgbClr val="FFFFFF"/>
+                    </a:solidFill>
+                  </a:tcPr>
+                </a:tc>
+                <a:tc>
+                  <a:txBody>
+                    <a:bodyPr/>
+                    <a:lstStyle/>
+                    <a:p>
+                      <a:pPr algn="l" indent="0" marL="0">
+                        <a:buNone/>
+                      </a:pPr>
+                      <a:r>
+                        <a:rPr lang="en-US" sz="1100" dirty="0">
+                          <a:solidFill>
+                            <a:srgbClr val="6B6B6B"/>
+                          </a:solidFill>
+                        </a:rPr>
+                        <a:t>17.4%</a:t>
+                      </a:r>
+                      <a:endParaRPr lang="en-US" sz="1100" dirty="0"/>
+                    </a:p>
+                  </a:txBody>
+                  <a:tcPr marL="91440" marR="91440" marT="45720" marB="45720" anchor="ctr">
+                    <a:lnL w="9525" cap="flat" cmpd="sng" algn="ctr">
+                      <a:solidFill>
+                        <a:srgbClr val="E5E5E5"/>
+                      </a:solidFill>
+                      <a:prstDash val="solid"/>
+                      <a:round/>
+                      <a:headEnd type="none" w="med" len="med"/>
+                      <a:tailEnd type="none" w="med" len="med"/>
+                    </a:lnL>
+                    <a:lnR w="9525" cap="flat" cmpd="sng" algn="ctr">
+                      <a:solidFill>
+                        <a:srgbClr val="E5E5E5"/>
+                      </a:solidFill>
+                      <a:prstDash val="solid"/>
+                      <a:round/>
+                      <a:headEnd type="none" w="med" len="med"/>
+                      <a:tailEnd type="none" w="med" len="med"/>
+                    </a:lnR>
+                    <a:lnT w="9525" cap="flat" cmpd="sng" algn="ctr">
+                      <a:solidFill>
+                        <a:srgbClr val="E5E5E5"/>
+                      </a:solidFill>
+                      <a:prstDash val="solid"/>
+                      <a:round/>
+                      <a:headEnd type="none" w="med" len="med"/>
+                      <a:tailEnd type="none" w="med" len="med"/>
+                    </a:lnT>
+                    <a:lnB w="9525" cap="flat" cmpd="sng" algn="ctr">
+                      <a:solidFill>
+                        <a:srgbClr val="E5E5E5"/>
+                      </a:solidFill>
+                      <a:prstDash val="solid"/>
+                      <a:round/>
+                      <a:headEnd type="none" w="med" len="med"/>
+                      <a:tailEnd type="none" w="med" len="med"/>
+                    </a:lnB>
+                    <a:solidFill>
+                      <a:srgbClr val="FFFFFF"/>
+                    </a:solidFill>
+                  </a:tcPr>
+                </a:tc>
+              </a:tr>
+              <a:tr h="512064">
+                <a:tc>
+                  <a:txBody>
+                    <a:bodyPr/>
+                    <a:lstStyle/>
+                    <a:p>
+                      <a:pPr algn="l" indent="0" marL="0">
+                        <a:buNone/>
+                      </a:pPr>
+                      <a:r>
+                        <a:rPr lang="en-US" sz="1100" b="1" dirty="0">
+                          <a:solidFill>
+                            <a:srgbClr val="1A1A1A"/>
+                          </a:solidFill>
+                        </a:rPr>
+                        <a:t>↔ George RUSSELL</a:t>
+                      </a:r>
+                      <a:endParaRPr lang="en-US" sz="1100" dirty="0"/>
+                    </a:p>
+                  </a:txBody>
+                  <a:tcPr marL="91440" marR="91440" marT="45720" marB="45720" anchor="ctr">
+                    <a:lnL w="9525" cap="flat" cmpd="sng" algn="ctr">
+                      <a:solidFill>
+                        <a:srgbClr val="E5E5E5"/>
+                      </a:solidFill>
+                      <a:prstDash val="solid"/>
+                      <a:round/>
+                      <a:headEnd type="none" w="med" len="med"/>
+                      <a:tailEnd type="none" w="med" len="med"/>
+                    </a:lnL>
+                    <a:lnR w="9525" cap="flat" cmpd="sng" algn="ctr">
+                      <a:solidFill>
+                        <a:srgbClr val="E5E5E5"/>
+                      </a:solidFill>
+                      <a:prstDash val="solid"/>
+                      <a:round/>
+                      <a:headEnd type="none" w="med" len="med"/>
+                      <a:tailEnd type="none" w="med" len="med"/>
+                    </a:lnR>
+                    <a:lnT w="9525" cap="flat" cmpd="sng" algn="ctr">
+                      <a:solidFill>
+                        <a:srgbClr val="E5E5E5"/>
+                      </a:solidFill>
+                      <a:prstDash val="solid"/>
+                      <a:round/>
+                      <a:headEnd type="none" w="med" len="med"/>
+                      <a:tailEnd type="none" w="med" len="med"/>
+                    </a:lnT>
+                    <a:lnB w="9525" cap="flat" cmpd="sng" algn="ctr">
+                      <a:solidFill>
+                        <a:srgbClr val="E5E5E5"/>
+                      </a:solidFill>
+                      <a:prstDash val="solid"/>
+                      <a:round/>
+                      <a:headEnd type="none" w="med" len="med"/>
+                      <a:tailEnd type="none" w="med" len="med"/>
+                    </a:lnB>
+                    <a:solidFill>
+                      <a:srgbClr val="F4F4F4"/>
+                    </a:solidFill>
+                  </a:tcPr>
+                </a:tc>
+                <a:tc>
+                  <a:txBody>
+                    <a:bodyPr/>
+                    <a:lstStyle/>
+                    <a:p>
+                      <a:pPr algn="l" indent="0" marL="0">
+                        <a:buNone/>
+                      </a:pPr>
+                      <a:r>
+                        <a:rPr lang="en-US" sz="1100" dirty="0">
+                          <a:solidFill>
+                            <a:srgbClr val="1A1A1A"/>
+                          </a:solidFill>
+                        </a:rPr>
+                        <a:t>Mercedes</a:t>
+                      </a:r>
+                      <a:endParaRPr lang="en-US" sz="1100" dirty="0"/>
+                    </a:p>
+                  </a:txBody>
+                  <a:tcPr marL="91440" marR="91440" marT="45720" marB="45720" anchor="ctr">
+                    <a:lnL w="9525" cap="flat" cmpd="sng" algn="ctr">
+                      <a:solidFill>
+                        <a:srgbClr val="E5E5E5"/>
+                      </a:solidFill>
+                      <a:prstDash val="solid"/>
+                      <a:round/>
+                      <a:headEnd type="none" w="med" len="med"/>
+                      <a:tailEnd type="none" w="med" len="med"/>
+                    </a:lnL>
+                    <a:lnR w="9525" cap="flat" cmpd="sng" algn="ctr">
+                      <a:solidFill>
+                        <a:srgbClr val="E5E5E5"/>
+                      </a:solidFill>
+                      <a:prstDash val="solid"/>
+                      <a:round/>
+                      <a:headEnd type="none" w="med" len="med"/>
+                      <a:tailEnd type="none" w="med" len="med"/>
+                    </a:lnR>
+                    <a:lnT w="9525" cap="flat" cmpd="sng" algn="ctr">
+                      <a:solidFill>
+                        <a:srgbClr val="E5E5E5"/>
+                      </a:solidFill>
+                      <a:prstDash val="solid"/>
+                      <a:round/>
+                      <a:headEnd type="none" w="med" len="med"/>
+                      <a:tailEnd type="none" w="med" len="med"/>
+                    </a:lnT>
+                    <a:lnB w="9525" cap="flat" cmpd="sng" algn="ctr">
+                      <a:solidFill>
+                        <a:srgbClr val="E5E5E5"/>
+                      </a:solidFill>
+                      <a:prstDash val="solid"/>
+                      <a:round/>
+                      <a:headEnd type="none" w="med" len="med"/>
+                      <a:tailEnd type="none" w="med" len="med"/>
+                    </a:lnB>
+                    <a:solidFill>
+                      <a:srgbClr val="F4F4F4"/>
+                    </a:solidFill>
+                  </a:tcPr>
+                </a:tc>
+                <a:tc>
+                  <a:txBody>
+                    <a:bodyPr/>
+                    <a:lstStyle/>
+                    <a:p>
+                      <a:pPr algn="l" indent="0" marL="0">
+                        <a:buNone/>
+                      </a:pPr>
+                      <a:r>
+                        <a:rPr lang="en-US" sz="1100" dirty="0">
+                          <a:solidFill>
+                            <a:srgbClr val="1A1A1A"/>
+                          </a:solidFill>
+                        </a:rPr>
+                        <a:t>0.3%</a:t>
+                      </a:r>
+                      <a:endParaRPr lang="en-US" sz="1100" dirty="0"/>
+                    </a:p>
+                  </a:txBody>
+                  <a:tcPr marL="91440" marR="91440" marT="45720" marB="45720" anchor="ctr">
+                    <a:lnL w="9525" cap="flat" cmpd="sng" algn="ctr">
+                      <a:solidFill>
+                        <a:srgbClr val="E5E5E5"/>
+                      </a:solidFill>
+                      <a:prstDash val="solid"/>
+                      <a:round/>
+                      <a:headEnd type="none" w="med" len="med"/>
+                      <a:tailEnd type="none" w="med" len="med"/>
+                    </a:lnL>
+                    <a:lnR w="9525" cap="flat" cmpd="sng" algn="ctr">
+                      <a:solidFill>
+                        <a:srgbClr val="E5E5E5"/>
+                      </a:solidFill>
+                      <a:prstDash val="solid"/>
+                      <a:round/>
+                      <a:headEnd type="none" w="med" len="med"/>
+                      <a:tailEnd type="none" w="med" len="med"/>
+                    </a:lnR>
+                    <a:lnT w="9525" cap="flat" cmpd="sng" algn="ctr">
+                      <a:solidFill>
+                        <a:srgbClr val="E5E5E5"/>
+                      </a:solidFill>
+                      <a:prstDash val="solid"/>
+                      <a:round/>
+                      <a:headEnd type="none" w="med" len="med"/>
+                      <a:tailEnd type="none" w="med" len="med"/>
+                    </a:lnT>
+                    <a:lnB w="9525" cap="flat" cmpd="sng" algn="ctr">
+                      <a:solidFill>
+                        <a:srgbClr val="E5E5E5"/>
+                      </a:solidFill>
+                      <a:prstDash val="solid"/>
+                      <a:round/>
+                      <a:headEnd type="none" w="med" len="med"/>
+                      <a:tailEnd type="none" w="med" len="med"/>
+                    </a:lnB>
+                    <a:solidFill>
+                      <a:srgbClr val="F4F4F4"/>
+                    </a:solidFill>
+                  </a:tcPr>
+                </a:tc>
+                <a:tc>
+                  <a:txBody>
+                    <a:bodyPr/>
+                    <a:lstStyle/>
+                    <a:p>
+                      <a:pPr algn="l" indent="0" marL="0">
+                        <a:buNone/>
+                      </a:pPr>
+                      <a:r>
+                        <a:rPr lang="en-US" sz="1100" dirty="0">
+                          <a:solidFill>
+                            <a:srgbClr val="1A1A1A"/>
+                          </a:solidFill>
+                        </a:rPr>
+                        <a:t>11.6%</a:t>
+                      </a:r>
+                      <a:endParaRPr lang="en-US" sz="1100" dirty="0"/>
+                    </a:p>
+                  </a:txBody>
+                  <a:tcPr marL="91440" marR="91440" marT="45720" marB="45720" anchor="ctr">
+                    <a:lnL w="9525" cap="flat" cmpd="sng" algn="ctr">
+                      <a:solidFill>
+                        <a:srgbClr val="E5E5E5"/>
+                      </a:solidFill>
+                      <a:prstDash val="solid"/>
+                      <a:round/>
+                      <a:headEnd type="none" w="med" len="med"/>
+                      <a:tailEnd type="none" w="med" len="med"/>
+                    </a:lnL>
+                    <a:lnR w="9525" cap="flat" cmpd="sng" algn="ctr">
+                      <a:solidFill>
+                        <a:srgbClr val="E5E5E5"/>
+                      </a:solidFill>
+                      <a:prstDash val="solid"/>
+                      <a:round/>
+                      <a:headEnd type="none" w="med" len="med"/>
+                      <a:tailEnd type="none" w="med" len="med"/>
+                    </a:lnR>
+                    <a:lnT w="9525" cap="flat" cmpd="sng" algn="ctr">
+                      <a:solidFill>
+                        <a:srgbClr val="E5E5E5"/>
+                      </a:solidFill>
+                      <a:prstDash val="solid"/>
+                      <a:round/>
+                      <a:headEnd type="none" w="med" len="med"/>
+                      <a:tailEnd type="none" w="med" len="med"/>
+                    </a:lnT>
+                    <a:lnB w="9525" cap="flat" cmpd="sng" algn="ctr">
+                      <a:solidFill>
+                        <a:srgbClr val="E5E5E5"/>
+                      </a:solidFill>
+                      <a:prstDash val="solid"/>
+                      <a:round/>
+                      <a:headEnd type="none" w="med" len="med"/>
+                      <a:tailEnd type="none" w="med" len="med"/>
+                    </a:lnB>
+                    <a:solidFill>
+                      <a:srgbClr val="F4F4F4"/>
+                    </a:solidFill>
+                  </a:tcPr>
+                </a:tc>
+                <a:tc>
+                  <a:txBody>
+                    <a:bodyPr/>
+                    <a:lstStyle/>
+                    <a:p>
+                      <a:pPr algn="l" indent="0" marL="0">
+                        <a:buNone/>
+                      </a:pPr>
+                      <a:r>
+                        <a:rPr lang="en-US" sz="1100" dirty="0">
+                          <a:solidFill>
+                            <a:srgbClr val="1A1A1A"/>
+                          </a:solidFill>
+                        </a:rPr>
+                        <a:t>69.0</a:t>
+                      </a:r>
+                      <a:endParaRPr lang="en-US" sz="1100" dirty="0"/>
+                    </a:p>
+                  </a:txBody>
+                  <a:tcPr marL="91440" marR="91440" marT="45720" marB="45720" anchor="ctr">
+                    <a:lnL w="9525" cap="flat" cmpd="sng" algn="ctr">
+                      <a:solidFill>
+                        <a:srgbClr val="E5E5E5"/>
+                      </a:solidFill>
+                      <a:prstDash val="solid"/>
+                      <a:round/>
+                      <a:headEnd type="none" w="med" len="med"/>
+                      <a:tailEnd type="none" w="med" len="med"/>
+                    </a:lnL>
+                    <a:lnR w="9525" cap="flat" cmpd="sng" algn="ctr">
+                      <a:solidFill>
+                        <a:srgbClr val="E5E5E5"/>
+                      </a:solidFill>
+                      <a:prstDash val="solid"/>
+                      <a:round/>
+                      <a:headEnd type="none" w="med" len="med"/>
+                      <a:tailEnd type="none" w="med" len="med"/>
+                    </a:lnR>
+                    <a:lnT w="9525" cap="flat" cmpd="sng" algn="ctr">
+                      <a:solidFill>
+                        <a:srgbClr val="E5E5E5"/>
+                      </a:solidFill>
+                      <a:prstDash val="solid"/>
+                      <a:round/>
+                      <a:headEnd type="none" w="med" len="med"/>
+                      <a:tailEnd type="none" w="med" len="med"/>
+                    </a:lnT>
+                    <a:lnB w="9525" cap="flat" cmpd="sng" algn="ctr">
+                      <a:solidFill>
+                        <a:srgbClr val="E5E5E5"/>
+                      </a:solidFill>
+                      <a:prstDash val="solid"/>
+                      <a:round/>
+                      <a:headEnd type="none" w="med" len="med"/>
+                      <a:tailEnd type="none" w="med" len="med"/>
+                    </a:lnB>
+                    <a:solidFill>
+                      <a:srgbClr val="F4F4F4"/>
+                    </a:solidFill>
+                  </a:tcPr>
+                </a:tc>
+                <a:tc>
+                  <a:txBody>
+                    <a:bodyPr/>
+                    <a:lstStyle/>
+                    <a:p>
+                      <a:pPr algn="l" indent="0" marL="0">
+                        <a:buNone/>
+                      </a:pPr>
+                      <a:r>
+                        <a:rPr lang="en-US" sz="1100" dirty="0">
+                          <a:solidFill>
+                            <a:srgbClr val="1A1A1A"/>
+                          </a:solidFill>
+                        </a:rPr>
+                        <a:t>7.9</a:t>
+                      </a:r>
+                      <a:endParaRPr lang="en-US" sz="1100" dirty="0"/>
+                    </a:p>
+                  </a:txBody>
+                  <a:tcPr marL="91440" marR="91440" marT="45720" marB="45720" anchor="ctr">
+                    <a:lnL w="9525" cap="flat" cmpd="sng" algn="ctr">
+                      <a:solidFill>
+                        <a:srgbClr val="E5E5E5"/>
+                      </a:solidFill>
+                      <a:prstDash val="solid"/>
+                      <a:round/>
+                      <a:headEnd type="none" w="med" len="med"/>
+                      <a:tailEnd type="none" w="med" len="med"/>
+                    </a:lnL>
+                    <a:lnR w="9525" cap="flat" cmpd="sng" algn="ctr">
+                      <a:solidFill>
+                        <a:srgbClr val="E5E5E5"/>
+                      </a:solidFill>
+                      <a:prstDash val="solid"/>
+                      <a:round/>
+                      <a:headEnd type="none" w="med" len="med"/>
+                      <a:tailEnd type="none" w="med" len="med"/>
+                    </a:lnR>
+                    <a:lnT w="9525" cap="flat" cmpd="sng" algn="ctr">
+                      <a:solidFill>
+                        <a:srgbClr val="E5E5E5"/>
+                      </a:solidFill>
+                      <a:prstDash val="solid"/>
+                      <a:round/>
+                      <a:headEnd type="none" w="med" len="med"/>
+                      <a:tailEnd type="none" w="med" len="med"/>
+                    </a:lnT>
+                    <a:lnB w="9525" cap="flat" cmpd="sng" algn="ctr">
+                      <a:solidFill>
+                        <a:srgbClr val="E5E5E5"/>
+                      </a:solidFill>
+                      <a:prstDash val="solid"/>
+                      <a:round/>
+                      <a:headEnd type="none" w="med" len="med"/>
+                      <a:tailEnd type="none" w="med" len="med"/>
+                    </a:lnB>
+                    <a:solidFill>
+                      <a:srgbClr val="F4F4F4"/>
+                    </a:solidFill>
+                  </a:tcPr>
+                </a:tc>
+                <a:tc>
+                  <a:txBody>
+                    <a:bodyPr/>
+                    <a:lstStyle/>
+                    <a:p>
+                      <a:pPr algn="l" indent="0" marL="0">
+                        <a:buNone/>
+                      </a:pPr>
+                      <a:r>
+                        <a:rPr lang="en-US" sz="1100" dirty="0">
+                          <a:solidFill>
+                            <a:srgbClr val="1A1A1A"/>
+                          </a:solidFill>
+                        </a:rPr>
+                        <a:t>11.5%</a:t>
+                      </a:r>
+                      <a:endParaRPr lang="en-US" sz="1100" dirty="0"/>
+                    </a:p>
+                  </a:txBody>
+                  <a:tcPr marL="91440" marR="91440" marT="45720" marB="45720" anchor="ctr">
+                    <a:lnL w="9525" cap="flat" cmpd="sng" algn="ctr">
+                      <a:solidFill>
+                        <a:srgbClr val="E5E5E5"/>
+                      </a:solidFill>
+                      <a:prstDash val="solid"/>
+                      <a:round/>
+                      <a:headEnd type="none" w="med" len="med"/>
+                      <a:tailEnd type="none" w="med" len="med"/>
+                    </a:lnL>
+                    <a:lnR w="9525" cap="flat" cmpd="sng" algn="ctr">
+                      <a:solidFill>
+                        <a:srgbClr val="E5E5E5"/>
+                      </a:solidFill>
+                      <a:prstDash val="solid"/>
+                      <a:round/>
+                      <a:headEnd type="none" w="med" len="med"/>
+                      <a:tailEnd type="none" w="med" len="med"/>
+                    </a:lnR>
+                    <a:lnT w="9525" cap="flat" cmpd="sng" algn="ctr">
+                      <a:solidFill>
+                        <a:srgbClr val="E5E5E5"/>
+                      </a:solidFill>
+                      <a:prstDash val="solid"/>
+                      <a:round/>
+                      <a:headEnd type="none" w="med" len="med"/>
+                      <a:tailEnd type="none" w="med" len="med"/>
+                    </a:lnT>
+                    <a:lnB w="9525" cap="flat" cmpd="sng" algn="ctr">
+                      <a:solidFill>
+                        <a:srgbClr val="E5E5E5"/>
+                      </a:solidFill>
+                      <a:prstDash val="solid"/>
+                      <a:round/>
+                      <a:headEnd type="none" w="med" len="med"/>
+                      <a:tailEnd type="none" w="med" len="med"/>
+                    </a:lnB>
+                    <a:solidFill>
+                      <a:srgbClr val="F4F4F4"/>
+                    </a:solidFill>
+                  </a:tcPr>
+                </a:tc>
+                <a:tc>
+                  <a:txBody>
+                    <a:bodyPr/>
+                    <a:lstStyle/>
+                    <a:p>
+                      <a:pPr algn="l" indent="0" marL="0">
+                        <a:buNone/>
+                      </a:pPr>
+                      <a:r>
+                        <a:rPr lang="en-US" sz="1100" dirty="0">
+                          <a:solidFill>
+                            <a:srgbClr val="6B6B6B"/>
+                          </a:solidFill>
+                        </a:rPr>
+                        <a:t>36.0%</a:t>
+                      </a:r>
+                      <a:endParaRPr lang="en-US" sz="1100" dirty="0"/>
+                    </a:p>
+                  </a:txBody>
+                  <a:tcPr marL="91440" marR="91440" marT="45720" marB="45720" anchor="ctr">
+                    <a:lnL w="9525" cap="flat" cmpd="sng" algn="ctr">
+                      <a:solidFill>
+                        <a:srgbClr val="E5E5E5"/>
+                      </a:solidFill>
+                      <a:prstDash val="solid"/>
+                      <a:round/>
+                      <a:headEnd type="none" w="med" len="med"/>
+                      <a:tailEnd type="none" w="med" len="med"/>
+                    </a:lnL>
+                    <a:lnR w="9525" cap="flat" cmpd="sng" algn="ctr">
+                      <a:solidFill>
+                        <a:srgbClr val="E5E5E5"/>
+                      </a:solidFill>
+                      <a:prstDash val="solid"/>
+                      <a:round/>
+                      <a:headEnd type="none" w="med" len="med"/>
+                      <a:tailEnd type="none" w="med" len="med"/>
+                    </a:lnR>
+                    <a:lnT w="9525" cap="flat" cmpd="sng" algn="ctr">
+                      <a:solidFill>
+                        <a:srgbClr val="E5E5E5"/>
+                      </a:solidFill>
+                      <a:prstDash val="solid"/>
+                      <a:round/>
+                      <a:headEnd type="none" w="med" len="med"/>
+                      <a:tailEnd type="none" w="med" len="med"/>
+                    </a:lnT>
+                    <a:lnB w="9525" cap="flat" cmpd="sng" algn="ctr">
+                      <a:solidFill>
+                        <a:srgbClr val="E5E5E5"/>
+                      </a:solidFill>
+                      <a:prstDash val="solid"/>
+                      <a:round/>
+                      <a:headEnd type="none" w="med" len="med"/>
+                      <a:tailEnd type="none" w="med" len="med"/>
+                    </a:lnB>
+                    <a:solidFill>
+                      <a:srgbClr val="F4F4F4"/>
+                    </a:solidFill>
+                  </a:tcPr>
+                </a:tc>
+              </a:tr>
+            </a:tbl>
+          </a:graphicData>
+        </a:graphic>
+      </p:graphicFrame>
+      <p:sp>
+        <p:nvSpPr>
+          <p:cNvPr id="5" name="cand-note"/>
+          <p:cNvSpPr txBox="1"/>
+          <p:nvPr/>
+        </p:nvSpPr>
+        <p:spPr>
+          <a:xfrm>
+            <a:off x="548640" y="5257800"/>
+            <a:ext cx="11109960" cy="365760"/>
+          </a:xfrm>
+          <a:prstGeom prst="rect">
+            <a:avLst/>
+          </a:prstGeom>
+          <a:noFill/>
+          <a:ln/>
+        </p:spPr>
+        <p:txBody>
+          <a:bodyPr wrap="square" lIns="0" tIns="0" rIns="0" bIns="0" rtlCol="0" anchor="t"/>
+          <a:lstStyle/>
+          <a:p>
+            <a:pPr indent="0" marL="0">
+              <a:buNone/>
+            </a:pPr>
+            <a:r>
+              <a:rPr lang="en-US" sz="1100" dirty="0">
+                <a:solidFill>
+                  <a:srgbClr val="6B6B6B"/>
+                </a:solidFill>
+              </a:rPr>
+              <a:t>모델 적중: 실제 라인업 재현 시 팀별 포인트 상관 0.99(평균 오차 20.6점), 경기 우승자 적중 37.5% → 시즌 합계로 읽는다 · STROLL과 후보는 같은 팀에서 뛴 적이 없어 비교에 "연결 그룹 평균이 같다"는 가정이 들어 있다 · VERSTAPPEN은 동료 비교 표본 근거 부족으로 후보에서 제외해 표에서 뺐다</a:t>
+            </a:r>
+            <a:endParaRPr lang="en-US" sz="1100" dirty="0"/>
+          </a:p>
+        </p:txBody>
+      </p:sp>
+      <p:sp>
+        <p:nvSpPr>
+          <p:cNvPr id="6" name="takeaway"/>
+          <p:cNvSpPr txBox="1"/>
+          <p:nvPr/>
+        </p:nvSpPr>
+        <p:spPr>
+          <a:xfrm>
+            <a:off x="548640" y="5870448"/>
+            <a:ext cx="11109960" cy="411480"/>
+          </a:xfrm>
+          <a:prstGeom prst="rect">
+            <a:avLst/>
+          </a:prstGeom>
+          <a:noFill/>
+          <a:ln/>
+        </p:spPr>
+        <p:txBody>
+          <a:bodyPr wrap="square" lIns="0" tIns="0" rIns="0" bIns="0" rtlCol="0" anchor="t"/>
+          <a:lstStyle/>
+          <a:p>
+            <a:pPr indent="0" marL="0">
+              <a:buNone/>
+            </a:pPr>
+            <a:r>
+              <a:rPr lang="en-US" sz="1400" b="1" dirty="0">
+                <a:solidFill>
+                  <a:srgbClr val="E10600"/>
+                </a:solidFill>
+              </a:rPr>
+              <a:t>→  </a:t>
+            </a:r>
+            <a:pPr indent="0" marL="0">
+              <a:buNone/>
+            </a:pPr>
+            <a:r>
+              <a:rPr lang="en-US" sz="1400" dirty="0">
+                <a:solidFill>
+                  <a:srgbClr val="1A1A1A"/>
+                </a:solidFill>
+              </a:rPr>
+              <a:t>LECLERC는 어느 추정 기간에서도 팀 6위 확률을 크게 올린다 — RUSSELL의 이득은 2025에만 커 보류 판단과 같은 방향이다</a:t>
+            </a:r>
+            <a:endParaRPr lang="en-US" sz="1400" dirty="0"/>
+          </a:p>
+        </p:txBody>
+      </p:sp>
+      <p:sp>
+        <p:nvSpPr>
+          <p:cNvPr id="25" name="Slide Number Placeholder 0"/>
+          <p:cNvSpPr>
+            <a:spLocks noGrp="1"/>
+          </p:cNvSpPr>
+          <p:nvPr>
+            <p:ph type="sldNum" sz="quarter" idx="4294967295"/>
+          </p:nvPr>
+        </p:nvSpPr>
+        <p:spPr>
+          <a:xfrm>
+            <a:off x="11109960" y="6446520"/>
+            <a:ext cx="548640" cy="256032"/>
+          </a:xfrm>
+          <a:prstGeom prst="rect">
+            <a:avLst/>
+          </a:prstGeom>
+          <a:extLst>
+            <a:ext uri="{C572A759-6A51-4108-AA02-DFA0A04FC94B}">
+              <ma14:wrappingTextBoxFlag xmlns:ma14="http://schemas.microsoft.com/office/mac/drawingml/2011/main" val="0"/>
+            </a:ext>
+          </a:extLst>
+        </p:spPr>
+        <p:txBody>
+          <a:bodyPr/>
+          <a:lstStyle>
+            <a:lvl1pPr>
+              <a:defRPr sz="900">
+                <a:solidFill>
+                  <a:srgbClr val="8C8C8C"/>
+                </a:solidFill>
+                <a:latin typeface="Malgun Gothic"/>
+                <a:ea typeface="Malgun Gothic"/>
+                <a:cs typeface="Malgun Gothic"/>
+              </a:defRPr>
+            </a:lvl1pPr>
+          </a:lstStyle>
+          <a:p>
+            <a:pPr algn="r"/>
+            <a:fld id="{F7021451-1387-4CA6-816F-3879F97B5CBC}" type="slidenum">
+              <a:rPr b="0" lang="en-US"/>
+              <a:t>17</a:t>
+            </a:fld>
+            <a:endParaRPr lang="en-US"/>
+          </a:p>
+        </p:txBody>
+      </p:sp>
+    </p:spTree>
+  </p:cSld>
+  <p:clrMapOvr>
+    <a:masterClrMapping/>
+  </p:clrMapOvr>
+</p:sld>
+</file>
+
+<file path=ppt/slides/slide24.xml><?xml version="1.0" encoding="utf-8"?>
+<p:sld xmlns:a="http://schemas.openxmlformats.org/drawingml/2006/main" xmlns:r="http://schemas.openxmlformats.org/officeDocument/2006/relationships" xmlns:p="http://schemas.openxmlformats.org/presentationml/2006/main">
   <p:cSld name="Slide 21">
     <p:spTree>
       <p:nvGrpSpPr>
@@ -22579,7 +26396,7 @@
 </p:sld>
 </file>
 
-<file path=ppt/slides/slide24.xml><?xml version="1.0" encoding="utf-8"?>
+<file path=ppt/slides/slide25.xml><?xml version="1.0" encoding="utf-8"?>
 <p:sld xmlns:a="http://schemas.openxmlformats.org/drawingml/2006/main" xmlns:r="http://schemas.openxmlformats.org/officeDocument/2006/relationships" xmlns:p="http://schemas.openxmlformats.org/presentationml/2006/main">
   <p:cSld name="Slide 22">
     <p:spTree>
@@ -22741,7 +26558,7 @@
 </p:sld>
 </file>
 
-<file path=ppt/slides/slide25.xml><?xml version="1.0" encoding="utf-8"?>
+<file path=ppt/slides/slide26.xml><?xml version="1.0" encoding="utf-8"?>
 <p:sld xmlns:a="http://schemas.openxmlformats.org/drawingml/2006/main" xmlns:r="http://schemas.openxmlformats.org/officeDocument/2006/relationships" xmlns:p="http://schemas.openxmlformats.org/presentationml/2006/main">
   <p:cSld name="Slide 23">
     <p:spTree>
@@ -22960,7 +26777,7 @@
                   <a:srgbClr val="1A1A1A"/>
                 </a:solidFill>
               </a:rPr>
-              <a:t>LECLERC·RUSSELL을 우선 검토 후보로 올린다 (1순위 LECLERC)</a:t>
+              <a:t>LECLERC를 우선 검토 후보로 올린다</a:t>
             </a:r>
             <a:endParaRPr lang="en-US" sz="1400" dirty="0"/>
           </a:p>
@@ -22996,7 +26813,7 @@
                   <a:srgbClr val="6B6B6B"/>
                 </a:solidFill>
               </a:rPr>
-              <a:t>후보 19명 중 같은 경기·같은 차 비교를 11/11 조건에서 모두 통과한 두 명이다. 같은 동료 HAMILTON 기준으로 재면 LECLERC가 앞선다. 계약 가능성은 별도로 확인한다.</a:t>
+              <a:t>후보 19명 중 같은 경기·같은 차 비교를 11/11 조건에서 모두 통과하고, 같은 동료 HAMILTON 기준과 2023~2026 시즌별 재확인에서도 버틴 유일한 선수다. 계약 가능성은 별도로 확인한다.</a:t>
             </a:r>
             <a:endParaRPr lang="en-US" sz="1050" dirty="0"/>
           </a:p>
@@ -23032,7 +26849,7 @@
                   <a:srgbClr val="E10600"/>
                 </a:solidFill>
               </a:rPr>
-              <a:t>2명</a:t>
+              <a:t>1명</a:t>
             </a:r>
             <a:endParaRPr lang="en-US" sz="2000" dirty="0"/>
           </a:p>
@@ -23068,7 +26885,7 @@
                   <a:srgbClr val="6B6B6B"/>
                 </a:solidFill>
               </a:rPr>
-              <a:t>근거 18 · 19 · 20</a:t>
+              <a:t>근거 18 · 19 · 20 · 23</a:t>
             </a:r>
             <a:endParaRPr lang="en-US" sz="1000" dirty="0"/>
           </a:p>
@@ -24090,7 +27907,7 @@
 </p:sld>
 </file>
 
-<file path=ppt/slides/slide26.xml><?xml version="1.0" encoding="utf-8"?>
+<file path=ppt/slides/slide27.xml><?xml version="1.0" encoding="utf-8"?>
 <p:sld xmlns:a="http://schemas.openxmlformats.org/drawingml/2006/main" xmlns:r="http://schemas.openxmlformats.org/officeDocument/2006/relationships" xmlns:p="http://schemas.openxmlformats.org/presentationml/2006/main">
   <p:cSld name="Slide 24">
     <p:spTree>
@@ -24269,7 +28086,7 @@
                   <a:srgbClr val="E5E5E5"/>
                 </a:solidFill>
               </a:rPr>
-              <a:t>재계산 값은 Gold와 방향은 같지만 크기가 다르다 — RUSSELL 대 ANTONELLI −0.281초(Gold −0.138초). 타이어 유지 지표는 시즌마다 크게 흔들린다.</a:t>
+              <a:t>재계산 값은 Gold와 방향은 같지만 크기가 다르다 — RUSSELL 대 ANTONELLI −0.281초(Gold −0.138초). 타이어 유지 지표는 시즌마다 크게 흔들린다. VERSTAPPEN은 시즌별로는 동료보다 빨랐지만 1개 조건 표본 부족·같은 자 비교 불가로 판정하지 못했다.</a:t>
             </a:r>
             <a:endParaRPr lang="en-US" sz="1400" dirty="0"/>
           </a:p>
@@ -24359,7 +28176,7 @@
                   <a:srgbClr val="E10600"/>
                 </a:solidFill>
               </a:rPr>
-              <a:t>다음에 볼 것 — ① LECLERC·RUSSELL을 2026 전체 시즌으로 다시 판정  ② Gold 계산 전체를 저장소로 옮겨 재계산  ③ 추가 5종 원본 응답 보존</a:t>
+              <a:t>다음에 볼 것 — ① LECLERC를 2026 전체 시즌으로 다시 판정  ② Gold 계산 전체를 저장소로 옮겨 재계산  ③ 추가 5종 원본 응답 보존</a:t>
             </a:r>
             <a:endParaRPr lang="en-US" sz="1200" dirty="0"/>
           </a:p>
@@ -24373,7 +28190,7 @@
 </p:sld>
 </file>
 
-<file path=ppt/slides/slide27.xml><?xml version="1.0" encoding="utf-8"?>
+<file path=ppt/slides/slide28.xml><?xml version="1.0" encoding="utf-8"?>
 <p:sld xmlns:a="http://schemas.openxmlformats.org/drawingml/2006/main" xmlns:r="http://schemas.openxmlformats.org/officeDocument/2006/relationships" xmlns:p="http://schemas.openxmlformats.org/presentationml/2006/main">
   <p:cSld name="Slide 25">
     <p:spTree>
@@ -24936,7 +28753,7 @@
 </p:sld>
 </file>
 
-<file path=ppt/slides/slide28.xml><?xml version="1.0" encoding="utf-8"?>
+<file path=ppt/slides/slide29.xml><?xml version="1.0" encoding="utf-8"?>
 <p:sld xmlns:a="http://schemas.openxmlformats.org/drawingml/2006/main" xmlns:r="http://schemas.openxmlformats.org/officeDocument/2006/relationships" xmlns:p="http://schemas.openxmlformats.org/presentationml/2006/main">
   <p:cSld name="Slide 26">
     <p:spTree>
@@ -25077,7 +28894,7 @@
                   <a:srgbClr val="E10600"/>
                 </a:solidFill>
               </a:rPr>
-              <a:t>LECLERC(1순위)와 RUSSELL이다. 같은 경기·같은 차 비교를 모든 조건에서 통과한 두 명이고, 같은 동료 HAMILTON 기준으로 재면 LECLERC가 앞선다. 가장 빠른 NORRIS·VERSTAPPEN·PIASTRI는 차량 이점을 배제하지 못했다.</a:t>
+              <a:t>LECLERC다. 같은 경기·같은 차 비교를 모든 조건에서 통과하고, 같은 동료 HAMILTON 기준과 2023~2026 시즌별 재확인에서도 버텼다. RUSSELL은 2025에만 앞서 보류했다. 가장 빠른 NORRIS·VERSTAPPEN·PIASTRI는 차량 이점을 배제하지 못했다.</a:t>
             </a:r>
             <a:pPr indent="0" marL="0">
               <a:buNone/>
@@ -25673,7 +29490,7 @@
                   <a:srgbClr val="E10600"/>
                 </a:solidFill>
               </a:rPr>
-              <a:t>2명</a:t>
+              <a:t>1명</a:t>
             </a:r>
             <a:endParaRPr lang="en-US" sz="2800" dirty="0"/>
           </a:p>
@@ -25709,7 +29526,7 @@
                   <a:srgbClr val="6B6B6B"/>
                 </a:solidFill>
               </a:rPr>
-              <a:t>STROLL 자리 후보 19명 중 최종 우선 검토 (LECLERC·RUSSELL)</a:t>
+              <a:t>STROLL 자리 후보 19명 중 최종 우선 검토 (LECLERC)</a:t>
             </a:r>
             <a:endParaRPr lang="en-US" sz="1100" dirty="0"/>
           </a:p>
@@ -26084,7 +29901,7 @@
                   <a:srgbClr val="1A1A1A"/>
                 </a:solidFill>
               </a:rPr>
-              <a:t>우선 검토 후보는 LECLERC(1순위)와 RUSSELL이다</a:t>
+              <a:t>우선 검토 후보는 LECLERC 한 명이다</a:t>
             </a:r>
             <a:endParaRPr lang="en-US" sz="1600" dirty="0"/>
           </a:p>
@@ -26120,7 +29937,7 @@
                   <a:srgbClr val="6B6B6B"/>
                 </a:solidFill>
               </a:rPr>
-              <a:t>후보 19명 중 7명이 기준 선수보다 빨랐지만, 자기 팀 동료 대비 우위까지 11/11 조건에서 반복된 것은 두 명뿐이다. 가장 빠른 NORRIS·VERSTAPPEN·PIASTRI는 동료 대비 우위가 11가지 조건 모두에서 확인되지 않아 차량 이점을 배제하지 못했다.</a:t>
+              <a:t>후보 19명 중 7명이 기준 선수보다 빨랐지만, 자기 팀 동료 대비 우위까지 11/11 조건에서 반복된 두 명 중 다른 기준·시즌에서도 버틴 것은 LECLERC뿐이다. 가장 빠른 NORRIS·VERSTAPPEN·PIASTRI는 동료 대비 우위가 11가지 조건 모두에서 확인되지 않아 차량 이점을 배제하지 못했다.</a:t>
             </a:r>
             <a:endParaRPr lang="en-US" sz="1200" dirty="0"/>
           </a:p>
